--- a/tmp/layout-v4/pptx/candidate.pptx
+++ b/tmp/layout-v4/pptx/candidate.pptx
@@ -2,13 +2,13 @@
 <file path=ppt/presentation.xml><?xml version="1.0" encoding="utf-8"?>
 <p:presentation xmlns:p="http://schemas.openxmlformats.org/presentationml/2006/main">
   <p:sldMasterIdLst>
-    <p:sldMasterId xmlns:r="http://schemas.openxmlformats.org/officeDocument/2006/relationships" id="2147483648" r:id="R9056e33e9d704206"/>
+    <p:sldMasterId xmlns:r="http://schemas.openxmlformats.org/officeDocument/2006/relationships" id="2147483648" r:id="Ra60a93dd25ef46e4"/>
   </p:sldMasterIdLst>
   <p:notesMasterIdLst>
-    <p:notesMasterId xmlns:r="http://schemas.openxmlformats.org/officeDocument/2006/relationships" r:id="R0434b72015aa4079"/>
+    <p:notesMasterId xmlns:r="http://schemas.openxmlformats.org/officeDocument/2006/relationships" r:id="R377e7a503a484ca8"/>
   </p:notesMasterIdLst>
   <p:sldIdLst>
-    <p:sldId xmlns:r="http://schemas.openxmlformats.org/officeDocument/2006/relationships" id="256" r:id="Rd27c4a35fac64ee1"/>
+    <p:sldId xmlns:r="http://schemas.openxmlformats.org/officeDocument/2006/relationships" id="256" r:id="Rc9b390fdee1a4af6"/>
   </p:sldIdLst>
   <p:sldSz cx="30276000" cy="21384000"/>
   <p:notesSz cx="6858000" cy="9144000"/>
@@ -510,7 +510,7 @@
   </p:cSld>
   <p:clrMap bg1="lt1" tx1="dk1" bg2="lt2" tx2="dk2" accent1="accent1" accent2="accent2" accent3="accent3" accent4="accent4" accent5="accent5" accent6="accent6" hlink="hlink" folHlink="folHlink"/>
   <p:sldLayoutIdLst>
-    <p:sldLayoutId xmlns:r="http://schemas.openxmlformats.org/officeDocument/2006/relationships" id="2147483649" r:id="R25f7eed9637749da"/>
+    <p:sldLayoutId xmlns:r="http://schemas.openxmlformats.org/officeDocument/2006/relationships" id="2147483649" r:id="R2f26a8cf40fd4942"/>
   </p:sldLayoutIdLst>
   <p:txStyles>
     <p:titleStyle>
@@ -1058,10 +1058,10 @@
       </p:grpSpPr>
       <p:sp>
         <p:nvSpPr>
-          <p:cNvPr id="402" name="Rule" descr="s0">
+          <p:cNvPr id="403" name="Rule" descr="s0">
             <a:extLst>
               <a:ext uri="{FF2B5EF4-FFF2-40B4-BE49-F238E27FC236}">
-                <ns2:creationId id="{3CD58625-B7A1-4E02-9F61-FCEBA9D532E7}"/>
+                <ns2:creationId id="{C4510521-74E6-4FEC-B042-BDB90C27E9BC}"/>
               </a:ext>
             </a:extLst>
           </p:cNvPr>
@@ -1072,7 +1072,7 @@
         </p:nvSpPr>
         <p:spPr>
           <a:xfrm>
-            <a:off x="287982" y="1179612"/>
+            <a:off x="287982" y="1256407"/>
             <a:ext cx="29699992" cy="19050"/>
           </a:xfrm>
           <a:prstGeom prst="rect">
@@ -1088,15 +1088,15 @@
       </p:sp>
       <p:grpSp>
         <p:nvGrpSpPr>
-          <p:cNvPr id="555" name="1. Research Context"/>
+          <p:cNvPr id="556" name="1. Research Context"/>
           <p:cNvGrpSpPr/>
           <p:nvPr/>
         </p:nvGrpSpPr>
         <p:grpSpPr>
           <a:xfrm>
-            <a:off x="287982" y="1370112"/>
+            <a:off x="287982" y="1351657"/>
             <a:ext cx="8612981" cy="3983831"/>
-            <a:chOff x="287982" y="1370112"/>
+            <a:chOff x="287982" y="1351657"/>
             <a:chExt cx="8612981" cy="3983831"/>
           </a:xfrm>
         </p:grpSpPr>
@@ -1105,18 +1105,18 @@
             <p:cNvPr id="2" name="Panel H2" descr="s1">
               <a:extLst>
                 <a:ext uri="{FF2B5EF4-FFF2-40B4-BE49-F238E27FC236}">
-                  <ns2:creationId id="{D797143C-24C9-4F09-B7DC-E09DF27B3ADC}"/>
-                </a:ext>
-              </a:extLst>
-            </p:cNvPr>
-            <p:cNvSpPr>
-              <a:spLocks noGrp="1"/>
-            </p:cNvSpPr>
-            <p:nvPr/>
-          </p:nvSpPr>
-          <p:spPr>
-            <a:xfrm>
-              <a:off x="287982" y="1370112"/>
+                  <ns2:creationId id="{BC725857-FF33-4EF9-B75C-DCEFC00F3F36}"/>
+                </a:ext>
+              </a:extLst>
+            </p:cNvPr>
+            <p:cNvSpPr>
+              <a:spLocks noGrp="1"/>
+            </p:cNvSpPr>
+            <p:nvPr/>
+          </p:nvSpPr>
+          <p:spPr>
+            <a:xfrm>
+              <a:off x="287982" y="1351657"/>
               <a:ext cx="8612981" cy="517327"/>
             </a:xfrm>
             <a:custGeom>
@@ -1187,18 +1187,18 @@
             <p:cNvPr id="3" name="Panel content" descr="s2">
               <a:extLst>
                 <a:ext uri="{FF2B5EF4-FFF2-40B4-BE49-F238E27FC236}">
-                  <ns2:creationId id="{47374FEE-FD7E-4928-A34F-618F4966EF79}"/>
-                </a:ext>
-              </a:extLst>
-            </p:cNvPr>
-            <p:cNvSpPr>
-              <a:spLocks noGrp="1"/>
-            </p:cNvSpPr>
-            <p:nvPr/>
-          </p:nvSpPr>
-          <p:spPr>
-            <a:xfrm>
-              <a:off x="287982" y="1887438"/>
+                  <ns2:creationId id="{A520929F-D725-48A1-8573-9033C48BD66D}"/>
+                </a:ext>
+              </a:extLst>
+            </p:cNvPr>
+            <p:cNvSpPr>
+              <a:spLocks noGrp="1"/>
+            </p:cNvSpPr>
+            <p:nvPr/>
+          </p:nvSpPr>
+          <p:spPr>
+            <a:xfrm>
+              <a:off x="287982" y="1868984"/>
               <a:ext cx="8612981" cy="3466505"/>
             </a:xfrm>
             <a:custGeom>
@@ -1260,21 +1260,21 @@
         </p:sp>
         <p:sp>
           <p:nvSpPr>
-            <p:cNvPr id="135" name="1. Research Context" descr="t1">
-              <a:extLst>
-                <a:ext uri="{FF2B5EF4-FFF2-40B4-BE49-F238E27FC236}">
-                  <ns2:creationId id="{D36E13B3-63FE-4730-89A8-CAF48A21FB96}"/>
-                </a:ext>
-              </a:extLst>
-            </p:cNvPr>
-            <p:cNvSpPr>
-              <a:spLocks noGrp="1"/>
-            </p:cNvSpPr>
-            <p:nvPr/>
-          </p:nvSpPr>
-          <p:spPr>
-            <a:xfrm>
-              <a:off x="421332" y="1416082"/>
+            <p:cNvPr id="136" name="1. Research Context" descr="t2">
+              <a:extLst>
+                <a:ext uri="{FF2B5EF4-FFF2-40B4-BE49-F238E27FC236}">
+                  <ns2:creationId id="{214A690C-2F3D-4CC3-82E8-3E591B56B4E4}"/>
+                </a:ext>
+              </a:extLst>
+            </p:cNvPr>
+            <p:cNvSpPr>
+              <a:spLocks noGrp="1"/>
+            </p:cNvSpPr>
+            <p:nvPr/>
+          </p:nvSpPr>
+          <p:spPr>
+            <a:xfrm>
+              <a:off x="421332" y="1397032"/>
               <a:ext cx="2675470" cy="464782"/>
             </a:xfrm>
             <a:prstGeom prst="rect">
@@ -1316,21 +1316,21 @@
         </p:sp>
         <p:sp>
           <p:nvSpPr>
-            <p:cNvPr id="136" name="RAG grounds language-model answers in external documents, but legal QA" descr="t2">
-              <a:extLst>
-                <a:ext uri="{FF2B5EF4-FFF2-40B4-BE49-F238E27FC236}">
-                  <ns2:creationId id="{A79C98C1-0B14-4C3D-B352-6E4AF0A1B542}"/>
-                </a:ext>
-              </a:extLst>
-            </p:cNvPr>
-            <p:cNvSpPr>
-              <a:spLocks noGrp="1"/>
-            </p:cNvSpPr>
-            <p:nvPr/>
-          </p:nvSpPr>
-          <p:spPr>
-            <a:xfrm>
-              <a:off x="449907" y="1990725"/>
+            <p:cNvPr id="137" name="RAG grounds language-model answers in external documents, but legal QA" descr="t3">
+              <a:extLst>
+                <a:ext uri="{FF2B5EF4-FFF2-40B4-BE49-F238E27FC236}">
+                  <ns2:creationId id="{AD374315-61ED-48B2-A9CA-4C3A147D1D6F}"/>
+                </a:ext>
+              </a:extLst>
+            </p:cNvPr>
+            <p:cNvSpPr>
+              <a:spLocks noGrp="1"/>
+            </p:cNvSpPr>
+            <p:nvPr/>
+          </p:nvSpPr>
+          <p:spPr>
+            <a:xfrm>
+              <a:off x="449907" y="1971675"/>
               <a:ext cx="7702160" cy="403860"/>
             </a:xfrm>
             <a:prstGeom prst="rect">
@@ -1372,21 +1372,21 @@
         </p:sp>
         <p:sp>
           <p:nvSpPr>
-            <p:cNvPr id="137" name="requires a pipeline to satisfy two goals at once: retrieve enough rele" descr="t3">
-              <a:extLst>
-                <a:ext uri="{FF2B5EF4-FFF2-40B4-BE49-F238E27FC236}">
-                  <ns2:creationId id="{475B88B3-DAB4-4872-A3B3-610D1C9D7A14}"/>
-                </a:ext>
-              </a:extLst>
-            </p:cNvPr>
-            <p:cNvSpPr>
-              <a:spLocks noGrp="1"/>
-            </p:cNvSpPr>
-            <p:nvPr/>
-          </p:nvSpPr>
-          <p:spPr>
-            <a:xfrm>
-              <a:off x="449907" y="2314575"/>
+            <p:cNvPr id="138" name="requires a pipeline to satisfy two goals at once: retrieve enough rele" descr="t4">
+              <a:extLst>
+                <a:ext uri="{FF2B5EF4-FFF2-40B4-BE49-F238E27FC236}">
+                  <ns2:creationId id="{45ACC1EA-5B24-4F35-A6DD-F8CC8BC0231D}"/>
+                </a:ext>
+              </a:extLst>
+            </p:cNvPr>
+            <p:cNvSpPr>
+              <a:spLocks noGrp="1"/>
+            </p:cNvSpPr>
+            <p:nvPr/>
+          </p:nvSpPr>
+          <p:spPr>
+            <a:xfrm>
+              <a:off x="449907" y="2295525"/>
               <a:ext cx="7540616" cy="403860"/>
             </a:xfrm>
             <a:prstGeom prst="rect">
@@ -1428,21 +1428,21 @@
         </p:sp>
         <p:sp>
           <p:nvSpPr>
-            <p:cNvPr id="138" name="evidence to produce a correct answer, while keeping source-page citati" descr="t4">
-              <a:extLst>
-                <a:ext uri="{FF2B5EF4-FFF2-40B4-BE49-F238E27FC236}">
-                  <ns2:creationId id="{13D90B0A-742F-485C-8624-A1C70423BA3E}"/>
-                </a:ext>
-              </a:extLst>
-            </p:cNvPr>
-            <p:cNvSpPr>
-              <a:spLocks noGrp="1"/>
-            </p:cNvSpPr>
-            <p:nvPr/>
-          </p:nvSpPr>
-          <p:spPr>
-            <a:xfrm>
-              <a:off x="449907" y="2628900"/>
+            <p:cNvPr id="139" name="evidence to produce a correct answer, while keeping source-page citati" descr="t5">
+              <a:extLst>
+                <a:ext uri="{FF2B5EF4-FFF2-40B4-BE49-F238E27FC236}">
+                  <ns2:creationId id="{026C5774-53D5-4CF3-8F30-BF0C5141277D}"/>
+                </a:ext>
+              </a:extLst>
+            </p:cNvPr>
+            <p:cNvSpPr>
+              <a:spLocks noGrp="1"/>
+            </p:cNvSpPr>
+            <p:nvPr/>
+          </p:nvSpPr>
+          <p:spPr>
+            <a:xfrm>
+              <a:off x="449907" y="2609850"/>
               <a:ext cx="7843588" cy="403860"/>
             </a:xfrm>
             <a:prstGeom prst="rect">
@@ -1484,21 +1484,21 @@
         </p:sp>
         <p:sp>
           <p:nvSpPr>
-            <p:cNvPr id="139" name="precise and complete. This is challenging because legal PDFs may lack" descr="t5">
-              <a:extLst>
-                <a:ext uri="{FF2B5EF4-FFF2-40B4-BE49-F238E27FC236}">
-                  <ns2:creationId id="{B3D4C420-2FBD-4644-85B9-68E45C40AE09}"/>
-                </a:ext>
-              </a:extLst>
-            </p:cNvPr>
-            <p:cNvSpPr>
-              <a:spLocks noGrp="1"/>
-            </p:cNvSpPr>
-            <p:nvPr/>
-          </p:nvSpPr>
-          <p:spPr>
-            <a:xfrm>
-              <a:off x="449907" y="2952750"/>
+            <p:cNvPr id="140" name="precise and complete. This is challenging because legal PDFs may lack" descr="t6">
+              <a:extLst>
+                <a:ext uri="{FF2B5EF4-FFF2-40B4-BE49-F238E27FC236}">
+                  <ns2:creationId id="{3FD8FCFD-365A-40EB-BECA-7B04F86E4D29}"/>
+                </a:ext>
+              </a:extLst>
+            </p:cNvPr>
+            <p:cNvSpPr>
+              <a:spLocks noGrp="1"/>
+            </p:cNvSpPr>
+            <p:nvPr/>
+          </p:nvSpPr>
+          <p:spPr>
+            <a:xfrm>
+              <a:off x="449907" y="2933700"/>
               <a:ext cx="7353773" cy="403860"/>
             </a:xfrm>
             <a:prstGeom prst="rect">
@@ -1540,21 +1540,21 @@
         </p:sp>
         <p:sp>
           <p:nvSpPr>
-            <p:cNvPr id="140" name="machine-readable text, evidence can appear at different textual scales" descr="t6">
-              <a:extLst>
-                <a:ext uri="{FF2B5EF4-FFF2-40B4-BE49-F238E27FC236}">
-                  <ns2:creationId id="{D90A8C14-61EB-47E7-AD93-736476154772}"/>
-                </a:ext>
-              </a:extLst>
-            </p:cNvPr>
-            <p:cNvSpPr>
-              <a:spLocks noGrp="1"/>
-            </p:cNvSpPr>
-            <p:nvPr/>
-          </p:nvSpPr>
-          <p:spPr>
-            <a:xfrm>
-              <a:off x="449907" y="3276600"/>
+            <p:cNvPr id="141" name="machine-readable text, evidence can appear at different textual scales" descr="t7">
+              <a:extLst>
+                <a:ext uri="{FF2B5EF4-FFF2-40B4-BE49-F238E27FC236}">
+                  <ns2:creationId id="{3029FAD8-CF09-4908-9629-16639C1C33E3}"/>
+                </a:ext>
+              </a:extLst>
+            </p:cNvPr>
+            <p:cNvSpPr>
+              <a:spLocks noGrp="1"/>
+            </p:cNvSpPr>
+            <p:nvPr/>
+          </p:nvSpPr>
+          <p:spPr>
+            <a:xfrm>
+              <a:off x="449907" y="3257550"/>
               <a:ext cx="7899671" cy="403860"/>
             </a:xfrm>
             <a:prstGeom prst="rect">
@@ -1596,21 +1596,21 @@
         </p:sp>
         <p:sp>
           <p:nvSpPr>
-            <p:cNvPr id="141" name="questions may depend on either exact legal references or semantic simi" descr="t7">
-              <a:extLst>
-                <a:ext uri="{FF2B5EF4-FFF2-40B4-BE49-F238E27FC236}">
-                  <ns2:creationId id="{2C760A73-5556-49CE-AEB0-B84187E73893}"/>
-                </a:ext>
-              </a:extLst>
-            </p:cNvPr>
-            <p:cNvSpPr>
-              <a:spLocks noGrp="1"/>
-            </p:cNvSpPr>
-            <p:nvPr/>
-          </p:nvSpPr>
-          <p:spPr>
-            <a:xfrm>
-              <a:off x="449907" y="3590925"/>
+            <p:cNvPr id="142" name="questions may depend on either exact legal references or semantic simi" descr="t8">
+              <a:extLst>
+                <a:ext uri="{FF2B5EF4-FFF2-40B4-BE49-F238E27FC236}">
+                  <ns2:creationId id="{954449D4-E3D4-4B59-8C92-608FA79B0D2F}"/>
+                </a:ext>
+              </a:extLst>
+            </p:cNvPr>
+            <p:cNvSpPr>
+              <a:spLocks noGrp="1"/>
+            </p:cNvSpPr>
+            <p:nvPr/>
+          </p:nvSpPr>
+          <p:spPr>
+            <a:xfrm>
+              <a:off x="449907" y="3571875"/>
               <a:ext cx="8112422" cy="403860"/>
             </a:xfrm>
             <a:prstGeom prst="rect">
@@ -1652,21 +1652,21 @@
         </p:sp>
         <p:sp>
           <p:nvSpPr>
-            <p:cNvPr id="142" name="Moreover, retrieving more evidence can improve coverage while also" descr="t8">
-              <a:extLst>
-                <a:ext uri="{FF2B5EF4-FFF2-40B4-BE49-F238E27FC236}">
-                  <ns2:creationId id="{1A9F97A3-D936-4CE8-B0AC-2F5F6F008C9F}"/>
-                </a:ext>
-              </a:extLst>
-            </p:cNvPr>
-            <p:cNvSpPr>
-              <a:spLocks noGrp="1"/>
-            </p:cNvSpPr>
-            <p:nvPr/>
-          </p:nvSpPr>
-          <p:spPr>
-            <a:xfrm>
-              <a:off x="449907" y="3914775"/>
+            <p:cNvPr id="143" name="Moreover, retrieving more evidence can improve coverage while also" descr="t9">
+              <a:extLst>
+                <a:ext uri="{FF2B5EF4-FFF2-40B4-BE49-F238E27FC236}">
+                  <ns2:creationId id="{42E57847-6976-4007-B24D-6B23C0FD9E19}"/>
+                </a:ext>
+              </a:extLst>
+            </p:cNvPr>
+            <p:cNvSpPr>
+              <a:spLocks noGrp="1"/>
+            </p:cNvSpPr>
+            <p:nvPr/>
+          </p:nvSpPr>
+          <p:spPr>
+            <a:xfrm>
+              <a:off x="449907" y="3895725"/>
               <a:ext cx="7136147" cy="403860"/>
             </a:xfrm>
             <a:prstGeom prst="rect">
@@ -1708,21 +1708,21 @@
         </p:sp>
         <p:sp>
           <p:nvSpPr>
-            <p:cNvPr id="143" name="introducing irrelevant source pages. We therefore examine how design c" descr="t9">
-              <a:extLst>
-                <a:ext uri="{FF2B5EF4-FFF2-40B4-BE49-F238E27FC236}">
-                  <ns2:creationId id="{1BA39B0C-7186-4D0F-9A38-62D6A95C0E0C}"/>
-                </a:ext>
-              </a:extLst>
-            </p:cNvPr>
-            <p:cNvSpPr>
-              <a:spLocks noGrp="1"/>
-            </p:cNvSpPr>
-            <p:nvPr/>
-          </p:nvSpPr>
-          <p:spPr>
-            <a:xfrm>
-              <a:off x="449907" y="4229100"/>
+            <p:cNvPr id="144" name="introducing irrelevant source pages. We therefore examine how design c" descr="t10">
+              <a:extLst>
+                <a:ext uri="{FF2B5EF4-FFF2-40B4-BE49-F238E27FC236}">
+                  <ns2:creationId id="{46BDC178-E0F9-4B75-85C2-1244BFD67DAC}"/>
+                </a:ext>
+              </a:extLst>
+            </p:cNvPr>
+            <p:cNvSpPr>
+              <a:spLocks noGrp="1"/>
+            </p:cNvSpPr>
+            <p:nvPr/>
+          </p:nvSpPr>
+          <p:spPr>
+            <a:xfrm>
+              <a:off x="449907" y="4210050"/>
               <a:ext cx="8222759" cy="403860"/>
             </a:xfrm>
             <a:prstGeom prst="rect">
@@ -1764,21 +1764,21 @@
         </p:sp>
         <p:sp>
           <p:nvSpPr>
-            <p:cNvPr id="144" name="in document processing, retrieval, and attribution can improve answer " descr="t10">
-              <a:extLst>
-                <a:ext uri="{FF2B5EF4-FFF2-40B4-BE49-F238E27FC236}">
-                  <ns2:creationId id="{4B3B4F97-D2D5-4128-943A-A64B4059710D}"/>
-                </a:ext>
-              </a:extLst>
-            </p:cNvPr>
-            <p:cNvSpPr>
-              <a:spLocks noGrp="1"/>
-            </p:cNvSpPr>
-            <p:nvPr/>
-          </p:nvSpPr>
-          <p:spPr>
-            <a:xfrm>
-              <a:off x="449907" y="4552950"/>
+            <p:cNvPr id="145" name="in document processing, retrieval, and attribution can improve answer " descr="t11">
+              <a:extLst>
+                <a:ext uri="{FF2B5EF4-FFF2-40B4-BE49-F238E27FC236}">
+                  <ns2:creationId id="{F6A7BC27-514A-410A-8004-90FA9AD44324}"/>
+                </a:ext>
+              </a:extLst>
+            </p:cNvPr>
+            <p:cNvSpPr>
+              <a:spLocks noGrp="1"/>
+            </p:cNvSpPr>
+            <p:nvPr/>
+          </p:nvSpPr>
+          <p:spPr>
+            <a:xfrm>
+              <a:off x="449907" y="4533900"/>
               <a:ext cx="8080722" cy="403860"/>
             </a:xfrm>
             <a:prstGeom prst="rect">
@@ -1820,21 +1820,21 @@
         </p:sp>
         <p:sp>
           <p:nvSpPr>
-            <p:cNvPr id="145" name="without sacrificing citation quality." descr="t11">
-              <a:extLst>
-                <a:ext uri="{FF2B5EF4-FFF2-40B4-BE49-F238E27FC236}">
-                  <ns2:creationId id="{B468B388-04A8-4AB1-B6C9-5FF15A78F58C}"/>
-                </a:ext>
-              </a:extLst>
-            </p:cNvPr>
-            <p:cNvSpPr>
-              <a:spLocks noGrp="1"/>
-            </p:cNvSpPr>
-            <p:nvPr/>
-          </p:nvSpPr>
-          <p:spPr>
-            <a:xfrm>
-              <a:off x="449907" y="4876800"/>
+            <p:cNvPr id="146" name="without sacrificing citation quality." descr="t12">
+              <a:extLst>
+                <a:ext uri="{FF2B5EF4-FFF2-40B4-BE49-F238E27FC236}">
+                  <ns2:creationId id="{6D646C2A-05FA-4717-A35C-EC20C13316C2}"/>
+                </a:ext>
+              </a:extLst>
+            </p:cNvPr>
+            <p:cNvSpPr>
+              <a:spLocks noGrp="1"/>
+            </p:cNvSpPr>
+            <p:nvPr/>
+          </p:nvSpPr>
+          <p:spPr>
+            <a:xfrm>
+              <a:off x="449907" y="4857750"/>
               <a:ext cx="3669953" cy="403860"/>
             </a:xfrm>
             <a:prstGeom prst="rect">
@@ -1877,15 +1877,15 @@
       </p:grpSp>
       <p:grpSp>
         <p:nvGrpSpPr>
-          <p:cNvPr id="554" name="2. Prior Work &amp; Study Focus"/>
+          <p:cNvPr id="555" name="2. Prior Work &amp; Study Focus"/>
           <p:cNvGrpSpPr/>
           <p:nvPr/>
         </p:nvGrpSpPr>
         <p:grpSpPr>
           <a:xfrm>
-            <a:off x="287982" y="5602784"/>
+            <a:off x="287982" y="5588943"/>
             <a:ext cx="8612981" cy="5454253"/>
-            <a:chOff x="287982" y="5602784"/>
+            <a:chOff x="287982" y="5588943"/>
             <a:chExt cx="8612981" cy="5454253"/>
           </a:xfrm>
         </p:grpSpPr>
@@ -1894,18 +1894,18 @@
             <p:cNvPr id="4" name="Panel H2" descr="s3">
               <a:extLst>
                 <a:ext uri="{FF2B5EF4-FFF2-40B4-BE49-F238E27FC236}">
-                  <ns2:creationId id="{3010196C-CDEC-46AB-882E-16F0A698804D}"/>
-                </a:ext>
-              </a:extLst>
-            </p:cNvPr>
-            <p:cNvSpPr>
-              <a:spLocks noGrp="1"/>
-            </p:cNvSpPr>
-            <p:nvPr/>
-          </p:nvSpPr>
-          <p:spPr>
-            <a:xfrm>
-              <a:off x="287982" y="5602784"/>
+                  <ns2:creationId id="{F74DE179-0C76-4C2D-9949-58D5F7F5706A}"/>
+                </a:ext>
+              </a:extLst>
+            </p:cNvPr>
+            <p:cNvSpPr>
+              <a:spLocks noGrp="1"/>
+            </p:cNvSpPr>
+            <p:nvPr/>
+          </p:nvSpPr>
+          <p:spPr>
+            <a:xfrm>
+              <a:off x="287982" y="5588943"/>
               <a:ext cx="8612981" cy="517327"/>
             </a:xfrm>
             <a:custGeom>
@@ -1976,18 +1976,18 @@
             <p:cNvPr id="5" name="Panel content" descr="s4">
               <a:extLst>
                 <a:ext uri="{FF2B5EF4-FFF2-40B4-BE49-F238E27FC236}">
-                  <ns2:creationId id="{C89BBFB8-4A91-416B-86F7-20F835D0FC73}"/>
-                </a:ext>
-              </a:extLst>
-            </p:cNvPr>
-            <p:cNvSpPr>
-              <a:spLocks noGrp="1"/>
-            </p:cNvSpPr>
-            <p:nvPr/>
-          </p:nvSpPr>
-          <p:spPr>
-            <a:xfrm>
-              <a:off x="287982" y="6120110"/>
+                  <ns2:creationId id="{C9274C89-88B7-4D93-AA81-D94FE3F37E4C}"/>
+                </a:ext>
+              </a:extLst>
+            </p:cNvPr>
+            <p:cNvSpPr>
+              <a:spLocks noGrp="1"/>
+            </p:cNvSpPr>
+            <p:nvPr/>
+          </p:nvSpPr>
+          <p:spPr>
+            <a:xfrm>
+              <a:off x="287982" y="6106269"/>
               <a:ext cx="8612981" cy="4936927"/>
             </a:xfrm>
             <a:custGeom>
@@ -2049,21 +2049,21 @@
         </p:sp>
         <p:sp>
           <p:nvSpPr>
-            <p:cNvPr id="146" name="2. Prior Work &amp; Study Focus" descr="t12">
-              <a:extLst>
-                <a:ext uri="{FF2B5EF4-FFF2-40B4-BE49-F238E27FC236}">
-                  <ns2:creationId id="{7C4B9782-6FD1-4590-88A5-985E5C037848}"/>
-                </a:ext>
-              </a:extLst>
-            </p:cNvPr>
-            <p:cNvSpPr>
-              <a:spLocks noGrp="1"/>
-            </p:cNvSpPr>
-            <p:nvPr/>
-          </p:nvSpPr>
-          <p:spPr>
-            <a:xfrm>
-              <a:off x="421332" y="5645182"/>
+            <p:cNvPr id="147" name="2. Prior Work &amp; Study Focus" descr="t13">
+              <a:extLst>
+                <a:ext uri="{FF2B5EF4-FFF2-40B4-BE49-F238E27FC236}">
+                  <ns2:creationId id="{6F787020-65EF-4B31-9D5D-43C029D4131D}"/>
+                </a:ext>
+              </a:extLst>
+            </p:cNvPr>
+            <p:cNvSpPr>
+              <a:spLocks noGrp="1"/>
+            </p:cNvSpPr>
+            <p:nvPr/>
+          </p:nvSpPr>
+          <p:spPr>
+            <a:xfrm>
+              <a:off x="421332" y="5635657"/>
               <a:ext cx="3739702" cy="464782"/>
             </a:xfrm>
             <a:prstGeom prst="rect">
@@ -2105,21 +2105,21 @@
         </p:sp>
         <p:sp>
           <p:nvSpPr>
-            <p:cNvPr id="147" name="Retrieval-augmented generation (RAG) conditions language-model answers" descr="t13">
-              <a:extLst>
-                <a:ext uri="{FF2B5EF4-FFF2-40B4-BE49-F238E27FC236}">
-                  <ns2:creationId id="{F8265EF2-701D-4457-9E32-854AC82D7E21}"/>
-                </a:ext>
-              </a:extLst>
-            </p:cNvPr>
-            <p:cNvSpPr>
-              <a:spLocks noGrp="1"/>
-            </p:cNvSpPr>
-            <p:nvPr/>
-          </p:nvSpPr>
-          <p:spPr>
-            <a:xfrm>
-              <a:off x="449907" y="6229350"/>
+            <p:cNvPr id="148" name="Retrieval-augmented generation (RAG) conditions language-model answers" descr="t14">
+              <a:extLst>
+                <a:ext uri="{FF2B5EF4-FFF2-40B4-BE49-F238E27FC236}">
+                  <ns2:creationId id="{E5AEE112-2843-407F-8CC6-719DE4D3997A}"/>
+                </a:ext>
+              </a:extLst>
+            </p:cNvPr>
+            <p:cNvSpPr>
+              <a:spLocks noGrp="1"/>
+            </p:cNvSpPr>
+            <p:nvPr/>
+          </p:nvSpPr>
+          <p:spPr>
+            <a:xfrm>
+              <a:off x="449907" y="6210300"/>
               <a:ext cx="8114250" cy="403860"/>
             </a:xfrm>
             <a:prstGeom prst="rect">
@@ -2161,21 +2161,21 @@
         </p:sp>
         <p:sp>
           <p:nvSpPr>
-            <p:cNvPr id="148" name="retrieved documents [1]. Legal retrieval must balance precision and co" descr="t14">
-              <a:extLst>
-                <a:ext uri="{FF2B5EF4-FFF2-40B4-BE49-F238E27FC236}">
-                  <ns2:creationId id="{5F8FAB5B-668E-4FC8-BEB8-60137767DEFB}"/>
-                </a:ext>
-              </a:extLst>
-            </p:cNvPr>
-            <p:cNvSpPr>
-              <a:spLocks noGrp="1"/>
-            </p:cNvSpPr>
-            <p:nvPr/>
-          </p:nvSpPr>
-          <p:spPr>
-            <a:xfrm>
-              <a:off x="449907" y="6543675"/>
+            <p:cNvPr id="149" name="retrieved documents [1]. Legal retrieval must balance precision and co" descr="t15">
+              <a:extLst>
+                <a:ext uri="{FF2B5EF4-FFF2-40B4-BE49-F238E27FC236}">
+                  <ns2:creationId id="{F360ACE6-1C0C-4449-9379-5D31646C176C}"/>
+                </a:ext>
+              </a:extLst>
+            </p:cNvPr>
+            <p:cNvSpPr>
+              <a:spLocks noGrp="1"/>
+            </p:cNvSpPr>
+            <p:nvPr/>
+          </p:nvSpPr>
+          <p:spPr>
+            <a:xfrm>
+              <a:off x="449907" y="6534150"/>
               <a:ext cx="8115775" cy="403860"/>
             </a:xfrm>
             <a:prstGeom prst="rect">
@@ -2217,21 +2217,21 @@
         </p:sp>
         <p:sp>
           <p:nvSpPr>
-            <p:cNvPr id="149" name="LegalBench-RAG targets minimal relevant passages [2], while regulatory" descr="t15">
-              <a:extLst>
-                <a:ext uri="{FF2B5EF4-FFF2-40B4-BE49-F238E27FC236}">
-                  <ns2:creationId id="{1A5046C2-30A0-4A6F-AF78-EF6E0F73C6EB}"/>
-                </a:ext>
-              </a:extLst>
-            </p:cNvPr>
-            <p:cNvSpPr>
-              <a:spLocks noGrp="1"/>
-            </p:cNvSpPr>
-            <p:nvPr/>
-          </p:nvSpPr>
-          <p:spPr>
-            <a:xfrm>
-              <a:off x="449907" y="6867525"/>
+            <p:cNvPr id="150" name="LegalBench-RAG targets minimal relevant passages [2], while regulatory" descr="t16">
+              <a:extLst>
+                <a:ext uri="{FF2B5EF4-FFF2-40B4-BE49-F238E27FC236}">
+                  <ns2:creationId id="{421F9068-1426-4114-A8C4-118E67E4D40C}"/>
+                </a:ext>
+              </a:extLst>
+            </p:cNvPr>
+            <p:cNvSpPr>
+              <a:spLocks noGrp="1"/>
+            </p:cNvSpPr>
+            <p:nvPr/>
+          </p:nvSpPr>
+          <p:spPr>
+            <a:xfrm>
+              <a:off x="449907" y="6848475"/>
               <a:ext cx="7829872" cy="403860"/>
             </a:xfrm>
             <a:prstGeom prst="rect">
@@ -2273,21 +2273,21 @@
         </p:sp>
         <p:sp>
           <p:nvSpPr>
-            <p:cNvPr id="150" name="studies show that retrieving all supporting evidence becomes harder wh" descr="t16">
-              <a:extLst>
-                <a:ext uri="{FF2B5EF4-FFF2-40B4-BE49-F238E27FC236}">
-                  <ns2:creationId id="{AE8558BC-5F00-475F-A989-DAED87F30A3F}"/>
-                </a:ext>
-              </a:extLst>
-            </p:cNvPr>
-            <p:cNvSpPr>
-              <a:spLocks noGrp="1"/>
-            </p:cNvSpPr>
-            <p:nvPr/>
-          </p:nvSpPr>
-          <p:spPr>
-            <a:xfrm>
-              <a:off x="449907" y="7181850"/>
+            <p:cNvPr id="151" name="studies show that retrieving all supporting evidence becomes harder wh" descr="t17">
+              <a:extLst>
+                <a:ext uri="{FF2B5EF4-FFF2-40B4-BE49-F238E27FC236}">
+                  <ns2:creationId id="{8ED068F2-DBCD-4450-9214-8A24311CD0B8}"/>
+                </a:ext>
+              </a:extLst>
+            </p:cNvPr>
+            <p:cNvSpPr>
+              <a:spLocks noGrp="1"/>
+            </p:cNvSpPr>
+            <p:nvPr/>
+          </p:nvSpPr>
+          <p:spPr>
+            <a:xfrm>
+              <a:off x="449907" y="7172325"/>
               <a:ext cx="7977699" cy="403860"/>
             </a:xfrm>
             <a:prstGeom prst="rect">
@@ -2329,21 +2329,21 @@
         </p:sp>
         <p:sp>
           <p:nvSpPr>
-            <p:cNvPr id="151" name="spans multiple passages [3]. In an end-to-end legal benchmark, retriev" descr="t17">
-              <a:extLst>
-                <a:ext uri="{FF2B5EF4-FFF2-40B4-BE49-F238E27FC236}">
-                  <ns2:creationId id="{F50674DA-3E77-43CB-93EE-DB3646921B30}"/>
-                </a:ext>
-              </a:extLst>
-            </p:cNvPr>
-            <p:cNvSpPr>
-              <a:spLocks noGrp="1"/>
-            </p:cNvSpPr>
-            <p:nvPr/>
-          </p:nvSpPr>
-          <p:spPr>
-            <a:xfrm>
-              <a:off x="449907" y="7505700"/>
+            <p:cNvPr id="152" name="spans multiple passages [3]. In an end-to-end legal benchmark, retriev" descr="t18">
+              <a:extLst>
+                <a:ext uri="{FF2B5EF4-FFF2-40B4-BE49-F238E27FC236}">
+                  <ns2:creationId id="{4F9804B7-C190-407C-8C0D-8610C350A014}"/>
+                </a:ext>
+              </a:extLst>
+            </p:cNvPr>
+            <p:cNvSpPr>
+              <a:spLocks noGrp="1"/>
+            </p:cNvSpPr>
+            <p:nvPr/>
+          </p:nvSpPr>
+          <p:spPr>
+            <a:xfrm>
+              <a:off x="449907" y="7486650"/>
               <a:ext cx="8300482" cy="403860"/>
             </a:xfrm>
             <a:prstGeom prst="rect">
@@ -2385,21 +2385,21 @@
         </p:sp>
         <p:sp>
           <p:nvSpPr>
-            <p:cNvPr id="152" name="choice had a larger effect on answer correctness than generator choice" descr="t18">
-              <a:extLst>
-                <a:ext uri="{FF2B5EF4-FFF2-40B4-BE49-F238E27FC236}">
-                  <ns2:creationId id="{6E64719F-B2C6-4E11-84A7-D8035F8084EE}"/>
-                </a:ext>
-              </a:extLst>
-            </p:cNvPr>
-            <p:cNvSpPr>
-              <a:spLocks noGrp="1"/>
-            </p:cNvSpPr>
-            <p:nvPr/>
-          </p:nvSpPr>
-          <p:spPr>
-            <a:xfrm>
-              <a:off x="449907" y="7829550"/>
+            <p:cNvPr id="153" name="choice had a larger effect on answer correctness than generator choice" descr="t19">
+              <a:extLst>
+                <a:ext uri="{FF2B5EF4-FFF2-40B4-BE49-F238E27FC236}">
+                  <ns2:creationId id="{E1B0EDB7-14DA-4171-B541-BEC4E0F0A2CE}"/>
+                </a:ext>
+              </a:extLst>
+            </p:cNvPr>
+            <p:cNvSpPr>
+              <a:spLocks noGrp="1"/>
+            </p:cNvSpPr>
+            <p:nvPr/>
+          </p:nvSpPr>
+          <p:spPr>
+            <a:xfrm>
+              <a:off x="449907" y="7810500"/>
               <a:ext cx="7917350" cy="403860"/>
             </a:xfrm>
             <a:prstGeom prst="rect">
@@ -2441,21 +2441,21 @@
         </p:sp>
         <p:sp>
           <p:nvSpPr>
-            <p:cNvPr id="153" name="Evaluation also extends beyond correctness. Legal QA research examines" descr="t19">
-              <a:extLst>
-                <a:ext uri="{FF2B5EF4-FFF2-40B4-BE49-F238E27FC236}">
-                  <ns2:creationId id="{7CA405F9-3E3F-43B0-A155-F64BD952996A}"/>
-                </a:ext>
-              </a:extLst>
-            </p:cNvPr>
-            <p:cNvSpPr>
-              <a:spLocks noGrp="1"/>
-            </p:cNvSpPr>
-            <p:nvPr/>
-          </p:nvSpPr>
-          <p:spPr>
-            <a:xfrm>
-              <a:off x="449907" y="8239125"/>
+            <p:cNvPr id="154" name="Evaluation also extends beyond correctness. Legal QA research examines" descr="t20">
+              <a:extLst>
+                <a:ext uri="{FF2B5EF4-FFF2-40B4-BE49-F238E27FC236}">
+                  <ns2:creationId id="{66538862-91F3-4098-B9E9-F90D5B9D7F74}"/>
+                </a:ext>
+              </a:extLst>
+            </p:cNvPr>
+            <p:cNvSpPr>
+              <a:spLocks noGrp="1"/>
+            </p:cNvSpPr>
+            <p:nvPr/>
+          </p:nvSpPr>
+          <p:spPr>
+            <a:xfrm>
+              <a:off x="449907" y="8229600"/>
               <a:ext cx="7609501" cy="403860"/>
             </a:xfrm>
             <a:prstGeom prst="rect">
@@ -2497,21 +2497,21 @@
         </p:sp>
         <p:sp>
           <p:nvSpPr>
-            <p:cNvPr id="154" name="whether answers are supported by the supplied context [5], while ALCE" descr="t20">
-              <a:extLst>
-                <a:ext uri="{FF2B5EF4-FFF2-40B4-BE49-F238E27FC236}">
-                  <ns2:creationId id="{F714D6CD-B084-4824-89FE-D48619D4B4C3}"/>
-                </a:ext>
-              </a:extLst>
-            </p:cNvPr>
-            <p:cNvSpPr>
-              <a:spLocks noGrp="1"/>
-            </p:cNvSpPr>
-            <p:nvPr/>
-          </p:nvSpPr>
-          <p:spPr>
-            <a:xfrm>
-              <a:off x="449907" y="8562975"/>
+            <p:cNvPr id="155" name="whether answers are supported by the supplied context [5], while ALCE" descr="t21">
+              <a:extLst>
+                <a:ext uri="{FF2B5EF4-FFF2-40B4-BE49-F238E27FC236}">
+                  <ns2:creationId id="{AE6FBC87-7B3C-4B06-BD97-EAB7212B9C70}"/>
+                </a:ext>
+              </a:extLst>
+            </p:cNvPr>
+            <p:cNvSpPr>
+              <a:spLocks noGrp="1"/>
+            </p:cNvSpPr>
+            <p:nvPr/>
+          </p:nvSpPr>
+          <p:spPr>
+            <a:xfrm>
+              <a:off x="449907" y="8543925"/>
               <a:ext cx="7409551" cy="403860"/>
             </a:xfrm>
             <a:prstGeom prst="rect">
@@ -2553,21 +2553,21 @@
         </p:sp>
         <p:sp>
           <p:nvSpPr>
-            <p:cNvPr id="155" name="evaluates answer correctness and citation quality separately [6]. Toge" descr="t21">
-              <a:extLst>
-                <a:ext uri="{FF2B5EF4-FFF2-40B4-BE49-F238E27FC236}">
-                  <ns2:creationId id="{7C937447-027F-4955-A3CA-313259ADE22C}"/>
-                </a:ext>
-              </a:extLst>
-            </p:cNvPr>
-            <p:cNvSpPr>
-              <a:spLocks noGrp="1"/>
-            </p:cNvSpPr>
-            <p:nvPr/>
-          </p:nvSpPr>
-          <p:spPr>
-            <a:xfrm>
-              <a:off x="449907" y="8877300"/>
+            <p:cNvPr id="156" name="evaluates answer correctness and citation quality separately [6]. Toge" descr="t22">
+              <a:extLst>
+                <a:ext uri="{FF2B5EF4-FFF2-40B4-BE49-F238E27FC236}">
+                  <ns2:creationId id="{B1C9504E-5631-48B9-A158-E09C0771A2FE}"/>
+                </a:ext>
+              </a:extLst>
+            </p:cNvPr>
+            <p:cNvSpPr>
+              <a:spLocks noGrp="1"/>
+            </p:cNvSpPr>
+            <p:nvPr/>
+          </p:nvSpPr>
+          <p:spPr>
+            <a:xfrm>
+              <a:off x="449907" y="8867775"/>
               <a:ext cx="7798173" cy="403860"/>
             </a:xfrm>
             <a:prstGeom prst="rect">
@@ -2609,21 +2609,21 @@
         </p:sp>
         <p:sp>
           <p:nvSpPr>
-            <p:cNvPr id="156" name="these studies motivate evaluating both the evidence available to the g" descr="t22">
-              <a:extLst>
-                <a:ext uri="{FF2B5EF4-FFF2-40B4-BE49-F238E27FC236}">
-                  <ns2:creationId id="{9FBBD06E-2E60-48DB-9A7A-11FF85C9BFDE}"/>
-                </a:ext>
-              </a:extLst>
-            </p:cNvPr>
-            <p:cNvSpPr>
-              <a:spLocks noGrp="1"/>
-            </p:cNvSpPr>
-            <p:nvPr/>
-          </p:nvSpPr>
-          <p:spPr>
-            <a:xfrm>
-              <a:off x="449907" y="9201150"/>
+            <p:cNvPr id="157" name="these studies motivate evaluating both the evidence available to the g" descr="t23">
+              <a:extLst>
+                <a:ext uri="{FF2B5EF4-FFF2-40B4-BE49-F238E27FC236}">
+                  <ns2:creationId id="{AD703068-6E6C-40B6-9D98-2CFD2ECABA9B}"/>
+                </a:ext>
+              </a:extLst>
+            </p:cNvPr>
+            <p:cNvSpPr>
+              <a:spLocks noGrp="1"/>
+            </p:cNvSpPr>
+            <p:nvPr/>
+          </p:nvSpPr>
+          <p:spPr>
+            <a:xfrm>
+              <a:off x="449907" y="9182100"/>
               <a:ext cx="8182831" cy="403860"/>
             </a:xfrm>
             <a:prstGeom prst="rect">
@@ -2665,21 +2665,21 @@
         </p:sp>
         <p:sp>
           <p:nvSpPr>
-            <p:cNvPr id="157" name="and the sources ultimately cited." descr="t23">
-              <a:extLst>
-                <a:ext uri="{FF2B5EF4-FFF2-40B4-BE49-F238E27FC236}">
-                  <ns2:creationId id="{EA0530D2-0516-4359-AC7E-A1C14B4CEC18}"/>
-                </a:ext>
-              </a:extLst>
-            </p:cNvPr>
-            <p:cNvSpPr>
-              <a:spLocks noGrp="1"/>
-            </p:cNvSpPr>
-            <p:nvPr/>
-          </p:nvSpPr>
-          <p:spPr>
-            <a:xfrm>
-              <a:off x="449907" y="9515475"/>
+            <p:cNvPr id="158" name="and the sources ultimately cited." descr="t24">
+              <a:extLst>
+                <a:ext uri="{FF2B5EF4-FFF2-40B4-BE49-F238E27FC236}">
+                  <ns2:creationId id="{4D8BAD09-02E2-4958-8B2A-44CF408A9DD0}"/>
+                </a:ext>
+              </a:extLst>
+            </p:cNvPr>
+            <p:cNvSpPr>
+              <a:spLocks noGrp="1"/>
+            </p:cNvSpPr>
+            <p:nvPr/>
+          </p:nvSpPr>
+          <p:spPr>
+            <a:xfrm>
+              <a:off x="449907" y="9505950"/>
               <a:ext cx="3440742" cy="403860"/>
             </a:xfrm>
             <a:prstGeom prst="rect">
@@ -2721,21 +2721,21 @@
         </p:sp>
         <p:sp>
           <p:nvSpPr>
-            <p:cNvPr id="158" name="Our study complements these approaches by holding the generator fixed " descr="t24">
-              <a:extLst>
-                <a:ext uri="{FF2B5EF4-FFF2-40B4-BE49-F238E27FC236}">
-                  <ns2:creationId id="{069E449C-6E60-4F04-B3B1-365B5EAA027E}"/>
-                </a:ext>
-              </a:extLst>
-            </p:cNvPr>
-            <p:cNvSpPr>
-              <a:spLocks noGrp="1"/>
-            </p:cNvSpPr>
-            <p:nvPr/>
-          </p:nvSpPr>
-          <p:spPr>
-            <a:xfrm>
-              <a:off x="449907" y="9934575"/>
+            <p:cNvPr id="159" name="Our study complements these approaches by holding the generator fixed " descr="t25">
+              <a:extLst>
+                <a:ext uri="{FF2B5EF4-FFF2-40B4-BE49-F238E27FC236}">
+                  <ns2:creationId id="{6AADEED6-660E-4D16-BAFB-8B2FEE04EF21}"/>
+                </a:ext>
+              </a:extLst>
+            </p:cNvPr>
+            <p:cNvSpPr>
+              <a:spLocks noGrp="1"/>
+            </p:cNvSpPr>
+            <p:nvPr/>
+          </p:nvSpPr>
+          <p:spPr>
+            <a:xfrm>
+              <a:off x="449907" y="9925050"/>
               <a:ext cx="8024333" cy="403860"/>
             </a:xfrm>
             <a:prstGeom prst="rect">
@@ -2777,21 +2777,21 @@
         </p:sp>
         <p:sp>
           <p:nvSpPr>
-            <p:cNvPr id="159" name="examining a broader sequence of pipeline choices, from document proces" descr="t25">
-              <a:extLst>
-                <a:ext uri="{FF2B5EF4-FFF2-40B4-BE49-F238E27FC236}">
-                  <ns2:creationId id="{5E842A89-A4A9-4485-9B46-522EDAAFFAA4}"/>
-                </a:ext>
-              </a:extLst>
-            </p:cNvPr>
-            <p:cNvSpPr>
-              <a:spLocks noGrp="1"/>
-            </p:cNvSpPr>
-            <p:nvPr/>
-          </p:nvSpPr>
-          <p:spPr>
-            <a:xfrm>
-              <a:off x="449907" y="10258425"/>
+            <p:cNvPr id="160" name="examining a broader sequence of pipeline choices, from document proces" descr="t26">
+              <a:extLst>
+                <a:ext uri="{FF2B5EF4-FFF2-40B4-BE49-F238E27FC236}">
+                  <ns2:creationId id="{85BF4F1C-B9B9-453D-8B10-2F8C18025526}"/>
+                </a:ext>
+              </a:extLst>
+            </p:cNvPr>
+            <p:cNvSpPr>
+              <a:spLocks noGrp="1"/>
+            </p:cNvSpPr>
+            <p:nvPr/>
+          </p:nvSpPr>
+          <p:spPr>
+            <a:xfrm>
+              <a:off x="449907" y="10239375"/>
               <a:ext cx="8165456" cy="403860"/>
             </a:xfrm>
             <a:prstGeom prst="rect">
@@ -2833,21 +2833,21 @@
         </p:sp>
         <p:sp>
           <p:nvSpPr>
-            <p:cNvPr id="160" name="to final page selection." descr="t26">
-              <a:extLst>
-                <a:ext uri="{FF2B5EF4-FFF2-40B4-BE49-F238E27FC236}">
-                  <ns2:creationId id="{AC34A827-E283-4C8A-839C-8EA14D0E568B}"/>
-                </a:ext>
-              </a:extLst>
-            </p:cNvPr>
-            <p:cNvSpPr>
-              <a:spLocks noGrp="1"/>
-            </p:cNvSpPr>
-            <p:nvPr/>
-          </p:nvSpPr>
-          <p:spPr>
-            <a:xfrm>
-              <a:off x="449907" y="10572750"/>
+            <p:cNvPr id="161" name="to final page selection." descr="t27">
+              <a:extLst>
+                <a:ext uri="{FF2B5EF4-FFF2-40B4-BE49-F238E27FC236}">
+                  <ns2:creationId id="{2DAB989F-1F98-43E5-B84C-BF5D1E46F681}"/>
+                </a:ext>
+              </a:extLst>
+            </p:cNvPr>
+            <p:cNvSpPr>
+              <a:spLocks noGrp="1"/>
+            </p:cNvSpPr>
+            <p:nvPr/>
+          </p:nvSpPr>
+          <p:spPr>
+            <a:xfrm>
+              <a:off x="449907" y="10563225"/>
               <a:ext cx="2405030" cy="403860"/>
             </a:xfrm>
             <a:prstGeom prst="rect">
@@ -2890,15 +2890,15 @@
       </p:grpSp>
       <p:grpSp>
         <p:nvGrpSpPr>
-          <p:cNvPr id="553" name="3. Research question"/>
+          <p:cNvPr id="554" name="3. Research question"/>
           <p:cNvGrpSpPr/>
           <p:nvPr/>
         </p:nvGrpSpPr>
         <p:grpSpPr>
           <a:xfrm>
-            <a:off x="287982" y="11305877"/>
+            <a:off x="287982" y="11296650"/>
             <a:ext cx="8612981" cy="1888629"/>
-            <a:chOff x="287982" y="11305877"/>
+            <a:chOff x="287982" y="11296650"/>
             <a:chExt cx="8612981" cy="1888629"/>
           </a:xfrm>
         </p:grpSpPr>
@@ -2907,18 +2907,18 @@
             <p:cNvPr id="6" name="Panel H2" descr="s5">
               <a:extLst>
                 <a:ext uri="{FF2B5EF4-FFF2-40B4-BE49-F238E27FC236}">
-                  <ns2:creationId id="{D2B81020-E685-4363-A0C1-826758BDA6C9}"/>
-                </a:ext>
-              </a:extLst>
-            </p:cNvPr>
-            <p:cNvSpPr>
-              <a:spLocks noGrp="1"/>
-            </p:cNvSpPr>
-            <p:nvPr/>
-          </p:nvSpPr>
-          <p:spPr>
-            <a:xfrm>
-              <a:off x="287982" y="11305877"/>
+                  <ns2:creationId id="{FD928323-573F-4156-8AB9-513B5C35C450}"/>
+                </a:ext>
+              </a:extLst>
+            </p:cNvPr>
+            <p:cNvSpPr>
+              <a:spLocks noGrp="1"/>
+            </p:cNvSpPr>
+            <p:nvPr/>
+          </p:nvSpPr>
+          <p:spPr>
+            <a:xfrm>
+              <a:off x="287982" y="11296650"/>
               <a:ext cx="8612981" cy="517327"/>
             </a:xfrm>
             <a:custGeom>
@@ -2989,18 +2989,18 @@
             <p:cNvPr id="7" name="Panel content" descr="s6">
               <a:extLst>
                 <a:ext uri="{FF2B5EF4-FFF2-40B4-BE49-F238E27FC236}">
-                  <ns2:creationId id="{251698C6-3FF6-49E5-B370-D2CF57F959BE}"/>
-                </a:ext>
-              </a:extLst>
-            </p:cNvPr>
-            <p:cNvSpPr>
-              <a:spLocks noGrp="1"/>
-            </p:cNvSpPr>
-            <p:nvPr/>
-          </p:nvSpPr>
-          <p:spPr>
-            <a:xfrm>
-              <a:off x="287982" y="11823204"/>
+                  <ns2:creationId id="{0A62A24F-2E8F-4755-8745-F6AC91D0123C}"/>
+                </a:ext>
+              </a:extLst>
+            </p:cNvPr>
+            <p:cNvSpPr>
+              <a:spLocks noGrp="1"/>
+            </p:cNvSpPr>
+            <p:nvPr/>
+          </p:nvSpPr>
+          <p:spPr>
+            <a:xfrm>
+              <a:off x="287982" y="11813977"/>
               <a:ext cx="8612981" cy="1371302"/>
             </a:xfrm>
             <a:custGeom>
@@ -3062,21 +3062,21 @@
         </p:sp>
         <p:sp>
           <p:nvSpPr>
-            <p:cNvPr id="161" name="3. Research question" descr="t27">
-              <a:extLst>
-                <a:ext uri="{FF2B5EF4-FFF2-40B4-BE49-F238E27FC236}">
-                  <ns2:creationId id="{60E0CED5-819A-44C9-B858-F2C37A63F087}"/>
-                </a:ext>
-              </a:extLst>
-            </p:cNvPr>
-            <p:cNvSpPr>
-              <a:spLocks noGrp="1"/>
-            </p:cNvSpPr>
-            <p:nvPr/>
-          </p:nvSpPr>
-          <p:spPr>
-            <a:xfrm>
-              <a:off x="421332" y="11350657"/>
+            <p:cNvPr id="162" name="3. Research question" descr="t28">
+              <a:extLst>
+                <a:ext uri="{FF2B5EF4-FFF2-40B4-BE49-F238E27FC236}">
+                  <ns2:creationId id="{088C9B19-6585-4508-8FFE-9167A7422F3D}"/>
+                </a:ext>
+              </a:extLst>
+            </p:cNvPr>
+            <p:cNvSpPr>
+              <a:spLocks noGrp="1"/>
+            </p:cNvSpPr>
+            <p:nvPr/>
+          </p:nvSpPr>
+          <p:spPr>
+            <a:xfrm>
+              <a:off x="421332" y="11341132"/>
               <a:ext cx="2850391" cy="464782"/>
             </a:xfrm>
             <a:prstGeom prst="rect">
@@ -3118,21 +3118,21 @@
         </p:sp>
         <p:sp>
           <p:nvSpPr>
-            <p:cNvPr id="162" name="With the answer generator fixed, which pipeline additions improve" descr="t28">
-              <a:extLst>
-                <a:ext uri="{FF2B5EF4-FFF2-40B4-BE49-F238E27FC236}">
-                  <ns2:creationId id="{E46AA8D0-567B-4A75-864C-262B4B34711B}"/>
-                </a:ext>
-              </a:extLst>
-            </p:cNvPr>
-            <p:cNvSpPr>
-              <a:spLocks noGrp="1"/>
-            </p:cNvSpPr>
-            <p:nvPr/>
-          </p:nvSpPr>
-          <p:spPr>
-            <a:xfrm>
-              <a:off x="785515" y="11960257"/>
+            <p:cNvPr id="163" name="With the answer generator fixed, which pipeline additions improve" descr="t29">
+              <a:extLst>
+                <a:ext uri="{FF2B5EF4-FFF2-40B4-BE49-F238E27FC236}">
+                  <ns2:creationId id="{DD4BACB0-E69E-4D85-9AA2-0B0321AE69D7}"/>
+                </a:ext>
+              </a:extLst>
+            </p:cNvPr>
+            <p:cNvSpPr>
+              <a:spLocks noGrp="1"/>
+            </p:cNvSpPr>
+            <p:nvPr/>
+          </p:nvSpPr>
+          <p:spPr>
+            <a:xfrm>
+              <a:off x="785515" y="11950732"/>
               <a:ext cx="7674998" cy="419062"/>
             </a:xfrm>
             <a:prstGeom prst="rect">
@@ -3174,21 +3174,21 @@
         </p:sp>
         <p:sp>
           <p:nvSpPr>
-            <p:cNvPr id="163" name="answer quality and page-level citation precision and recall, and where" descr="t29">
-              <a:extLst>
-                <a:ext uri="{FF2B5EF4-FFF2-40B4-BE49-F238E27FC236}">
-                  <ns2:creationId id="{119B179D-7619-4B4F-B912-0BBBEADDD4E1}"/>
-                </a:ext>
-              </a:extLst>
-            </p:cNvPr>
-            <p:cNvSpPr>
-              <a:spLocks noGrp="1"/>
-            </p:cNvSpPr>
-            <p:nvPr/>
-          </p:nvSpPr>
-          <p:spPr>
-            <a:xfrm>
-              <a:off x="561380" y="12312682"/>
+            <p:cNvPr id="164" name="answer quality and page-level citation precision and recall, and where" descr="t30">
+              <a:extLst>
+                <a:ext uri="{FF2B5EF4-FFF2-40B4-BE49-F238E27FC236}">
+                  <ns2:creationId id="{0E7AAC97-686B-47A7-A159-53BF724C1E4F}"/>
+                </a:ext>
+              </a:extLst>
+            </p:cNvPr>
+            <p:cNvSpPr>
+              <a:spLocks noGrp="1"/>
+            </p:cNvSpPr>
+            <p:nvPr/>
+          </p:nvSpPr>
+          <p:spPr>
+            <a:xfrm>
+              <a:off x="561380" y="12303157"/>
               <a:ext cx="8123238" cy="419062"/>
             </a:xfrm>
             <a:prstGeom prst="rect">
@@ -3230,21 +3230,21 @@
         </p:sp>
         <p:sp>
           <p:nvSpPr>
-            <p:cNvPr id="164" name="do these objectives conflict?" descr="t30">
-              <a:extLst>
-                <a:ext uri="{FF2B5EF4-FFF2-40B4-BE49-F238E27FC236}">
-                  <ns2:creationId id="{D09C6DEA-1582-4E27-923C-F3D187186855}"/>
-                </a:ext>
-              </a:extLst>
-            </p:cNvPr>
-            <p:cNvSpPr>
-              <a:spLocks noGrp="1"/>
-            </p:cNvSpPr>
-            <p:nvPr/>
-          </p:nvSpPr>
-          <p:spPr>
-            <a:xfrm>
-              <a:off x="2934593" y="12665107"/>
+            <p:cNvPr id="165" name="do these objectives conflict?" descr="t31">
+              <a:extLst>
+                <a:ext uri="{FF2B5EF4-FFF2-40B4-BE49-F238E27FC236}">
+                  <ns2:creationId id="{23F63FE0-16E0-4C11-BE00-8923A672E43B}"/>
+                </a:ext>
+              </a:extLst>
+            </p:cNvPr>
+            <p:cNvSpPr>
+              <a:spLocks noGrp="1"/>
+            </p:cNvSpPr>
+            <p:nvPr/>
+          </p:nvSpPr>
+          <p:spPr>
+            <a:xfrm>
+              <a:off x="2934593" y="12655582"/>
               <a:ext cx="3376730" cy="419062"/>
             </a:xfrm>
             <a:prstGeom prst="rect">
@@ -3287,15 +3287,15 @@
       </p:grpSp>
       <p:grpSp>
         <p:nvGrpSpPr>
-          <p:cNvPr id="552" name="4. Our Contribution"/>
+          <p:cNvPr id="553" name="4. Our Contribution"/>
           <p:cNvGrpSpPr/>
           <p:nvPr/>
         </p:nvGrpSpPr>
         <p:grpSpPr>
           <a:xfrm>
-            <a:off x="287982" y="13443347"/>
+            <a:off x="287982" y="13438733"/>
             <a:ext cx="8612981" cy="2703909"/>
-            <a:chOff x="287982" y="13443347"/>
+            <a:chOff x="287982" y="13438733"/>
             <a:chExt cx="8612981" cy="2703909"/>
           </a:xfrm>
         </p:grpSpPr>
@@ -3304,18 +3304,18 @@
             <p:cNvPr id="8" name="Panel H2" descr="s7">
               <a:extLst>
                 <a:ext uri="{FF2B5EF4-FFF2-40B4-BE49-F238E27FC236}">
-                  <ns2:creationId id="{D035BF2E-8859-4839-B94B-4FF4AE94EE86}"/>
-                </a:ext>
-              </a:extLst>
-            </p:cNvPr>
-            <p:cNvSpPr>
-              <a:spLocks noGrp="1"/>
-            </p:cNvSpPr>
-            <p:nvPr/>
-          </p:nvSpPr>
-          <p:spPr>
-            <a:xfrm>
-              <a:off x="287982" y="13443347"/>
+                  <ns2:creationId id="{10E16712-CB8A-4B65-A47D-59A036631090}"/>
+                </a:ext>
+              </a:extLst>
+            </p:cNvPr>
+            <p:cNvSpPr>
+              <a:spLocks noGrp="1"/>
+            </p:cNvSpPr>
+            <p:nvPr/>
+          </p:nvSpPr>
+          <p:spPr>
+            <a:xfrm>
+              <a:off x="287982" y="13438733"/>
               <a:ext cx="8612981" cy="517327"/>
             </a:xfrm>
             <a:custGeom>
@@ -3386,18 +3386,18 @@
             <p:cNvPr id="9" name="Panel content" descr="s8">
               <a:extLst>
                 <a:ext uri="{FF2B5EF4-FFF2-40B4-BE49-F238E27FC236}">
-                  <ns2:creationId id="{158428FA-864C-45CD-948D-0382AD74D11F}"/>
-                </a:ext>
-              </a:extLst>
-            </p:cNvPr>
-            <p:cNvSpPr>
-              <a:spLocks noGrp="1"/>
-            </p:cNvSpPr>
-            <p:nvPr/>
-          </p:nvSpPr>
-          <p:spPr>
-            <a:xfrm>
-              <a:off x="287982" y="13960673"/>
+                  <ns2:creationId id="{5BCF1005-A4A3-4A93-ADB0-7A87C920C90B}"/>
+                </a:ext>
+              </a:extLst>
+            </p:cNvPr>
+            <p:cNvSpPr>
+              <a:spLocks noGrp="1"/>
+            </p:cNvSpPr>
+            <p:nvPr/>
+          </p:nvSpPr>
+          <p:spPr>
+            <a:xfrm>
+              <a:off x="287982" y="13956060"/>
               <a:ext cx="8612981" cy="2186583"/>
             </a:xfrm>
             <a:custGeom>
@@ -3459,10 +3459,10 @@
         </p:sp>
         <p:sp>
           <p:nvSpPr>
-            <p:cNvPr id="165" name="4. Our Contribution" descr="t31">
-              <a:extLst>
-                <a:ext uri="{FF2B5EF4-FFF2-40B4-BE49-F238E27FC236}">
-                  <ns2:creationId id="{DC74E600-C910-49DA-8DD6-FE6A0C06221D}"/>
+            <p:cNvPr id="166" name="4. Our Contribution" descr="t32">
+              <a:extLst>
+                <a:ext uri="{FF2B5EF4-FFF2-40B4-BE49-F238E27FC236}">
+                  <ns2:creationId id="{C6A5A21B-458F-4DF7-BE66-1EF345D2ABAD}"/>
                 </a:ext>
               </a:extLst>
             </p:cNvPr>
@@ -3515,21 +3515,21 @@
         </p:sp>
         <p:sp>
           <p:nvSpPr>
-            <p:cNvPr id="166" name="We build a Legal RAG pipeline and provide an empirical comparison of s" descr="t32">
-              <a:extLst>
-                <a:ext uri="{FF2B5EF4-FFF2-40B4-BE49-F238E27FC236}">
-                  <ns2:creationId id="{CC8A23BE-0F3A-4455-8DEA-02118F812776}"/>
-                </a:ext>
-              </a:extLst>
-            </p:cNvPr>
-            <p:cNvSpPr>
-              <a:spLocks noGrp="1"/>
-            </p:cNvSpPr>
-            <p:nvPr/>
-          </p:nvSpPr>
-          <p:spPr>
-            <a:xfrm>
-              <a:off x="449907" y="14068425"/>
+            <p:cNvPr id="167" name="We build a Legal RAG pipeline and provide an empirical comparison of s" descr="t33">
+              <a:extLst>
+                <a:ext uri="{FF2B5EF4-FFF2-40B4-BE49-F238E27FC236}">
+                  <ns2:creationId id="{832CD1E5-D462-4BE0-B125-51F8AABD7C73}"/>
+                </a:ext>
+              </a:extLst>
+            </p:cNvPr>
+            <p:cNvSpPr>
+              <a:spLocks noGrp="1"/>
+            </p:cNvSpPr>
+            <p:nvPr/>
+          </p:nvSpPr>
+          <p:spPr>
+            <a:xfrm>
+              <a:off x="449907" y="14058900"/>
               <a:ext cx="7914301" cy="403861"/>
             </a:xfrm>
             <a:prstGeom prst="rect">
@@ -3571,10 +3571,10 @@
         </p:sp>
         <p:sp>
           <p:nvSpPr>
-            <p:cNvPr id="167" name="cumulative configurations on 30 documents and 100 questions. By adding" descr="t33">
-              <a:extLst>
-                <a:ext uri="{FF2B5EF4-FFF2-40B4-BE49-F238E27FC236}">
-                  <ns2:creationId id="{3351B2FC-7295-4516-9361-5E850D704F08}"/>
+            <p:cNvPr id="168" name="cumulative configurations on 30 documents and 100 questions. By adding" descr="t34">
+              <a:extLst>
+                <a:ext uri="{FF2B5EF4-FFF2-40B4-BE49-F238E27FC236}">
+                  <ns2:creationId id="{B5304FE5-00A3-4FA6-A7DC-6002D014FFC5}"/>
                 </a:ext>
               </a:extLst>
             </p:cNvPr>
@@ -3627,21 +3627,21 @@
         </p:sp>
         <p:sp>
           <p:nvSpPr>
-            <p:cNvPr id="168" name="components sequentially while keeping the answer generator fixed, we m" descr="t34">
-              <a:extLst>
-                <a:ext uri="{FF2B5EF4-FFF2-40B4-BE49-F238E27FC236}">
-                  <ns2:creationId id="{A5F2B84E-A27A-4442-A018-6FDEC1387E0F}"/>
-                </a:ext>
-              </a:extLst>
-            </p:cNvPr>
-            <p:cNvSpPr>
-              <a:spLocks noGrp="1"/>
-            </p:cNvSpPr>
-            <p:nvPr/>
-          </p:nvSpPr>
-          <p:spPr>
-            <a:xfrm>
-              <a:off x="449907" y="14706600"/>
+            <p:cNvPr id="169" name="components sequentially while keeping the answer generator fixed, we m" descr="t35">
+              <a:extLst>
+                <a:ext uri="{FF2B5EF4-FFF2-40B4-BE49-F238E27FC236}">
+                  <ns2:creationId id="{5E397B48-C1EE-43E4-A628-43D7713E6AED}"/>
+                </a:ext>
+              </a:extLst>
+            </p:cNvPr>
+            <p:cNvSpPr>
+              <a:spLocks noGrp="1"/>
+            </p:cNvSpPr>
+            <p:nvPr/>
+          </p:nvSpPr>
+          <p:spPr>
+            <a:xfrm>
+              <a:off x="449907" y="14697075"/>
               <a:ext cx="8343155" cy="403861"/>
             </a:xfrm>
             <a:prstGeom prst="rect">
@@ -3683,10 +3683,10 @@
         </p:sp>
         <p:sp>
           <p:nvSpPr>
-            <p:cNvPr id="169" name="changes in answer quality and page-level citation precision and recall" descr="t35">
-              <a:extLst>
-                <a:ext uri="{FF2B5EF4-FFF2-40B4-BE49-F238E27FC236}">
-                  <ns2:creationId id="{0502E592-8630-47F4-AC52-DCEB5375660B}"/>
+            <p:cNvPr id="170" name="changes in answer quality and page-level citation precision and recall" descr="t36">
+              <a:extLst>
+                <a:ext uri="{FF2B5EF4-FFF2-40B4-BE49-F238E27FC236}">
+                  <ns2:creationId id="{A9D90773-06CB-48AC-8BFD-7C0E6AE98517}"/>
                 </a:ext>
               </a:extLst>
             </p:cNvPr>
@@ -3739,10 +3739,10 @@
         </p:sp>
         <p:sp>
           <p:nvSpPr>
-            <p:cNvPr id="170" name="stages of document processing, retrieval, reranking, answer processing" descr="t36">
-              <a:extLst>
-                <a:ext uri="{FF2B5EF4-FFF2-40B4-BE49-F238E27FC236}">
-                  <ns2:creationId id="{2B42BFC9-3F61-4067-BE38-D57ACF24FA5A}"/>
+            <p:cNvPr id="171" name="stages of document processing, retrieval, reranking, answer processing" descr="t37">
+              <a:extLst>
+                <a:ext uri="{FF2B5EF4-FFF2-40B4-BE49-F238E27FC236}">
+                  <ns2:creationId id="{1E1B5F3B-B52E-476E-872D-AF40BBDD4126}"/>
                 </a:ext>
               </a:extLst>
             </p:cNvPr>
@@ -3795,21 +3795,21 @@
         </p:sp>
         <p:sp>
           <p:nvSpPr>
-            <p:cNvPr id="171" name="citation selection." descr="t37">
-              <a:extLst>
-                <a:ext uri="{FF2B5EF4-FFF2-40B4-BE49-F238E27FC236}">
-                  <ns2:creationId id="{863FF7E3-EEF8-4544-AD9F-EF68066176EC}"/>
-                </a:ext>
-              </a:extLst>
-            </p:cNvPr>
-            <p:cNvSpPr>
-              <a:spLocks noGrp="1"/>
-            </p:cNvSpPr>
-            <p:nvPr/>
-          </p:nvSpPr>
-          <p:spPr>
-            <a:xfrm>
-              <a:off x="449907" y="15668625"/>
+            <p:cNvPr id="172" name="citation selection." descr="t38">
+              <a:extLst>
+                <a:ext uri="{FF2B5EF4-FFF2-40B4-BE49-F238E27FC236}">
+                  <ns2:creationId id="{5EF3CE09-1B27-4037-B6F8-221F48234C5E}"/>
+                </a:ext>
+              </a:extLst>
+            </p:cNvPr>
+            <p:cNvSpPr>
+              <a:spLocks noGrp="1"/>
+            </p:cNvSpPr>
+            <p:nvPr/>
+          </p:nvSpPr>
+          <p:spPr>
+            <a:xfrm>
+              <a:off x="449907" y="15659100"/>
               <a:ext cx="1904852" cy="403861"/>
             </a:xfrm>
             <a:prstGeom prst="rect">
@@ -3852,7 +3852,7 @@
       </p:grpSp>
       <p:grpSp>
         <p:nvGrpSpPr>
-          <p:cNvPr id="551" name="5. Hypothesis"/>
+          <p:cNvPr id="552" name="5. Hypothesis"/>
           <p:cNvGrpSpPr/>
           <p:nvPr/>
         </p:nvGrpSpPr>
@@ -3869,7 +3869,7 @@
             <p:cNvPr id="10" name="Panel H2" descr="s9">
               <a:extLst>
                 <a:ext uri="{FF2B5EF4-FFF2-40B4-BE49-F238E27FC236}">
-                  <ns2:creationId id="{C04F0E3C-71FB-4541-A0C8-76C4CE71F08A}"/>
+                  <ns2:creationId id="{2C264C3A-0C1A-406B-B597-6FA63F87F027}"/>
                 </a:ext>
               </a:extLst>
             </p:cNvPr>
@@ -3951,7 +3951,7 @@
             <p:cNvPr id="11" name="Panel content" descr="s10">
               <a:extLst>
                 <a:ext uri="{FF2B5EF4-FFF2-40B4-BE49-F238E27FC236}">
-                  <ns2:creationId id="{5BB38BBB-8DBF-4BB0-B89A-19D5A388BEE5}"/>
+                  <ns2:creationId id="{41F2048A-56F7-4AFF-BBB8-1E76EF512D8A}"/>
                 </a:ext>
               </a:extLst>
             </p:cNvPr>
@@ -4025,7 +4025,7 @@
             <p:cNvPr id="12" name="Panel hyp h1" descr="s11">
               <a:extLst>
                 <a:ext uri="{FF2B5EF4-FFF2-40B4-BE49-F238E27FC236}">
-                  <ns2:creationId id="{3B2E543E-151C-4E33-B04E-5F1BC4982533}"/>
+                  <ns2:creationId id="{36F1CF4A-CA8C-4AB3-A533-DFFE1FD89DE7}"/>
                 </a:ext>
               </a:extLst>
             </p:cNvPr>
@@ -4099,7 +4099,7 @@
             <p:cNvPr id="13" name="Panel hyp h2" descr="s12">
               <a:extLst>
                 <a:ext uri="{FF2B5EF4-FFF2-40B4-BE49-F238E27FC236}">
-                  <ns2:creationId id="{15E5FAED-2C1E-444C-9A62-5EB3B917C7AF}"/>
+                  <ns2:creationId id="{BD720A7A-F724-4B55-BA36-45ADEE905C4B}"/>
                 </a:ext>
               </a:extLst>
             </p:cNvPr>
@@ -4173,7 +4173,7 @@
             <p:cNvPr id="14" name="Panel hyp h3" descr="s13">
               <a:extLst>
                 <a:ext uri="{FF2B5EF4-FFF2-40B4-BE49-F238E27FC236}">
-                  <ns2:creationId id="{BA32288F-50B1-45FB-BD45-D11F3D785AC3}"/>
+                  <ns2:creationId id="{38E326A5-2A58-4A8B-9F03-95F373438BA1}"/>
                 </a:ext>
               </a:extLst>
             </p:cNvPr>
@@ -4244,10 +4244,10 @@
         </p:sp>
         <p:sp>
           <p:nvSpPr>
-            <p:cNvPr id="172" name="5. Hypothesis" descr="t38">
-              <a:extLst>
-                <a:ext uri="{FF2B5EF4-FFF2-40B4-BE49-F238E27FC236}">
-                  <ns2:creationId id="{59896453-E23B-4C4D-A246-8C0ABB382747}"/>
+            <p:cNvPr id="173" name="5. Hypothesis" descr="t39">
+              <a:extLst>
+                <a:ext uri="{FF2B5EF4-FFF2-40B4-BE49-F238E27FC236}">
+                  <ns2:creationId id="{5826C9A2-7BD6-4CA9-907D-CFDFC6F1D43E}"/>
                 </a:ext>
               </a:extLst>
             </p:cNvPr>
@@ -4300,10 +4300,10 @@
         </p:sp>
         <p:sp>
           <p:nvSpPr>
-            <p:cNvPr id="173" name="H1 — Retrieval" descr="t39">
-              <a:extLst>
-                <a:ext uri="{FF2B5EF4-FFF2-40B4-BE49-F238E27FC236}">
-                  <ns2:creationId id="{65B0DDDD-9FA3-42D9-A7C9-B2DCF35EDD98}"/>
+            <p:cNvPr id="174" name="H1 — Retrieval" descr="t40">
+              <a:extLst>
+                <a:ext uri="{FF2B5EF4-FFF2-40B4-BE49-F238E27FC236}">
+                  <ns2:creationId id="{D6947970-1E68-4AC7-938C-C7FCD4A03535}"/>
                 </a:ext>
               </a:extLst>
             </p:cNvPr>
@@ -4356,10 +4356,10 @@
         </p:sp>
         <p:sp>
           <p:nvSpPr>
-            <p:cNvPr id="174" name="Combining multiple text granularities, semantic and lexical retrieval," descr="t40">
-              <a:extLst>
-                <a:ext uri="{FF2B5EF4-FFF2-40B4-BE49-F238E27FC236}">
-                  <ns2:creationId id="{C064A681-107A-4C6C-98AA-1E3A02F49DC8}"/>
+            <p:cNvPr id="175" name="Combining multiple text granularities, semantic and lexical retrieval," descr="t41">
+              <a:extLst>
+                <a:ext uri="{FF2B5EF4-FFF2-40B4-BE49-F238E27FC236}">
+                  <ns2:creationId id="{72C00E64-9ECF-4DB5-B6B6-142EEF8ABC08}"/>
                 </a:ext>
               </a:extLst>
             </p:cNvPr>
@@ -4412,10 +4412,10 @@
         </p:sp>
         <p:sp>
           <p:nvSpPr>
-            <p:cNvPr id="175" name="relevance reranking will improve answer quality and evidence retrieval" descr="t41">
-              <a:extLst>
-                <a:ext uri="{FF2B5EF4-FFF2-40B4-BE49-F238E27FC236}">
-                  <ns2:creationId id="{1F25BBC9-BFB4-48BF-B26D-ED8F1AFDD6F3}"/>
+            <p:cNvPr id="176" name="relevance reranking will improve answer quality and evidence retrieval" descr="t42">
+              <a:extLst>
+                <a:ext uri="{FF2B5EF4-FFF2-40B4-BE49-F238E27FC236}">
+                  <ns2:creationId id="{90B0D906-97ED-4780-BE88-F50711499E28}"/>
                 </a:ext>
               </a:extLst>
             </p:cNvPr>
@@ -4468,10 +4468,10 @@
         </p:sp>
         <p:sp>
           <p:nvSpPr>
-            <p:cNvPr id="176" name="compared with a simple semantic-retrieval baseline." descr="t42">
-              <a:extLst>
-                <a:ext uri="{FF2B5EF4-FFF2-40B4-BE49-F238E27FC236}">
-                  <ns2:creationId id="{E1953FAB-B56E-4BFE-B7A1-A49C2C0866E1}"/>
+            <p:cNvPr id="177" name="compared with a simple semantic-retrieval baseline." descr="t43">
+              <a:extLst>
+                <a:ext uri="{FF2B5EF4-FFF2-40B4-BE49-F238E27FC236}">
+                  <ns2:creationId id="{6522E251-496F-42CE-B4B7-2ED68ABC220C}"/>
                 </a:ext>
               </a:extLst>
             </p:cNvPr>
@@ -4524,10 +4524,10 @@
         </p:sp>
         <p:sp>
           <p:nvSpPr>
-            <p:cNvPr id="177" name="H2 — Robustness to scanned documents" descr="t43">
-              <a:extLst>
-                <a:ext uri="{FF2B5EF4-FFF2-40B4-BE49-F238E27FC236}">
-                  <ns2:creationId id="{3B80B77B-DD7C-480A-AF00-04F987A4489C}"/>
+            <p:cNvPr id="178" name="H2 — Robustness to scanned documents" descr="t44">
+              <a:extLst>
+                <a:ext uri="{FF2B5EF4-FFF2-40B4-BE49-F238E27FC236}">
+                  <ns2:creationId id="{6BBC1CEB-108D-4FA0-B316-790456B52DFC}"/>
                 </a:ext>
               </a:extLst>
             </p:cNvPr>
@@ -4580,10 +4580,10 @@
         </p:sp>
         <p:sp>
           <p:nvSpPr>
-            <p:cNvPr id="178" name="Recovering text from scan-like legal documents will reduce the perform" descr="t44">
-              <a:extLst>
-                <a:ext uri="{FF2B5EF4-FFF2-40B4-BE49-F238E27FC236}">
-                  <ns2:creationId id="{AB75C040-1032-454D-934B-C0A908AF25C2}"/>
+            <p:cNvPr id="179" name="Recovering text from scan-like legal documents will reduce the perform" descr="t45">
+              <a:extLst>
+                <a:ext uri="{FF2B5EF4-FFF2-40B4-BE49-F238E27FC236}">
+                  <ns2:creationId id="{4E58C571-616B-41AA-9924-4B50DED1AFF6}"/>
                 </a:ext>
               </a:extLst>
             </p:cNvPr>
@@ -4636,10 +4636,10 @@
         </p:sp>
         <p:sp>
           <p:nvSpPr>
-            <p:cNvPr id="179" name="loss caused by the absence of a machine-readable text layer." descr="t45">
-              <a:extLst>
-                <a:ext uri="{FF2B5EF4-FFF2-40B4-BE49-F238E27FC236}">
-                  <ns2:creationId id="{2C8FD679-E4BD-4A69-8CA0-F23773F15324}"/>
+            <p:cNvPr id="180" name="loss caused by the absence of a machine-readable text layer." descr="t46">
+              <a:extLst>
+                <a:ext uri="{FF2B5EF4-FFF2-40B4-BE49-F238E27FC236}">
+                  <ns2:creationId id="{6BED2ACC-8D63-42EC-B613-DBED01B22982}"/>
                 </a:ext>
               </a:extLst>
             </p:cNvPr>
@@ -4692,10 +4692,10 @@
         </p:sp>
         <p:sp>
           <p:nvSpPr>
-            <p:cNvPr id="180" name="H3 — Citation attribution" descr="t46">
-              <a:extLst>
-                <a:ext uri="{FF2B5EF4-FFF2-40B4-BE49-F238E27FC236}">
-                  <ns2:creationId id="{10D96FF2-CBFC-4E5E-83DC-0DD545258080}"/>
+            <p:cNvPr id="181" name="H3 — Citation attribution" descr="t47">
+              <a:extLst>
+                <a:ext uri="{FF2B5EF4-FFF2-40B4-BE49-F238E27FC236}">
+                  <ns2:creationId id="{71684BB9-C600-4459-9DA3-45DF2D8A369C}"/>
                 </a:ext>
               </a:extLst>
             </p:cNvPr>
@@ -4748,10 +4748,10 @@
         </p:sp>
         <p:sp>
           <p:nvSpPr>
-            <p:cNvPr id="181" name="Selecting source pages after answer generation will produce a more foc" descr="t47">
-              <a:extLst>
-                <a:ext uri="{FF2B5EF4-FFF2-40B4-BE49-F238E27FC236}">
-                  <ns2:creationId id="{CBCC085B-D88D-4105-9072-7FAF752F3CFD}"/>
+            <p:cNvPr id="182" name="Selecting source pages after answer generation will produce a more foc" descr="t48">
+              <a:extLst>
+                <a:ext uri="{FF2B5EF4-FFF2-40B4-BE49-F238E27FC236}">
+                  <ns2:creationId id="{9DA0991D-5624-41EF-9ECC-84E1A9A01EF1}"/>
                 </a:ext>
               </a:extLst>
             </p:cNvPr>
@@ -4804,10 +4804,10 @@
         </p:sp>
         <p:sp>
           <p:nvSpPr>
-            <p:cNvPr id="182" name="citation set without substantially reducing the coverage of relevant e" descr="t48">
-              <a:extLst>
-                <a:ext uri="{FF2B5EF4-FFF2-40B4-BE49-F238E27FC236}">
-                  <ns2:creationId id="{9601E6DB-3DDA-4C7B-B303-F3D95A8E4C0F}"/>
+            <p:cNvPr id="183" name="citation set without substantially reducing the coverage of relevant e" descr="t49">
+              <a:extLst>
+                <a:ext uri="{FF2B5EF4-FFF2-40B4-BE49-F238E27FC236}">
+                  <ns2:creationId id="{05B2ECAC-FB57-42DF-AB4A-19DBF40C6A40}"/>
                 </a:ext>
               </a:extLst>
             </p:cNvPr>
@@ -4861,15 +4861,15 @@
       </p:grpSp>
       <p:grpSp>
         <p:nvGrpSpPr>
-          <p:cNvPr id="550" name="6. Data and Methods"/>
+          <p:cNvPr id="551" name="6. Data and Methods"/>
           <p:cNvGrpSpPr/>
           <p:nvPr/>
         </p:nvGrpSpPr>
         <p:grpSpPr>
           <a:xfrm>
-            <a:off x="9072414" y="1370112"/>
+            <a:off x="9072414" y="1351657"/>
             <a:ext cx="11731377" cy="10858351"/>
-            <a:chOff x="9072414" y="1370112"/>
+            <a:chOff x="9072414" y="1351657"/>
             <a:chExt cx="11731377" cy="10858351"/>
           </a:xfrm>
         </p:grpSpPr>
@@ -4878,18 +4878,18 @@
             <p:cNvPr id="15" name="Panel H2" descr="s14">
               <a:extLst>
                 <a:ext uri="{FF2B5EF4-FFF2-40B4-BE49-F238E27FC236}">
-                  <ns2:creationId id="{637F59D8-7793-4584-9356-55A92EF202F4}"/>
-                </a:ext>
-              </a:extLst>
-            </p:cNvPr>
-            <p:cNvSpPr>
-              <a:spLocks noGrp="1"/>
-            </p:cNvSpPr>
-            <p:nvPr/>
-          </p:nvSpPr>
-          <p:spPr>
-            <a:xfrm>
-              <a:off x="9072414" y="1370112"/>
+                  <ns2:creationId id="{179DF8A4-5011-4F12-931C-FD83E3BB2AAD}"/>
+                </a:ext>
+              </a:extLst>
+            </p:cNvPr>
+            <p:cNvSpPr>
+              <a:spLocks noGrp="1"/>
+            </p:cNvSpPr>
+            <p:nvPr/>
+          </p:nvSpPr>
+          <p:spPr>
+            <a:xfrm>
+              <a:off x="9072414" y="1351657"/>
               <a:ext cx="11731377" cy="517327"/>
             </a:xfrm>
             <a:custGeom>
@@ -4960,18 +4960,18 @@
             <p:cNvPr id="16" name="Panel content" descr="s15">
               <a:extLst>
                 <a:ext uri="{FF2B5EF4-FFF2-40B4-BE49-F238E27FC236}">
-                  <ns2:creationId id="{38C9C283-0E8C-482B-86E7-F170F5E070F7}"/>
-                </a:ext>
-              </a:extLst>
-            </p:cNvPr>
-            <p:cNvSpPr>
-              <a:spLocks noGrp="1"/>
-            </p:cNvSpPr>
-            <p:nvPr/>
-          </p:nvSpPr>
-          <p:spPr>
-            <a:xfrm>
-              <a:off x="9072414" y="1887438"/>
+                  <ns2:creationId id="{AE84D980-9F66-4C33-88B8-0B04DB36A4F6}"/>
+                </a:ext>
+              </a:extLst>
+            </p:cNvPr>
+            <p:cNvSpPr>
+              <a:spLocks noGrp="1"/>
+            </p:cNvSpPr>
+            <p:nvPr/>
+          </p:nvSpPr>
+          <p:spPr>
+            <a:xfrm>
+              <a:off x="9072414" y="1868984"/>
               <a:ext cx="11731377" cy="10341025"/>
             </a:xfrm>
             <a:custGeom>
@@ -5033,15 +5033,15 @@
         </p:sp>
         <p:grpSp>
           <p:nvGrpSpPr>
-            <p:cNvPr id="549" name="R0 · Baseline"/>
+            <p:cNvPr id="550" name="R0 · Baseline"/>
             <p:cNvGrpSpPr/>
             <p:nvPr/>
           </p:nvGrpSpPr>
           <p:grpSpPr>
             <a:xfrm>
-              <a:off x="9234339" y="4696718"/>
+              <a:off x="9234339" y="4678263"/>
               <a:ext cx="11407527" cy="1338858"/>
-              <a:chOff x="9234339" y="4696718"/>
+              <a:chOff x="9234339" y="4678263"/>
               <a:chExt cx="11407527" cy="1338858"/>
             </a:xfrm>
           </p:grpSpPr>
@@ -5050,7 +5050,7 @@
               <p:cNvPr id="17" name="Panel baseline" descr="s16">
                 <a:extLst>
                   <a:ext uri="{FF2B5EF4-FFF2-40B4-BE49-F238E27FC236}">
-                    <ns2:creationId id="{CAE9DBE5-16AA-4816-947E-EA4068AD3ACD}"/>
+                    <ns2:creationId id="{5B3951E1-A121-414E-8786-1711E643335F}"/>
                   </a:ext>
                 </a:extLst>
               </p:cNvPr>
@@ -5061,7 +5061,7 @@
             </p:nvSpPr>
             <p:spPr>
               <a:xfrm>
-                <a:off x="9234339" y="4696718"/>
+                <a:off x="9234339" y="4678263"/>
                 <a:ext cx="11407527" cy="1338858"/>
               </a:xfrm>
               <a:custGeom>
@@ -5123,17 +5123,17 @@
           </p:sp>
           <p:pic>
             <p:nvPicPr>
-              <p:cNvPr id="524" name="icon-file" descr="s122"/>
+              <p:cNvPr id="525" name="icon-file" descr="s122"/>
               <p:cNvPicPr>
                 <a:picLocks noChangeAspect="1"/>
               </p:cNvPicPr>
               <p:nvPr/>
             </p:nvPicPr>
             <p:blipFill>
-              <a:blip r:embed="Rfc804368da8f460b">
+              <a:blip r:embed="Rbc8f7fe3c81b4ab8">
                 <a:extLst>
                   <a:ext uri="{96DAC541-7B7A-43D3-8B79-37D633B846F1}">
-                    <ns4:svgBlip r:embed="Rd4f289a3a9b0470b"/>
+                    <ns4:svgBlip r:embed="Rdb333644fa424497"/>
                   </a:ext>
                 </a:extLst>
               </a:blip>
@@ -5141,7 +5141,7 @@
             </p:blipFill>
             <p:spPr>
               <a:xfrm>
-                <a:off x="10567839" y="5175647"/>
+                <a:off x="10567839" y="5157192"/>
                 <a:ext cx="381000" cy="381000"/>
               </a:xfrm>
               <a:prstGeom prst="rect">
@@ -5151,17 +5151,17 @@
           </p:pic>
           <p:pic>
             <p:nvPicPr>
-              <p:cNvPr id="525" name="icon-search" descr="s123"/>
+              <p:cNvPr id="526" name="icon-search" descr="s123"/>
               <p:cNvPicPr>
                 <a:picLocks noChangeAspect="1"/>
               </p:cNvPicPr>
               <p:nvPr/>
             </p:nvPicPr>
             <p:blipFill>
-              <a:blip r:embed="R1de0a2d8709f473d">
+              <a:blip r:embed="R3cefcdab79504b20">
                 <a:extLst>
                   <a:ext uri="{96DAC541-7B7A-43D3-8B79-37D633B846F1}">
-                    <ns4:svgBlip r:embed="R0236f11125004989"/>
+                    <ns4:svgBlip r:embed="R455c67edd2734b89"/>
                   </a:ext>
                 </a:extLst>
               </a:blip>
@@ -5169,7 +5169,7 @@
             </p:blipFill>
             <p:spPr>
               <a:xfrm>
-                <a:off x="12597259" y="5175647"/>
+                <a:off x="12597259" y="5157192"/>
                 <a:ext cx="381000" cy="381000"/>
               </a:xfrm>
               <a:prstGeom prst="rect">
@@ -5179,17 +5179,17 @@
           </p:pic>
           <p:pic>
             <p:nvPicPr>
-              <p:cNvPr id="526" name="icon-answer" descr="s124"/>
+              <p:cNvPr id="527" name="icon-answer" descr="s124"/>
               <p:cNvPicPr>
                 <a:picLocks noChangeAspect="1"/>
               </p:cNvPicPr>
               <p:nvPr/>
             </p:nvPicPr>
             <p:blipFill>
-              <a:blip r:embed="R1dcb0a0ec22249d3">
+              <a:blip r:embed="R7fed2d3dd82d473f">
                 <a:extLst>
                   <a:ext uri="{96DAC541-7B7A-43D3-8B79-37D633B846F1}">
-                    <ns4:svgBlip r:embed="R0e0562fac043487e"/>
+                    <ns4:svgBlip r:embed="R17cf09e1076c4e46"/>
                   </a:ext>
                 </a:extLst>
               </a:blip>
@@ -5197,7 +5197,7 @@
             </p:blipFill>
             <p:spPr>
               <a:xfrm>
-                <a:off x="15913894" y="5175647"/>
+                <a:off x="15913894" y="5157192"/>
                 <a:ext cx="381000" cy="381000"/>
               </a:xfrm>
               <a:prstGeom prst="rect">
@@ -5207,17 +5207,17 @@
           </p:pic>
           <p:pic>
             <p:nvPicPr>
-              <p:cNvPr id="527" name="icon-file" descr="s125"/>
+              <p:cNvPr id="528" name="icon-file" descr="s125"/>
               <p:cNvPicPr>
                 <a:picLocks noChangeAspect="1"/>
               </p:cNvPicPr>
               <p:nvPr/>
             </p:nvPicPr>
             <p:blipFill>
-              <a:blip r:embed="Ra3bf8f748f944627">
+              <a:blip r:embed="R16e9ebc7e354487a">
                 <a:extLst>
                   <a:ext uri="{96DAC541-7B7A-43D3-8B79-37D633B846F1}">
-                    <ns4:svgBlip r:embed="R04086f6da4624f9d"/>
+                    <ns4:svgBlip r:embed="Rf5a70fbbc7f94a40"/>
                   </a:ext>
                 </a:extLst>
               </a:blip>
@@ -5225,7 +5225,7 @@
             </p:blipFill>
             <p:spPr>
               <a:xfrm>
-                <a:off x="18311217" y="5175647"/>
+                <a:off x="18311217" y="5157192"/>
                 <a:ext cx="381000" cy="381000"/>
               </a:xfrm>
               <a:prstGeom prst="rect">
@@ -5235,10 +5235,10 @@
           </p:pic>
           <p:sp>
             <p:nvSpPr>
-              <p:cNvPr id="336" name="R0 ·" descr="t202">
+              <p:cNvPr id="337" name="R0 ·" descr="t203">
                 <a:extLst>
                   <a:ext uri="{FF2B5EF4-FFF2-40B4-BE49-F238E27FC236}">
-                    <ns2:creationId id="{8FBC937A-DA3C-4238-8853-40567A811E72}"/>
+                    <ns2:creationId id="{E52984AE-393F-452A-9779-5F4475C0171E}"/>
                   </a:ext>
                 </a:extLst>
               </p:cNvPr>
@@ -5249,7 +5249,7 @@
             </p:nvSpPr>
             <p:spPr>
               <a:xfrm>
-                <a:off x="9358164" y="5010150"/>
+                <a:off x="9358164" y="4991100"/>
                 <a:ext cx="468326" cy="403860"/>
               </a:xfrm>
               <a:prstGeom prst="rect">
@@ -5291,10 +5291,10 @@
           </p:sp>
           <p:sp>
             <p:nvSpPr>
-              <p:cNvPr id="337" name="Baseline" descr="t203">
+              <p:cNvPr id="338" name="Baseline" descr="t204">
                 <a:extLst>
                   <a:ext uri="{FF2B5EF4-FFF2-40B4-BE49-F238E27FC236}">
-                    <ns2:creationId id="{4BC88DE3-A22C-4DFC-B73C-62E6B10C5EED}"/>
+                    <ns2:creationId id="{6894D069-702B-4F8A-AE9E-53DBE4771E60}"/>
                   </a:ext>
                 </a:extLst>
               </p:cNvPr>
@@ -5305,7 +5305,7 @@
             </p:nvSpPr>
             <p:spPr>
               <a:xfrm>
-                <a:off x="9358164" y="5343525"/>
+                <a:off x="9358164" y="5324475"/>
                 <a:ext cx="994412" cy="403860"/>
               </a:xfrm>
               <a:prstGeom prst="rect">
@@ -5347,10 +5347,10 @@
           </p:sp>
           <p:sp>
             <p:nvSpPr>
-              <p:cNvPr id="338" name="PDF text" descr="t204">
+              <p:cNvPr id="339" name="PDF text" descr="t205">
                 <a:extLst>
                   <a:ext uri="{FF2B5EF4-FFF2-40B4-BE49-F238E27FC236}">
-                    <ns2:creationId id="{F846AB90-0F23-4DC7-80FA-CE140845716F}"/>
+                    <ns2:creationId id="{D0FEBC04-0E84-4339-B685-B61FFCD9562B}"/>
                   </a:ext>
                 </a:extLst>
               </p:cNvPr>
@@ -5361,7 +5361,7 @@
             </p:nvSpPr>
             <p:spPr>
               <a:xfrm>
-                <a:off x="11025039" y="4848225"/>
+                <a:off x="11025039" y="4829175"/>
                 <a:ext cx="976429" cy="403860"/>
               </a:xfrm>
               <a:prstGeom prst="rect">
@@ -5403,10 +5403,10 @@
           </p:sp>
           <p:sp>
             <p:nvSpPr>
-              <p:cNvPr id="339" name="300-token" descr="t205">
+              <p:cNvPr id="340" name="300-token" descr="t206">
                 <a:extLst>
                   <a:ext uri="{FF2B5EF4-FFF2-40B4-BE49-F238E27FC236}">
-                    <ns2:creationId id="{8A05E048-8F3C-4575-A19D-259822E0D2EB}"/>
+                    <ns2:creationId id="{75277094-A6EA-4336-B4E2-33201FAA3EDB}"/>
                   </a:ext>
                 </a:extLst>
               </p:cNvPr>
@@ -5417,7 +5417,7 @@
             </p:nvSpPr>
             <p:spPr>
               <a:xfrm>
-                <a:off x="11025039" y="5181600"/>
+                <a:off x="11025039" y="5162550"/>
                 <a:ext cx="1129134" cy="403860"/>
               </a:xfrm>
               <a:prstGeom prst="rect">
@@ -5459,10 +5459,10 @@
           </p:sp>
           <p:sp>
             <p:nvSpPr>
-              <p:cNvPr id="340" name="passages" descr="t206">
+              <p:cNvPr id="341" name="passages" descr="t207">
                 <a:extLst>
                   <a:ext uri="{FF2B5EF4-FFF2-40B4-BE49-F238E27FC236}">
-                    <ns2:creationId id="{A3E4186E-A858-4FCC-8793-1B6C2B32484F}"/>
+                    <ns2:creationId id="{BDF7C6AA-22AA-4DB0-9870-06BE5965618C}"/>
                   </a:ext>
                 </a:extLst>
               </p:cNvPr>
@@ -5473,7 +5473,7 @@
             </p:nvSpPr>
             <p:spPr>
               <a:xfrm>
-                <a:off x="11025039" y="5514975"/>
+                <a:off x="11025039" y="5495925"/>
                 <a:ext cx="1023064" cy="403860"/>
               </a:xfrm>
               <a:prstGeom prst="rect">
@@ -5515,10 +5515,10 @@
           </p:sp>
           <p:sp>
             <p:nvSpPr>
-              <p:cNvPr id="341" name="→" descr="t207">
+              <p:cNvPr id="342" name="→" descr="t208">
                 <a:extLst>
                   <a:ext uri="{FF2B5EF4-FFF2-40B4-BE49-F238E27FC236}">
-                    <ns2:creationId id="{10892BF0-44FE-4979-9735-571D033E36BD}"/>
+                    <ns2:creationId id="{ACFBCD50-64C0-446C-B24C-300BF761EFFA}"/>
                   </a:ext>
                 </a:extLst>
               </p:cNvPr>
@@ -5529,7 +5529,7 @@
             </p:nvSpPr>
             <p:spPr>
               <a:xfrm>
-                <a:off x="12244834" y="5177786"/>
+                <a:off x="12244834" y="5158736"/>
                 <a:ext cx="419100" cy="442466"/>
               </a:xfrm>
               <a:prstGeom prst="rect">
@@ -5571,10 +5571,10 @@
           </p:sp>
           <p:sp>
             <p:nvSpPr>
-              <p:cNvPr id="342" name="Semantic retrieval" descr="t208">
+              <p:cNvPr id="343" name="Semantic retrieval" descr="t209">
                 <a:extLst>
                   <a:ext uri="{FF2B5EF4-FFF2-40B4-BE49-F238E27FC236}">
-                    <ns2:creationId id="{217522E7-5892-4162-98BA-A9031C3CFA46}"/>
+                    <ns2:creationId id="{CA43F0FA-B46E-4967-8DF0-187BC6300E98}"/>
                   </a:ext>
                 </a:extLst>
               </p:cNvPr>
@@ -5585,7 +5585,7 @@
             </p:nvSpPr>
             <p:spPr>
               <a:xfrm>
-                <a:off x="13054459" y="4991100"/>
+                <a:off x="13054459" y="4972050"/>
                 <a:ext cx="2091696" cy="403860"/>
               </a:xfrm>
               <a:prstGeom prst="rect">
@@ -5627,10 +5627,10 @@
           </p:sp>
           <p:sp>
             <p:nvSpPr>
-              <p:cNvPr id="343" name="Qwen3-Embedding-0.6B" descr="t209">
+              <p:cNvPr id="344" name="Qwen3-Embedding-0.6B" descr="t210">
                 <a:extLst>
                   <a:ext uri="{FF2B5EF4-FFF2-40B4-BE49-F238E27FC236}">
-                    <ns2:creationId id="{728BCD82-3BFD-4CBE-B85C-1EB4DC6FE3C6}"/>
+                    <ns2:creationId id="{6E75DC1D-CBE1-41DA-A26E-A385D2794830}"/>
                   </a:ext>
                 </a:extLst>
               </p:cNvPr>
@@ -5641,7 +5641,7 @@
             </p:nvSpPr>
             <p:spPr>
               <a:xfrm>
-                <a:off x="13054459" y="5372100"/>
+                <a:off x="13054459" y="5353050"/>
                 <a:ext cx="2539140" cy="403860"/>
               </a:xfrm>
               <a:prstGeom prst="rect">
@@ -5683,10 +5683,10 @@
           </p:sp>
           <p:sp>
             <p:nvSpPr>
-              <p:cNvPr id="344" name="→" descr="t210">
+              <p:cNvPr id="345" name="→" descr="t211">
                 <a:extLst>
                   <a:ext uri="{FF2B5EF4-FFF2-40B4-BE49-F238E27FC236}">
-                    <ns2:creationId id="{A1BA095A-D04C-45A5-809A-9E5E4D1B26F4}"/>
+                    <ns2:creationId id="{63C1DBA4-F1A4-4203-8759-78FDCA76DF13}"/>
                   </a:ext>
                 </a:extLst>
               </p:cNvPr>
@@ -5697,7 +5697,7 @@
             </p:nvSpPr>
             <p:spPr>
               <a:xfrm>
-                <a:off x="15561469" y="5177786"/>
+                <a:off x="15561469" y="5158736"/>
                 <a:ext cx="419100" cy="442466"/>
               </a:xfrm>
               <a:prstGeom prst="rect">
@@ -5739,10 +5739,10 @@
           </p:sp>
           <p:sp>
             <p:nvSpPr>
-              <p:cNvPr id="345" name="Generate" descr="t211">
+              <p:cNvPr id="346" name="Generate" descr="t212">
                 <a:extLst>
                   <a:ext uri="{FF2B5EF4-FFF2-40B4-BE49-F238E27FC236}">
-                    <ns2:creationId id="{E1636E91-C967-433E-BBFF-DEBDC1FEB8BE}"/>
+                    <ns2:creationId id="{2B0B8A75-DF36-4678-8C87-6B2E30F73C32}"/>
                   </a:ext>
                 </a:extLst>
               </p:cNvPr>
@@ -5753,7 +5753,7 @@
             </p:nvSpPr>
             <p:spPr>
               <a:xfrm>
-                <a:off x="16371094" y="4819650"/>
+                <a:off x="16371094" y="4800600"/>
                 <a:ext cx="1054762" cy="403860"/>
               </a:xfrm>
               <a:prstGeom prst="rect">
@@ -5795,10 +5795,10 @@
           </p:sp>
           <p:sp>
             <p:nvSpPr>
-              <p:cNvPr id="346" name="answer" descr="t212">
+              <p:cNvPr id="347" name="answer" descr="t213">
                 <a:extLst>
                   <a:ext uri="{FF2B5EF4-FFF2-40B4-BE49-F238E27FC236}">
-                    <ns2:creationId id="{1E02A207-DA40-4947-8962-19304E24EBFB}"/>
+                    <ns2:creationId id="{CEE40100-280B-49CF-A5A4-29B216AA6A60}"/>
                   </a:ext>
                 </a:extLst>
               </p:cNvPr>
@@ -5809,7 +5809,7 @@
             </p:nvSpPr>
             <p:spPr>
               <a:xfrm>
-                <a:off x="16371094" y="5153025"/>
+                <a:off x="16371094" y="5133975"/>
                 <a:ext cx="861822" cy="403860"/>
               </a:xfrm>
               <a:prstGeom prst="rect">
@@ -5851,10 +5851,10 @@
           </p:sp>
           <p:sp>
             <p:nvSpPr>
-              <p:cNvPr id="347" name="GPT-5.4-mini" descr="t213">
+              <p:cNvPr id="348" name="GPT-5.4-mini" descr="t214">
                 <a:extLst>
                   <a:ext uri="{FF2B5EF4-FFF2-40B4-BE49-F238E27FC236}">
-                    <ns2:creationId id="{1B009BF7-6848-488E-AE27-1EE0E16A9CBF}"/>
+                    <ns2:creationId id="{823F4880-F57E-406C-A70A-DEF9EED06805}"/>
                   </a:ext>
                 </a:extLst>
               </p:cNvPr>
@@ -5865,7 +5865,7 @@
             </p:nvSpPr>
             <p:spPr>
               <a:xfrm>
-                <a:off x="16371094" y="5534025"/>
+                <a:off x="16371094" y="5524500"/>
                 <a:ext cx="1395833" cy="403860"/>
               </a:xfrm>
               <a:prstGeom prst="rect">
@@ -5907,10 +5907,10 @@
           </p:sp>
           <p:sp>
             <p:nvSpPr>
-              <p:cNvPr id="348" name="→" descr="t214">
+              <p:cNvPr id="349" name="→" descr="t215">
                 <a:extLst>
                   <a:ext uri="{FF2B5EF4-FFF2-40B4-BE49-F238E27FC236}">
-                    <ns2:creationId id="{892A8540-EE87-4200-AB46-3C5CAD2EB74D}"/>
+                    <ns2:creationId id="{F6283317-1ACC-411B-8887-6995454051F5}"/>
                   </a:ext>
                 </a:extLst>
               </p:cNvPr>
@@ -5921,7 +5921,7 @@
             </p:nvSpPr>
             <p:spPr>
               <a:xfrm>
-                <a:off x="17958792" y="5177786"/>
+                <a:off x="17958792" y="5158736"/>
                 <a:ext cx="419100" cy="442466"/>
               </a:xfrm>
               <a:prstGeom prst="rect">
@@ -5963,10 +5963,10 @@
           </p:sp>
           <p:sp>
             <p:nvSpPr>
-              <p:cNvPr id="349" name="Answer +" descr="t215">
+              <p:cNvPr id="350" name="Answer +" descr="t216">
                 <a:extLst>
                   <a:ext uri="{FF2B5EF4-FFF2-40B4-BE49-F238E27FC236}">
-                    <ns2:creationId id="{A16AA32C-8855-4C43-B9F0-AE63E480F250}"/>
+                    <ns2:creationId id="{E784E573-349D-4F31-B5AA-DE80821C5002}"/>
                   </a:ext>
                 </a:extLst>
               </p:cNvPr>
@@ -5977,7 +5977,7 @@
             </p:nvSpPr>
             <p:spPr>
               <a:xfrm>
-                <a:off x="18768417" y="5010150"/>
+                <a:off x="18768417" y="4991100"/>
                 <a:ext cx="1067256" cy="403860"/>
               </a:xfrm>
               <a:prstGeom prst="rect">
@@ -6019,10 +6019,10 @@
           </p:sp>
           <p:sp>
             <p:nvSpPr>
-              <p:cNvPr id="350" name="retrieved pages" descr="t216">
+              <p:cNvPr id="351" name="retrieved pages" descr="t217">
                 <a:extLst>
                   <a:ext uri="{FF2B5EF4-FFF2-40B4-BE49-F238E27FC236}">
-                    <ns2:creationId id="{40C29D01-0C2E-410B-AA1D-2C43A457D4BC}"/>
+                    <ns2:creationId id="{1CEE5C45-E9AB-447B-AFA5-6D42480E81E0}"/>
                   </a:ext>
                 </a:extLst>
               </p:cNvPr>
@@ -6033,7 +6033,7 @@
             </p:nvSpPr>
             <p:spPr>
               <a:xfrm>
-                <a:off x="18768417" y="5343525"/>
+                <a:off x="18768417" y="5324475"/>
                 <a:ext cx="1791159" cy="403860"/>
               </a:xfrm>
               <a:prstGeom prst="rect">
@@ -6079,18 +6079,18 @@
             <p:cNvPr id="18" name="Panel phase doc" descr="s17">
               <a:extLst>
                 <a:ext uri="{FF2B5EF4-FFF2-40B4-BE49-F238E27FC236}">
-                  <ns2:creationId id="{CB0E684F-AF22-4A87-BE79-35D4A4501630}"/>
-                </a:ext>
-              </a:extLst>
-            </p:cNvPr>
-            <p:cNvSpPr>
-              <a:spLocks noGrp="1"/>
-            </p:cNvSpPr>
-            <p:nvPr/>
-          </p:nvSpPr>
-          <p:spPr>
-            <a:xfrm>
-              <a:off x="9234339" y="6168926"/>
+                  <ns2:creationId id="{628A1AA3-6311-4A78-887E-0BA6C246BC56}"/>
+                </a:ext>
+              </a:extLst>
+            </p:cNvPr>
+            <p:cNvSpPr>
+              <a:spLocks noGrp="1"/>
+            </p:cNvSpPr>
+            <p:nvPr/>
+          </p:nvSpPr>
+          <p:spPr>
+            <a:xfrm>
+              <a:off x="9234339" y="6150471"/>
               <a:ext cx="3726210" cy="426541"/>
             </a:xfrm>
             <a:custGeom>
@@ -6153,18 +6153,18 @@
             <p:cNvPr id="19" name="Panel phase retr" descr="s18">
               <a:extLst>
                 <a:ext uri="{FF2B5EF4-FFF2-40B4-BE49-F238E27FC236}">
-                  <ns2:creationId id="{5649FBA5-2466-4265-A868-69ECEBF763AA}"/>
-                </a:ext>
-              </a:extLst>
-            </p:cNvPr>
-            <p:cNvSpPr>
-              <a:spLocks noGrp="1"/>
-            </p:cNvSpPr>
-            <p:nvPr/>
-          </p:nvSpPr>
-          <p:spPr>
-            <a:xfrm>
-              <a:off x="13074848" y="6168926"/>
+                  <ns2:creationId id="{10CDEEE0-D35B-4FDB-96F7-6AC48AD9EB6E}"/>
+                </a:ext>
+              </a:extLst>
+            </p:cNvPr>
+            <p:cNvSpPr>
+              <a:spLocks noGrp="1"/>
+            </p:cNvSpPr>
+            <p:nvPr/>
+          </p:nvSpPr>
+          <p:spPr>
+            <a:xfrm>
+              <a:off x="13074848" y="6150471"/>
               <a:ext cx="3726359" cy="426541"/>
             </a:xfrm>
             <a:custGeom>
@@ -6227,18 +6227,18 @@
             <p:cNvPr id="20" name="Panel phase ans single" descr="s19">
               <a:extLst>
                 <a:ext uri="{FF2B5EF4-FFF2-40B4-BE49-F238E27FC236}">
-                  <ns2:creationId id="{BBA19F8A-06E2-488D-AF6A-FB41F72B354A}"/>
-                </a:ext>
-              </a:extLst>
-            </p:cNvPr>
-            <p:cNvSpPr>
-              <a:spLocks noGrp="1"/>
-            </p:cNvSpPr>
-            <p:nvPr/>
-          </p:nvSpPr>
-          <p:spPr>
-            <a:xfrm>
-              <a:off x="16915507" y="6168926"/>
+                  <ns2:creationId id="{1A502A78-8416-4F14-96EE-BCBD0399E311}"/>
+                </a:ext>
+              </a:extLst>
+            </p:cNvPr>
+            <p:cNvSpPr>
+              <a:spLocks noGrp="1"/>
+            </p:cNvSpPr>
+            <p:nvPr/>
+          </p:nvSpPr>
+          <p:spPr>
+            <a:xfrm>
+              <a:off x="16915507" y="6150471"/>
               <a:ext cx="1806029" cy="426541"/>
             </a:xfrm>
             <a:custGeom>
@@ -6301,18 +6301,18 @@
             <p:cNvPr id="21" name="Panel phase cit single" descr="s20">
               <a:extLst>
                 <a:ext uri="{FF2B5EF4-FFF2-40B4-BE49-F238E27FC236}">
-                  <ns2:creationId id="{B2DA5F05-A5B8-4C5B-B2C3-4D220484966A}"/>
-                </a:ext>
-              </a:extLst>
-            </p:cNvPr>
-            <p:cNvSpPr>
-              <a:spLocks noGrp="1"/>
-            </p:cNvSpPr>
-            <p:nvPr/>
-          </p:nvSpPr>
-          <p:spPr>
-            <a:xfrm>
-              <a:off x="18835836" y="6168926"/>
+                  <ns2:creationId id="{7386889A-C6E3-4664-B331-38300550D3F0}"/>
+                </a:ext>
+              </a:extLst>
+            </p:cNvPr>
+            <p:cNvSpPr>
+              <a:spLocks noGrp="1"/>
+            </p:cNvSpPr>
+            <p:nvPr/>
+          </p:nvSpPr>
+          <p:spPr>
+            <a:xfrm>
+              <a:off x="18835836" y="6150471"/>
               <a:ext cx="1805880" cy="426541"/>
             </a:xfrm>
             <a:custGeom>
@@ -6372,15 +6372,15 @@
         </p:sp>
         <p:grpSp>
           <p:nvGrpSpPr>
-            <p:cNvPr id="548" name="R1 · Read scans"/>
+            <p:cNvPr id="549" name="R1 · Read scans"/>
             <p:cNvGrpSpPr/>
             <p:nvPr/>
           </p:nvGrpSpPr>
           <p:grpSpPr>
             <a:xfrm>
-              <a:off x="9234339" y="6671667"/>
+              <a:off x="9234339" y="6653212"/>
               <a:ext cx="1805880" cy="4573935"/>
-              <a:chOff x="9234339" y="6671667"/>
+              <a:chOff x="9234339" y="6653212"/>
               <a:chExt cx="1805880" cy="4573935"/>
             </a:xfrm>
           </p:grpSpPr>
@@ -6389,7 +6389,7 @@
               <p:cNvPr id="22" name="Panel stage doc" descr="s21">
                 <a:extLst>
                   <a:ext uri="{FF2B5EF4-FFF2-40B4-BE49-F238E27FC236}">
-                    <ns2:creationId id="{A225DF66-3893-41B3-882F-5E9584D868E8}"/>
+                    <ns2:creationId id="{CE68F918-E2A2-4028-BD86-2CD9B7729B83}"/>
                   </a:ext>
                 </a:extLst>
               </p:cNvPr>
@@ -6400,7 +6400,7 @@
             </p:nvSpPr>
             <p:spPr>
               <a:xfrm>
-                <a:off x="9234339" y="6671667"/>
+                <a:off x="9234339" y="6653213"/>
                 <a:ext cx="1805880" cy="4573935"/>
               </a:xfrm>
               <a:custGeom>
@@ -6465,7 +6465,7 @@
               <p:cNvPr id="23" name="Panel tech" descr="s22">
                 <a:extLst>
                   <a:ext uri="{FF2B5EF4-FFF2-40B4-BE49-F238E27FC236}">
-                    <ns2:creationId id="{8C8B85AB-D1A9-411D-AE6F-DE9A257041C1}"/>
+                    <ns2:creationId id="{5EEF18D5-161A-4BDB-B70F-9EF550BBC47C}"/>
                   </a:ext>
                 </a:extLst>
               </p:cNvPr>
@@ -6476,7 +6476,7 @@
             </p:nvSpPr>
             <p:spPr>
               <a:xfrm>
-                <a:off x="9243864" y="9748391"/>
+                <a:off x="9243864" y="9729936"/>
                 <a:ext cx="1786830" cy="1487686"/>
               </a:xfrm>
               <a:custGeom>
@@ -6539,7 +6539,7 @@
               <p:cNvPr id="64" name="Stage connector" descr="s63">
                 <a:extLst>
                   <a:ext uri="{FF2B5EF4-FFF2-40B4-BE49-F238E27FC236}">
-                    <ns2:creationId id="{B865A8D2-0939-4FB1-AB85-97A6FA4CD5B0}"/>
+                    <ns2:creationId id="{775DFD82-7898-4E50-A8DF-374886EC2A38}"/>
                   </a:ext>
                 </a:extLst>
               </p:cNvPr>
@@ -6550,7 +6550,7 @@
             </p:nvSpPr>
             <p:spPr>
               <a:xfrm>
-                <a:off x="11040219" y="9348341"/>
+                <a:off x="11040219" y="9329886"/>
                 <a:ext cx="104775" cy="171450"/>
               </a:xfrm>
               <a:custGeom>
@@ -6591,17 +6591,17 @@
           </p:sp>
           <p:pic>
             <p:nvPicPr>
-              <p:cNvPr id="528" name="icon-scan" descr="s126"/>
+              <p:cNvPr id="529" name="icon-scan" descr="s126"/>
               <p:cNvPicPr>
                 <a:picLocks noChangeAspect="1"/>
               </p:cNvPicPr>
               <p:nvPr/>
             </p:nvPicPr>
             <p:blipFill>
-              <a:blip r:embed="R8b0359b7fc9e475a">
+              <a:blip r:embed="R3b8f3b8281604ca6">
                 <a:extLst>
                   <a:ext uri="{96DAC541-7B7A-43D3-8B79-37D633B846F1}">
-                    <ns4:svgBlip r:embed="Rd8c012d6541b4d67"/>
+                    <ns4:svgBlip r:embed="R75c2c647d0ae4e00"/>
                   </a:ext>
                 </a:extLst>
               </a:blip>
@@ -6609,7 +6609,7 @@
             </p:blipFill>
             <p:spPr>
               <a:xfrm>
-                <a:off x="9899154" y="9195941"/>
+                <a:off x="9899154" y="9177486"/>
                 <a:ext cx="476250" cy="476250"/>
               </a:xfrm>
               <a:prstGeom prst="rect">
@@ -6619,10 +6619,10 @@
           </p:pic>
           <p:sp>
             <p:nvSpPr>
-              <p:cNvPr id="351" name="R1 · Read" descr="t217">
+              <p:cNvPr id="352" name="R1 · Read" descr="t218">
                 <a:extLst>
                   <a:ext uri="{FF2B5EF4-FFF2-40B4-BE49-F238E27FC236}">
-                    <ns2:creationId id="{1E40FD29-BA55-4DDF-8037-F58AD287FF01}"/>
+                    <ns2:creationId id="{A64F7132-0F1A-4170-A88A-C6C4B8196C58}"/>
                   </a:ext>
                 </a:extLst>
               </p:cNvPr>
@@ -6633,7 +6633,7 @@
             </p:nvSpPr>
             <p:spPr>
               <a:xfrm>
-                <a:off x="9301014" y="6753225"/>
+                <a:off x="9301014" y="6743700"/>
                 <a:ext cx="1023977" cy="403860"/>
               </a:xfrm>
               <a:prstGeom prst="rect">
@@ -6675,10 +6675,10 @@
           </p:sp>
           <p:sp>
             <p:nvSpPr>
-              <p:cNvPr id="352" name="scans" descr="t218">
+              <p:cNvPr id="353" name="scans" descr="t219">
                 <a:extLst>
                   <a:ext uri="{FF2B5EF4-FFF2-40B4-BE49-F238E27FC236}">
-                    <ns2:creationId id="{14111709-0662-4B0F-901E-5878F44FD225}"/>
+                    <ns2:creationId id="{6F65AD0C-E05F-4DA9-9BBE-6EF50F01255E}"/>
                   </a:ext>
                 </a:extLst>
               </p:cNvPr>
@@ -6689,7 +6689,7 @@
             </p:nvSpPr>
             <p:spPr>
               <a:xfrm>
-                <a:off x="9301014" y="7086600"/>
+                <a:off x="9301014" y="7067550"/>
                 <a:ext cx="712776" cy="403860"/>
               </a:xfrm>
               <a:prstGeom prst="rect">
@@ -6731,10 +6731,10 @@
           </p:sp>
           <p:sp>
             <p:nvSpPr>
-              <p:cNvPr id="353" name="Convert" descr="t219">
+              <p:cNvPr id="354" name="Convert" descr="t220">
                 <a:extLst>
                   <a:ext uri="{FF2B5EF4-FFF2-40B4-BE49-F238E27FC236}">
-                    <ns2:creationId id="{975254C2-2870-4F22-8D73-0EC4EB5EEA3F}"/>
+                    <ns2:creationId id="{DE20886F-FCB9-43C5-9299-F0DE84438D23}"/>
                   </a:ext>
                 </a:extLst>
               </p:cNvPr>
@@ -6745,7 +6745,7 @@
             </p:nvSpPr>
             <p:spPr>
               <a:xfrm>
-                <a:off x="9301014" y="7810500"/>
+                <a:off x="9301014" y="7791450"/>
                 <a:ext cx="852071" cy="403860"/>
               </a:xfrm>
               <a:prstGeom prst="rect">
@@ -6787,10 +6787,10 @@
           </p:sp>
           <p:sp>
             <p:nvSpPr>
-              <p:cNvPr id="354" name="scanned pages" descr="t220">
+              <p:cNvPr id="355" name="scanned pages" descr="t221">
                 <a:extLst>
                   <a:ext uri="{FF2B5EF4-FFF2-40B4-BE49-F238E27FC236}">
-                    <ns2:creationId id="{8AF36AE4-C3C7-466A-98D5-432F45C43EF4}"/>
+                    <ns2:creationId id="{89631579-E1E3-4772-A3F2-EDE63DA13A4F}"/>
                   </a:ext>
                 </a:extLst>
               </p:cNvPr>
@@ -6801,7 +6801,7 @@
             </p:nvSpPr>
             <p:spPr>
               <a:xfrm>
-                <a:off x="9301014" y="8134350"/>
+                <a:off x="9301014" y="8115300"/>
                 <a:ext cx="1611634" cy="403860"/>
               </a:xfrm>
               <a:prstGeom prst="rect">
@@ -6843,10 +6843,10 @@
           </p:sp>
           <p:sp>
             <p:nvSpPr>
-              <p:cNvPr id="355" name="into searchable" descr="t221">
+              <p:cNvPr id="356" name="into searchable" descr="t222">
                 <a:extLst>
                   <a:ext uri="{FF2B5EF4-FFF2-40B4-BE49-F238E27FC236}">
-                    <ns2:creationId id="{ACB766DE-8021-46C8-87DC-C8B71C95534A}"/>
+                    <ns2:creationId id="{304EAB77-C40E-4E81-A15B-011B117EE005}"/>
                   </a:ext>
                 </a:extLst>
               </p:cNvPr>
@@ -6857,7 +6857,7 @@
             </p:nvSpPr>
             <p:spPr>
               <a:xfrm>
-                <a:off x="9301014" y="8448675"/>
+                <a:off x="9301014" y="8429625"/>
                 <a:ext cx="1654914" cy="403860"/>
               </a:xfrm>
               <a:prstGeom prst="rect">
@@ -6899,10 +6899,10 @@
           </p:sp>
           <p:sp>
             <p:nvSpPr>
-              <p:cNvPr id="356" name="text" descr="t222">
+              <p:cNvPr id="357" name="text" descr="t223">
                 <a:extLst>
                   <a:ext uri="{FF2B5EF4-FFF2-40B4-BE49-F238E27FC236}">
-                    <ns2:creationId id="{4BC528BF-A6FF-42A7-814F-3F6465EFD6B0}"/>
+                    <ns2:creationId id="{0DCCE62D-FB42-4175-97DE-2F2664AC927E}"/>
                   </a:ext>
                 </a:extLst>
               </p:cNvPr>
@@ -6913,7 +6913,7 @@
             </p:nvSpPr>
             <p:spPr>
               <a:xfrm>
-                <a:off x="9301014" y="8772525"/>
+                <a:off x="9301014" y="8753475"/>
                 <a:ext cx="458573" cy="403860"/>
               </a:xfrm>
               <a:prstGeom prst="rect">
@@ -6955,10 +6955,10 @@
           </p:sp>
           <p:sp>
             <p:nvSpPr>
-              <p:cNvPr id="357" name="PP-OCRv5" descr="t223">
+              <p:cNvPr id="358" name="PP-OCRv5" descr="t224">
                 <a:extLst>
                   <a:ext uri="{FF2B5EF4-FFF2-40B4-BE49-F238E27FC236}">
-                    <ns2:creationId id="{05151B61-C4BC-4ECA-8E24-A869D90912B7}"/>
+                    <ns2:creationId id="{8F3CE8FA-A2CF-4E8B-BD25-1D63595F8A4E}"/>
                   </a:ext>
                 </a:extLst>
               </p:cNvPr>
@@ -6969,7 +6969,7 @@
             </p:nvSpPr>
             <p:spPr>
               <a:xfrm>
-                <a:off x="9301014" y="9801225"/>
+                <a:off x="9301014" y="9791700"/>
                 <a:ext cx="1072137" cy="403860"/>
               </a:xfrm>
               <a:prstGeom prst="rect">
@@ -7012,15 +7012,15 @@
         </p:grpSp>
         <p:grpSp>
           <p:nvGrpSpPr>
-            <p:cNvPr id="547" name="R2 · Multiple scales"/>
+            <p:cNvPr id="548" name="R2 · Multiple scales"/>
             <p:cNvGrpSpPr/>
             <p:nvPr/>
           </p:nvGrpSpPr>
           <p:grpSpPr>
             <a:xfrm>
-              <a:off x="11154519" y="6671667"/>
+              <a:off x="11154519" y="6653212"/>
               <a:ext cx="1806029" cy="4573935"/>
-              <a:chOff x="11154519" y="6671667"/>
+              <a:chOff x="11154519" y="6653212"/>
               <a:chExt cx="1806029" cy="4573935"/>
             </a:xfrm>
           </p:grpSpPr>
@@ -7029,7 +7029,7 @@
               <p:cNvPr id="24" name="Panel stage doc" descr="s23">
                 <a:extLst>
                   <a:ext uri="{FF2B5EF4-FFF2-40B4-BE49-F238E27FC236}">
-                    <ns2:creationId id="{2F3D5BA1-3CCE-4E9F-A24D-089FD4A43E75}"/>
+                    <ns2:creationId id="{84571FD8-D2BA-4ADB-9FB1-39FD5C736F04}"/>
                   </a:ext>
                 </a:extLst>
               </p:cNvPr>
@@ -7040,7 +7040,7 @@
             </p:nvSpPr>
             <p:spPr>
               <a:xfrm>
-                <a:off x="11154519" y="6671667"/>
+                <a:off x="11154519" y="6653213"/>
                 <a:ext cx="1806029" cy="4573935"/>
               </a:xfrm>
               <a:custGeom>
@@ -7105,7 +7105,7 @@
               <p:cNvPr id="25" name="Panel tech" descr="s24">
                 <a:extLst>
                   <a:ext uri="{FF2B5EF4-FFF2-40B4-BE49-F238E27FC236}">
-                    <ns2:creationId id="{BD634465-9ADC-464B-AAB1-09E29BD0FA87}"/>
+                    <ns2:creationId id="{2C62A0AC-DCEB-4125-8760-34F4B5373DE3}"/>
                   </a:ext>
                 </a:extLst>
               </p:cNvPr>
@@ -7116,7 +7116,7 @@
             </p:nvSpPr>
             <p:spPr>
               <a:xfrm>
-                <a:off x="11164044" y="9748391"/>
+                <a:off x="11164044" y="9729936"/>
                 <a:ext cx="1786979" cy="1487686"/>
               </a:xfrm>
               <a:custGeom>
@@ -7179,7 +7179,7 @@
               <p:cNvPr id="65" name="Stage connector" descr="s64">
                 <a:extLst>
                   <a:ext uri="{FF2B5EF4-FFF2-40B4-BE49-F238E27FC236}">
-                    <ns2:creationId id="{C4877537-C89D-4DB8-BAAA-984906B98E9D}"/>
+                    <ns2:creationId id="{CE463E7C-2FDC-4F19-9251-2CF9EE9B2802}"/>
                   </a:ext>
                 </a:extLst>
               </p:cNvPr>
@@ -7190,7 +7190,7 @@
             </p:nvSpPr>
             <p:spPr>
               <a:xfrm>
-                <a:off x="12960548" y="9348341"/>
+                <a:off x="12960548" y="9329886"/>
                 <a:ext cx="104775" cy="171450"/>
               </a:xfrm>
               <a:custGeom>
@@ -7231,17 +7231,17 @@
           </p:sp>
           <p:pic>
             <p:nvPicPr>
-              <p:cNvPr id="529" name="icon-layers" descr="s127"/>
+              <p:cNvPr id="530" name="icon-layers" descr="s127"/>
               <p:cNvPicPr>
                 <a:picLocks noChangeAspect="1"/>
               </p:cNvPicPr>
               <p:nvPr/>
             </p:nvPicPr>
             <p:blipFill>
-              <a:blip r:embed="Rf5f1f5d0a3ca45c7">
+              <a:blip r:embed="Rafdf736ee59c47cc">
                 <a:extLst>
                   <a:ext uri="{96DAC541-7B7A-43D3-8B79-37D633B846F1}">
-                    <ns4:svgBlip r:embed="R5c8adca68ae34b55"/>
+                    <ns4:svgBlip r:embed="R6cccafd5af4848d2"/>
                   </a:ext>
                 </a:extLst>
               </a:blip>
@@ -7249,7 +7249,7 @@
             </p:blipFill>
             <p:spPr>
               <a:xfrm>
-                <a:off x="11819334" y="9195941"/>
+                <a:off x="11819334" y="9177486"/>
                 <a:ext cx="476250" cy="476250"/>
               </a:xfrm>
               <a:prstGeom prst="rect">
@@ -7259,10 +7259,10 @@
           </p:pic>
           <p:sp>
             <p:nvSpPr>
-              <p:cNvPr id="358" name="R2 · Multiple" descr="t224">
+              <p:cNvPr id="359" name="R2 · Multiple" descr="t225">
                 <a:extLst>
                   <a:ext uri="{FF2B5EF4-FFF2-40B4-BE49-F238E27FC236}">
-                    <ns2:creationId id="{12B626FA-DDBF-4879-84BC-10ED807B6176}"/>
+                    <ns2:creationId id="{DA8147BE-FAD7-49B2-8FE2-FB2DD5C6A2CF}"/>
                   </a:ext>
                 </a:extLst>
               </p:cNvPr>
@@ -7273,7 +7273,7 @@
             </p:nvSpPr>
             <p:spPr>
               <a:xfrm>
-                <a:off x="11221194" y="6753225"/>
+                <a:off x="11221194" y="6743700"/>
                 <a:ext cx="1380289" cy="403860"/>
               </a:xfrm>
               <a:prstGeom prst="rect">
@@ -7315,10 +7315,10 @@
           </p:sp>
           <p:sp>
             <p:nvSpPr>
-              <p:cNvPr id="359" name="scales" descr="t225">
+              <p:cNvPr id="360" name="scales" descr="t226">
                 <a:extLst>
                   <a:ext uri="{FF2B5EF4-FFF2-40B4-BE49-F238E27FC236}">
-                    <ns2:creationId id="{D174F3C7-55A7-495E-8087-FB6E1A9F39A4}"/>
+                    <ns2:creationId id="{59896259-6D53-47B7-BFE5-87619D4609C6}"/>
                   </a:ext>
                 </a:extLst>
               </p:cNvPr>
@@ -7329,7 +7329,7 @@
             </p:nvSpPr>
             <p:spPr>
               <a:xfrm>
-                <a:off x="11221194" y="7086600"/>
+                <a:off x="11221194" y="7067550"/>
                 <a:ext cx="772823" cy="403860"/>
               </a:xfrm>
               <a:prstGeom prst="rect">
@@ -7371,10 +7371,10 @@
           </p:sp>
           <p:sp>
             <p:nvSpPr>
-              <p:cNvPr id="360" name="Represent" descr="t226">
+              <p:cNvPr id="361" name="Represent" descr="t227">
                 <a:extLst>
                   <a:ext uri="{FF2B5EF4-FFF2-40B4-BE49-F238E27FC236}">
-                    <ns2:creationId id="{05277DE7-2E2A-4DBC-9EEA-D14A627486A8}"/>
+                    <ns2:creationId id="{946D1788-DEC5-4EFA-9AF3-E2164968DE40}"/>
                   </a:ext>
                 </a:extLst>
               </p:cNvPr>
@@ -7385,7 +7385,7 @@
             </p:nvSpPr>
             <p:spPr>
               <a:xfrm>
-                <a:off x="11221194" y="7810500"/>
+                <a:off x="11221194" y="7791450"/>
                 <a:ext cx="1106580" cy="403860"/>
               </a:xfrm>
               <a:prstGeom prst="rect">
@@ -7427,10 +7427,10 @@
           </p:sp>
           <p:sp>
             <p:nvSpPr>
-              <p:cNvPr id="361" name="evidence at" descr="t227">
+              <p:cNvPr id="362" name="evidence at" descr="t228">
                 <a:extLst>
                   <a:ext uri="{FF2B5EF4-FFF2-40B4-BE49-F238E27FC236}">
-                    <ns2:creationId id="{9829177C-2525-4210-AE66-A30211636C73}"/>
+                    <ns2:creationId id="{546A659F-48E4-4AC4-A82E-D0FE36D9221F}"/>
                   </a:ext>
                 </a:extLst>
               </p:cNvPr>
@@ -7441,7 +7441,7 @@
             </p:nvSpPr>
             <p:spPr>
               <a:xfrm>
-                <a:off x="11221194" y="8134350"/>
+                <a:off x="11221194" y="8115300"/>
                 <a:ext cx="1255322" cy="403860"/>
               </a:xfrm>
               <a:prstGeom prst="rect">
@@ -7483,10 +7483,10 @@
           </p:sp>
           <p:sp>
             <p:nvSpPr>
-              <p:cNvPr id="362" name="multiple scales" descr="t228">
+              <p:cNvPr id="363" name="multiple scales" descr="t229">
                 <a:extLst>
                   <a:ext uri="{FF2B5EF4-FFF2-40B4-BE49-F238E27FC236}">
-                    <ns2:creationId id="{807009BD-1C8D-40C8-8728-4104C0A60736}"/>
+                    <ns2:creationId id="{41E9FDF8-3149-47D7-8BF0-6EAAC283366B}"/>
                   </a:ext>
                 </a:extLst>
               </p:cNvPr>
@@ -7497,7 +7497,7 @@
             </p:nvSpPr>
             <p:spPr>
               <a:xfrm>
-                <a:off x="11221194" y="8448675"/>
+                <a:off x="11221194" y="8429625"/>
                 <a:ext cx="1609501" cy="403860"/>
               </a:xfrm>
               <a:prstGeom prst="rect">
@@ -7539,10 +7539,10 @@
           </p:sp>
           <p:sp>
             <p:nvSpPr>
-              <p:cNvPr id="363" name="Pages, sections," descr="t229">
+              <p:cNvPr id="364" name="Pages, sections," descr="t230">
                 <a:extLst>
                   <a:ext uri="{FF2B5EF4-FFF2-40B4-BE49-F238E27FC236}">
-                    <ns2:creationId id="{C745361E-EDED-4A7C-AFCF-336FF564D907}"/>
+                    <ns2:creationId id="{75638048-27F9-4CC3-A4A4-8DDD98D26920}"/>
                   </a:ext>
                 </a:extLst>
               </p:cNvPr>
@@ -7553,7 +7553,7 @@
             </p:nvSpPr>
             <p:spPr>
               <a:xfrm>
-                <a:off x="11221194" y="9801225"/>
+                <a:off x="11221194" y="9791700"/>
                 <a:ext cx="1724106" cy="403860"/>
               </a:xfrm>
               <a:prstGeom prst="rect">
@@ -7595,10 +7595,10 @@
           </p:sp>
           <p:sp>
             <p:nvSpPr>
-              <p:cNvPr id="364" name="clauses," descr="t230">
+              <p:cNvPr id="365" name="clauses," descr="t231">
                 <a:extLst>
                   <a:ext uri="{FF2B5EF4-FFF2-40B4-BE49-F238E27FC236}">
-                    <ns2:creationId id="{69633F5F-F83F-44E9-B605-3566205D881F}"/>
+                    <ns2:creationId id="{55CC1947-4F04-40B8-A606-EBF4D3514B86}"/>
                   </a:ext>
                 </a:extLst>
               </p:cNvPr>
@@ -7609,7 +7609,7 @@
             </p:nvSpPr>
             <p:spPr>
               <a:xfrm>
-                <a:off x="11221194" y="10134600"/>
+                <a:off x="11221194" y="10115550"/>
                 <a:ext cx="895352" cy="403860"/>
               </a:xfrm>
               <a:prstGeom prst="rect">
@@ -7651,10 +7651,10 @@
           </p:sp>
           <p:sp>
             <p:nvSpPr>
-              <p:cNvPr id="365" name="microchunks," descr="t231">
+              <p:cNvPr id="366" name="microchunks," descr="t232">
                 <a:extLst>
                   <a:ext uri="{FF2B5EF4-FFF2-40B4-BE49-F238E27FC236}">
-                    <ns2:creationId id="{893A1442-9251-47BE-9261-6840603F1114}"/>
+                    <ns2:creationId id="{E86883E5-B9EA-4ABE-89D8-7D4D9F9D9FB6}"/>
                   </a:ext>
                 </a:extLst>
               </p:cNvPr>
@@ -7665,7 +7665,7 @@
             </p:nvSpPr>
             <p:spPr>
               <a:xfrm>
-                <a:off x="11221194" y="10467975"/>
+                <a:off x="11221194" y="10448925"/>
                 <a:ext cx="1453745" cy="403860"/>
               </a:xfrm>
               <a:prstGeom prst="rect">
@@ -7707,10 +7707,10 @@
           </p:sp>
           <p:sp>
             <p:nvSpPr>
-              <p:cNvPr id="366" name="tables" descr="t232">
+              <p:cNvPr id="367" name="tables" descr="t233">
                 <a:extLst>
                   <a:ext uri="{FF2B5EF4-FFF2-40B4-BE49-F238E27FC236}">
-                    <ns2:creationId id="{C49EF922-1EAE-4E2B-ADF1-9894CC6F6DE5}"/>
+                    <ns2:creationId id="{21962380-7324-44F4-9A1B-9F8395EC1F0B}"/>
                   </a:ext>
                 </a:extLst>
               </p:cNvPr>
@@ -7721,7 +7721,7 @@
             </p:nvSpPr>
             <p:spPr>
               <a:xfrm>
-                <a:off x="11221194" y="10791825"/>
+                <a:off x="11221194" y="10772775"/>
                 <a:ext cx="685954" cy="403860"/>
               </a:xfrm>
               <a:prstGeom prst="rect">
@@ -7764,15 +7764,15 @@
         </p:grpSp>
         <p:grpSp>
           <p:nvGrpSpPr>
-            <p:cNvPr id="546" name="R3 · Find exact terms too"/>
+            <p:cNvPr id="547" name="R3 · Find exact terms too"/>
             <p:cNvGrpSpPr/>
             <p:nvPr/>
           </p:nvGrpSpPr>
           <p:grpSpPr>
             <a:xfrm>
-              <a:off x="13074848" y="6671667"/>
+              <a:off x="13074848" y="6653212"/>
               <a:ext cx="1806029" cy="4573935"/>
-              <a:chOff x="13074848" y="6671667"/>
+              <a:chOff x="13074848" y="6653212"/>
               <a:chExt cx="1806029" cy="4573935"/>
             </a:xfrm>
           </p:grpSpPr>
@@ -7781,7 +7781,7 @@
               <p:cNvPr id="26" name="Panel stage retr" descr="s25">
                 <a:extLst>
                   <a:ext uri="{FF2B5EF4-FFF2-40B4-BE49-F238E27FC236}">
-                    <ns2:creationId id="{AAF18DEB-7940-4BE9-A640-DBD253D9C4E0}"/>
+                    <ns2:creationId id="{1AE268A3-5DCC-4BF0-B70B-395DDF789EC4}"/>
                   </a:ext>
                 </a:extLst>
               </p:cNvPr>
@@ -7792,7 +7792,7 @@
             </p:nvSpPr>
             <p:spPr>
               <a:xfrm>
-                <a:off x="13074848" y="6671667"/>
+                <a:off x="13074848" y="6653213"/>
                 <a:ext cx="1806029" cy="4573935"/>
               </a:xfrm>
               <a:custGeom>
@@ -7857,7 +7857,7 @@
               <p:cNvPr id="27" name="Panel tech" descr="s26">
                 <a:extLst>
                   <a:ext uri="{FF2B5EF4-FFF2-40B4-BE49-F238E27FC236}">
-                    <ns2:creationId id="{58E832C5-237A-42D8-B0F3-DAF10A081138}"/>
+                    <ns2:creationId id="{A4AD07A2-CC28-4D03-ABDC-ABF80DD5E5B3}"/>
                   </a:ext>
                 </a:extLst>
               </p:cNvPr>
@@ -7868,7 +7868,7 @@
             </p:nvSpPr>
             <p:spPr>
               <a:xfrm>
-                <a:off x="13084373" y="9748391"/>
+                <a:off x="13084373" y="9729936"/>
                 <a:ext cx="1786979" cy="1487686"/>
               </a:xfrm>
               <a:custGeom>
@@ -7931,7 +7931,7 @@
               <p:cNvPr id="66" name="Stage connector" descr="s65">
                 <a:extLst>
                   <a:ext uri="{FF2B5EF4-FFF2-40B4-BE49-F238E27FC236}">
-                    <ns2:creationId id="{26EEC036-6D2E-44E6-9081-DCB8F4241214}"/>
+                    <ns2:creationId id="{3C3189D4-E727-4959-951E-9226E10D936D}"/>
                   </a:ext>
                 </a:extLst>
               </p:cNvPr>
@@ -7942,7 +7942,7 @@
             </p:nvSpPr>
             <p:spPr>
               <a:xfrm>
-                <a:off x="14880878" y="9348341"/>
+                <a:off x="14880878" y="9329886"/>
                 <a:ext cx="104775" cy="171450"/>
               </a:xfrm>
               <a:custGeom>
@@ -7983,17 +7983,17 @@
           </p:sp>
           <p:pic>
             <p:nvPicPr>
-              <p:cNvPr id="530" name="icon-search" descr="s128"/>
+              <p:cNvPr id="531" name="icon-search" descr="s128"/>
               <p:cNvPicPr>
                 <a:picLocks noChangeAspect="1"/>
               </p:cNvPicPr>
               <p:nvPr/>
             </p:nvPicPr>
             <p:blipFill>
-              <a:blip r:embed="Re084cc728f2341d5">
+              <a:blip r:embed="Rb5b5cd85b7434022">
                 <a:extLst>
                   <a:ext uri="{96DAC541-7B7A-43D3-8B79-37D633B846F1}">
-                    <ns4:svgBlip r:embed="R36eab8183e3c4004"/>
+                    <ns4:svgBlip r:embed="Rc0bd8c8098634ab8"/>
                   </a:ext>
                 </a:extLst>
               </a:blip>
@@ -8001,7 +8001,7 @@
             </p:blipFill>
             <p:spPr>
               <a:xfrm>
-                <a:off x="13739664" y="9195941"/>
+                <a:off x="13739664" y="9177486"/>
                 <a:ext cx="476250" cy="476250"/>
               </a:xfrm>
               <a:prstGeom prst="rect">
@@ -8011,10 +8011,10 @@
           </p:pic>
           <p:sp>
             <p:nvSpPr>
-              <p:cNvPr id="367" name="R3 · Find exact" descr="t233">
+              <p:cNvPr id="368" name="R3 · Find exact" descr="t234">
                 <a:extLst>
                   <a:ext uri="{FF2B5EF4-FFF2-40B4-BE49-F238E27FC236}">
-                    <ns2:creationId id="{C5DCA467-8417-40A1-B990-FA1FEB75A937}"/>
+                    <ns2:creationId id="{B1BED031-0C2E-4EB6-8CBE-02FE92336959}"/>
                   </a:ext>
                 </a:extLst>
               </p:cNvPr>
@@ -8025,7 +8025,7 @@
             </p:nvSpPr>
             <p:spPr>
               <a:xfrm>
-                <a:off x="13141523" y="6753225"/>
+                <a:off x="13141523" y="6743700"/>
                 <a:ext cx="1673813" cy="403860"/>
               </a:xfrm>
               <a:prstGeom prst="rect">
@@ -8067,10 +8067,10 @@
           </p:sp>
           <p:sp>
             <p:nvSpPr>
-              <p:cNvPr id="368" name="terms too" descr="t234">
+              <p:cNvPr id="369" name="terms too" descr="t235">
                 <a:extLst>
                   <a:ext uri="{FF2B5EF4-FFF2-40B4-BE49-F238E27FC236}">
-                    <ns2:creationId id="{3446023A-BA0A-4E67-AB0A-52808CA2362A}"/>
+                    <ns2:creationId id="{E0452893-B78F-4E90-A662-35C679CF686A}"/>
                   </a:ext>
                 </a:extLst>
               </p:cNvPr>
@@ -8081,7 +8081,7 @@
             </p:nvSpPr>
             <p:spPr>
               <a:xfrm>
-                <a:off x="13141523" y="7086600"/>
+                <a:off x="13141523" y="7067550"/>
                 <a:ext cx="1127916" cy="403860"/>
               </a:xfrm>
               <a:prstGeom prst="rect">
@@ -8123,10 +8123,10 @@
           </p:sp>
           <p:sp>
             <p:nvSpPr>
-              <p:cNvPr id="369" name="Combine" descr="t235">
+              <p:cNvPr id="370" name="Combine" descr="t236">
                 <a:extLst>
                   <a:ext uri="{FF2B5EF4-FFF2-40B4-BE49-F238E27FC236}">
-                    <ns2:creationId id="{AB9545B0-2609-4331-8F0C-5F8D243C1CB2}"/>
+                    <ns2:creationId id="{CAC401B4-636A-47AD-A6A1-A38E3A8F40A8}"/>
                   </a:ext>
                 </a:extLst>
               </p:cNvPr>
@@ -8137,7 +8137,7 @@
             </p:nvSpPr>
             <p:spPr>
               <a:xfrm>
-                <a:off x="13141523" y="7810500"/>
+                <a:off x="13141523" y="7791450"/>
                 <a:ext cx="959055" cy="403860"/>
               </a:xfrm>
               <a:prstGeom prst="rect">
@@ -8179,10 +8179,10 @@
           </p:sp>
           <p:sp>
             <p:nvSpPr>
-              <p:cNvPr id="370" name="semantic and" descr="t236">
+              <p:cNvPr id="371" name="semantic and" descr="t237">
                 <a:extLst>
                   <a:ext uri="{FF2B5EF4-FFF2-40B4-BE49-F238E27FC236}">
-                    <ns2:creationId id="{14E963EC-9658-4950-B632-45A1CC95FB31}"/>
+                    <ns2:creationId id="{CFBE3BAB-FFA4-449B-8D03-3F54930704A2}"/>
                   </a:ext>
                 </a:extLst>
               </p:cNvPr>
@@ -8193,7 +8193,7 @@
             </p:nvSpPr>
             <p:spPr>
               <a:xfrm>
-                <a:off x="13141523" y="8134350"/>
+                <a:off x="13141523" y="8115300"/>
                 <a:ext cx="1460148" cy="403860"/>
               </a:xfrm>
               <a:prstGeom prst="rect">
@@ -8235,10 +8235,10 @@
           </p:sp>
           <p:sp>
             <p:nvSpPr>
-              <p:cNvPr id="371" name="exact-word" descr="t237">
+              <p:cNvPr id="372" name="exact-word" descr="t238">
                 <a:extLst>
                   <a:ext uri="{FF2B5EF4-FFF2-40B4-BE49-F238E27FC236}">
-                    <ns2:creationId id="{17356B61-5C41-4F8C-9DF8-DB0FFB5118F9}"/>
+                    <ns2:creationId id="{1C236110-CDC5-4919-B32C-011E8450B263}"/>
                   </a:ext>
                 </a:extLst>
               </p:cNvPr>
@@ -8249,7 +8249,7 @@
             </p:nvSpPr>
             <p:spPr>
               <a:xfrm>
-                <a:off x="13141523" y="8448675"/>
+                <a:off x="13141523" y="8429625"/>
                 <a:ext cx="1225756" cy="403860"/>
               </a:xfrm>
               <a:prstGeom prst="rect">
@@ -8291,10 +8291,10 @@
           </p:sp>
           <p:sp>
             <p:nvSpPr>
-              <p:cNvPr id="372" name="search" descr="t238">
+              <p:cNvPr id="373" name="search" descr="t239">
                 <a:extLst>
                   <a:ext uri="{FF2B5EF4-FFF2-40B4-BE49-F238E27FC236}">
-                    <ns2:creationId id="{B1757F31-21B5-4DA4-A629-4F7232542B7F}"/>
+                    <ns2:creationId id="{B76E18D4-1794-4B39-B108-FB867CD048D1}"/>
                   </a:ext>
                 </a:extLst>
               </p:cNvPr>
@@ -8305,7 +8305,7 @@
             </p:nvSpPr>
             <p:spPr>
               <a:xfrm>
-                <a:off x="13141523" y="8772525"/>
+                <a:off x="13141523" y="8753475"/>
                 <a:ext cx="759411" cy="403860"/>
               </a:xfrm>
               <a:prstGeom prst="rect">
@@ -8347,10 +8347,10 @@
           </p:sp>
           <p:sp>
             <p:nvSpPr>
-              <p:cNvPr id="373" name="BM25 + RRF" descr="t239">
+              <p:cNvPr id="374" name="BM25 + RRF" descr="t240">
                 <a:extLst>
                   <a:ext uri="{FF2B5EF4-FFF2-40B4-BE49-F238E27FC236}">
-                    <ns2:creationId id="{892F8A48-B547-48B8-8B91-C83F78D02C0B}"/>
+                    <ns2:creationId id="{E77D7D32-C9BD-4224-A5DA-6AE9FEE3B2B1}"/>
                   </a:ext>
                 </a:extLst>
               </p:cNvPr>
@@ -8361,7 +8361,7 @@
             </p:nvSpPr>
             <p:spPr>
               <a:xfrm>
-                <a:off x="13141523" y="9801225"/>
+                <a:off x="13141523" y="9791700"/>
                 <a:ext cx="1249835" cy="403860"/>
               </a:xfrm>
               <a:prstGeom prst="rect">
@@ -8404,15 +8404,15 @@
         </p:grpSp>
         <p:grpSp>
           <p:nvGrpSpPr>
-            <p:cNvPr id="545" name="R4 · Prioritize better evidence"/>
+            <p:cNvPr id="546" name="R4 · Prioritize better evidence"/>
             <p:cNvGrpSpPr/>
             <p:nvPr/>
           </p:nvGrpSpPr>
           <p:grpSpPr>
             <a:xfrm>
-              <a:off x="14995178" y="6671667"/>
+              <a:off x="14995178" y="6653212"/>
               <a:ext cx="1806029" cy="4573935"/>
-              <a:chOff x="14995178" y="6671667"/>
+              <a:chOff x="14995178" y="6653212"/>
               <a:chExt cx="1806029" cy="4573935"/>
             </a:xfrm>
           </p:grpSpPr>
@@ -8421,7 +8421,7 @@
               <p:cNvPr id="28" name="Panel stage retr" descr="s27">
                 <a:extLst>
                   <a:ext uri="{FF2B5EF4-FFF2-40B4-BE49-F238E27FC236}">
-                    <ns2:creationId id="{1459A333-07DF-4C1B-AF45-AF43D9561486}"/>
+                    <ns2:creationId id="{D4FBCDA6-72C4-415A-9FAB-1672ED78A5E8}"/>
                   </a:ext>
                 </a:extLst>
               </p:cNvPr>
@@ -8432,7 +8432,7 @@
             </p:nvSpPr>
             <p:spPr>
               <a:xfrm>
-                <a:off x="14995178" y="6671667"/>
+                <a:off x="14995178" y="6653213"/>
                 <a:ext cx="1806029" cy="4573935"/>
               </a:xfrm>
               <a:custGeom>
@@ -8497,7 +8497,7 @@
               <p:cNvPr id="29" name="Panel tech" descr="s28">
                 <a:extLst>
                   <a:ext uri="{FF2B5EF4-FFF2-40B4-BE49-F238E27FC236}">
-                    <ns2:creationId id="{85D19033-C198-4180-A838-9446916D3BDE}"/>
+                    <ns2:creationId id="{1DFFFE77-93E6-46B8-8617-3432A1FFACBD}"/>
                   </a:ext>
                 </a:extLst>
               </p:cNvPr>
@@ -8508,7 +8508,7 @@
             </p:nvSpPr>
             <p:spPr>
               <a:xfrm>
-                <a:off x="15004703" y="9748391"/>
+                <a:off x="15004703" y="9729936"/>
                 <a:ext cx="1786979" cy="1487686"/>
               </a:xfrm>
               <a:custGeom>
@@ -8571,7 +8571,7 @@
               <p:cNvPr id="67" name="Stage connector" descr="s66">
                 <a:extLst>
                   <a:ext uri="{FF2B5EF4-FFF2-40B4-BE49-F238E27FC236}">
-                    <ns2:creationId id="{963EE052-1126-425B-ABBA-56D066FEBA8C}"/>
+                    <ns2:creationId id="{BD4BFFE0-5AB9-447F-8635-F3A88ED4AA3A}"/>
                   </a:ext>
                 </a:extLst>
               </p:cNvPr>
@@ -8582,7 +8582,7 @@
             </p:nvSpPr>
             <p:spPr>
               <a:xfrm>
-                <a:off x="16801207" y="9348341"/>
+                <a:off x="16801207" y="9329886"/>
                 <a:ext cx="104775" cy="171450"/>
               </a:xfrm>
               <a:custGeom>
@@ -8623,17 +8623,17 @@
           </p:sp>
           <p:pic>
             <p:nvPicPr>
-              <p:cNvPr id="531" name="icon-rank" descr="s129"/>
+              <p:cNvPr id="532" name="icon-rank" descr="s129"/>
               <p:cNvPicPr>
                 <a:picLocks noChangeAspect="1"/>
               </p:cNvPicPr>
               <p:nvPr/>
             </p:nvPicPr>
             <p:blipFill>
-              <a:blip r:embed="Reb52887b920e4b13">
+              <a:blip r:embed="R06b17e4c381c4c55">
                 <a:extLst>
                   <a:ext uri="{96DAC541-7B7A-43D3-8B79-37D633B846F1}">
-                    <ns4:svgBlip r:embed="R2fdb27ae523d4b6b"/>
+                    <ns4:svgBlip r:embed="R17c3a88c45284ac4"/>
                   </a:ext>
                 </a:extLst>
               </a:blip>
@@ -8641,7 +8641,7 @@
             </p:blipFill>
             <p:spPr>
               <a:xfrm>
-                <a:off x="15659993" y="9195941"/>
+                <a:off x="15659993" y="9177486"/>
                 <a:ext cx="476250" cy="476250"/>
               </a:xfrm>
               <a:prstGeom prst="rect">
@@ -8651,10 +8651,10 @@
           </p:pic>
           <p:sp>
             <p:nvSpPr>
-              <p:cNvPr id="374" name="R4 · Prioritize" descr="t240">
+              <p:cNvPr id="375" name="R4 · Prioritize" descr="t241">
                 <a:extLst>
                   <a:ext uri="{FF2B5EF4-FFF2-40B4-BE49-F238E27FC236}">
-                    <ns2:creationId id="{005F2682-6A34-46A6-9843-5F7EF9FBDD5A}"/>
+                    <ns2:creationId id="{4569C97B-252A-4B0D-95BE-10C93D506A5A}"/>
                   </a:ext>
                 </a:extLst>
               </p:cNvPr>
@@ -8665,7 +8665,7 @@
             </p:nvSpPr>
             <p:spPr>
               <a:xfrm>
-                <a:off x="15061853" y="6753225"/>
+                <a:off x="15061853" y="6743700"/>
                 <a:ext cx="1548236" cy="403860"/>
               </a:xfrm>
               <a:prstGeom prst="rect">
@@ -8707,10 +8707,10 @@
           </p:sp>
           <p:sp>
             <p:nvSpPr>
-              <p:cNvPr id="375" name="better" descr="t241">
+              <p:cNvPr id="376" name="better" descr="t242">
                 <a:extLst>
                   <a:ext uri="{FF2B5EF4-FFF2-40B4-BE49-F238E27FC236}">
-                    <ns2:creationId id="{57201F69-1613-4BCB-9477-9F2BD240FC33}"/>
+                    <ns2:creationId id="{AB1BF752-28AA-49BD-A0A0-AE8D7C91CD8C}"/>
                   </a:ext>
                 </a:extLst>
               </p:cNvPr>
@@ -8721,7 +8721,7 @@
             </p:nvSpPr>
             <p:spPr>
               <a:xfrm>
-                <a:off x="15061853" y="7086600"/>
+                <a:off x="15061853" y="7067550"/>
                 <a:ext cx="733808" cy="403860"/>
               </a:xfrm>
               <a:prstGeom prst="rect">
@@ -8763,10 +8763,10 @@
           </p:sp>
           <p:sp>
             <p:nvSpPr>
-              <p:cNvPr id="376" name="evidence" descr="t242">
+              <p:cNvPr id="377" name="evidence" descr="t243">
                 <a:extLst>
                   <a:ext uri="{FF2B5EF4-FFF2-40B4-BE49-F238E27FC236}">
-                    <ns2:creationId id="{9068546D-E93A-4D84-8A68-9C99F1101F3F}"/>
+                    <ns2:creationId id="{F3916A0D-109F-4296-BC40-E43E5D16AE0B}"/>
                   </a:ext>
                 </a:extLst>
               </p:cNvPr>
@@ -8777,7 +8777,7 @@
             </p:nvSpPr>
             <p:spPr>
               <a:xfrm>
-                <a:off x="15061853" y="7419975"/>
+                <a:off x="15061853" y="7400925"/>
                 <a:ext cx="1055373" cy="403860"/>
               </a:xfrm>
               <a:prstGeom prst="rect">
@@ -8819,10 +8819,10 @@
           </p:sp>
           <p:sp>
             <p:nvSpPr>
-              <p:cNvPr id="377" name="Move the most" descr="t243">
+              <p:cNvPr id="378" name="Move the most" descr="t244">
                 <a:extLst>
                   <a:ext uri="{FF2B5EF4-FFF2-40B4-BE49-F238E27FC236}">
-                    <ns2:creationId id="{199DB3AA-FD53-4B97-AE70-D93D32355634}"/>
+                    <ns2:creationId id="{08848F55-0C81-49C2-A1CB-ECD218478EA2}"/>
                   </a:ext>
                 </a:extLst>
               </p:cNvPr>
@@ -8833,7 +8833,7 @@
             </p:nvSpPr>
             <p:spPr>
               <a:xfrm>
-                <a:off x="15061853" y="7810500"/>
+                <a:off x="15061853" y="7791450"/>
                 <a:ext cx="1551587" cy="403860"/>
               </a:xfrm>
               <a:prstGeom prst="rect">
@@ -8875,10 +8875,10 @@
           </p:sp>
           <p:sp>
             <p:nvSpPr>
-              <p:cNvPr id="378" name="relevant" descr="t244">
+              <p:cNvPr id="379" name="relevant" descr="t245">
                 <a:extLst>
                   <a:ext uri="{FF2B5EF4-FFF2-40B4-BE49-F238E27FC236}">
-                    <ns2:creationId id="{0BFE4129-F986-4887-999F-0FDA00DE5FAB}"/>
+                    <ns2:creationId id="{AF6C953E-2374-4569-AC3A-0E8D05F54C7E}"/>
                   </a:ext>
                 </a:extLst>
               </p:cNvPr>
@@ -8889,7 +8889,7 @@
             </p:nvSpPr>
             <p:spPr>
               <a:xfrm>
-                <a:off x="15061853" y="8134350"/>
+                <a:off x="15061853" y="8115300"/>
                 <a:ext cx="896572" cy="403860"/>
               </a:xfrm>
               <a:prstGeom prst="rect">
@@ -8931,10 +8931,10 @@
           </p:sp>
           <p:sp>
             <p:nvSpPr>
-              <p:cNvPr id="379" name="passages to the" descr="t245">
+              <p:cNvPr id="380" name="passages to the" descr="t246">
                 <a:extLst>
                   <a:ext uri="{FF2B5EF4-FFF2-40B4-BE49-F238E27FC236}">
-                    <ns2:creationId id="{273D3E62-3958-4F12-A059-AD82768AE6BB}"/>
+                    <ns2:creationId id="{5A6A6C04-2F0B-48B3-9B54-D5CD34D33135}"/>
                   </a:ext>
                 </a:extLst>
               </p:cNvPr>
@@ -8945,7 +8945,7 @@
             </p:nvSpPr>
             <p:spPr>
               <a:xfrm>
-                <a:off x="15061853" y="8448675"/>
+                <a:off x="15061853" y="8429625"/>
                 <a:ext cx="1687530" cy="403860"/>
               </a:xfrm>
               <a:prstGeom prst="rect">
@@ -8987,10 +8987,10 @@
           </p:sp>
           <p:sp>
             <p:nvSpPr>
-              <p:cNvPr id="380" name="top" descr="t246">
+              <p:cNvPr id="381" name="top" descr="t247">
                 <a:extLst>
                   <a:ext uri="{FF2B5EF4-FFF2-40B4-BE49-F238E27FC236}">
-                    <ns2:creationId id="{275F4A57-E584-4DA3-9C74-134EB6EA7DF0}"/>
+                    <ns2:creationId id="{F5849BB6-30B2-4CFA-9176-372AA4EA661D}"/>
                   </a:ext>
                 </a:extLst>
               </p:cNvPr>
@@ -9001,7 +9001,7 @@
             </p:nvSpPr>
             <p:spPr>
               <a:xfrm>
-                <a:off x="15061853" y="8772525"/>
+                <a:off x="15061853" y="8753475"/>
                 <a:ext cx="395478" cy="403860"/>
               </a:xfrm>
               <a:prstGeom prst="rect">
@@ -9043,10 +9043,10 @@
           </p:sp>
           <p:sp>
             <p:nvSpPr>
-              <p:cNvPr id="381" name="Qwen3-" descr="t247">
+              <p:cNvPr id="382" name="Qwen3-" descr="t248">
                 <a:extLst>
                   <a:ext uri="{FF2B5EF4-FFF2-40B4-BE49-F238E27FC236}">
-                    <ns2:creationId id="{32771DA2-8E9D-41C3-A1F1-E6A626D22205}"/>
+                    <ns2:creationId id="{BA2CDE5E-5007-4C86-99BC-6D30545CE2D4}"/>
                   </a:ext>
                 </a:extLst>
               </p:cNvPr>
@@ -9057,7 +9057,7 @@
             </p:nvSpPr>
             <p:spPr>
               <a:xfrm>
-                <a:off x="15061853" y="9801225"/>
+                <a:off x="15061853" y="9791700"/>
                 <a:ext cx="831038" cy="403860"/>
               </a:xfrm>
               <a:prstGeom prst="rect">
@@ -9099,10 +9099,10 @@
           </p:sp>
           <p:sp>
             <p:nvSpPr>
-              <p:cNvPr id="382" name="Reranker" descr="t248">
+              <p:cNvPr id="383" name="Reranker" descr="t249">
                 <a:extLst>
                   <a:ext uri="{FF2B5EF4-FFF2-40B4-BE49-F238E27FC236}">
-                    <ns2:creationId id="{18CFE005-F806-40F5-B8EC-A09B23F1DC41}"/>
+                    <ns2:creationId id="{E00371E4-D3F2-43AB-99F3-C2ADA4EE636B}"/>
                   </a:ext>
                 </a:extLst>
               </p:cNvPr>
@@ -9113,7 +9113,7 @@
             </p:nvSpPr>
             <p:spPr>
               <a:xfrm>
-                <a:off x="15061853" y="10134600"/>
+                <a:off x="15061853" y="10115550"/>
                 <a:ext cx="993194" cy="403860"/>
               </a:xfrm>
               <a:prstGeom prst="rect">
@@ -9156,15 +9156,15 @@
         </p:grpSp>
         <p:grpSp>
           <p:nvGrpSpPr>
-            <p:cNvPr id="544" name="R5 · Check the answer"/>
+            <p:cNvPr id="545" name="R5 · Check the answer"/>
             <p:cNvGrpSpPr/>
             <p:nvPr/>
           </p:nvGrpSpPr>
           <p:grpSpPr>
             <a:xfrm>
-              <a:off x="16915507" y="6671667"/>
+              <a:off x="16915507" y="6653212"/>
               <a:ext cx="1806029" cy="4573935"/>
-              <a:chOff x="16915507" y="6671667"/>
+              <a:chOff x="16915507" y="6653212"/>
               <a:chExt cx="1806029" cy="4573935"/>
             </a:xfrm>
           </p:grpSpPr>
@@ -9173,7 +9173,7 @@
               <p:cNvPr id="30" name="Panel stage ans" descr="s29">
                 <a:extLst>
                   <a:ext uri="{FF2B5EF4-FFF2-40B4-BE49-F238E27FC236}">
-                    <ns2:creationId id="{8C20C4B7-00D3-47D3-A48D-9A2EF787F34D}"/>
+                    <ns2:creationId id="{2AF04E76-7CA7-452C-AD91-CA3B401FBC84}"/>
                   </a:ext>
                 </a:extLst>
               </p:cNvPr>
@@ -9184,7 +9184,7 @@
             </p:nvSpPr>
             <p:spPr>
               <a:xfrm>
-                <a:off x="16915507" y="6671667"/>
+                <a:off x="16915507" y="6653213"/>
                 <a:ext cx="1806029" cy="4573935"/>
               </a:xfrm>
               <a:custGeom>
@@ -9249,7 +9249,7 @@
               <p:cNvPr id="31" name="Panel tech" descr="s30">
                 <a:extLst>
                   <a:ext uri="{FF2B5EF4-FFF2-40B4-BE49-F238E27FC236}">
-                    <ns2:creationId id="{6F8BC1CB-DB1C-4EC9-B3AF-C411C5C3752F}"/>
+                    <ns2:creationId id="{E22A3E09-3579-4D27-9D7A-2FC5DB5EFA36}"/>
                   </a:ext>
                 </a:extLst>
               </p:cNvPr>
@@ -9260,7 +9260,7 @@
             </p:nvSpPr>
             <p:spPr>
               <a:xfrm>
-                <a:off x="16925032" y="9748391"/>
+                <a:off x="16925032" y="9729936"/>
                 <a:ext cx="1786979" cy="1487686"/>
               </a:xfrm>
               <a:custGeom>
@@ -9323,7 +9323,7 @@
               <p:cNvPr id="68" name="Stage connector" descr="s67">
                 <a:extLst>
                   <a:ext uri="{FF2B5EF4-FFF2-40B4-BE49-F238E27FC236}">
-                    <ns2:creationId id="{F1AAF75B-248C-458E-A3FE-425D9496EA78}"/>
+                    <ns2:creationId id="{27F77489-89B7-4B4E-A018-A6929FD99CC9}"/>
                   </a:ext>
                 </a:extLst>
               </p:cNvPr>
@@ -9334,7 +9334,7 @@
             </p:nvSpPr>
             <p:spPr>
               <a:xfrm>
-                <a:off x="18721536" y="9348341"/>
+                <a:off x="18721536" y="9329886"/>
                 <a:ext cx="104775" cy="171450"/>
               </a:xfrm>
               <a:custGeom>
@@ -9375,17 +9375,17 @@
           </p:sp>
           <p:pic>
             <p:nvPicPr>
-              <p:cNvPr id="532" name="icon-check" descr="s130"/>
+              <p:cNvPr id="533" name="icon-check" descr="s130"/>
               <p:cNvPicPr>
                 <a:picLocks noChangeAspect="1"/>
               </p:cNvPicPr>
               <p:nvPr/>
             </p:nvPicPr>
             <p:blipFill>
-              <a:blip r:embed="Rb4fb08ccdc5d41a6">
+              <a:blip r:embed="Rf1b0872b5a6a4938">
                 <a:extLst>
                   <a:ext uri="{96DAC541-7B7A-43D3-8B79-37D633B846F1}">
-                    <ns4:svgBlip r:embed="R50a5b27f92cc4e7a"/>
+                    <ns4:svgBlip r:embed="R43b79e1ce16f4af0"/>
                   </a:ext>
                 </a:extLst>
               </a:blip>
@@ -9393,7 +9393,7 @@
             </p:blipFill>
             <p:spPr>
               <a:xfrm>
-                <a:off x="17580322" y="9195941"/>
+                <a:off x="17580322" y="9177486"/>
                 <a:ext cx="476250" cy="476250"/>
               </a:xfrm>
               <a:prstGeom prst="rect">
@@ -9403,10 +9403,10 @@
           </p:pic>
           <p:sp>
             <p:nvSpPr>
-              <p:cNvPr id="383" name="R5 · Check the" descr="t249">
+              <p:cNvPr id="384" name="R5 · Check the" descr="t250">
                 <a:extLst>
                   <a:ext uri="{FF2B5EF4-FFF2-40B4-BE49-F238E27FC236}">
-                    <ns2:creationId id="{049D696D-EB4D-4AD4-BB2E-73DD344A0C47}"/>
+                    <ns2:creationId id="{61E389AC-5DF7-422C-A948-E30FFCEBE819}"/>
                   </a:ext>
                 </a:extLst>
               </p:cNvPr>
@@ -9417,7 +9417,7 @@
             </p:nvSpPr>
             <p:spPr>
               <a:xfrm>
-                <a:off x="16982182" y="6753225"/>
+                <a:off x="16982182" y="6743700"/>
                 <a:ext cx="1623523" cy="403860"/>
               </a:xfrm>
               <a:prstGeom prst="rect">
@@ -9459,10 +9459,10 @@
           </p:sp>
           <p:sp>
             <p:nvSpPr>
-              <p:cNvPr id="384" name="answer" descr="t250">
+              <p:cNvPr id="385" name="answer" descr="t251">
                 <a:extLst>
                   <a:ext uri="{FF2B5EF4-FFF2-40B4-BE49-F238E27FC236}">
-                    <ns2:creationId id="{1B53577F-AF64-4DE3-A9B3-F72BF823E87F}"/>
+                    <ns2:creationId id="{C77CD4E6-DC09-433E-925C-A8144E5D2692}"/>
                   </a:ext>
                 </a:extLst>
               </p:cNvPr>
@@ -9473,7 +9473,7 @@
             </p:nvSpPr>
             <p:spPr>
               <a:xfrm>
-                <a:off x="16982182" y="7086600"/>
+                <a:off x="16982182" y="7067550"/>
                 <a:ext cx="861822" cy="403860"/>
               </a:xfrm>
               <a:prstGeom prst="rect">
@@ -9515,10 +9515,10 @@
           </p:sp>
           <p:sp>
             <p:nvSpPr>
-              <p:cNvPr id="385" name="Normalize and" descr="t251">
+              <p:cNvPr id="386" name="Normalize and" descr="t252">
                 <a:extLst>
                   <a:ext uri="{FF2B5EF4-FFF2-40B4-BE49-F238E27FC236}">
-                    <ns2:creationId id="{2E490E47-0555-49AC-88BA-979CBEB66F7E}"/>
+                    <ns2:creationId id="{E3EF7EBB-8225-40B0-9981-5D892ECAF30F}"/>
                   </a:ext>
                 </a:extLst>
               </p:cNvPr>
@@ -9529,7 +9529,7 @@
             </p:nvSpPr>
             <p:spPr>
               <a:xfrm>
-                <a:off x="16982182" y="7810500"/>
+                <a:off x="16982182" y="7791450"/>
                 <a:ext cx="1543966" cy="403860"/>
               </a:xfrm>
               <a:prstGeom prst="rect">
@@ -9571,10 +9571,10 @@
           </p:sp>
           <p:sp>
             <p:nvSpPr>
-              <p:cNvPr id="386" name="validate the" descr="t252">
+              <p:cNvPr id="387" name="validate the" descr="t253">
                 <a:extLst>
                   <a:ext uri="{FF2B5EF4-FFF2-40B4-BE49-F238E27FC236}">
-                    <ns2:creationId id="{02C40BB6-5DAD-4835-B821-29DFED806176}"/>
+                    <ns2:creationId id="{A8DA28E6-B450-4E0D-994F-AD6C02A15F92}"/>
                   </a:ext>
                 </a:extLst>
               </p:cNvPr>
@@ -9585,7 +9585,7 @@
             </p:nvSpPr>
             <p:spPr>
               <a:xfrm>
-                <a:off x="16982182" y="8134350"/>
+                <a:off x="16982182" y="8115300"/>
                 <a:ext cx="1271170" cy="403860"/>
               </a:xfrm>
               <a:prstGeom prst="rect">
@@ -9627,10 +9627,10 @@
           </p:sp>
           <p:sp>
             <p:nvSpPr>
-              <p:cNvPr id="387" name="expected" descr="t253">
+              <p:cNvPr id="388" name="expected" descr="t254">
                 <a:extLst>
                   <a:ext uri="{FF2B5EF4-FFF2-40B4-BE49-F238E27FC236}">
-                    <ns2:creationId id="{5EE121BC-DE7E-43DB-8EF6-5749BDDCF357}"/>
+                    <ns2:creationId id="{EAB10741-B8E0-4664-A74F-55F37F7C18B5}"/>
                   </a:ext>
                 </a:extLst>
               </p:cNvPr>
@@ -9641,7 +9641,7 @@
             </p:nvSpPr>
             <p:spPr>
               <a:xfrm>
-                <a:off x="16982182" y="8448675"/>
+                <a:off x="16982182" y="8429625"/>
                 <a:ext cx="1006300" cy="403860"/>
               </a:xfrm>
               <a:prstGeom prst="rect">
@@ -9683,10 +9683,10 @@
           </p:sp>
           <p:sp>
             <p:nvSpPr>
-              <p:cNvPr id="388" name="answer type" descr="t254">
+              <p:cNvPr id="389" name="answer type" descr="t255">
                 <a:extLst>
                   <a:ext uri="{FF2B5EF4-FFF2-40B4-BE49-F238E27FC236}">
-                    <ns2:creationId id="{1E717A7F-B321-496B-8E4E-240F4D9FD59C}"/>
+                    <ns2:creationId id="{F1721A53-AC83-4B27-9E21-E553923532B7}"/>
                   </a:ext>
                 </a:extLst>
               </p:cNvPr>
@@ -9697,7 +9697,7 @@
             </p:nvSpPr>
             <p:spPr>
               <a:xfrm>
-                <a:off x="16982182" y="8772525"/>
+                <a:off x="16982182" y="8753475"/>
                 <a:ext cx="1312318" cy="403860"/>
               </a:xfrm>
               <a:prstGeom prst="rect">
@@ -9739,10 +9739,10 @@
           </p:sp>
           <p:sp>
             <p:nvSpPr>
-              <p:cNvPr id="389" name="Typed schema" descr="t255">
+              <p:cNvPr id="390" name="Typed schema" descr="t256">
                 <a:extLst>
                   <a:ext uri="{FF2B5EF4-FFF2-40B4-BE49-F238E27FC236}">
-                    <ns2:creationId id="{51729C4B-8DBD-4D1E-9C2A-8B599B4C03A5}"/>
+                    <ns2:creationId id="{09DD741D-7A67-40E0-8058-2473EB6241F0}"/>
                   </a:ext>
                 </a:extLst>
               </p:cNvPr>
@@ -9753,7 +9753,7 @@
             </p:nvSpPr>
             <p:spPr>
               <a:xfrm>
-                <a:off x="16982182" y="9801225"/>
+                <a:off x="16982182" y="9791700"/>
                 <a:ext cx="1546710" cy="403860"/>
               </a:xfrm>
               <a:prstGeom prst="rect">
@@ -9796,15 +9796,15 @@
         </p:grpSp>
         <p:grpSp>
           <p:nvGrpSpPr>
-            <p:cNvPr id="543" name="R6 · Refine citations"/>
+            <p:cNvPr id="544" name="R6 · Refine citations"/>
             <p:cNvGrpSpPr/>
             <p:nvPr/>
           </p:nvGrpSpPr>
           <p:grpSpPr>
             <a:xfrm>
-              <a:off x="18835836" y="6671667"/>
+              <a:off x="18835836" y="6653212"/>
               <a:ext cx="1805880" cy="4573935"/>
-              <a:chOff x="18835836" y="6671667"/>
+              <a:chOff x="18835836" y="6653212"/>
               <a:chExt cx="1805880" cy="4573935"/>
             </a:xfrm>
           </p:grpSpPr>
@@ -9813,7 +9813,7 @@
               <p:cNvPr id="32" name="Panel stage cit" descr="s31">
                 <a:extLst>
                   <a:ext uri="{FF2B5EF4-FFF2-40B4-BE49-F238E27FC236}">
-                    <ns2:creationId id="{D403EBE7-5A2A-4AEE-9C57-FEDF90F42CE6}"/>
+                    <ns2:creationId id="{DEA6A6DD-83E2-4A70-BF0F-31D7FCE2B876}"/>
                   </a:ext>
                 </a:extLst>
               </p:cNvPr>
@@ -9824,7 +9824,7 @@
             </p:nvSpPr>
             <p:spPr>
               <a:xfrm>
-                <a:off x="18835836" y="6671667"/>
+                <a:off x="18835836" y="6653213"/>
                 <a:ext cx="1805880" cy="4573935"/>
               </a:xfrm>
               <a:custGeom>
@@ -9889,7 +9889,7 @@
               <p:cNvPr id="33" name="Panel tech" descr="s32">
                 <a:extLst>
                   <a:ext uri="{FF2B5EF4-FFF2-40B4-BE49-F238E27FC236}">
-                    <ns2:creationId id="{69BB4732-1A24-40EB-B35C-E08C1AD2903C}"/>
+                    <ns2:creationId id="{7538C7B0-4AC3-4827-8368-D722E23ABC88}"/>
                   </a:ext>
                 </a:extLst>
               </p:cNvPr>
@@ -9900,7 +9900,7 @@
             </p:nvSpPr>
             <p:spPr>
               <a:xfrm>
-                <a:off x="18845361" y="9748391"/>
+                <a:off x="18845361" y="9729936"/>
                 <a:ext cx="1786830" cy="1487686"/>
               </a:xfrm>
               <a:custGeom>
@@ -9960,17 +9960,17 @@
           </p:sp>
           <p:pic>
             <p:nvPicPr>
-              <p:cNvPr id="533" name="icon-link" descr="s131"/>
+              <p:cNvPr id="534" name="icon-link" descr="s131"/>
               <p:cNvPicPr>
                 <a:picLocks noChangeAspect="1"/>
               </p:cNvPicPr>
               <p:nvPr/>
             </p:nvPicPr>
             <p:blipFill>
-              <a:blip r:embed="Rfbc1cd89e4ce4903">
+              <a:blip r:embed="Ra600342c4bc94505">
                 <a:extLst>
                   <a:ext uri="{96DAC541-7B7A-43D3-8B79-37D633B846F1}">
-                    <ns4:svgBlip r:embed="R314ecc830f024ed7"/>
+                    <ns4:svgBlip r:embed="Reb48d4c706254c8a"/>
                   </a:ext>
                 </a:extLst>
               </a:blip>
@@ -9978,7 +9978,7 @@
             </p:blipFill>
             <p:spPr>
               <a:xfrm>
-                <a:off x="19500652" y="9195941"/>
+                <a:off x="19500652" y="9177486"/>
                 <a:ext cx="476250" cy="476250"/>
               </a:xfrm>
               <a:prstGeom prst="rect">
@@ -9988,10 +9988,10 @@
           </p:pic>
           <p:sp>
             <p:nvSpPr>
-              <p:cNvPr id="390" name="R6 · Refine" descr="t256">
+              <p:cNvPr id="391" name="R6 · Refine" descr="t257">
                 <a:extLst>
                   <a:ext uri="{FF2B5EF4-FFF2-40B4-BE49-F238E27FC236}">
-                    <ns2:creationId id="{4F70F5AF-8EFC-4C14-B006-64EA3A1CA0E3}"/>
+                    <ns2:creationId id="{60112DEF-D9C6-46D6-92B1-DF7D3A7B0F12}"/>
                   </a:ext>
                 </a:extLst>
               </p:cNvPr>
@@ -10002,7 +10002,7 @@
             </p:nvSpPr>
             <p:spPr>
               <a:xfrm>
-                <a:off x="18902511" y="6753225"/>
+                <a:off x="18902511" y="6743700"/>
                 <a:ext cx="1228193" cy="403860"/>
               </a:xfrm>
               <a:prstGeom prst="rect">
@@ -10044,10 +10044,10 @@
           </p:sp>
           <p:sp>
             <p:nvSpPr>
-              <p:cNvPr id="391" name="citations" descr="t257">
+              <p:cNvPr id="392" name="citations" descr="t258">
                 <a:extLst>
                   <a:ext uri="{FF2B5EF4-FFF2-40B4-BE49-F238E27FC236}">
-                    <ns2:creationId id="{48E2EB3A-5B90-4DDE-9586-29B2B464A396}"/>
+                    <ns2:creationId id="{FB54B945-BB25-4967-84E7-A32A94B16561}"/>
                   </a:ext>
                 </a:extLst>
               </p:cNvPr>
@@ -10058,7 +10058,7 @@
             </p:nvSpPr>
             <p:spPr>
               <a:xfrm>
-                <a:off x="18902511" y="7086600"/>
+                <a:off x="18902511" y="7067550"/>
                 <a:ext cx="1032818" cy="403860"/>
               </a:xfrm>
               <a:prstGeom prst="rect">
@@ -10100,10 +10100,10 @@
           </p:sp>
           <p:sp>
             <p:nvSpPr>
-              <p:cNvPr id="392" name="Keep only" descr="t258">
+              <p:cNvPr id="393" name="Keep only" descr="t259">
                 <a:extLst>
                   <a:ext uri="{FF2B5EF4-FFF2-40B4-BE49-F238E27FC236}">
-                    <ns2:creationId id="{38A5BDF2-6AEA-44A7-8032-E54DA1137438}"/>
+                    <ns2:creationId id="{D687CFD9-F3F5-49FE-A885-67CE08135B88}"/>
                   </a:ext>
                 </a:extLst>
               </p:cNvPr>
@@ -10114,7 +10114,7 @@
             </p:nvSpPr>
             <p:spPr>
               <a:xfrm>
-                <a:off x="18902511" y="7810500"/>
+                <a:off x="18902511" y="7791450"/>
                 <a:ext cx="1057508" cy="403860"/>
               </a:xfrm>
               <a:prstGeom prst="rect">
@@ -10156,10 +10156,10 @@
           </p:sp>
           <p:sp>
             <p:nvSpPr>
-              <p:cNvPr id="393" name="pages that" descr="t259">
+              <p:cNvPr id="394" name="pages that" descr="t260">
                 <a:extLst>
                   <a:ext uri="{FF2B5EF4-FFF2-40B4-BE49-F238E27FC236}">
-                    <ns2:creationId id="{B377EB4C-6959-44CA-97CA-F9028AD75094}"/>
+                    <ns2:creationId id="{0F227BA0-964D-4729-B6A5-E6D68EBD6DFE}"/>
                   </a:ext>
                 </a:extLst>
               </p:cNvPr>
@@ -10170,7 +10170,7 @@
             </p:nvSpPr>
             <p:spPr>
               <a:xfrm>
-                <a:off x="18902511" y="8134350"/>
+                <a:off x="18902511" y="8115300"/>
                 <a:ext cx="1155650" cy="403860"/>
               </a:xfrm>
               <a:prstGeom prst="rect">
@@ -10212,10 +10212,10 @@
           </p:sp>
           <p:sp>
             <p:nvSpPr>
-              <p:cNvPr id="394" name="support the" descr="t260">
+              <p:cNvPr id="395" name="support the" descr="t261">
                 <a:extLst>
                   <a:ext uri="{FF2B5EF4-FFF2-40B4-BE49-F238E27FC236}">
-                    <ns2:creationId id="{4844FF50-C295-4F85-ACB2-7413E8E109C5}"/>
+                    <ns2:creationId id="{015E5A7F-A48E-40C2-A53F-7F28BC3BC98C}"/>
                   </a:ext>
                 </a:extLst>
               </p:cNvPr>
@@ -10226,7 +10226,7 @@
             </p:nvSpPr>
             <p:spPr>
               <a:xfrm>
-                <a:off x="18902511" y="8448675"/>
+                <a:off x="18902511" y="8429625"/>
                 <a:ext cx="1253793" cy="403860"/>
               </a:xfrm>
               <a:prstGeom prst="rect">
@@ -10268,10 +10268,10 @@
           </p:sp>
           <p:sp>
             <p:nvSpPr>
-              <p:cNvPr id="395" name="final answer" descr="t261">
+              <p:cNvPr id="396" name="final answer" descr="t262">
                 <a:extLst>
                   <a:ext uri="{FF2B5EF4-FFF2-40B4-BE49-F238E27FC236}">
-                    <ns2:creationId id="{8B15E6E6-D50F-49EA-BA25-B1B222D56933}"/>
+                    <ns2:creationId id="{EA5F525C-1D02-444D-BFFD-C501350237F0}"/>
                   </a:ext>
                 </a:extLst>
               </p:cNvPr>
@@ -10282,7 +10282,7 @@
             </p:nvSpPr>
             <p:spPr>
               <a:xfrm>
-                <a:off x="18902511" y="8772525"/>
+                <a:off x="18902511" y="8753475"/>
                 <a:ext cx="1322074" cy="403860"/>
               </a:xfrm>
               <a:prstGeom prst="rect">
@@ -10324,10 +10324,10 @@
           </p:sp>
           <p:sp>
             <p:nvSpPr>
-              <p:cNvPr id="396" name="Supporting-" descr="t262">
+              <p:cNvPr id="397" name="Supporting-" descr="t263">
                 <a:extLst>
                   <a:ext uri="{FF2B5EF4-FFF2-40B4-BE49-F238E27FC236}">
-                    <ns2:creationId id="{F53AD68C-1D39-439D-8F0E-6AECC02DE0F1}"/>
+                    <ns2:creationId id="{166304EA-5546-46FE-B1B1-1844CBAD33FE}"/>
                   </a:ext>
                 </a:extLst>
               </p:cNvPr>
@@ -10338,7 +10338,7 @@
             </p:nvSpPr>
             <p:spPr>
               <a:xfrm>
-                <a:off x="18902511" y="9801225"/>
+                <a:off x="18902511" y="9791700"/>
                 <a:ext cx="1284887" cy="403860"/>
               </a:xfrm>
               <a:prstGeom prst="rect">
@@ -10380,10 +10380,10 @@
           </p:sp>
           <p:sp>
             <p:nvSpPr>
-              <p:cNvPr id="397" name="chunk" descr="t263">
+              <p:cNvPr id="398" name="chunk" descr="t264">
                 <a:extLst>
                   <a:ext uri="{FF2B5EF4-FFF2-40B4-BE49-F238E27FC236}">
-                    <ns2:creationId id="{4A4A9E74-4243-4E26-B52C-DB264A3BA8C8}"/>
+                    <ns2:creationId id="{CBE0BC7C-9811-4125-8BD6-ADE38AF17973}"/>
                   </a:ext>
                 </a:extLst>
               </p:cNvPr>
@@ -10394,7 +10394,7 @@
             </p:nvSpPr>
             <p:spPr>
               <a:xfrm>
-                <a:off x="18902511" y="10134600"/>
+                <a:off x="18902511" y="10115550"/>
                 <a:ext cx="690829" cy="403860"/>
               </a:xfrm>
               <a:prstGeom prst="rect">
@@ -10436,10 +10436,10 @@
           </p:sp>
           <p:sp>
             <p:nvSpPr>
-              <p:cNvPr id="398" name="references" descr="t264">
+              <p:cNvPr id="399" name="references" descr="t265">
                 <a:extLst>
                   <a:ext uri="{FF2B5EF4-FFF2-40B4-BE49-F238E27FC236}">
-                    <ns2:creationId id="{6720A711-27E9-4C07-B659-D3F8D502227E}"/>
+                    <ns2:creationId id="{252E5D24-0B0E-45D2-BD03-EDAD6C978231}"/>
                   </a:ext>
                 </a:extLst>
               </p:cNvPr>
@@ -10450,7 +10450,7 @@
             </p:nvSpPr>
             <p:spPr>
               <a:xfrm>
-                <a:off x="18902511" y="10467975"/>
+                <a:off x="18902511" y="10448925"/>
                 <a:ext cx="1177292" cy="403860"/>
               </a:xfrm>
               <a:prstGeom prst="rect">
@@ -10496,18 +10496,18 @@
             <p:cNvPr id="34" name="Rule" descr="s33">
               <a:extLst>
                 <a:ext uri="{FF2B5EF4-FFF2-40B4-BE49-F238E27FC236}">
-                  <ns2:creationId id="{E14A0C40-809F-4344-A024-18ACDB51AC36}"/>
-                </a:ext>
-              </a:extLst>
-            </p:cNvPr>
-            <p:cNvSpPr>
-              <a:spLocks noGrp="1"/>
-            </p:cNvSpPr>
-            <p:nvPr/>
-          </p:nvSpPr>
-          <p:spPr>
-            <a:xfrm>
-              <a:off x="9234339" y="11350377"/>
+                  <ns2:creationId id="{743C12FC-C540-4972-81F3-A6D0B1D73865}"/>
+                </a:ext>
+              </a:extLst>
+            </p:cNvPr>
+            <p:cNvSpPr>
+              <a:spLocks noGrp="1"/>
+            </p:cNvSpPr>
+            <p:nvPr/>
+          </p:nvSpPr>
+          <p:spPr>
+            <a:xfrm>
+              <a:off x="9234339" y="11331922"/>
               <a:ext cx="11407527" cy="9525"/>
             </a:xfrm>
             <a:prstGeom prst="rect">
@@ -10523,21 +10523,21 @@
         </p:sp>
         <p:sp>
           <p:nvSpPr>
-            <p:cNvPr id="183" name="6. Data and Methods" descr="t49">
-              <a:extLst>
-                <a:ext uri="{FF2B5EF4-FFF2-40B4-BE49-F238E27FC236}">
-                  <ns2:creationId id="{D0375A4E-FACA-4A5A-9346-E3AF9C03D21D}"/>
-                </a:ext>
-              </a:extLst>
-            </p:cNvPr>
-            <p:cNvSpPr>
-              <a:spLocks noGrp="1"/>
-            </p:cNvSpPr>
-            <p:nvPr/>
-          </p:nvSpPr>
-          <p:spPr>
-            <a:xfrm>
-              <a:off x="9205764" y="1416082"/>
+            <p:cNvPr id="184" name="6. Data and Methods" descr="t50">
+              <a:extLst>
+                <a:ext uri="{FF2B5EF4-FFF2-40B4-BE49-F238E27FC236}">
+                  <ns2:creationId id="{238B2948-5ED2-4179-A327-22AD896E4097}"/>
+                </a:ext>
+              </a:extLst>
+            </p:cNvPr>
+            <p:cNvSpPr>
+              <a:spLocks noGrp="1"/>
+            </p:cNvSpPr>
+            <p:nvPr/>
+          </p:nvSpPr>
+          <p:spPr>
+            <a:xfrm>
+              <a:off x="9205764" y="1397032"/>
               <a:ext cx="2737383" cy="464782"/>
             </a:xfrm>
             <a:prstGeom prst="rect">
@@ -10579,21 +10579,21 @@
         </p:sp>
         <p:sp>
           <p:nvSpPr>
-            <p:cNvPr id="184" name="Data" descr="t50">
-              <a:extLst>
-                <a:ext uri="{FF2B5EF4-FFF2-40B4-BE49-F238E27FC236}">
-                  <ns2:creationId id="{FAC561CF-B0FB-48A3-AC4B-0B6666F83242}"/>
-                </a:ext>
-              </a:extLst>
-            </p:cNvPr>
-            <p:cNvSpPr>
-              <a:spLocks noGrp="1"/>
-            </p:cNvSpPr>
-            <p:nvPr/>
-          </p:nvSpPr>
-          <p:spPr>
-            <a:xfrm>
-              <a:off x="9234339" y="1997107"/>
+            <p:cNvPr id="185" name="Data" descr="t51">
+              <a:extLst>
+                <a:ext uri="{FF2B5EF4-FFF2-40B4-BE49-F238E27FC236}">
+                  <ns2:creationId id="{C5022EEB-AA5F-4EDC-8E56-2185783B5BF6}"/>
+                </a:ext>
+              </a:extLst>
+            </p:cNvPr>
+            <p:cNvSpPr>
+              <a:spLocks noGrp="1"/>
+            </p:cNvSpPr>
+            <p:nvPr/>
+          </p:nvSpPr>
+          <p:spPr>
+            <a:xfrm>
+              <a:off x="9234339" y="1978057"/>
               <a:ext cx="583807" cy="419062"/>
             </a:xfrm>
             <a:prstGeom prst="rect">
@@ -10635,21 +10635,21 @@
         </p:sp>
         <p:sp>
           <p:nvSpPr>
-            <p:cNvPr id="185" name="30 DIFC legal PDFs (590 pages), 100 questions, including 70 structured" descr="t51">
-              <a:extLst>
-                <a:ext uri="{FF2B5EF4-FFF2-40B4-BE49-F238E27FC236}">
-                  <ns2:creationId id="{19D55564-87D0-4D0D-B9F2-0DC80CDF5E6E}"/>
-                </a:ext>
-              </a:extLst>
-            </p:cNvPr>
-            <p:cNvSpPr>
-              <a:spLocks noGrp="1"/>
-            </p:cNvSpPr>
-            <p:nvPr/>
-          </p:nvSpPr>
-          <p:spPr>
-            <a:xfrm>
-              <a:off x="9234339" y="2390775"/>
+            <p:cNvPr id="186" name="30 DIFC legal PDFs (590 pages), 100 questions, including 70 structured" descr="t52">
+              <a:extLst>
+                <a:ext uri="{FF2B5EF4-FFF2-40B4-BE49-F238E27FC236}">
+                  <ns2:creationId id="{C5A2AA13-1CAA-476F-96FA-109D95E2A28B}"/>
+                </a:ext>
+              </a:extLst>
+            </p:cNvPr>
+            <p:cNvSpPr>
+              <a:spLocks noGrp="1"/>
+            </p:cNvSpPr>
+            <p:nvPr/>
+          </p:nvSpPr>
+          <p:spPr>
+            <a:xfrm>
+              <a:off x="9234339" y="2371725"/>
               <a:ext cx="10985773" cy="403860"/>
             </a:xfrm>
             <a:prstGeom prst="rect">
@@ -10691,21 +10691,21 @@
         </p:sp>
         <p:sp>
           <p:nvSpPr>
-            <p:cNvPr id="186" name="Reference source pages are available for 95 questions. For the scan-ro" descr="t52">
-              <a:extLst>
-                <a:ext uri="{FF2B5EF4-FFF2-40B4-BE49-F238E27FC236}">
-                  <ns2:creationId id="{7F96ECD4-92D8-496C-99A7-7FB64226F1E8}"/>
-                </a:ext>
-              </a:extLst>
-            </p:cNvPr>
-            <p:cNvSpPr>
-              <a:spLocks noGrp="1"/>
-            </p:cNvSpPr>
-            <p:nvPr/>
-          </p:nvSpPr>
-          <p:spPr>
-            <a:xfrm>
-              <a:off x="9234339" y="2714625"/>
+            <p:cNvPr id="187" name="Reference source pages are available for 95 questions. For the scan-ro" descr="t53">
+              <a:extLst>
+                <a:ext uri="{FF2B5EF4-FFF2-40B4-BE49-F238E27FC236}">
+                  <ns2:creationId id="{9FFFBA01-BE0D-4873-B9E6-D9FEBE79D53E}"/>
+                </a:ext>
+              </a:extLst>
+            </p:cNvPr>
+            <p:cNvSpPr>
+              <a:spLocks noGrp="1"/>
+            </p:cNvSpPr>
+            <p:nvPr/>
+          </p:nvSpPr>
+          <p:spPr>
+            <a:xfrm>
+              <a:off x="9234339" y="2695575"/>
               <a:ext cx="11300637" cy="403860"/>
             </a:xfrm>
             <a:prstGeom prst="rect">
@@ -10747,21 +10747,21 @@
         </p:sp>
         <p:sp>
           <p:nvSpPr>
-            <p:cNvPr id="187" name="(107 pages) were converted into synthetic scans: each page was rasteri" descr="t53">
-              <a:extLst>
-                <a:ext uri="{FF2B5EF4-FFF2-40B4-BE49-F238E27FC236}">
-                  <ns2:creationId id="{B2CBE438-6F6F-4C3A-903D-EC60A1EB10DE}"/>
-                </a:ext>
-              </a:extLst>
-            </p:cNvPr>
-            <p:cNvSpPr>
-              <a:spLocks noGrp="1"/>
-            </p:cNvSpPr>
-            <p:nvPr/>
-          </p:nvSpPr>
-          <p:spPr>
-            <a:xfrm>
-              <a:off x="9234339" y="3028950"/>
+            <p:cNvPr id="188" name="(107 pages) were converted into synthetic scans: each page was rasteri" descr="t54">
+              <a:extLst>
+                <a:ext uri="{FF2B5EF4-FFF2-40B4-BE49-F238E27FC236}">
+                  <ns2:creationId id="{79BD9FB8-DFF0-40B5-A0D9-374AC76EE557}"/>
+                </a:ext>
+              </a:extLst>
+            </p:cNvPr>
+            <p:cNvSpPr>
+              <a:spLocks noGrp="1"/>
+            </p:cNvSpPr>
+            <p:nvPr/>
+          </p:nvSpPr>
+          <p:spPr>
+            <a:xfrm>
+              <a:off x="9234339" y="3009900"/>
               <a:ext cx="10905617" cy="403860"/>
             </a:xfrm>
             <a:prstGeom prst="rect">
@@ -10803,21 +10803,21 @@
         </p:sp>
         <p:sp>
           <p:nvSpPr>
-            <p:cNvPr id="188" name="readable text layer was removed." descr="t54">
-              <a:extLst>
-                <a:ext uri="{FF2B5EF4-FFF2-40B4-BE49-F238E27FC236}">
-                  <ns2:creationId id="{2D0580F7-8CFA-442B-8482-AB615CA5B7C8}"/>
-                </a:ext>
-              </a:extLst>
-            </p:cNvPr>
-            <p:cNvSpPr>
-              <a:spLocks noGrp="1"/>
-            </p:cNvSpPr>
-            <p:nvPr/>
-          </p:nvSpPr>
-          <p:spPr>
-            <a:xfrm>
-              <a:off x="9234339" y="3352800"/>
+            <p:cNvPr id="189" name="readable text layer was removed." descr="t55">
+              <a:extLst>
+                <a:ext uri="{FF2B5EF4-FFF2-40B4-BE49-F238E27FC236}">
+                  <ns2:creationId id="{0A3C4027-9846-41CB-8748-98B5DAECE80A}"/>
+                </a:ext>
+              </a:extLst>
+            </p:cNvPr>
+            <p:cNvSpPr>
+              <a:spLocks noGrp="1"/>
+            </p:cNvSpPr>
+            <p:nvPr/>
+          </p:nvSpPr>
+          <p:spPr>
+            <a:xfrm>
+              <a:off x="9234339" y="3333750"/>
               <a:ext cx="3466955" cy="403860"/>
             </a:xfrm>
             <a:prstGeom prst="rect">
@@ -10859,21 +10859,21 @@
         </p:sp>
         <p:sp>
           <p:nvSpPr>
-            <p:cNvPr id="189" name="Pipeline" descr="t55">
-              <a:extLst>
-                <a:ext uri="{FF2B5EF4-FFF2-40B4-BE49-F238E27FC236}">
-                  <ns2:creationId id="{182E3217-0E3F-458B-BAB7-3A6D32AEE884}"/>
-                </a:ext>
-              </a:extLst>
-            </p:cNvPr>
-            <p:cNvSpPr>
-              <a:spLocks noGrp="1"/>
-            </p:cNvSpPr>
-            <p:nvPr/>
-          </p:nvSpPr>
-          <p:spPr>
-            <a:xfrm>
-              <a:off x="9234339" y="3797332"/>
+            <p:cNvPr id="190" name="Pipeline" descr="t56">
+              <a:extLst>
+                <a:ext uri="{FF2B5EF4-FFF2-40B4-BE49-F238E27FC236}">
+                  <ns2:creationId id="{B546C388-8EA3-4BA9-9321-082716290387}"/>
+                </a:ext>
+              </a:extLst>
+            </p:cNvPr>
+            <p:cNvSpPr>
+              <a:spLocks noGrp="1"/>
+            </p:cNvSpPr>
+            <p:nvPr/>
+          </p:nvSpPr>
+          <p:spPr>
+            <a:xfrm>
+              <a:off x="9234339" y="3778282"/>
               <a:ext cx="971096" cy="419062"/>
             </a:xfrm>
             <a:prstGeom prst="rect">
@@ -10915,21 +10915,21 @@
         </p:sp>
         <p:sp>
           <p:nvSpPr>
-            <p:cNvPr id="190" name="Starting from a simple baseline, we add one capability at a time. Each" descr="t56">
-              <a:extLst>
-                <a:ext uri="{FF2B5EF4-FFF2-40B4-BE49-F238E27FC236}">
-                  <ns2:creationId id="{8CE0DE5F-FE8E-49F3-AFD4-B7B699A488B9}"/>
-                </a:ext>
-              </a:extLst>
-            </p:cNvPr>
-            <p:cNvSpPr>
-              <a:spLocks noGrp="1"/>
-            </p:cNvSpPr>
-            <p:nvPr/>
-          </p:nvSpPr>
-          <p:spPr>
-            <a:xfrm>
-              <a:off x="9234339" y="4191000"/>
+            <p:cNvPr id="191" name="Starting from a simple baseline, we add one capability at a time. Each" descr="t57">
+              <a:extLst>
+                <a:ext uri="{FF2B5EF4-FFF2-40B4-BE49-F238E27FC236}">
+                  <ns2:creationId id="{43E23A1B-7AA3-425C-BB00-2F51D9DB8DF3}"/>
+                </a:ext>
+              </a:extLst>
+            </p:cNvPr>
+            <p:cNvSpPr>
+              <a:spLocks noGrp="1"/>
+            </p:cNvSpPr>
+            <p:nvPr/>
+          </p:nvSpPr>
+          <p:spPr>
+            <a:xfrm>
+              <a:off x="9234339" y="4171950"/>
               <a:ext cx="11306125" cy="403860"/>
             </a:xfrm>
             <a:prstGeom prst="rect">
@@ -10971,21 +10971,21 @@
         </p:sp>
         <p:sp>
           <p:nvSpPr>
-            <p:cNvPr id="191" name="DOCUMENT PROCESSING" descr="t57">
-              <a:extLst>
-                <a:ext uri="{FF2B5EF4-FFF2-40B4-BE49-F238E27FC236}">
-                  <ns2:creationId id="{48AF505F-4FA7-4ACD-B05D-2748CA3BFD2A}"/>
-                </a:ext>
-              </a:extLst>
-            </p:cNvPr>
-            <p:cNvSpPr>
-              <a:spLocks noGrp="1"/>
-            </p:cNvSpPr>
-            <p:nvPr/>
-          </p:nvSpPr>
-          <p:spPr>
-            <a:xfrm>
-              <a:off x="9914334" y="6207157"/>
+            <p:cNvPr id="192" name="DOCUMENT PROCESSING" descr="t58">
+              <a:extLst>
+                <a:ext uri="{FF2B5EF4-FFF2-40B4-BE49-F238E27FC236}">
+                  <ns2:creationId id="{18939359-381D-46A5-A693-9CDE50D128E4}"/>
+                </a:ext>
+              </a:extLst>
+            </p:cNvPr>
+            <p:cNvSpPr>
+              <a:spLocks noGrp="1"/>
+            </p:cNvSpPr>
+            <p:nvPr/>
+          </p:nvSpPr>
+          <p:spPr>
+            <a:xfrm>
+              <a:off x="9914334" y="6188107"/>
               <a:ext cx="2423255" cy="373342"/>
             </a:xfrm>
             <a:prstGeom prst="rect">
@@ -11027,21 +11027,21 @@
         </p:sp>
         <p:sp>
           <p:nvSpPr>
-            <p:cNvPr id="192" name="RETRIEVAL" descr="t58">
-              <a:extLst>
-                <a:ext uri="{FF2B5EF4-FFF2-40B4-BE49-F238E27FC236}">
-                  <ns2:creationId id="{3813118F-3B1E-42B1-8670-3976402F4B77}"/>
-                </a:ext>
-              </a:extLst>
-            </p:cNvPr>
-            <p:cNvSpPr>
-              <a:spLocks noGrp="1"/>
-            </p:cNvSpPr>
-            <p:nvPr/>
-          </p:nvSpPr>
-          <p:spPr>
-            <a:xfrm>
-              <a:off x="14401949" y="6207157"/>
+            <p:cNvPr id="193" name="RETRIEVAL" descr="t59">
+              <a:extLst>
+                <a:ext uri="{FF2B5EF4-FFF2-40B4-BE49-F238E27FC236}">
+                  <ns2:creationId id="{F2612C7B-2B23-4468-B57A-87EF38230CAB}"/>
+                </a:ext>
+              </a:extLst>
+            </p:cNvPr>
+            <p:cNvSpPr>
+              <a:spLocks noGrp="1"/>
+            </p:cNvSpPr>
+            <p:nvPr/>
+          </p:nvSpPr>
+          <p:spPr>
+            <a:xfrm>
+              <a:off x="14401949" y="6188107"/>
               <a:ext cx="1129023" cy="373342"/>
             </a:xfrm>
             <a:prstGeom prst="rect">
@@ -11083,21 +11083,21 @@
         </p:sp>
         <p:sp>
           <p:nvSpPr>
-            <p:cNvPr id="193" name="ANSWERING" descr="t59">
-              <a:extLst>
-                <a:ext uri="{FF2B5EF4-FFF2-40B4-BE49-F238E27FC236}">
-                  <ns2:creationId id="{890984A0-F2DC-423D-8C9C-7D2055D6B629}"/>
-                </a:ext>
-              </a:extLst>
-            </p:cNvPr>
-            <p:cNvSpPr>
-              <a:spLocks noGrp="1"/>
-            </p:cNvSpPr>
-            <p:nvPr/>
-          </p:nvSpPr>
-          <p:spPr>
-            <a:xfrm>
-              <a:off x="17227004" y="6207157"/>
+            <p:cNvPr id="194" name="ANSWERING" descr="t60">
+              <a:extLst>
+                <a:ext uri="{FF2B5EF4-FFF2-40B4-BE49-F238E27FC236}">
+                  <ns2:creationId id="{8DA8A1E1-CDC8-4EBE-BAB2-4942C66A9EA1}"/>
+                </a:ext>
+              </a:extLst>
+            </p:cNvPr>
+            <p:cNvSpPr>
+              <a:spLocks noGrp="1"/>
+            </p:cNvSpPr>
+            <p:nvPr/>
+          </p:nvSpPr>
+          <p:spPr>
+            <a:xfrm>
+              <a:off x="17227004" y="6188107"/>
               <a:ext cx="1239926" cy="373342"/>
             </a:xfrm>
             <a:prstGeom prst="rect">
@@ -11139,21 +11139,21 @@
         </p:sp>
         <p:sp>
           <p:nvSpPr>
-            <p:cNvPr id="194" name="CITATIONS" descr="t60">
-              <a:extLst>
-                <a:ext uri="{FF2B5EF4-FFF2-40B4-BE49-F238E27FC236}">
-                  <ns2:creationId id="{167E595D-DAA9-4ACA-9FE1-54D469B48EA9}"/>
-                </a:ext>
-              </a:extLst>
-            </p:cNvPr>
-            <p:cNvSpPr>
-              <a:spLocks noGrp="1"/>
-            </p:cNvSpPr>
-            <p:nvPr/>
-          </p:nvSpPr>
-          <p:spPr>
-            <a:xfrm>
-              <a:off x="19227701" y="6207157"/>
+            <p:cNvPr id="195" name="CITATIONS" descr="t61">
+              <a:extLst>
+                <a:ext uri="{FF2B5EF4-FFF2-40B4-BE49-F238E27FC236}">
+                  <ns2:creationId id="{2C38FFE2-5230-4965-A97F-9DEB48F2C0DA}"/>
+                </a:ext>
+              </a:extLst>
+            </p:cNvPr>
+            <p:cNvSpPr>
+              <a:spLocks noGrp="1"/>
+            </p:cNvSpPr>
+            <p:nvPr/>
+          </p:nvSpPr>
+          <p:spPr>
+            <a:xfrm>
+              <a:off x="19227701" y="6188107"/>
               <a:ext cx="1079297" cy="373342"/>
             </a:xfrm>
             <a:prstGeom prst="rect">
@@ -11195,21 +11195,21 @@
         </p:sp>
         <p:sp>
           <p:nvSpPr>
-            <p:cNvPr id="195" name="Answer generation:" descr="t61">
-              <a:extLst>
-                <a:ext uri="{FF2B5EF4-FFF2-40B4-BE49-F238E27FC236}">
-                  <ns2:creationId id="{735880B0-EE68-4D57-B3A6-C0627F09CDB4}"/>
-                </a:ext>
-              </a:extLst>
-            </p:cNvPr>
-            <p:cNvSpPr>
-              <a:spLocks noGrp="1"/>
-            </p:cNvSpPr>
-            <p:nvPr/>
-          </p:nvSpPr>
-          <p:spPr>
-            <a:xfrm>
-              <a:off x="9234339" y="11430000"/>
+            <p:cNvPr id="196" name="Answer generation:" descr="t62">
+              <a:extLst>
+                <a:ext uri="{FF2B5EF4-FFF2-40B4-BE49-F238E27FC236}">
+                  <ns2:creationId id="{8CF083A1-9FBA-4A43-8630-1CA35DA365EB}"/>
+                </a:ext>
+              </a:extLst>
+            </p:cNvPr>
+            <p:cNvSpPr>
+              <a:spLocks noGrp="1"/>
+            </p:cNvSpPr>
+            <p:nvPr/>
+          </p:nvSpPr>
+          <p:spPr>
+            <a:xfrm>
+              <a:off x="9234339" y="11410950"/>
               <a:ext cx="2213617" cy="403860"/>
             </a:xfrm>
             <a:prstGeom prst="rect">
@@ -11251,21 +11251,21 @@
         </p:sp>
         <p:sp>
           <p:nvSpPr>
-            <p:cNvPr id="196" name=" A fixed GPT-5.4-mini configuration is used across variants, so change" descr="t62">
-              <a:extLst>
-                <a:ext uri="{FF2B5EF4-FFF2-40B4-BE49-F238E27FC236}">
-                  <ns2:creationId id="{DC8E9DF1-3A83-40CA-8C74-5B517C159D7D}"/>
-                </a:ext>
-              </a:extLst>
-            </p:cNvPr>
-            <p:cNvSpPr>
-              <a:spLocks noGrp="1"/>
-            </p:cNvSpPr>
-            <p:nvPr/>
-          </p:nvSpPr>
-          <p:spPr>
-            <a:xfrm>
-              <a:off x="11390858" y="11430000"/>
+            <p:cNvPr id="197" name=" A fixed GPT-5.4-mini configuration is used across variants, so change" descr="t63">
+              <a:extLst>
+                <a:ext uri="{FF2B5EF4-FFF2-40B4-BE49-F238E27FC236}">
+                  <ns2:creationId id="{E6EC64BD-CED8-440C-A294-B1B2CD296668}"/>
+                </a:ext>
+              </a:extLst>
+            </p:cNvPr>
+            <p:cNvSpPr>
+              <a:spLocks noGrp="1"/>
+            </p:cNvSpPr>
+            <p:nvPr/>
+          </p:nvSpPr>
+          <p:spPr>
+            <a:xfrm>
+              <a:off x="11390858" y="11410950"/>
               <a:ext cx="9059436" cy="403860"/>
             </a:xfrm>
             <a:prstGeom prst="rect">
@@ -11307,21 +11307,21 @@
         </p:sp>
         <p:sp>
           <p:nvSpPr>
-            <p:cNvPr id="197" name="reflect modifications to the surrounding pipeline rather than a change" descr="t63">
-              <a:extLst>
-                <a:ext uri="{FF2B5EF4-FFF2-40B4-BE49-F238E27FC236}">
-                  <ns2:creationId id="{66F24A82-61B3-422A-A735-669F04E79C75}"/>
-                </a:ext>
-              </a:extLst>
-            </p:cNvPr>
-            <p:cNvSpPr>
-              <a:spLocks noGrp="1"/>
-            </p:cNvSpPr>
-            <p:nvPr/>
-          </p:nvSpPr>
-          <p:spPr>
-            <a:xfrm>
-              <a:off x="9234339" y="11744325"/>
+            <p:cNvPr id="198" name="reflect modifications to the surrounding pipeline rather than a change" descr="t64">
+              <a:extLst>
+                <a:ext uri="{FF2B5EF4-FFF2-40B4-BE49-F238E27FC236}">
+                  <ns2:creationId id="{A8198CB9-93A1-4ED2-9C52-C71CE4BD237E}"/>
+                </a:ext>
+              </a:extLst>
+            </p:cNvPr>
+            <p:cNvSpPr>
+              <a:spLocks noGrp="1"/>
+            </p:cNvSpPr>
+            <p:nvPr/>
+          </p:nvSpPr>
+          <p:spPr>
+            <a:xfrm>
+              <a:off x="9234339" y="11725275"/>
               <a:ext cx="9677578" cy="403860"/>
             </a:xfrm>
             <a:prstGeom prst="rect">
@@ -11364,15 +11364,15 @@
       </p:grpSp>
       <p:grpSp>
         <p:nvGrpSpPr>
-          <p:cNvPr id="542" name="7. Evaluation"/>
+          <p:cNvPr id="543" name="7. Evaluation"/>
           <p:cNvGrpSpPr/>
           <p:nvPr/>
         </p:nvGrpSpPr>
         <p:grpSpPr>
           <a:xfrm>
-            <a:off x="9072414" y="12323713"/>
+            <a:off x="9072414" y="12305258"/>
             <a:ext cx="11731377" cy="3833366"/>
-            <a:chOff x="9072414" y="12323713"/>
+            <a:chOff x="9072414" y="12305258"/>
             <a:chExt cx="11731377" cy="3833366"/>
           </a:xfrm>
         </p:grpSpPr>
@@ -11381,18 +11381,18 @@
             <p:cNvPr id="35" name="Panel H2" descr="s34">
               <a:extLst>
                 <a:ext uri="{FF2B5EF4-FFF2-40B4-BE49-F238E27FC236}">
-                  <ns2:creationId id="{359B52E0-4D12-4146-B3CA-7C965A632C8F}"/>
-                </a:ext>
-              </a:extLst>
-            </p:cNvPr>
-            <p:cNvSpPr>
-              <a:spLocks noGrp="1"/>
-            </p:cNvSpPr>
-            <p:nvPr/>
-          </p:nvSpPr>
-          <p:spPr>
-            <a:xfrm>
-              <a:off x="9072414" y="12323713"/>
+                  <ns2:creationId id="{940C6DBB-7251-4871-90DF-09E628356B0C}"/>
+                </a:ext>
+              </a:extLst>
+            </p:cNvPr>
+            <p:cNvSpPr>
+              <a:spLocks noGrp="1"/>
+            </p:cNvSpPr>
+            <p:nvPr/>
+          </p:nvSpPr>
+          <p:spPr>
+            <a:xfrm>
+              <a:off x="9072414" y="12305258"/>
               <a:ext cx="11731377" cy="517327"/>
             </a:xfrm>
             <a:custGeom>
@@ -11463,18 +11463,18 @@
             <p:cNvPr id="36" name="Panel content" descr="s35">
               <a:extLst>
                 <a:ext uri="{FF2B5EF4-FFF2-40B4-BE49-F238E27FC236}">
-                  <ns2:creationId id="{3D949C51-51BF-4BD8-A1E2-4F35D700ED91}"/>
-                </a:ext>
-              </a:extLst>
-            </p:cNvPr>
-            <p:cNvSpPr>
-              <a:spLocks noGrp="1"/>
-            </p:cNvSpPr>
-            <p:nvPr/>
-          </p:nvSpPr>
-          <p:spPr>
-            <a:xfrm>
-              <a:off x="9072414" y="12841039"/>
+                  <ns2:creationId id="{B949D31A-58BC-4AB3-AC15-DC34604859AC}"/>
+                </a:ext>
+              </a:extLst>
+            </p:cNvPr>
+            <p:cNvSpPr>
+              <a:spLocks noGrp="1"/>
+            </p:cNvSpPr>
+            <p:nvPr/>
+          </p:nvSpPr>
+          <p:spPr>
+            <a:xfrm>
+              <a:off x="9072414" y="12822585"/>
               <a:ext cx="11731377" cy="3316039"/>
             </a:xfrm>
             <a:custGeom>
@@ -11539,18 +11539,18 @@
             <p:cNvPr id="37" name="Panel doc" descr="s36">
               <a:extLst>
                 <a:ext uri="{FF2B5EF4-FFF2-40B4-BE49-F238E27FC236}">
-                  <ns2:creationId id="{C16A004A-7030-4750-98CD-1EA65805FF14}"/>
-                </a:ext>
-              </a:extLst>
-            </p:cNvPr>
-            <p:cNvSpPr>
-              <a:spLocks noGrp="1"/>
-            </p:cNvSpPr>
-            <p:nvPr/>
-          </p:nvSpPr>
-          <p:spPr>
-            <a:xfrm>
-              <a:off x="9234339" y="14039106"/>
+                  <ns2:creationId id="{7DC740D0-55C9-4C09-8008-CD843E98267F}"/>
+                </a:ext>
+              </a:extLst>
+            </p:cNvPr>
+            <p:cNvSpPr>
+              <a:spLocks noGrp="1"/>
+            </p:cNvSpPr>
+            <p:nvPr/>
+          </p:nvSpPr>
+          <p:spPr>
+            <a:xfrm>
+              <a:off x="9234339" y="14020651"/>
               <a:ext cx="3739009" cy="1984623"/>
             </a:xfrm>
             <a:custGeom>
@@ -11613,18 +11613,18 @@
             <p:cNvPr id="38" name="Panel retr" descr="s37">
               <a:extLst>
                 <a:ext uri="{FF2B5EF4-FFF2-40B4-BE49-F238E27FC236}">
-                  <ns2:creationId id="{8DF0DFC8-B8A3-4575-8768-C45905195701}"/>
-                </a:ext>
-              </a:extLst>
-            </p:cNvPr>
-            <p:cNvSpPr>
-              <a:spLocks noGrp="1"/>
-            </p:cNvSpPr>
-            <p:nvPr/>
-          </p:nvSpPr>
-          <p:spPr>
-            <a:xfrm>
-              <a:off x="13068598" y="14039106"/>
+                  <ns2:creationId id="{8B8500B7-6157-4F25-B0C9-76DF3D19F053}"/>
+                </a:ext>
+              </a:extLst>
+            </p:cNvPr>
+            <p:cNvSpPr>
+              <a:spLocks noGrp="1"/>
+            </p:cNvSpPr>
+            <p:nvPr/>
+          </p:nvSpPr>
+          <p:spPr>
+            <a:xfrm>
+              <a:off x="13068598" y="14020651"/>
               <a:ext cx="3739009" cy="1984623"/>
             </a:xfrm>
             <a:custGeom>
@@ -11687,18 +11687,18 @@
             <p:cNvPr id="39" name="Panel ans" descr="s38">
               <a:extLst>
                 <a:ext uri="{FF2B5EF4-FFF2-40B4-BE49-F238E27FC236}">
-                  <ns2:creationId id="{E5F7F5A0-8889-4941-B805-B1CA9D185E4F}"/>
-                </a:ext>
-              </a:extLst>
-            </p:cNvPr>
-            <p:cNvSpPr>
-              <a:spLocks noGrp="1"/>
-            </p:cNvSpPr>
-            <p:nvPr/>
-          </p:nvSpPr>
-          <p:spPr>
-            <a:xfrm>
-              <a:off x="16902857" y="14039106"/>
+                  <ns2:creationId id="{D6857FC3-377F-4037-9D18-A697F96B3C14}"/>
+                </a:ext>
+              </a:extLst>
+            </p:cNvPr>
+            <p:cNvSpPr>
+              <a:spLocks noGrp="1"/>
+            </p:cNvSpPr>
+            <p:nvPr/>
+          </p:nvSpPr>
+          <p:spPr>
+            <a:xfrm>
+              <a:off x="16902857" y="14020651"/>
               <a:ext cx="3739009" cy="1984623"/>
             </a:xfrm>
             <a:custGeom>
@@ -11758,21 +11758,21 @@
         </p:sp>
         <p:sp>
           <p:nvSpPr>
-            <p:cNvPr id="198" name="7. Evaluation" descr="t64">
-              <a:extLst>
-                <a:ext uri="{FF2B5EF4-FFF2-40B4-BE49-F238E27FC236}">
-                  <ns2:creationId id="{CABBC855-954C-43D6-AC83-3B9F5C8BEF0E}"/>
-                </a:ext>
-              </a:extLst>
-            </p:cNvPr>
-            <p:cNvSpPr>
-              <a:spLocks noGrp="1"/>
-            </p:cNvSpPr>
-            <p:nvPr/>
-          </p:nvSpPr>
-          <p:spPr>
-            <a:xfrm>
-              <a:off x="9205764" y="12369832"/>
+            <p:cNvPr id="199" name="7. Evaluation" descr="t65">
+              <a:extLst>
+                <a:ext uri="{FF2B5EF4-FFF2-40B4-BE49-F238E27FC236}">
+                  <ns2:creationId id="{303B87CE-C761-4781-ACED-39237D709E08}"/>
+                </a:ext>
+              </a:extLst>
+            </p:cNvPr>
+            <p:cNvSpPr>
+              <a:spLocks noGrp="1"/>
+            </p:cNvSpPr>
+            <p:nvPr/>
+          </p:nvSpPr>
+          <p:spPr>
+            <a:xfrm>
+              <a:off x="9205764" y="12350782"/>
               <a:ext cx="1773403" cy="464782"/>
             </a:xfrm>
             <a:prstGeom prst="rect">
@@ -11814,21 +11814,21 @@
         </p:sp>
         <p:sp>
           <p:nvSpPr>
-            <p:cNvPr id="199" name="A correct answer does not necessarily imply good citations. A system m" descr="t65">
-              <a:extLst>
-                <a:ext uri="{FF2B5EF4-FFF2-40B4-BE49-F238E27FC236}">
-                  <ns2:creationId id="{94394B6D-8A60-44AA-BF7C-692B41BC42F6}"/>
-                </a:ext>
-              </a:extLst>
-            </p:cNvPr>
-            <p:cNvSpPr>
-              <a:spLocks noGrp="1"/>
-            </p:cNvSpPr>
-            <p:nvPr/>
-          </p:nvSpPr>
-          <p:spPr>
-            <a:xfrm>
-              <a:off x="9234339" y="12944475"/>
+            <p:cNvPr id="200" name="A correct answer does not necessarily imply good citations. A system m" descr="t66">
+              <a:extLst>
+                <a:ext uri="{FF2B5EF4-FFF2-40B4-BE49-F238E27FC236}">
+                  <ns2:creationId id="{3C03BFF7-5E18-4FE7-830E-AC1A0DEC48A8}"/>
+                </a:ext>
+              </a:extLst>
+            </p:cNvPr>
+            <p:cNvSpPr>
+              <a:spLocks noGrp="1"/>
+            </p:cNvSpPr>
+            <p:nvPr/>
+          </p:nvSpPr>
+          <p:spPr>
+            <a:xfrm>
+              <a:off x="9234339" y="12925425"/>
               <a:ext cx="10940968" cy="403861"/>
             </a:xfrm>
             <a:prstGeom prst="rect">
@@ -11870,21 +11870,21 @@
         </p:sp>
         <p:sp>
           <p:nvSpPr>
-            <p:cNvPr id="200" name="citing irrelevant pages, or it may cite only part of the evidence requ" descr="t66">
-              <a:extLst>
-                <a:ext uri="{FF2B5EF4-FFF2-40B4-BE49-F238E27FC236}">
-                  <ns2:creationId id="{0AEB5926-E026-4856-97DD-FF653195FFB6}"/>
-                </a:ext>
-              </a:extLst>
-            </p:cNvPr>
-            <p:cNvSpPr>
-              <a:spLocks noGrp="1"/>
-            </p:cNvSpPr>
-            <p:nvPr/>
-          </p:nvSpPr>
-          <p:spPr>
-            <a:xfrm>
-              <a:off x="9234339" y="13268325"/>
+            <p:cNvPr id="201" name="citing irrelevant pages, or it may cite only part of the evidence requ" descr="t67">
+              <a:extLst>
+                <a:ext uri="{FF2B5EF4-FFF2-40B4-BE49-F238E27FC236}">
+                  <ns2:creationId id="{93F7FE5C-7BB6-4F3A-B7E3-F822D6A66488}"/>
+                </a:ext>
+              </a:extLst>
+            </p:cNvPr>
+            <p:cNvSpPr>
+              <a:spLocks noGrp="1"/>
+            </p:cNvSpPr>
+            <p:nvPr/>
+          </p:nvSpPr>
+          <p:spPr>
+            <a:xfrm>
+              <a:off x="9234339" y="13249275"/>
               <a:ext cx="11210111" cy="403861"/>
             </a:xfrm>
             <a:prstGeom prst="rect">
@@ -11926,21 +11926,21 @@
         </p:sp>
         <p:sp>
           <p:nvSpPr>
-            <p:cNvPr id="201" name="evaluate answer quality and citation quality separately." descr="t67">
-              <a:extLst>
-                <a:ext uri="{FF2B5EF4-FFF2-40B4-BE49-F238E27FC236}">
-                  <ns2:creationId id="{C36F1629-AD6D-4590-AD35-CC249BDE9702}"/>
-                </a:ext>
-              </a:extLst>
-            </p:cNvPr>
-            <p:cNvSpPr>
-              <a:spLocks noGrp="1"/>
-            </p:cNvSpPr>
-            <p:nvPr/>
-          </p:nvSpPr>
-          <p:spPr>
-            <a:xfrm>
-              <a:off x="9234339" y="13582650"/>
+            <p:cNvPr id="202" name="evaluate answer quality and citation quality separately." descr="t68">
+              <a:extLst>
+                <a:ext uri="{FF2B5EF4-FFF2-40B4-BE49-F238E27FC236}">
+                  <ns2:creationId id="{031D79D1-2931-4628-BBFC-CA8CFB3B6D50}"/>
+                </a:ext>
+              </a:extLst>
+            </p:cNvPr>
+            <p:cNvSpPr>
+              <a:spLocks noGrp="1"/>
+            </p:cNvSpPr>
+            <p:nvPr/>
+          </p:nvSpPr>
+          <p:spPr>
+            <a:xfrm>
+              <a:off x="9234339" y="13563600"/>
               <a:ext cx="5756317" cy="403861"/>
             </a:xfrm>
             <a:prstGeom prst="rect">
@@ -11982,21 +11982,21 @@
         </p:sp>
         <p:sp>
           <p:nvSpPr>
-            <p:cNvPr id="202" name="Answer quality" descr="t68">
-              <a:extLst>
-                <a:ext uri="{FF2B5EF4-FFF2-40B4-BE49-F238E27FC236}">
-                  <ns2:creationId id="{48E785CE-1278-40A7-9F90-C6EB42D6D99E}"/>
-                </a:ext>
-              </a:extLst>
-            </p:cNvPr>
-            <p:cNvSpPr>
-              <a:spLocks noGrp="1"/>
-            </p:cNvSpPr>
-            <p:nvPr/>
-          </p:nvSpPr>
-          <p:spPr>
-            <a:xfrm>
-              <a:off x="9329589" y="14112906"/>
+            <p:cNvPr id="203" name="Answer quality" descr="t69">
+              <a:extLst>
+                <a:ext uri="{FF2B5EF4-FFF2-40B4-BE49-F238E27FC236}">
+                  <ns2:creationId id="{50F3F8B9-2AEC-4CC7-AEC4-A048A47A06DF}"/>
+                </a:ext>
+              </a:extLst>
+            </p:cNvPr>
+            <p:cNvSpPr>
+              <a:spLocks noGrp="1"/>
+            </p:cNvSpPr>
+            <p:nvPr/>
+          </p:nvSpPr>
+          <p:spPr>
+            <a:xfrm>
+              <a:off x="9329589" y="14093856"/>
               <a:ext cx="1758371" cy="419063"/>
             </a:xfrm>
             <a:prstGeom prst="rect">
@@ -12038,21 +12038,21 @@
         </p:sp>
         <p:sp>
           <p:nvSpPr>
-            <p:cNvPr id="203" name="Is the generated answer correct?" descr="t69">
-              <a:extLst>
-                <a:ext uri="{FF2B5EF4-FFF2-40B4-BE49-F238E27FC236}">
-                  <ns2:creationId id="{2E12F8AE-9763-4570-8444-A2D06385DC5A}"/>
-                </a:ext>
-              </a:extLst>
-            </p:cNvPr>
-            <p:cNvSpPr>
-              <a:spLocks noGrp="1"/>
-            </p:cNvSpPr>
-            <p:nvPr/>
-          </p:nvSpPr>
-          <p:spPr>
-            <a:xfrm>
-              <a:off x="9314349" y="14525625"/>
+            <p:cNvPr id="204" name="Is the generated answer correct?" descr="t70">
+              <a:extLst>
+                <a:ext uri="{FF2B5EF4-FFF2-40B4-BE49-F238E27FC236}">
+                  <ns2:creationId id="{5CBF4A23-6DBE-4333-A51D-9FD8646192F8}"/>
+                </a:ext>
+              </a:extLst>
+            </p:cNvPr>
+            <p:cNvSpPr>
+              <a:spLocks noGrp="1"/>
+            </p:cNvSpPr>
+            <p:nvPr/>
+          </p:nvSpPr>
+          <p:spPr>
+            <a:xfrm>
+              <a:off x="9314349" y="14506575"/>
               <a:ext cx="3570284" cy="403861"/>
             </a:xfrm>
             <a:prstGeom prst="rect">
@@ -12094,21 +12094,21 @@
         </p:sp>
         <p:sp>
           <p:nvSpPr>
-            <p:cNvPr id="204" name="Q = 0.7 × structured score" descr="t70">
-              <a:extLst>
-                <a:ext uri="{FF2B5EF4-FFF2-40B4-BE49-F238E27FC236}">
-                  <ns2:creationId id="{A4ED3962-37D3-4613-93F2-706ABF16BEA9}"/>
-                </a:ext>
-              </a:extLst>
-            </p:cNvPr>
-            <p:cNvSpPr>
-              <a:spLocks noGrp="1"/>
-            </p:cNvSpPr>
-            <p:nvPr/>
-          </p:nvSpPr>
-          <p:spPr>
-            <a:xfrm>
-              <a:off x="9329589" y="14944725"/>
+            <p:cNvPr id="205" name="Q = 0.7 × structured score" descr="t71">
+              <a:extLst>
+                <a:ext uri="{FF2B5EF4-FFF2-40B4-BE49-F238E27FC236}">
+                  <ns2:creationId id="{A656AB94-4E2C-478E-9C38-D7B9933973FD}"/>
+                </a:ext>
+              </a:extLst>
+            </p:cNvPr>
+            <p:cNvSpPr>
+              <a:spLocks noGrp="1"/>
+            </p:cNvSpPr>
+            <p:nvPr/>
+          </p:nvSpPr>
+          <p:spPr>
+            <a:xfrm>
+              <a:off x="9329589" y="14925675"/>
               <a:ext cx="2869243" cy="403861"/>
             </a:xfrm>
             <a:prstGeom prst="rect">
@@ -12150,21 +12150,21 @@
         </p:sp>
         <p:sp>
           <p:nvSpPr>
-            <p:cNvPr id="205" name="+ 0.3 × free-text score" descr="t71">
-              <a:extLst>
-                <a:ext uri="{FF2B5EF4-FFF2-40B4-BE49-F238E27FC236}">
-                  <ns2:creationId id="{9E5F5A46-C2BD-4319-9E94-4DB70DC82E79}"/>
-                </a:ext>
-              </a:extLst>
-            </p:cNvPr>
-            <p:cNvSpPr>
-              <a:spLocks noGrp="1"/>
-            </p:cNvSpPr>
-            <p:nvPr/>
-          </p:nvSpPr>
-          <p:spPr>
-            <a:xfrm>
-              <a:off x="9329589" y="15259050"/>
+            <p:cNvPr id="206" name="+ 0.3 × free-text score" descr="t72">
+              <a:extLst>
+                <a:ext uri="{FF2B5EF4-FFF2-40B4-BE49-F238E27FC236}">
+                  <ns2:creationId id="{CAEC8E54-392D-49BD-98A6-614D02E27719}"/>
+                </a:ext>
+              </a:extLst>
+            </p:cNvPr>
+            <p:cNvSpPr>
+              <a:spLocks noGrp="1"/>
+            </p:cNvSpPr>
+            <p:nvPr/>
+          </p:nvSpPr>
+          <p:spPr>
+            <a:xfrm>
+              <a:off x="9329589" y="15240000"/>
               <a:ext cx="2515367" cy="403861"/>
             </a:xfrm>
             <a:prstGeom prst="rect">
@@ -12206,21 +12206,21 @@
         </p:sp>
         <p:sp>
           <p:nvSpPr>
-            <p:cNvPr id="206" name="Citation precision" descr="t72">
-              <a:extLst>
-                <a:ext uri="{FF2B5EF4-FFF2-40B4-BE49-F238E27FC236}">
-                  <ns2:creationId id="{C322048A-D82E-4FDE-85BB-9A9D562A18BE}"/>
-                </a:ext>
-              </a:extLst>
-            </p:cNvPr>
-            <p:cNvSpPr>
-              <a:spLocks noGrp="1"/>
-            </p:cNvSpPr>
-            <p:nvPr/>
-          </p:nvSpPr>
-          <p:spPr>
-            <a:xfrm>
-              <a:off x="13163848" y="14112906"/>
+            <p:cNvPr id="207" name="Citation precision" descr="t73">
+              <a:extLst>
+                <a:ext uri="{FF2B5EF4-FFF2-40B4-BE49-F238E27FC236}">
+                  <ns2:creationId id="{6F47D281-C705-4D37-B051-C1D92D76A8B5}"/>
+                </a:ext>
+              </a:extLst>
+            </p:cNvPr>
+            <p:cNvSpPr>
+              <a:spLocks noGrp="1"/>
+            </p:cNvSpPr>
+            <p:nvPr/>
+          </p:nvSpPr>
+          <p:spPr>
+            <a:xfrm>
+              <a:off x="13163848" y="14093856"/>
               <a:ext cx="2086614" cy="419063"/>
             </a:xfrm>
             <a:prstGeom prst="rect">
@@ -12262,21 +12262,21 @@
         </p:sp>
         <p:sp>
           <p:nvSpPr>
-            <p:cNvPr id="207" name="Are the cited pages actually" descr="t73">
-              <a:extLst>
-                <a:ext uri="{FF2B5EF4-FFF2-40B4-BE49-F238E27FC236}">
-                  <ns2:creationId id="{819FBFB7-FEB9-44D5-AF98-0F9522A09745}"/>
-                </a:ext>
-              </a:extLst>
-            </p:cNvPr>
-            <p:cNvSpPr>
-              <a:spLocks noGrp="1"/>
-            </p:cNvSpPr>
-            <p:nvPr/>
-          </p:nvSpPr>
-          <p:spPr>
-            <a:xfrm>
-              <a:off x="13148608" y="14525625"/>
+            <p:cNvPr id="208" name="Are the cited pages actually" descr="t74">
+              <a:extLst>
+                <a:ext uri="{FF2B5EF4-FFF2-40B4-BE49-F238E27FC236}">
+                  <ns2:creationId id="{5DB96BC2-7411-4152-B3C3-BF103B98D7CA}"/>
+                </a:ext>
+              </a:extLst>
+            </p:cNvPr>
+            <p:cNvSpPr>
+              <a:spLocks noGrp="1"/>
+            </p:cNvSpPr>
+            <p:nvPr/>
+          </p:nvSpPr>
+          <p:spPr>
+            <a:xfrm>
+              <a:off x="13148608" y="14506575"/>
               <a:ext cx="3010367" cy="403861"/>
             </a:xfrm>
             <a:prstGeom prst="rect">
@@ -12318,21 +12318,21 @@
         </p:sp>
         <p:sp>
           <p:nvSpPr>
-            <p:cNvPr id="208" name="relevant?" descr="t74">
-              <a:extLst>
-                <a:ext uri="{FF2B5EF4-FFF2-40B4-BE49-F238E27FC236}">
-                  <ns2:creationId id="{0D8664EC-40BE-4E93-9388-39C71CCFB43D}"/>
-                </a:ext>
-              </a:extLst>
-            </p:cNvPr>
-            <p:cNvSpPr>
-              <a:spLocks noGrp="1"/>
-            </p:cNvSpPr>
-            <p:nvPr/>
-          </p:nvSpPr>
-          <p:spPr>
-            <a:xfrm>
-              <a:off x="13148608" y="14849475"/>
+            <p:cNvPr id="209" name="relevant?" descr="t75">
+              <a:extLst>
+                <a:ext uri="{FF2B5EF4-FFF2-40B4-BE49-F238E27FC236}">
+                  <ns2:creationId id="{7E47C846-8E17-4488-8B2C-DC2065235209}"/>
+                </a:ext>
+              </a:extLst>
+            </p:cNvPr>
+            <p:cNvSpPr>
+              <a:spLocks noGrp="1"/>
+            </p:cNvSpPr>
+            <p:nvPr/>
+          </p:nvSpPr>
+          <p:spPr>
+            <a:xfrm>
+              <a:off x="13148608" y="14830425"/>
               <a:ext cx="1100787" cy="403861"/>
             </a:xfrm>
             <a:prstGeom prst="rect">
@@ -12374,21 +12374,21 @@
         </p:sp>
         <p:sp>
           <p:nvSpPr>
-            <p:cNvPr id="209" name="Share of cited pages that support" descr="t75">
-              <a:extLst>
-                <a:ext uri="{FF2B5EF4-FFF2-40B4-BE49-F238E27FC236}">
-                  <ns2:creationId id="{40D7B268-946B-4DF0-9EA1-C36989E68DF7}"/>
-                </a:ext>
-              </a:extLst>
-            </p:cNvPr>
-            <p:cNvSpPr>
-              <a:spLocks noGrp="1"/>
-            </p:cNvSpPr>
-            <p:nvPr/>
-          </p:nvSpPr>
-          <p:spPr>
-            <a:xfrm>
-              <a:off x="13163848" y="15259050"/>
+            <p:cNvPr id="210" name="Share of cited pages that support" descr="t76">
+              <a:extLst>
+                <a:ext uri="{FF2B5EF4-FFF2-40B4-BE49-F238E27FC236}">
+                  <ns2:creationId id="{967169F8-2DF3-407D-9198-F8F4B92E95B1}"/>
+                </a:ext>
+              </a:extLst>
+            </p:cNvPr>
+            <p:cNvSpPr>
+              <a:spLocks noGrp="1"/>
+            </p:cNvSpPr>
+            <p:nvPr/>
+          </p:nvSpPr>
+          <p:spPr>
+            <a:xfrm>
+              <a:off x="13163848" y="15240000"/>
               <a:ext cx="3525481" cy="403861"/>
             </a:xfrm>
             <a:prstGeom prst="rect">
@@ -12430,21 +12430,21 @@
         </p:sp>
         <p:sp>
           <p:nvSpPr>
-            <p:cNvPr id="210" name="the answer." descr="t76">
-              <a:extLst>
-                <a:ext uri="{FF2B5EF4-FFF2-40B4-BE49-F238E27FC236}">
-                  <ns2:creationId id="{60DF114D-5489-4074-81DC-777D47FA0F6D}"/>
-                </a:ext>
-              </a:extLst>
-            </p:cNvPr>
-            <p:cNvSpPr>
-              <a:spLocks noGrp="1"/>
-            </p:cNvSpPr>
-            <p:nvPr/>
-          </p:nvSpPr>
-          <p:spPr>
-            <a:xfrm>
-              <a:off x="13163848" y="15582900"/>
+            <p:cNvPr id="211" name="the answer." descr="t77">
+              <a:extLst>
+                <a:ext uri="{FF2B5EF4-FFF2-40B4-BE49-F238E27FC236}">
+                  <ns2:creationId id="{E4566832-0745-4026-8180-47EBEB9088B4}"/>
+                </a:ext>
+              </a:extLst>
+            </p:cNvPr>
+            <p:cNvSpPr>
+              <a:spLocks noGrp="1"/>
+            </p:cNvSpPr>
+            <p:nvPr/>
+          </p:nvSpPr>
+          <p:spPr>
+            <a:xfrm>
+              <a:off x="13163848" y="15563850"/>
               <a:ext cx="1256847" cy="403861"/>
             </a:xfrm>
             <a:prstGeom prst="rect">
@@ -12486,21 +12486,21 @@
         </p:sp>
         <p:sp>
           <p:nvSpPr>
-            <p:cNvPr id="211" name="Citation recall" descr="t77">
-              <a:extLst>
-                <a:ext uri="{FF2B5EF4-FFF2-40B4-BE49-F238E27FC236}">
-                  <ns2:creationId id="{C1D02AB5-A234-4505-A0F3-8664F58435B7}"/>
-                </a:ext>
-              </a:extLst>
-            </p:cNvPr>
-            <p:cNvSpPr>
-              <a:spLocks noGrp="1"/>
-            </p:cNvSpPr>
-            <p:nvPr/>
-          </p:nvSpPr>
-          <p:spPr>
-            <a:xfrm>
-              <a:off x="16998107" y="14112906"/>
+            <p:cNvPr id="212" name="Citation recall" descr="t78">
+              <a:extLst>
+                <a:ext uri="{FF2B5EF4-FFF2-40B4-BE49-F238E27FC236}">
+                  <ns2:creationId id="{CD416F8F-BDAA-43C8-BDC3-25529D7EA0B6}"/>
+                </a:ext>
+              </a:extLst>
+            </p:cNvPr>
+            <p:cNvSpPr>
+              <a:spLocks noGrp="1"/>
+            </p:cNvSpPr>
+            <p:nvPr/>
+          </p:nvSpPr>
+          <p:spPr>
+            <a:xfrm>
+              <a:off x="16998107" y="14093856"/>
               <a:ext cx="1666625" cy="419063"/>
             </a:xfrm>
             <a:prstGeom prst="rect">
@@ -12542,21 +12542,21 @@
         </p:sp>
         <p:sp>
           <p:nvSpPr>
-            <p:cNvPr id="212" name="Did the system cite all required" descr="t78">
-              <a:extLst>
-                <a:ext uri="{FF2B5EF4-FFF2-40B4-BE49-F238E27FC236}">
-                  <ns2:creationId id="{440081F8-0920-4869-BDB4-411247657E07}"/>
-                </a:ext>
-              </a:extLst>
-            </p:cNvPr>
-            <p:cNvSpPr>
-              <a:spLocks noGrp="1"/>
-            </p:cNvSpPr>
-            <p:nvPr/>
-          </p:nvSpPr>
-          <p:spPr>
-            <a:xfrm>
-              <a:off x="16982867" y="14525625"/>
+            <p:cNvPr id="213" name="Did the system cite all required" descr="t79">
+              <a:extLst>
+                <a:ext uri="{FF2B5EF4-FFF2-40B4-BE49-F238E27FC236}">
+                  <ns2:creationId id="{E871D556-5F92-4CE1-85BB-EE4822FCD5E2}"/>
+                </a:ext>
+              </a:extLst>
+            </p:cNvPr>
+            <p:cNvSpPr>
+              <a:spLocks noGrp="1"/>
+            </p:cNvSpPr>
+            <p:nvPr/>
+          </p:nvSpPr>
+          <p:spPr>
+            <a:xfrm>
+              <a:off x="16982867" y="14506575"/>
               <a:ext cx="3363936" cy="403861"/>
             </a:xfrm>
             <a:prstGeom prst="rect">
@@ -12598,21 +12598,21 @@
         </p:sp>
         <p:sp>
           <p:nvSpPr>
-            <p:cNvPr id="213" name="evidence?" descr="t79">
-              <a:extLst>
-                <a:ext uri="{FF2B5EF4-FFF2-40B4-BE49-F238E27FC236}">
-                  <ns2:creationId id="{0A3638F2-2920-4737-84B0-64CEE2F8DA3F}"/>
-                </a:ext>
-              </a:extLst>
-            </p:cNvPr>
-            <p:cNvSpPr>
-              <a:spLocks noGrp="1"/>
-            </p:cNvSpPr>
-            <p:nvPr/>
-          </p:nvSpPr>
-          <p:spPr>
-            <a:xfrm>
-              <a:off x="16982867" y="14849475"/>
+            <p:cNvPr id="214" name="evidence?" descr="t80">
+              <a:extLst>
+                <a:ext uri="{FF2B5EF4-FFF2-40B4-BE49-F238E27FC236}">
+                  <ns2:creationId id="{92F4DDF6-E0C3-42DA-AB8F-359847629703}"/>
+                </a:ext>
+              </a:extLst>
+            </p:cNvPr>
+            <p:cNvSpPr>
+              <a:spLocks noGrp="1"/>
+            </p:cNvSpPr>
+            <p:nvPr/>
+          </p:nvSpPr>
+          <p:spPr>
+            <a:xfrm>
+              <a:off x="16982867" y="14830425"/>
               <a:ext cx="1191312" cy="403861"/>
             </a:xfrm>
             <a:prstGeom prst="rect">
@@ -12654,21 +12654,21 @@
         </p:sp>
         <p:sp>
           <p:nvSpPr>
-            <p:cNvPr id="214" name="Share of annotated supporting" descr="t80">
-              <a:extLst>
-                <a:ext uri="{FF2B5EF4-FFF2-40B4-BE49-F238E27FC236}">
-                  <ns2:creationId id="{040DF4D9-01CE-4BA3-B451-2F7FA1EDCDEF}"/>
-                </a:ext>
-              </a:extLst>
-            </p:cNvPr>
-            <p:cNvSpPr>
-              <a:spLocks noGrp="1"/>
-            </p:cNvSpPr>
-            <p:nvPr/>
-          </p:nvSpPr>
-          <p:spPr>
-            <a:xfrm>
-              <a:off x="16998107" y="15259050"/>
+            <p:cNvPr id="215" name="Share of annotated supporting" descr="t81">
+              <a:extLst>
+                <a:ext uri="{FF2B5EF4-FFF2-40B4-BE49-F238E27FC236}">
+                  <ns2:creationId id="{7FEBC677-D6E0-4B8D-9FFC-265930BBCB43}"/>
+                </a:ext>
+              </a:extLst>
+            </p:cNvPr>
+            <p:cNvSpPr>
+              <a:spLocks noGrp="1"/>
+            </p:cNvSpPr>
+            <p:nvPr/>
+          </p:nvSpPr>
+          <p:spPr>
+            <a:xfrm>
+              <a:off x="16998107" y="15240000"/>
               <a:ext cx="3216714" cy="403861"/>
             </a:xfrm>
             <a:prstGeom prst="rect">
@@ -12710,21 +12710,21 @@
         </p:sp>
         <p:sp>
           <p:nvSpPr>
-            <p:cNvPr id="215" name="pages that were cited." descr="t81">
-              <a:extLst>
-                <a:ext uri="{FF2B5EF4-FFF2-40B4-BE49-F238E27FC236}">
-                  <ns2:creationId id="{F3991236-2E93-4E0D-BF74-E536A9AB4342}"/>
-                </a:ext>
-              </a:extLst>
-            </p:cNvPr>
-            <p:cNvSpPr>
-              <a:spLocks noGrp="1"/>
-            </p:cNvSpPr>
-            <p:nvPr/>
-          </p:nvSpPr>
-          <p:spPr>
-            <a:xfrm>
-              <a:off x="16998107" y="15582900"/>
+            <p:cNvPr id="216" name="pages that were cited." descr="t82">
+              <a:extLst>
+                <a:ext uri="{FF2B5EF4-FFF2-40B4-BE49-F238E27FC236}">
+                  <ns2:creationId id="{C5F255A5-7C48-48ED-AF74-066DE9BB8B38}"/>
+                </a:ext>
+              </a:extLst>
+            </p:cNvPr>
+            <p:cNvSpPr>
+              <a:spLocks noGrp="1"/>
+            </p:cNvSpPr>
+            <p:nvPr/>
+          </p:nvSpPr>
+          <p:spPr>
+            <a:xfrm>
+              <a:off x="16998107" y="15563850"/>
               <a:ext cx="2358399" cy="403861"/>
             </a:xfrm>
             <a:prstGeom prst="rect">
@@ -12767,7 +12767,7 @@
       </p:grpSp>
       <p:grpSp>
         <p:nvGrpSpPr>
-          <p:cNvPr id="541" name="8. Results"/>
+          <p:cNvPr id="542" name="8. Results: Pipeline performance"/>
           <p:cNvGrpSpPr/>
           <p:nvPr/>
         </p:nvGrpSpPr>
@@ -12784,7 +12784,7 @@
             <p:cNvPr id="40" name="Panel H2" descr="s39">
               <a:extLst>
                 <a:ext uri="{FF2B5EF4-FFF2-40B4-BE49-F238E27FC236}">
-                  <ns2:creationId id="{92EC0D82-62D5-4CF9-958B-09D121CF8829}"/>
+                  <ns2:creationId id="{F4AC9D76-3225-4181-9A6C-167CF36A3AA6}"/>
                 </a:ext>
               </a:extLst>
             </p:cNvPr>
@@ -12866,7 +12866,7 @@
             <p:cNvPr id="41" name="Panel content" descr="s40">
               <a:extLst>
                 <a:ext uri="{FF2B5EF4-FFF2-40B4-BE49-F238E27FC236}">
-                  <ns2:creationId id="{B5D933CF-344F-4674-816F-B6FF961706A9}"/>
+                  <ns2:creationId id="{3DAEF154-C38C-4CC8-91AE-1342D154C9F3}"/>
                 </a:ext>
               </a:extLst>
             </p:cNvPr>
@@ -12942,7 +12942,7 @@
             <p:cNvPr id="69" name="Chart grid" descr="s68">
               <a:extLst>
                 <a:ext uri="{FF2B5EF4-FFF2-40B4-BE49-F238E27FC236}">
-                  <ns2:creationId id="{258A5556-D823-441E-8C77-970A26035AF9}"/>
+                  <ns2:creationId id="{E99D9AEE-1C67-488F-853E-34A63C6A572E}"/>
                 </a:ext>
               </a:extLst>
             </p:cNvPr>
@@ -12981,7 +12981,7 @@
             <p:cNvPr id="70" name="Chart grid" descr="s69">
               <a:extLst>
                 <a:ext uri="{FF2B5EF4-FFF2-40B4-BE49-F238E27FC236}">
-                  <ns2:creationId id="{EE05BBC5-05FE-4EAD-A8B4-6AF8C1295F7E}"/>
+                  <ns2:creationId id="{DE166EF9-6DD7-4685-869A-73BEA2FA39F9}"/>
                 </a:ext>
               </a:extLst>
             </p:cNvPr>
@@ -13020,7 +13020,7 @@
             <p:cNvPr id="71" name="Chart grid" descr="s70">
               <a:extLst>
                 <a:ext uri="{FF2B5EF4-FFF2-40B4-BE49-F238E27FC236}">
-                  <ns2:creationId id="{455D2152-D886-4AA6-A4AD-700C2550B651}"/>
+                  <ns2:creationId id="{BF7B65A7-BF41-43C7-A262-915518F5D9DE}"/>
                 </a:ext>
               </a:extLst>
             </p:cNvPr>
@@ -13059,7 +13059,7 @@
             <p:cNvPr id="72" name="Measured series" descr="s71">
               <a:extLst>
                 <a:ext uri="{FF2B5EF4-FFF2-40B4-BE49-F238E27FC236}">
-                  <ns2:creationId id="{72EB4B33-795E-4148-91AB-F511970817EA}"/>
+                  <ns2:creationId id="{5D0A9FB5-26B8-4C8C-9945-CA42B24043A4}"/>
                 </a:ext>
               </a:extLst>
             </p:cNvPr>
@@ -13113,7 +13113,7 @@
             <p:cNvPr id="73" name="Measured point" descr="s72">
               <a:extLst>
                 <a:ext uri="{FF2B5EF4-FFF2-40B4-BE49-F238E27FC236}">
-                  <ns2:creationId id="{4B224173-9AA3-4299-A78C-5DDF64792FC4}"/>
+                  <ns2:creationId id="{585E4787-EF7B-40A7-9031-64B309DD6411}"/>
                 </a:ext>
               </a:extLst>
             </p:cNvPr>
@@ -13143,7 +13143,7 @@
             <p:cNvPr id="74" name="Measured point" descr="s73">
               <a:extLst>
                 <a:ext uri="{FF2B5EF4-FFF2-40B4-BE49-F238E27FC236}">
-                  <ns2:creationId id="{68DBAA2A-DB69-46A8-876B-4626A2B8A36B}"/>
+                  <ns2:creationId id="{FE2D9BA2-4486-4A85-B278-BFBC4DD8D9BC}"/>
                 </a:ext>
               </a:extLst>
             </p:cNvPr>
@@ -13173,7 +13173,7 @@
             <p:cNvPr id="75" name="Measured point" descr="s74">
               <a:extLst>
                 <a:ext uri="{FF2B5EF4-FFF2-40B4-BE49-F238E27FC236}">
-                  <ns2:creationId id="{3B62D72B-4EDA-4F67-B687-3A9EFFFB6D70}"/>
+                  <ns2:creationId id="{DFD8D27B-3B40-4AAA-B34D-2C3BDBF19F40}"/>
                 </a:ext>
               </a:extLst>
             </p:cNvPr>
@@ -13203,7 +13203,7 @@
             <p:cNvPr id="76" name="Measured point" descr="s75">
               <a:extLst>
                 <a:ext uri="{FF2B5EF4-FFF2-40B4-BE49-F238E27FC236}">
-                  <ns2:creationId id="{8AA997AF-65D4-4A3F-B0EE-F31FD66DB107}"/>
+                  <ns2:creationId id="{F2D23BED-E36C-474A-B748-827C29927257}"/>
                 </a:ext>
               </a:extLst>
             </p:cNvPr>
@@ -13233,7 +13233,7 @@
             <p:cNvPr id="77" name="Measured point" descr="s76">
               <a:extLst>
                 <a:ext uri="{FF2B5EF4-FFF2-40B4-BE49-F238E27FC236}">
-                  <ns2:creationId id="{3EAC186E-D16F-4541-B99D-1F6D9FAEFC66}"/>
+                  <ns2:creationId id="{1B950AD6-EAFE-407E-917F-6F8A74950138}"/>
                 </a:ext>
               </a:extLst>
             </p:cNvPr>
@@ -13263,7 +13263,7 @@
             <p:cNvPr id="78" name="Measured point" descr="s77">
               <a:extLst>
                 <a:ext uri="{FF2B5EF4-FFF2-40B4-BE49-F238E27FC236}">
-                  <ns2:creationId id="{E5F90763-B277-40F5-AF8D-92DA1016FB38}"/>
+                  <ns2:creationId id="{CF6D37E5-E269-45A5-BF0A-FBDC9CBF2D70}"/>
                 </a:ext>
               </a:extLst>
             </p:cNvPr>
@@ -13293,7 +13293,7 @@
             <p:cNvPr id="79" name="Measured point" descr="s78">
               <a:extLst>
                 <a:ext uri="{FF2B5EF4-FFF2-40B4-BE49-F238E27FC236}">
-                  <ns2:creationId id="{C82F7002-882F-4378-BB00-5C0662B037D7}"/>
+                  <ns2:creationId id="{D4C7F58E-B53B-4A42-9BB9-7D95063A0D4E}"/>
                 </a:ext>
               </a:extLst>
             </p:cNvPr>
@@ -13323,7 +13323,7 @@
             <p:cNvPr id="80" name="Chart grid" descr="s79">
               <a:extLst>
                 <a:ext uri="{FF2B5EF4-FFF2-40B4-BE49-F238E27FC236}">
-                  <ns2:creationId id="{EED7EA39-F0B8-47DF-B0D1-C846BF80E560}"/>
+                  <ns2:creationId id="{6142C6E8-FD30-427A-A244-94570941F0E5}"/>
                 </a:ext>
               </a:extLst>
             </p:cNvPr>
@@ -13362,7 +13362,7 @@
             <p:cNvPr id="81" name="Chart grid" descr="s80">
               <a:extLst>
                 <a:ext uri="{FF2B5EF4-FFF2-40B4-BE49-F238E27FC236}">
-                  <ns2:creationId id="{A30068E8-1527-4D6D-BBF6-A487A6D981C2}"/>
+                  <ns2:creationId id="{79AB11E4-93A1-47D4-8082-9395CBA61D4E}"/>
                 </a:ext>
               </a:extLst>
             </p:cNvPr>
@@ -13401,7 +13401,7 @@
             <p:cNvPr id="82" name="Chart grid" descr="s81">
               <a:extLst>
                 <a:ext uri="{FF2B5EF4-FFF2-40B4-BE49-F238E27FC236}">
-                  <ns2:creationId id="{D8101962-186C-4977-B2F8-0D283DF6C767}"/>
+                  <ns2:creationId id="{607D023F-EAF4-456F-8429-94670809CD5A}"/>
                 </a:ext>
               </a:extLst>
             </p:cNvPr>
@@ -13440,7 +13440,7 @@
             <p:cNvPr id="83" name="Measured series" descr="s82">
               <a:extLst>
                 <a:ext uri="{FF2B5EF4-FFF2-40B4-BE49-F238E27FC236}">
-                  <ns2:creationId id="{02DBDD39-7E81-423B-B70E-A4849A1DC6AB}"/>
+                  <ns2:creationId id="{60581578-1674-417B-A4BC-7C22CC3E4DEA}"/>
                 </a:ext>
               </a:extLst>
             </p:cNvPr>
@@ -13494,7 +13494,7 @@
             <p:cNvPr id="84" name="Measured point" descr="s83">
               <a:extLst>
                 <a:ext uri="{FF2B5EF4-FFF2-40B4-BE49-F238E27FC236}">
-                  <ns2:creationId id="{CA7F9513-DD9C-40F6-A203-C783B084DCAC}"/>
+                  <ns2:creationId id="{D8395ED3-37D4-48CF-A78C-0B6A213C5C7B}"/>
                 </a:ext>
               </a:extLst>
             </p:cNvPr>
@@ -13524,7 +13524,7 @@
             <p:cNvPr id="85" name="Measured point" descr="s84">
               <a:extLst>
                 <a:ext uri="{FF2B5EF4-FFF2-40B4-BE49-F238E27FC236}">
-                  <ns2:creationId id="{1DA129D8-6A6D-42FD-B235-7FF2753A4C27}"/>
+                  <ns2:creationId id="{F53A1E31-F5F7-40BC-B498-AA3F8E19D1F7}"/>
                 </a:ext>
               </a:extLst>
             </p:cNvPr>
@@ -13554,7 +13554,7 @@
             <p:cNvPr id="86" name="Measured point" descr="s85">
               <a:extLst>
                 <a:ext uri="{FF2B5EF4-FFF2-40B4-BE49-F238E27FC236}">
-                  <ns2:creationId id="{C0CD590F-7684-4A02-9772-212B5156C5AF}"/>
+                  <ns2:creationId id="{35577972-1440-43C4-BF82-D096ED751E3A}"/>
                 </a:ext>
               </a:extLst>
             </p:cNvPr>
@@ -13584,7 +13584,7 @@
             <p:cNvPr id="87" name="Measured point" descr="s86">
               <a:extLst>
                 <a:ext uri="{FF2B5EF4-FFF2-40B4-BE49-F238E27FC236}">
-                  <ns2:creationId id="{A3C14C0C-5DD9-47B7-9BE0-587280820124}"/>
+                  <ns2:creationId id="{18BE6425-FE7A-41EA-A49E-23319A19A3D3}"/>
                 </a:ext>
               </a:extLst>
             </p:cNvPr>
@@ -13614,7 +13614,7 @@
             <p:cNvPr id="88" name="Measured point" descr="s87">
               <a:extLst>
                 <a:ext uri="{FF2B5EF4-FFF2-40B4-BE49-F238E27FC236}">
-                  <ns2:creationId id="{00A2D6BF-2B34-4A17-94B7-0A80042DADB5}"/>
+                  <ns2:creationId id="{AA5FD3D5-3ADC-45E6-8CBF-5B1E8BFE0119}"/>
                 </a:ext>
               </a:extLst>
             </p:cNvPr>
@@ -13644,7 +13644,7 @@
             <p:cNvPr id="89" name="Measured point" descr="s88">
               <a:extLst>
                 <a:ext uri="{FF2B5EF4-FFF2-40B4-BE49-F238E27FC236}">
-                  <ns2:creationId id="{0E2371D6-FC36-4212-AF58-DF52A73CAC2A}"/>
+                  <ns2:creationId id="{971C39F6-F338-4266-9FC3-0FD2E5E96D39}"/>
                 </a:ext>
               </a:extLst>
             </p:cNvPr>
@@ -13674,7 +13674,7 @@
             <p:cNvPr id="90" name="Measured point" descr="s89">
               <a:extLst>
                 <a:ext uri="{FF2B5EF4-FFF2-40B4-BE49-F238E27FC236}">
-                  <ns2:creationId id="{04D7FE7E-E989-4BBA-9E66-FF2DEEB89D63}"/>
+                  <ns2:creationId id="{AA96D0E7-FE44-4F45-90D3-0865DA1B1B1D}"/>
                 </a:ext>
               </a:extLst>
             </p:cNvPr>
@@ -13704,7 +13704,7 @@
             <p:cNvPr id="91" name="Chart grid" descr="s90">
               <a:extLst>
                 <a:ext uri="{FF2B5EF4-FFF2-40B4-BE49-F238E27FC236}">
-                  <ns2:creationId id="{73EC1C34-E197-4383-9411-4380E066A305}"/>
+                  <ns2:creationId id="{5CCB7950-7FDD-474B-9551-E0BE4473083C}"/>
                 </a:ext>
               </a:extLst>
             </p:cNvPr>
@@ -13743,7 +13743,7 @@
             <p:cNvPr id="92" name="Chart grid" descr="s91">
               <a:extLst>
                 <a:ext uri="{FF2B5EF4-FFF2-40B4-BE49-F238E27FC236}">
-                  <ns2:creationId id="{38C0D3E8-48AD-4FCF-B106-655DFD79B86E}"/>
+                  <ns2:creationId id="{A0E5A0DE-F668-483C-9E76-1EE62F330EA4}"/>
                 </a:ext>
               </a:extLst>
             </p:cNvPr>
@@ -13782,7 +13782,7 @@
             <p:cNvPr id="93" name="Chart grid" descr="s92">
               <a:extLst>
                 <a:ext uri="{FF2B5EF4-FFF2-40B4-BE49-F238E27FC236}">
-                  <ns2:creationId id="{2C9867EF-ABCD-466A-9ABD-D35FC60DE261}"/>
+                  <ns2:creationId id="{C5565621-6B99-4AA6-87C9-BF2507FFB64E}"/>
                 </a:ext>
               </a:extLst>
             </p:cNvPr>
@@ -13821,7 +13821,7 @@
             <p:cNvPr id="94" name="Measured series" descr="s93">
               <a:extLst>
                 <a:ext uri="{FF2B5EF4-FFF2-40B4-BE49-F238E27FC236}">
-                  <ns2:creationId id="{5CBF365A-05E8-4808-81DD-66E59D75A76C}"/>
+                  <ns2:creationId id="{B947FA2A-17C0-42D5-A78A-D0E18DD34DA3}"/>
                 </a:ext>
               </a:extLst>
             </p:cNvPr>
@@ -13875,7 +13875,7 @@
             <p:cNvPr id="95" name="Measured point" descr="s94">
               <a:extLst>
                 <a:ext uri="{FF2B5EF4-FFF2-40B4-BE49-F238E27FC236}">
-                  <ns2:creationId id="{91E19DE9-32A9-4442-9103-F7A6CA51C4BD}"/>
+                  <ns2:creationId id="{5AE444F8-2D37-4FDB-BDF5-CCF4D90613FE}"/>
                 </a:ext>
               </a:extLst>
             </p:cNvPr>
@@ -13905,7 +13905,7 @@
             <p:cNvPr id="96" name="Measured point" descr="s95">
               <a:extLst>
                 <a:ext uri="{FF2B5EF4-FFF2-40B4-BE49-F238E27FC236}">
-                  <ns2:creationId id="{C2D009F9-467C-4360-914B-28B8ADEDD20F}"/>
+                  <ns2:creationId id="{2C1C3B2E-F0A6-4D39-84F1-65FF05D5EE6C}"/>
                 </a:ext>
               </a:extLst>
             </p:cNvPr>
@@ -13935,7 +13935,7 @@
             <p:cNvPr id="97" name="Measured point" descr="s96">
               <a:extLst>
                 <a:ext uri="{FF2B5EF4-FFF2-40B4-BE49-F238E27FC236}">
-                  <ns2:creationId id="{430F6E9C-99FD-438B-97E0-31B6547B3820}"/>
+                  <ns2:creationId id="{3C75FE5F-7B11-45C9-9EC8-F5414E69B07E}"/>
                 </a:ext>
               </a:extLst>
             </p:cNvPr>
@@ -13965,7 +13965,7 @@
             <p:cNvPr id="98" name="Measured point" descr="s97">
               <a:extLst>
                 <a:ext uri="{FF2B5EF4-FFF2-40B4-BE49-F238E27FC236}">
-                  <ns2:creationId id="{0AC05461-8AF0-448F-865B-F0D763F3A32B}"/>
+                  <ns2:creationId id="{C3B65E9D-5455-4FA8-8E8B-1080D015CB4F}"/>
                 </a:ext>
               </a:extLst>
             </p:cNvPr>
@@ -13995,7 +13995,7 @@
             <p:cNvPr id="99" name="Measured point" descr="s98">
               <a:extLst>
                 <a:ext uri="{FF2B5EF4-FFF2-40B4-BE49-F238E27FC236}">
-                  <ns2:creationId id="{FEBD2D70-4B7B-4DBC-A328-8986A2FC0DEB}"/>
+                  <ns2:creationId id="{1CC16FB2-3583-424D-B9DC-386F22018E7F}"/>
                 </a:ext>
               </a:extLst>
             </p:cNvPr>
@@ -14025,7 +14025,7 @@
             <p:cNvPr id="100" name="Measured point" descr="s99">
               <a:extLst>
                 <a:ext uri="{FF2B5EF4-FFF2-40B4-BE49-F238E27FC236}">
-                  <ns2:creationId id="{E916AA3E-564E-445F-AC37-6352007B48F9}"/>
+                  <ns2:creationId id="{BC4D2EBB-1BFA-4801-9EDA-7FC993EB76AF}"/>
                 </a:ext>
               </a:extLst>
             </p:cNvPr>
@@ -14055,7 +14055,7 @@
             <p:cNvPr id="101" name="Measured point" descr="s100">
               <a:extLst>
                 <a:ext uri="{FF2B5EF4-FFF2-40B4-BE49-F238E27FC236}">
-                  <ns2:creationId id="{7F6EB2E5-DC87-443D-93F3-441E3AA71714}"/>
+                  <ns2:creationId id="{BF6C87E4-E615-4B16-AD9C-3BA0CFF3D3D7}"/>
                 </a:ext>
               </a:extLst>
             </p:cNvPr>
@@ -14085,7 +14085,7 @@
             <p:cNvPr id="102" name="46.2" descr="s101">
               <a:extLst>
                 <a:ext uri="{FF2B5EF4-FFF2-40B4-BE49-F238E27FC236}">
-                  <ns2:creationId id="{4AB47B57-4803-4B54-9E54-C7824B982528}"/>
+                  <ns2:creationId id="{F1988B32-0ECC-42C6-BBF7-A8B00C3E07A4}"/>
                 </a:ext>
               </a:extLst>
             </p:cNvPr>
@@ -14141,7 +14141,7 @@
             <p:cNvPr id="103" name="63.2" descr="s102">
               <a:extLst>
                 <a:ext uri="{FF2B5EF4-FFF2-40B4-BE49-F238E27FC236}">
-                  <ns2:creationId id="{C48FF86A-A96C-4AB8-B4F6-D94C48ABD743}"/>
+                  <ns2:creationId id="{8B391E20-4764-436D-A1A6-759CC30BA57C}"/>
                 </a:ext>
               </a:extLst>
             </p:cNvPr>
@@ -14197,7 +14197,7 @@
             <p:cNvPr id="104" name="49.8" descr="s103">
               <a:extLst>
                 <a:ext uri="{FF2B5EF4-FFF2-40B4-BE49-F238E27FC236}">
-                  <ns2:creationId id="{24B34B74-9E9B-4245-86A5-3BBEB40CE90B}"/>
+                  <ns2:creationId id="{EFF32B0B-BC4B-4A2A-9E25-C39ED77BC8AC}"/>
                 </a:ext>
               </a:extLst>
             </p:cNvPr>
@@ -14253,7 +14253,7 @@
             <p:cNvPr id="105" name="74.6" descr="s104">
               <a:extLst>
                 <a:ext uri="{FF2B5EF4-FFF2-40B4-BE49-F238E27FC236}">
-                  <ns2:creationId id="{011B6279-1BE6-4B08-9909-EB29FC233BBF}"/>
+                  <ns2:creationId id="{7B102BA5-1E94-4D13-B910-C89C7054FACA}"/>
                 </a:ext>
               </a:extLst>
             </p:cNvPr>
@@ -14309,7 +14309,7 @@
             <p:cNvPr id="106" name="84.4" descr="s105">
               <a:extLst>
                 <a:ext uri="{FF2B5EF4-FFF2-40B4-BE49-F238E27FC236}">
-                  <ns2:creationId id="{6A632E4A-FE0C-4A05-A41C-66E2ABF87FDF}"/>
+                  <ns2:creationId id="{0C32CC99-BFA2-4C07-821F-26056EEEC72C}"/>
                 </a:ext>
               </a:extLst>
             </p:cNvPr>
@@ -14365,7 +14365,7 @@
             <p:cNvPr id="107" name="84.4" descr="s106">
               <a:extLst>
                 <a:ext uri="{FF2B5EF4-FFF2-40B4-BE49-F238E27FC236}">
-                  <ns2:creationId id="{DDA4AAA1-CF5D-4BC9-A65A-D9828E8CC6BF}"/>
+                  <ns2:creationId id="{059EC231-B194-4AF4-BE8B-A37B3EF5DDAD}"/>
                 </a:ext>
               </a:extLst>
             </p:cNvPr>
@@ -14421,7 +14421,7 @@
             <p:cNvPr id="108" name="84.4" descr="s107">
               <a:extLst>
                 <a:ext uri="{FF2B5EF4-FFF2-40B4-BE49-F238E27FC236}">
-                  <ns2:creationId id="{52913578-24A6-433B-A0C9-A08A5C97C15A}"/>
+                  <ns2:creationId id="{4E3E319F-9027-4051-957E-23446B391D53}"/>
                 </a:ext>
               </a:extLst>
             </p:cNvPr>
@@ -14477,7 +14477,7 @@
             <p:cNvPr id="109" name="7.6" descr="s108">
               <a:extLst>
                 <a:ext uri="{FF2B5EF4-FFF2-40B4-BE49-F238E27FC236}">
-                  <ns2:creationId id="{2424B0CF-753D-49F3-9FE6-77B91284E2CB}"/>
+                  <ns2:creationId id="{AC10687F-1601-4155-8170-BBC1AA832E25}"/>
                 </a:ext>
               </a:extLst>
             </p:cNvPr>
@@ -14533,7 +14533,7 @@
             <p:cNvPr id="110" name="11.2" descr="s109">
               <a:extLst>
                 <a:ext uri="{FF2B5EF4-FFF2-40B4-BE49-F238E27FC236}">
-                  <ns2:creationId id="{4F912256-4F07-4359-8C63-9044E8B45D7C}"/>
+                  <ns2:creationId id="{F3AF9A4C-DBEE-4176-A547-AB7799BB8215}"/>
                 </a:ext>
               </a:extLst>
             </p:cNvPr>
@@ -14589,7 +14589,7 @@
             <p:cNvPr id="111" name="14.7" descr="s110">
               <a:extLst>
                 <a:ext uri="{FF2B5EF4-FFF2-40B4-BE49-F238E27FC236}">
-                  <ns2:creationId id="{F573E083-0C1D-402B-BE0E-9D5CEA26642F}"/>
+                  <ns2:creationId id="{3D51FB1D-6658-4BFA-B444-C183832C6FD1}"/>
                 </a:ext>
               </a:extLst>
             </p:cNvPr>
@@ -14645,7 +14645,7 @@
             <p:cNvPr id="112" name="22.2" descr="s111">
               <a:extLst>
                 <a:ext uri="{FF2B5EF4-FFF2-40B4-BE49-F238E27FC236}">
-                  <ns2:creationId id="{0456F21D-0C66-47AD-BEA2-F8C7E32C51DC}"/>
+                  <ns2:creationId id="{4E1654FF-B959-408A-99D8-16D3D875772A}"/>
                 </a:ext>
               </a:extLst>
             </p:cNvPr>
@@ -14701,7 +14701,7 @@
             <p:cNvPr id="113" name="27.1" descr="s112">
               <a:extLst>
                 <a:ext uri="{FF2B5EF4-FFF2-40B4-BE49-F238E27FC236}">
-                  <ns2:creationId id="{9722F87D-EB15-4E6E-B28A-D45E5499019A}"/>
+                  <ns2:creationId id="{835FB043-E3ED-4CC3-AA08-3CA41A5DCCFF}"/>
                 </a:ext>
               </a:extLst>
             </p:cNvPr>
@@ -14757,7 +14757,7 @@
             <p:cNvPr id="114" name="27.1" descr="s113">
               <a:extLst>
                 <a:ext uri="{FF2B5EF4-FFF2-40B4-BE49-F238E27FC236}">
-                  <ns2:creationId id="{F7B79467-D2C2-494F-A5A7-23745D3D1D40}"/>
+                  <ns2:creationId id="{CB4F576A-476B-40D7-B63E-82F7679A5B2F}"/>
                 </a:ext>
               </a:extLst>
             </p:cNvPr>
@@ -14813,7 +14813,7 @@
             <p:cNvPr id="115" name="61.8" descr="s114">
               <a:extLst>
                 <a:ext uri="{FF2B5EF4-FFF2-40B4-BE49-F238E27FC236}">
-                  <ns2:creationId id="{FD0050D5-8875-4105-8272-6EE61FE93C58}"/>
+                  <ns2:creationId id="{CE4F273C-9007-411A-AF78-F33A5C0633CB}"/>
                 </a:ext>
               </a:extLst>
             </p:cNvPr>
@@ -14869,7 +14869,7 @@
             <p:cNvPr id="116" name="38.5" descr="s115">
               <a:extLst>
                 <a:ext uri="{FF2B5EF4-FFF2-40B4-BE49-F238E27FC236}">
-                  <ns2:creationId id="{438D15AA-7ECA-4929-9206-34AEE9353FDE}"/>
+                  <ns2:creationId id="{944AF8D0-D39E-4746-BE44-B9FC7D02B430}"/>
                 </a:ext>
               </a:extLst>
             </p:cNvPr>
@@ -14925,7 +14925,7 @@
             <p:cNvPr id="117" name="61.6" descr="s116">
               <a:extLst>
                 <a:ext uri="{FF2B5EF4-FFF2-40B4-BE49-F238E27FC236}">
-                  <ns2:creationId id="{2D20FDD3-34B8-47D4-AA37-CE08FC83ADEC}"/>
+                  <ns2:creationId id="{3EC9E7C3-EE46-4FFB-9D59-504B6855854E}"/>
                 </a:ext>
               </a:extLst>
             </p:cNvPr>
@@ -14981,7 +14981,7 @@
             <p:cNvPr id="118" name="52.9" descr="s117">
               <a:extLst>
                 <a:ext uri="{FF2B5EF4-FFF2-40B4-BE49-F238E27FC236}">
-                  <ns2:creationId id="{9703EF8D-DC24-4B3E-8088-6C4CFA155EE3}"/>
+                  <ns2:creationId id="{FF29E425-F6F8-4C2B-B8DB-4346C9967007}"/>
                 </a:ext>
               </a:extLst>
             </p:cNvPr>
@@ -15037,7 +15037,7 @@
             <p:cNvPr id="119" name="72.7" descr="s118">
               <a:extLst>
                 <a:ext uri="{FF2B5EF4-FFF2-40B4-BE49-F238E27FC236}">
-                  <ns2:creationId id="{49C7C8E9-F6DE-4BFC-B533-16F28376AF34}"/>
+                  <ns2:creationId id="{F0969A82-D0DC-492C-9BD0-05888F7A840F}"/>
                 </a:ext>
               </a:extLst>
             </p:cNvPr>
@@ -15093,7 +15093,7 @@
             <p:cNvPr id="120" name="78.9" descr="s119">
               <a:extLst>
                 <a:ext uri="{FF2B5EF4-FFF2-40B4-BE49-F238E27FC236}">
-                  <ns2:creationId id="{390A0833-529E-4F44-B414-1D411D2A110F}"/>
+                  <ns2:creationId id="{60534B34-3684-43DE-82AB-1B98E5943DCF}"/>
                 </a:ext>
               </a:extLst>
             </p:cNvPr>
@@ -15149,7 +15149,7 @@
             <p:cNvPr id="121" name="78.9" descr="s120">
               <a:extLst>
                 <a:ext uri="{FF2B5EF4-FFF2-40B4-BE49-F238E27FC236}">
-                  <ns2:creationId id="{F4FD7236-C633-4671-881C-18DFE4372FAE}"/>
+                  <ns2:creationId id="{771CDB85-2FAC-4634-958E-993A0B655936}"/>
                 </a:ext>
               </a:extLst>
             </p:cNvPr>
@@ -15205,7 +15205,7 @@
             <p:cNvPr id="122" name="74.7" descr="s121">
               <a:extLst>
                 <a:ext uri="{FF2B5EF4-FFF2-40B4-BE49-F238E27FC236}">
-                  <ns2:creationId id="{7318ECA1-84A7-4CD5-A8F4-C7BE4058927D}"/>
+                  <ns2:creationId id="{088803AF-1C49-457A-82A2-F48B1B29FE59}"/>
                 </a:ext>
               </a:extLst>
             </p:cNvPr>
@@ -15258,10 +15258,10 @@
         </p:sp>
         <p:sp>
           <p:nvSpPr>
-            <p:cNvPr id="216" name="8. Results" descr="t82">
-              <a:extLst>
-                <a:ext uri="{FF2B5EF4-FFF2-40B4-BE49-F238E27FC236}">
-                  <ns2:creationId id="{23EAA222-C778-41C8-ADF6-DBCEA7B55CAD}"/>
+            <p:cNvPr id="217" name="8. Results: Pipeline performance" descr="t83">
+              <a:extLst>
+                <a:ext uri="{FF2B5EF4-FFF2-40B4-BE49-F238E27FC236}">
+                  <ns2:creationId id="{7023BABD-B572-42CB-B851-E0FA3D14E181}"/>
                 </a:ext>
               </a:extLst>
             </p:cNvPr>
@@ -15273,7 +15273,7 @@
           <p:spPr>
             <a:xfrm>
               <a:off x="9205764" y="16313181"/>
-              <a:ext cx="1395476" cy="464782"/>
+              <a:ext cx="4365188" cy="464782"/>
             </a:xfrm>
             <a:prstGeom prst="rect">
               <a:avLst/>
@@ -15306,7 +15306,7 @@
                   <a:ea typeface="Barlow Condensed"/>
                   <a:cs typeface="Barlow Condensed"/>
                 </a:rPr>
-                <a:t>8. Results</a:t>
+                <a:t>8. Results: Pipeline performance</a:t>
               </a:r>
               <a:endParaRPr lang="en-GB" sz="2800"/>
             </a:p>
@@ -15314,10 +15314,10 @@
         </p:sp>
         <p:sp>
           <p:nvSpPr>
-            <p:cNvPr id="217" name="Answer quality Q, %" descr="t83">
-              <a:extLst>
-                <a:ext uri="{FF2B5EF4-FFF2-40B4-BE49-F238E27FC236}">
-                  <ns2:creationId id="{2578612D-F638-4DE3-8DB2-95B026D59E6B}"/>
+            <p:cNvPr id="218" name="Answer quality Q, %" descr="t84">
+              <a:extLst>
+                <a:ext uri="{FF2B5EF4-FFF2-40B4-BE49-F238E27FC236}">
+                  <ns2:creationId id="{29BC5003-0490-4BD2-90EE-E9456BE88EB8}"/>
                 </a:ext>
               </a:extLst>
             </p:cNvPr>
@@ -15370,10 +15370,10 @@
         </p:sp>
         <p:sp>
           <p:nvSpPr>
-            <p:cNvPr id="218" name="100 questions" descr="t84">
-              <a:extLst>
-                <a:ext uri="{FF2B5EF4-FFF2-40B4-BE49-F238E27FC236}">
-                  <ns2:creationId id="{7C1D2222-A3BD-4BF0-B9E0-1F93810269CD}"/>
+            <p:cNvPr id="219" name="100 questions" descr="t85">
+              <a:extLst>
+                <a:ext uri="{FF2B5EF4-FFF2-40B4-BE49-F238E27FC236}">
+                  <ns2:creationId id="{934C72F0-76B6-44B2-8EC1-80E95AF5AA98}"/>
                 </a:ext>
               </a:extLst>
             </p:cNvPr>
@@ -15426,10 +15426,10 @@
         </p:sp>
         <p:sp>
           <p:nvSpPr>
-            <p:cNvPr id="219" name="0" descr="t85">
-              <a:extLst>
-                <a:ext uri="{FF2B5EF4-FFF2-40B4-BE49-F238E27FC236}">
-                  <ns2:creationId id="{F2F84D70-59FD-4A1B-B52B-924D9F17CCDE}"/>
+            <p:cNvPr id="220" name="0" descr="t86">
+              <a:extLst>
+                <a:ext uri="{FF2B5EF4-FFF2-40B4-BE49-F238E27FC236}">
+                  <ns2:creationId id="{AB88E7F9-D651-46B8-8645-7EB6821BFE88}"/>
                 </a:ext>
               </a:extLst>
             </p:cNvPr>
@@ -15482,10 +15482,10 @@
         </p:sp>
         <p:sp>
           <p:nvSpPr>
-            <p:cNvPr id="220" name="50" descr="t86">
-              <a:extLst>
-                <a:ext uri="{FF2B5EF4-FFF2-40B4-BE49-F238E27FC236}">
-                  <ns2:creationId id="{AE5144D3-7AF3-49D6-8E06-DBC72A2E808E}"/>
+            <p:cNvPr id="221" name="50" descr="t87">
+              <a:extLst>
+                <a:ext uri="{FF2B5EF4-FFF2-40B4-BE49-F238E27FC236}">
+                  <ns2:creationId id="{3BDDCF0D-5135-467F-A68E-545EFB5966C5}"/>
                 </a:ext>
               </a:extLst>
             </p:cNvPr>
@@ -15538,10 +15538,10 @@
         </p:sp>
         <p:sp>
           <p:nvSpPr>
-            <p:cNvPr id="221" name="100" descr="t87">
-              <a:extLst>
-                <a:ext uri="{FF2B5EF4-FFF2-40B4-BE49-F238E27FC236}">
-                  <ns2:creationId id="{77513D09-13CF-4F5B-99E1-4B8445A6FB87}"/>
+            <p:cNvPr id="222" name="100" descr="t88">
+              <a:extLst>
+                <a:ext uri="{FF2B5EF4-FFF2-40B4-BE49-F238E27FC236}">
+                  <ns2:creationId id="{8A12B84B-D5B2-45E2-B049-D0B6D0EEE773}"/>
                 </a:ext>
               </a:extLst>
             </p:cNvPr>
@@ -15594,10 +15594,10 @@
         </p:sp>
         <p:sp>
           <p:nvSpPr>
-            <p:cNvPr id="222" name="46.2" descr="t88">
-              <a:extLst>
-                <a:ext uri="{FF2B5EF4-FFF2-40B4-BE49-F238E27FC236}">
-                  <ns2:creationId id="{0E561F1B-DDDC-4CD3-B0CE-462AA91AB051}"/>
+            <p:cNvPr id="223" name="46.2" descr="t89">
+              <a:extLst>
+                <a:ext uri="{FF2B5EF4-FFF2-40B4-BE49-F238E27FC236}">
+                  <ns2:creationId id="{EE80CC41-F892-4D6C-85F7-C8FB6041673C}"/>
                 </a:ext>
               </a:extLst>
             </p:cNvPr>
@@ -15650,10 +15650,10 @@
         </p:sp>
         <p:sp>
           <p:nvSpPr>
-            <p:cNvPr id="223" name="R0" descr="t89">
-              <a:extLst>
-                <a:ext uri="{FF2B5EF4-FFF2-40B4-BE49-F238E27FC236}">
-                  <ns2:creationId id="{52470322-A1BF-49AE-AC5D-557BFF7CB3C6}"/>
+            <p:cNvPr id="224" name="R0" descr="t90">
+              <a:extLst>
+                <a:ext uri="{FF2B5EF4-FFF2-40B4-BE49-F238E27FC236}">
+                  <ns2:creationId id="{6B8C731F-D9FA-4573-BB89-A61E0BBC3DA1}"/>
                 </a:ext>
               </a:extLst>
             </p:cNvPr>
@@ -15706,10 +15706,10 @@
         </p:sp>
         <p:sp>
           <p:nvSpPr>
-            <p:cNvPr id="224" name="63.2" descr="t90">
-              <a:extLst>
-                <a:ext uri="{FF2B5EF4-FFF2-40B4-BE49-F238E27FC236}">
-                  <ns2:creationId id="{209802DF-D827-4927-981F-7C576C29B7A2}"/>
+            <p:cNvPr id="225" name="63.2" descr="t91">
+              <a:extLst>
+                <a:ext uri="{FF2B5EF4-FFF2-40B4-BE49-F238E27FC236}">
+                  <ns2:creationId id="{BF41883D-25BD-4351-AFE3-7B4CC997FFB5}"/>
                 </a:ext>
               </a:extLst>
             </p:cNvPr>
@@ -15762,10 +15762,10 @@
         </p:sp>
         <p:sp>
           <p:nvSpPr>
-            <p:cNvPr id="225" name="R1" descr="t91">
-              <a:extLst>
-                <a:ext uri="{FF2B5EF4-FFF2-40B4-BE49-F238E27FC236}">
-                  <ns2:creationId id="{16F2D3BF-5470-4AAE-98B7-193A02D4E76B}"/>
+            <p:cNvPr id="226" name="R1" descr="t92">
+              <a:extLst>
+                <a:ext uri="{FF2B5EF4-FFF2-40B4-BE49-F238E27FC236}">
+                  <ns2:creationId id="{21A67C2C-F2A2-4A1B-AA86-D3C4B4764FA8}"/>
                 </a:ext>
               </a:extLst>
             </p:cNvPr>
@@ -15818,10 +15818,10 @@
         </p:sp>
         <p:sp>
           <p:nvSpPr>
-            <p:cNvPr id="226" name="49.8" descr="t92">
-              <a:extLst>
-                <a:ext uri="{FF2B5EF4-FFF2-40B4-BE49-F238E27FC236}">
-                  <ns2:creationId id="{4E3FB0DB-FD92-4FE8-AEA0-066D0A05193F}"/>
+            <p:cNvPr id="227" name="49.8" descr="t93">
+              <a:extLst>
+                <a:ext uri="{FF2B5EF4-FFF2-40B4-BE49-F238E27FC236}">
+                  <ns2:creationId id="{36811B5D-E6AC-4FC6-8E87-FB84B3132C48}"/>
                 </a:ext>
               </a:extLst>
             </p:cNvPr>
@@ -15874,10 +15874,10 @@
         </p:sp>
         <p:sp>
           <p:nvSpPr>
-            <p:cNvPr id="227" name="R2" descr="t93">
-              <a:extLst>
-                <a:ext uri="{FF2B5EF4-FFF2-40B4-BE49-F238E27FC236}">
-                  <ns2:creationId id="{691086BA-18B8-4581-AF57-1EBDFFA6D08B}"/>
+            <p:cNvPr id="228" name="R2" descr="t94">
+              <a:extLst>
+                <a:ext uri="{FF2B5EF4-FFF2-40B4-BE49-F238E27FC236}">
+                  <ns2:creationId id="{1A0A842A-D029-4DF8-9697-03C45268C4D5}"/>
                 </a:ext>
               </a:extLst>
             </p:cNvPr>
@@ -15930,10 +15930,10 @@
         </p:sp>
         <p:sp>
           <p:nvSpPr>
-            <p:cNvPr id="228" name="74.6" descr="t94">
-              <a:extLst>
-                <a:ext uri="{FF2B5EF4-FFF2-40B4-BE49-F238E27FC236}">
-                  <ns2:creationId id="{73C1FAFC-AFE0-44A2-9F70-742BDFD9D87E}"/>
+            <p:cNvPr id="229" name="74.6" descr="t95">
+              <a:extLst>
+                <a:ext uri="{FF2B5EF4-FFF2-40B4-BE49-F238E27FC236}">
+                  <ns2:creationId id="{721ECD98-EBE6-4656-9840-66D48C5C30FF}"/>
                 </a:ext>
               </a:extLst>
             </p:cNvPr>
@@ -15986,10 +15986,10 @@
         </p:sp>
         <p:sp>
           <p:nvSpPr>
-            <p:cNvPr id="229" name="R3" descr="t95">
-              <a:extLst>
-                <a:ext uri="{FF2B5EF4-FFF2-40B4-BE49-F238E27FC236}">
-                  <ns2:creationId id="{137CBB74-5700-496D-936C-853742BDBE97}"/>
+            <p:cNvPr id="230" name="R3" descr="t96">
+              <a:extLst>
+                <a:ext uri="{FF2B5EF4-FFF2-40B4-BE49-F238E27FC236}">
+                  <ns2:creationId id="{0BF9DD5B-1E77-4B70-9F67-F20903F023EE}"/>
                 </a:ext>
               </a:extLst>
             </p:cNvPr>
@@ -16042,10 +16042,10 @@
         </p:sp>
         <p:sp>
           <p:nvSpPr>
-            <p:cNvPr id="230" name="84.4" descr="t96">
-              <a:extLst>
-                <a:ext uri="{FF2B5EF4-FFF2-40B4-BE49-F238E27FC236}">
-                  <ns2:creationId id="{9EE392CB-A012-4295-A725-526F7314ACB1}"/>
+            <p:cNvPr id="231" name="84.4" descr="t97">
+              <a:extLst>
+                <a:ext uri="{FF2B5EF4-FFF2-40B4-BE49-F238E27FC236}">
+                  <ns2:creationId id="{FBD8C83D-216D-42B5-839B-0385741357DC}"/>
                 </a:ext>
               </a:extLst>
             </p:cNvPr>
@@ -16098,10 +16098,10 @@
         </p:sp>
         <p:sp>
           <p:nvSpPr>
-            <p:cNvPr id="231" name="R4" descr="t97">
-              <a:extLst>
-                <a:ext uri="{FF2B5EF4-FFF2-40B4-BE49-F238E27FC236}">
-                  <ns2:creationId id="{8CCC603D-DCA7-4F0B-8F68-E4EEA2BC21AF}"/>
+            <p:cNvPr id="232" name="R4" descr="t98">
+              <a:extLst>
+                <a:ext uri="{FF2B5EF4-FFF2-40B4-BE49-F238E27FC236}">
+                  <ns2:creationId id="{3E787904-60D5-467A-B8E8-2A9B82D6A43D}"/>
                 </a:ext>
               </a:extLst>
             </p:cNvPr>
@@ -16154,10 +16154,10 @@
         </p:sp>
         <p:sp>
           <p:nvSpPr>
-            <p:cNvPr id="232" name="84.4" descr="t98">
-              <a:extLst>
-                <a:ext uri="{FF2B5EF4-FFF2-40B4-BE49-F238E27FC236}">
-                  <ns2:creationId id="{36DD77CE-9F20-4496-AE2C-0683B050ECEA}"/>
+            <p:cNvPr id="233" name="84.4" descr="t99">
+              <a:extLst>
+                <a:ext uri="{FF2B5EF4-FFF2-40B4-BE49-F238E27FC236}">
+                  <ns2:creationId id="{B90760EC-EFF5-4E28-AFBB-4D3898510A90}"/>
                 </a:ext>
               </a:extLst>
             </p:cNvPr>
@@ -16210,10 +16210,10 @@
         </p:sp>
         <p:sp>
           <p:nvSpPr>
-            <p:cNvPr id="233" name="R5" descr="t99">
-              <a:extLst>
-                <a:ext uri="{FF2B5EF4-FFF2-40B4-BE49-F238E27FC236}">
-                  <ns2:creationId id="{45BB43A7-BFC6-4E39-9F0C-185A1317196B}"/>
+            <p:cNvPr id="234" name="R5" descr="t100">
+              <a:extLst>
+                <a:ext uri="{FF2B5EF4-FFF2-40B4-BE49-F238E27FC236}">
+                  <ns2:creationId id="{FA15D5B7-5F1C-4B6F-9D2A-472D4A0C027C}"/>
                 </a:ext>
               </a:extLst>
             </p:cNvPr>
@@ -16266,10 +16266,10 @@
         </p:sp>
         <p:sp>
           <p:nvSpPr>
-            <p:cNvPr id="234" name="84.4" descr="t100">
-              <a:extLst>
-                <a:ext uri="{FF2B5EF4-FFF2-40B4-BE49-F238E27FC236}">
-                  <ns2:creationId id="{699972EF-A5E6-4011-963E-80F859EE272B}"/>
+            <p:cNvPr id="235" name="84.4" descr="t101">
+              <a:extLst>
+                <a:ext uri="{FF2B5EF4-FFF2-40B4-BE49-F238E27FC236}">
+                  <ns2:creationId id="{9B1633E3-8D7F-47F4-A63C-B42E5EC3F19B}"/>
                 </a:ext>
               </a:extLst>
             </p:cNvPr>
@@ -16322,10 +16322,10 @@
         </p:sp>
         <p:sp>
           <p:nvSpPr>
-            <p:cNvPr id="235" name="R6" descr="t101">
-              <a:extLst>
-                <a:ext uri="{FF2B5EF4-FFF2-40B4-BE49-F238E27FC236}">
-                  <ns2:creationId id="{5A28528B-21E7-4467-8E7D-492241D7658D}"/>
+            <p:cNvPr id="236" name="R6" descr="t102">
+              <a:extLst>
+                <a:ext uri="{FF2B5EF4-FFF2-40B4-BE49-F238E27FC236}">
+                  <ns2:creationId id="{E9CAD513-6441-4F74-88BE-2618A93BBC71}"/>
                 </a:ext>
               </a:extLst>
             </p:cNvPr>
@@ -16378,10 +16378,10 @@
         </p:sp>
         <p:sp>
           <p:nvSpPr>
-            <p:cNvPr id="236" name="Citation precision, %" descr="t102">
-              <a:extLst>
-                <a:ext uri="{FF2B5EF4-FFF2-40B4-BE49-F238E27FC236}">
-                  <ns2:creationId id="{29A4257E-28E3-4C4F-8EB7-BB0F56257BA9}"/>
+            <p:cNvPr id="237" name="Citation precision, %" descr="t103">
+              <a:extLst>
+                <a:ext uri="{FF2B5EF4-FFF2-40B4-BE49-F238E27FC236}">
+                  <ns2:creationId id="{E8A6F76F-3B2E-4AB2-AAEE-56689E579C92}"/>
                 </a:ext>
               </a:extLst>
             </p:cNvPr>
@@ -16434,10 +16434,10 @@
         </p:sp>
         <p:sp>
           <p:nvSpPr>
-            <p:cNvPr id="237" name="95 questions" descr="t103">
-              <a:extLst>
-                <a:ext uri="{FF2B5EF4-FFF2-40B4-BE49-F238E27FC236}">
-                  <ns2:creationId id="{BD3652B3-4CEC-49A6-9D44-BB11584F61D9}"/>
+            <p:cNvPr id="238" name="95 questions" descr="t104">
+              <a:extLst>
+                <a:ext uri="{FF2B5EF4-FFF2-40B4-BE49-F238E27FC236}">
+                  <ns2:creationId id="{8BEE01D7-CC0C-4C1A-BB2B-457F74D5660B}"/>
                 </a:ext>
               </a:extLst>
             </p:cNvPr>
@@ -16490,10 +16490,10 @@
         </p:sp>
         <p:sp>
           <p:nvSpPr>
-            <p:cNvPr id="238" name="0" descr="t104">
-              <a:extLst>
-                <a:ext uri="{FF2B5EF4-FFF2-40B4-BE49-F238E27FC236}">
-                  <ns2:creationId id="{57B9596A-5894-4184-A227-78C766293D1A}"/>
+            <p:cNvPr id="239" name="0" descr="t105">
+              <a:extLst>
+                <a:ext uri="{FF2B5EF4-FFF2-40B4-BE49-F238E27FC236}">
+                  <ns2:creationId id="{304FE509-69C2-4980-9E56-87CDD942A89F}"/>
                 </a:ext>
               </a:extLst>
             </p:cNvPr>
@@ -16546,10 +16546,10 @@
         </p:sp>
         <p:sp>
           <p:nvSpPr>
-            <p:cNvPr id="239" name="50" descr="t105">
-              <a:extLst>
-                <a:ext uri="{FF2B5EF4-FFF2-40B4-BE49-F238E27FC236}">
-                  <ns2:creationId id="{79079D96-FAB4-420C-B4CF-27F7C7261F83}"/>
+            <p:cNvPr id="240" name="50" descr="t106">
+              <a:extLst>
+                <a:ext uri="{FF2B5EF4-FFF2-40B4-BE49-F238E27FC236}">
+                  <ns2:creationId id="{78799B9C-9776-42A9-98E5-AE0A38D794B5}"/>
                 </a:ext>
               </a:extLst>
             </p:cNvPr>
@@ -16602,10 +16602,10 @@
         </p:sp>
         <p:sp>
           <p:nvSpPr>
-            <p:cNvPr id="240" name="100" descr="t106">
-              <a:extLst>
-                <a:ext uri="{FF2B5EF4-FFF2-40B4-BE49-F238E27FC236}">
-                  <ns2:creationId id="{52DA1298-901B-4A4A-9274-66021F9F696C}"/>
+            <p:cNvPr id="241" name="100" descr="t107">
+              <a:extLst>
+                <a:ext uri="{FF2B5EF4-FFF2-40B4-BE49-F238E27FC236}">
+                  <ns2:creationId id="{F21C0D33-016B-4086-8AB1-CBA0D22E311B}"/>
                 </a:ext>
               </a:extLst>
             </p:cNvPr>
@@ -16658,10 +16658,10 @@
         </p:sp>
         <p:sp>
           <p:nvSpPr>
-            <p:cNvPr id="241" name="7.6" descr="t107">
-              <a:extLst>
-                <a:ext uri="{FF2B5EF4-FFF2-40B4-BE49-F238E27FC236}">
-                  <ns2:creationId id="{AD2DB893-DF5E-4B30-AE89-70321301B899}"/>
+            <p:cNvPr id="242" name="7.6" descr="t108">
+              <a:extLst>
+                <a:ext uri="{FF2B5EF4-FFF2-40B4-BE49-F238E27FC236}">
+                  <ns2:creationId id="{C22C35B7-8EC1-4500-A75C-DD11B9F02363}"/>
                 </a:ext>
               </a:extLst>
             </p:cNvPr>
@@ -16714,10 +16714,10 @@
         </p:sp>
         <p:sp>
           <p:nvSpPr>
-            <p:cNvPr id="242" name="R0" descr="t108">
-              <a:extLst>
-                <a:ext uri="{FF2B5EF4-FFF2-40B4-BE49-F238E27FC236}">
-                  <ns2:creationId id="{2B362FFA-659D-4AB0-89E8-8686D3FC489F}"/>
+            <p:cNvPr id="243" name="R0" descr="t109">
+              <a:extLst>
+                <a:ext uri="{FF2B5EF4-FFF2-40B4-BE49-F238E27FC236}">
+                  <ns2:creationId id="{5766AA0F-7D52-4C63-B536-77C69F3ABCF2}"/>
                 </a:ext>
               </a:extLst>
             </p:cNvPr>
@@ -16770,10 +16770,10 @@
         </p:sp>
         <p:sp>
           <p:nvSpPr>
-            <p:cNvPr id="243" name="11.2" descr="t109">
-              <a:extLst>
-                <a:ext uri="{FF2B5EF4-FFF2-40B4-BE49-F238E27FC236}">
-                  <ns2:creationId id="{F330BCDF-5D38-4B33-9E6A-B6FF837BAEB6}"/>
+            <p:cNvPr id="244" name="11.2" descr="t110">
+              <a:extLst>
+                <a:ext uri="{FF2B5EF4-FFF2-40B4-BE49-F238E27FC236}">
+                  <ns2:creationId id="{469EF558-3388-4264-AF0A-29E0F7E1AE36}"/>
                 </a:ext>
               </a:extLst>
             </p:cNvPr>
@@ -16826,10 +16826,10 @@
         </p:sp>
         <p:sp>
           <p:nvSpPr>
-            <p:cNvPr id="244" name="R1" descr="t110">
-              <a:extLst>
-                <a:ext uri="{FF2B5EF4-FFF2-40B4-BE49-F238E27FC236}">
-                  <ns2:creationId id="{9AC201E8-95DD-4A44-9190-ADF30D39C12D}"/>
+            <p:cNvPr id="245" name="R1" descr="t111">
+              <a:extLst>
+                <a:ext uri="{FF2B5EF4-FFF2-40B4-BE49-F238E27FC236}">
+                  <ns2:creationId id="{E51BBBB4-D975-486C-A3E7-1175900C1A68}"/>
                 </a:ext>
               </a:extLst>
             </p:cNvPr>
@@ -16882,10 +16882,10 @@
         </p:sp>
         <p:sp>
           <p:nvSpPr>
-            <p:cNvPr id="245" name="14.7" descr="t111">
-              <a:extLst>
-                <a:ext uri="{FF2B5EF4-FFF2-40B4-BE49-F238E27FC236}">
-                  <ns2:creationId id="{2733F812-D470-4CEB-8564-66D173FE3B2F}"/>
+            <p:cNvPr id="246" name="14.7" descr="t112">
+              <a:extLst>
+                <a:ext uri="{FF2B5EF4-FFF2-40B4-BE49-F238E27FC236}">
+                  <ns2:creationId id="{876FA3BD-AAF5-4E05-8F85-0C6E52827696}"/>
                 </a:ext>
               </a:extLst>
             </p:cNvPr>
@@ -16938,10 +16938,10 @@
         </p:sp>
         <p:sp>
           <p:nvSpPr>
-            <p:cNvPr id="246" name="R2" descr="t112">
-              <a:extLst>
-                <a:ext uri="{FF2B5EF4-FFF2-40B4-BE49-F238E27FC236}">
-                  <ns2:creationId id="{D5BAF5ED-DD73-4BCA-8BCF-124570500505}"/>
+            <p:cNvPr id="247" name="R2" descr="t113">
+              <a:extLst>
+                <a:ext uri="{FF2B5EF4-FFF2-40B4-BE49-F238E27FC236}">
+                  <ns2:creationId id="{FCFB595F-A21D-4270-9A76-A9C85EB6B1C7}"/>
                 </a:ext>
               </a:extLst>
             </p:cNvPr>
@@ -16994,10 +16994,10 @@
         </p:sp>
         <p:sp>
           <p:nvSpPr>
-            <p:cNvPr id="247" name="22.2" descr="t113">
-              <a:extLst>
-                <a:ext uri="{FF2B5EF4-FFF2-40B4-BE49-F238E27FC236}">
-                  <ns2:creationId id="{86B39B56-CD81-4ADD-9855-E5B10198115F}"/>
+            <p:cNvPr id="248" name="22.2" descr="t114">
+              <a:extLst>
+                <a:ext uri="{FF2B5EF4-FFF2-40B4-BE49-F238E27FC236}">
+                  <ns2:creationId id="{5AD38856-63D6-4987-8B73-BFD251CE43BA}"/>
                 </a:ext>
               </a:extLst>
             </p:cNvPr>
@@ -17050,10 +17050,10 @@
         </p:sp>
         <p:sp>
           <p:nvSpPr>
-            <p:cNvPr id="248" name="R3" descr="t114">
-              <a:extLst>
-                <a:ext uri="{FF2B5EF4-FFF2-40B4-BE49-F238E27FC236}">
-                  <ns2:creationId id="{91DBB160-EA02-4324-B35C-8376FEE89133}"/>
+            <p:cNvPr id="249" name="R3" descr="t115">
+              <a:extLst>
+                <a:ext uri="{FF2B5EF4-FFF2-40B4-BE49-F238E27FC236}">
+                  <ns2:creationId id="{3F9CCEFF-4E39-4E07-B9D4-2F7979B3E915}"/>
                 </a:ext>
               </a:extLst>
             </p:cNvPr>
@@ -17106,10 +17106,10 @@
         </p:sp>
         <p:sp>
           <p:nvSpPr>
-            <p:cNvPr id="249" name="27.1" descr="t115">
-              <a:extLst>
-                <a:ext uri="{FF2B5EF4-FFF2-40B4-BE49-F238E27FC236}">
-                  <ns2:creationId id="{BBEA96CE-C759-4A43-8933-6E55030A50A9}"/>
+            <p:cNvPr id="250" name="27.1" descr="t116">
+              <a:extLst>
+                <a:ext uri="{FF2B5EF4-FFF2-40B4-BE49-F238E27FC236}">
+                  <ns2:creationId id="{65FA957B-101A-4E44-A075-EB01AE351182}"/>
                 </a:ext>
               </a:extLst>
             </p:cNvPr>
@@ -17162,10 +17162,10 @@
         </p:sp>
         <p:sp>
           <p:nvSpPr>
-            <p:cNvPr id="250" name="R4" descr="t116">
-              <a:extLst>
-                <a:ext uri="{FF2B5EF4-FFF2-40B4-BE49-F238E27FC236}">
-                  <ns2:creationId id="{A79F7ED2-AD3A-4141-8A3D-260C3D1C0837}"/>
+            <p:cNvPr id="251" name="R4" descr="t117">
+              <a:extLst>
+                <a:ext uri="{FF2B5EF4-FFF2-40B4-BE49-F238E27FC236}">
+                  <ns2:creationId id="{B3749257-FB37-4CC7-A459-5BCB0DC1504B}"/>
                 </a:ext>
               </a:extLst>
             </p:cNvPr>
@@ -17218,10 +17218,10 @@
         </p:sp>
         <p:sp>
           <p:nvSpPr>
-            <p:cNvPr id="251" name="27.1" descr="t117">
-              <a:extLst>
-                <a:ext uri="{FF2B5EF4-FFF2-40B4-BE49-F238E27FC236}">
-                  <ns2:creationId id="{035A0AB1-761F-4B22-89F0-FB501E9EE579}"/>
+            <p:cNvPr id="252" name="27.1" descr="t118">
+              <a:extLst>
+                <a:ext uri="{FF2B5EF4-FFF2-40B4-BE49-F238E27FC236}">
+                  <ns2:creationId id="{95E23768-22C3-40EA-9FA3-8A5B447208F4}"/>
                 </a:ext>
               </a:extLst>
             </p:cNvPr>
@@ -17274,10 +17274,10 @@
         </p:sp>
         <p:sp>
           <p:nvSpPr>
-            <p:cNvPr id="252" name="R5" descr="t118">
-              <a:extLst>
-                <a:ext uri="{FF2B5EF4-FFF2-40B4-BE49-F238E27FC236}">
-                  <ns2:creationId id="{980323AB-8342-4D18-808C-34A9F606C05E}"/>
+            <p:cNvPr id="253" name="R5" descr="t119">
+              <a:extLst>
+                <a:ext uri="{FF2B5EF4-FFF2-40B4-BE49-F238E27FC236}">
+                  <ns2:creationId id="{14034703-D3B2-4EF5-B019-AF0178E00B38}"/>
                 </a:ext>
               </a:extLst>
             </p:cNvPr>
@@ -17330,10 +17330,10 @@
         </p:sp>
         <p:sp>
           <p:nvSpPr>
-            <p:cNvPr id="253" name="61.8" descr="t119">
-              <a:extLst>
-                <a:ext uri="{FF2B5EF4-FFF2-40B4-BE49-F238E27FC236}">
-                  <ns2:creationId id="{539CE884-A79C-4BE2-996A-8CD44B602E7A}"/>
+            <p:cNvPr id="254" name="61.8" descr="t120">
+              <a:extLst>
+                <a:ext uri="{FF2B5EF4-FFF2-40B4-BE49-F238E27FC236}">
+                  <ns2:creationId id="{AFC4CA6B-0E1B-43D7-8604-9484F3668E3F}"/>
                 </a:ext>
               </a:extLst>
             </p:cNvPr>
@@ -17386,10 +17386,10 @@
         </p:sp>
         <p:sp>
           <p:nvSpPr>
-            <p:cNvPr id="254" name="R6" descr="t120">
-              <a:extLst>
-                <a:ext uri="{FF2B5EF4-FFF2-40B4-BE49-F238E27FC236}">
-                  <ns2:creationId id="{F0DDBE8E-3CBF-4B4A-9FD4-B50253F3B490}"/>
+            <p:cNvPr id="255" name="R6" descr="t121">
+              <a:extLst>
+                <a:ext uri="{FF2B5EF4-FFF2-40B4-BE49-F238E27FC236}">
+                  <ns2:creationId id="{B86D79B5-D818-4FC3-90AE-367607F14DE7}"/>
                 </a:ext>
               </a:extLst>
             </p:cNvPr>
@@ -17442,10 +17442,10 @@
         </p:sp>
         <p:sp>
           <p:nvSpPr>
-            <p:cNvPr id="255" name="Citation recall, %" descr="t121">
-              <a:extLst>
-                <a:ext uri="{FF2B5EF4-FFF2-40B4-BE49-F238E27FC236}">
-                  <ns2:creationId id="{B5429FB5-FCAA-48CF-8538-A42669231E0C}"/>
+            <p:cNvPr id="256" name="Citation recall, %" descr="t122">
+              <a:extLst>
+                <a:ext uri="{FF2B5EF4-FFF2-40B4-BE49-F238E27FC236}">
+                  <ns2:creationId id="{72BED4AA-8C10-4684-8A8F-1997F800FFFD}"/>
                 </a:ext>
               </a:extLst>
             </p:cNvPr>
@@ -17498,10 +17498,10 @@
         </p:sp>
         <p:sp>
           <p:nvSpPr>
-            <p:cNvPr id="256" name="95 questions" descr="t122">
-              <a:extLst>
-                <a:ext uri="{FF2B5EF4-FFF2-40B4-BE49-F238E27FC236}">
-                  <ns2:creationId id="{B57A54F7-0392-4E4F-B6C6-873FB4684229}"/>
+            <p:cNvPr id="257" name="95 questions" descr="t123">
+              <a:extLst>
+                <a:ext uri="{FF2B5EF4-FFF2-40B4-BE49-F238E27FC236}">
+                  <ns2:creationId id="{A3BBF6D3-3D66-46D2-BD95-A0381D0F042B}"/>
                 </a:ext>
               </a:extLst>
             </p:cNvPr>
@@ -17554,10 +17554,10 @@
         </p:sp>
         <p:sp>
           <p:nvSpPr>
-            <p:cNvPr id="257" name="0" descr="t123">
-              <a:extLst>
-                <a:ext uri="{FF2B5EF4-FFF2-40B4-BE49-F238E27FC236}">
-                  <ns2:creationId id="{B73A1760-D4D0-4E35-A4A9-316BCC0E58A3}"/>
+            <p:cNvPr id="258" name="0" descr="t124">
+              <a:extLst>
+                <a:ext uri="{FF2B5EF4-FFF2-40B4-BE49-F238E27FC236}">
+                  <ns2:creationId id="{5D498C17-54F5-4000-9424-FF52C6AA9F3E}"/>
                 </a:ext>
               </a:extLst>
             </p:cNvPr>
@@ -17610,10 +17610,10 @@
         </p:sp>
         <p:sp>
           <p:nvSpPr>
-            <p:cNvPr id="258" name="50" descr="t124">
-              <a:extLst>
-                <a:ext uri="{FF2B5EF4-FFF2-40B4-BE49-F238E27FC236}">
-                  <ns2:creationId id="{7BCF5517-F54F-44E6-A7F5-85342A33AF75}"/>
+            <p:cNvPr id="259" name="50" descr="t125">
+              <a:extLst>
+                <a:ext uri="{FF2B5EF4-FFF2-40B4-BE49-F238E27FC236}">
+                  <ns2:creationId id="{3567F253-97C5-438A-B20E-365B513B9925}"/>
                 </a:ext>
               </a:extLst>
             </p:cNvPr>
@@ -17666,10 +17666,10 @@
         </p:sp>
         <p:sp>
           <p:nvSpPr>
-            <p:cNvPr id="259" name="100" descr="t125">
-              <a:extLst>
-                <a:ext uri="{FF2B5EF4-FFF2-40B4-BE49-F238E27FC236}">
-                  <ns2:creationId id="{1AF40285-BA45-4B11-BF1C-63ECC2CDD846}"/>
+            <p:cNvPr id="260" name="100" descr="t126">
+              <a:extLst>
+                <a:ext uri="{FF2B5EF4-FFF2-40B4-BE49-F238E27FC236}">
+                  <ns2:creationId id="{B8A8C18F-4B38-4D39-B260-021C78BAB423}"/>
                 </a:ext>
               </a:extLst>
             </p:cNvPr>
@@ -17722,10 +17722,10 @@
         </p:sp>
         <p:sp>
           <p:nvSpPr>
-            <p:cNvPr id="260" name="38.5" descr="t126">
-              <a:extLst>
-                <a:ext uri="{FF2B5EF4-FFF2-40B4-BE49-F238E27FC236}">
-                  <ns2:creationId id="{61A34FB5-ACBA-4659-9357-AB2AE8537639}"/>
+            <p:cNvPr id="261" name="38.5" descr="t127">
+              <a:extLst>
+                <a:ext uri="{FF2B5EF4-FFF2-40B4-BE49-F238E27FC236}">
+                  <ns2:creationId id="{F86521E7-32FB-438D-99B1-8D6812073626}"/>
                 </a:ext>
               </a:extLst>
             </p:cNvPr>
@@ -17778,10 +17778,10 @@
         </p:sp>
         <p:sp>
           <p:nvSpPr>
-            <p:cNvPr id="261" name="R0" descr="t127">
-              <a:extLst>
-                <a:ext uri="{FF2B5EF4-FFF2-40B4-BE49-F238E27FC236}">
-                  <ns2:creationId id="{0874DF7A-F6B2-4CFB-8B94-A248BA6A5B09}"/>
+            <p:cNvPr id="262" name="R0" descr="t128">
+              <a:extLst>
+                <a:ext uri="{FF2B5EF4-FFF2-40B4-BE49-F238E27FC236}">
+                  <ns2:creationId id="{3FAC0A59-8A23-44D6-BCF0-E812ED1054B4}"/>
                 </a:ext>
               </a:extLst>
             </p:cNvPr>
@@ -17834,10 +17834,10 @@
         </p:sp>
         <p:sp>
           <p:nvSpPr>
-            <p:cNvPr id="262" name="61.6" descr="t128">
-              <a:extLst>
-                <a:ext uri="{FF2B5EF4-FFF2-40B4-BE49-F238E27FC236}">
-                  <ns2:creationId id="{4693DE97-A443-4A7C-9098-A63AE42B56A7}"/>
+            <p:cNvPr id="263" name="61.6" descr="t129">
+              <a:extLst>
+                <a:ext uri="{FF2B5EF4-FFF2-40B4-BE49-F238E27FC236}">
+                  <ns2:creationId id="{10064744-19CB-411C-AE85-23C28916DCF4}"/>
                 </a:ext>
               </a:extLst>
             </p:cNvPr>
@@ -17890,10 +17890,10 @@
         </p:sp>
         <p:sp>
           <p:nvSpPr>
-            <p:cNvPr id="263" name="R1" descr="t129">
-              <a:extLst>
-                <a:ext uri="{FF2B5EF4-FFF2-40B4-BE49-F238E27FC236}">
-                  <ns2:creationId id="{E5770726-F971-473E-A1BB-690F4F27888E}"/>
+            <p:cNvPr id="264" name="R1" descr="t130">
+              <a:extLst>
+                <a:ext uri="{FF2B5EF4-FFF2-40B4-BE49-F238E27FC236}">
+                  <ns2:creationId id="{945F1C74-FF7F-4483-8421-554440D19DD5}"/>
                 </a:ext>
               </a:extLst>
             </p:cNvPr>
@@ -17946,10 +17946,10 @@
         </p:sp>
         <p:sp>
           <p:nvSpPr>
-            <p:cNvPr id="264" name="52.9" descr="t130">
-              <a:extLst>
-                <a:ext uri="{FF2B5EF4-FFF2-40B4-BE49-F238E27FC236}">
-                  <ns2:creationId id="{5AE99326-558A-4FE3-A4D7-9DE382AF37B1}"/>
+            <p:cNvPr id="265" name="52.9" descr="t131">
+              <a:extLst>
+                <a:ext uri="{FF2B5EF4-FFF2-40B4-BE49-F238E27FC236}">
+                  <ns2:creationId id="{8D5FB7A6-79AF-4B2D-8A55-CFC9929A222D}"/>
                 </a:ext>
               </a:extLst>
             </p:cNvPr>
@@ -18002,10 +18002,10 @@
         </p:sp>
         <p:sp>
           <p:nvSpPr>
-            <p:cNvPr id="265" name="R2" descr="t131">
-              <a:extLst>
-                <a:ext uri="{FF2B5EF4-FFF2-40B4-BE49-F238E27FC236}">
-                  <ns2:creationId id="{90FDC1F9-DB14-484A-A410-83F611551D7A}"/>
+            <p:cNvPr id="266" name="R2" descr="t132">
+              <a:extLst>
+                <a:ext uri="{FF2B5EF4-FFF2-40B4-BE49-F238E27FC236}">
+                  <ns2:creationId id="{893D5E05-8EA9-4295-8B17-4155617ED609}"/>
                 </a:ext>
               </a:extLst>
             </p:cNvPr>
@@ -18058,10 +18058,10 @@
         </p:sp>
         <p:sp>
           <p:nvSpPr>
-            <p:cNvPr id="266" name="72.7" descr="t132">
-              <a:extLst>
-                <a:ext uri="{FF2B5EF4-FFF2-40B4-BE49-F238E27FC236}">
-                  <ns2:creationId id="{83083E84-948F-4994-9E67-25AD184BC767}"/>
+            <p:cNvPr id="267" name="72.7" descr="t133">
+              <a:extLst>
+                <a:ext uri="{FF2B5EF4-FFF2-40B4-BE49-F238E27FC236}">
+                  <ns2:creationId id="{53AE29E7-654B-46BD-B7FF-EB219FFE4F0C}"/>
                 </a:ext>
               </a:extLst>
             </p:cNvPr>
@@ -18114,10 +18114,10 @@
         </p:sp>
         <p:sp>
           <p:nvSpPr>
-            <p:cNvPr id="267" name="R3" descr="t133">
-              <a:extLst>
-                <a:ext uri="{FF2B5EF4-FFF2-40B4-BE49-F238E27FC236}">
-                  <ns2:creationId id="{57505CCE-0164-43FF-A4BC-10F43A13BA6B}"/>
+            <p:cNvPr id="268" name="R3" descr="t134">
+              <a:extLst>
+                <a:ext uri="{FF2B5EF4-FFF2-40B4-BE49-F238E27FC236}">
+                  <ns2:creationId id="{0ABA49BB-DF28-4255-A827-0C8DA854141D}"/>
                 </a:ext>
               </a:extLst>
             </p:cNvPr>
@@ -18170,10 +18170,10 @@
         </p:sp>
         <p:sp>
           <p:nvSpPr>
-            <p:cNvPr id="268" name="78.9" descr="t134">
-              <a:extLst>
-                <a:ext uri="{FF2B5EF4-FFF2-40B4-BE49-F238E27FC236}">
-                  <ns2:creationId id="{01758D72-008C-4ACA-8465-8795667D8CA4}"/>
+            <p:cNvPr id="269" name="78.9" descr="t135">
+              <a:extLst>
+                <a:ext uri="{FF2B5EF4-FFF2-40B4-BE49-F238E27FC236}">
+                  <ns2:creationId id="{2DE09343-A793-41AF-A56C-F1491057C84A}"/>
                 </a:ext>
               </a:extLst>
             </p:cNvPr>
@@ -18226,10 +18226,10 @@
         </p:sp>
         <p:sp>
           <p:nvSpPr>
-            <p:cNvPr id="269" name="R4" descr="t135">
-              <a:extLst>
-                <a:ext uri="{FF2B5EF4-FFF2-40B4-BE49-F238E27FC236}">
-                  <ns2:creationId id="{4BC34828-672D-4CC1-BC37-04892066DCB6}"/>
+            <p:cNvPr id="270" name="R4" descr="t136">
+              <a:extLst>
+                <a:ext uri="{FF2B5EF4-FFF2-40B4-BE49-F238E27FC236}">
+                  <ns2:creationId id="{7BB9726E-EC90-45E8-A5FC-B3816C33C8CD}"/>
                 </a:ext>
               </a:extLst>
             </p:cNvPr>
@@ -18282,10 +18282,10 @@
         </p:sp>
         <p:sp>
           <p:nvSpPr>
-            <p:cNvPr id="270" name="78.9" descr="t136">
-              <a:extLst>
-                <a:ext uri="{FF2B5EF4-FFF2-40B4-BE49-F238E27FC236}">
-                  <ns2:creationId id="{22042202-5490-41E2-9D7D-813BF94E099D}"/>
+            <p:cNvPr id="271" name="78.9" descr="t137">
+              <a:extLst>
+                <a:ext uri="{FF2B5EF4-FFF2-40B4-BE49-F238E27FC236}">
+                  <ns2:creationId id="{76293EFB-B357-4315-A62D-5FC4EB095A4C}"/>
                 </a:ext>
               </a:extLst>
             </p:cNvPr>
@@ -18338,10 +18338,10 @@
         </p:sp>
         <p:sp>
           <p:nvSpPr>
-            <p:cNvPr id="271" name="R5" descr="t137">
-              <a:extLst>
-                <a:ext uri="{FF2B5EF4-FFF2-40B4-BE49-F238E27FC236}">
-                  <ns2:creationId id="{3C8D4219-190C-4278-9F54-F67EE32D8E9A}"/>
+            <p:cNvPr id="272" name="R5" descr="t138">
+              <a:extLst>
+                <a:ext uri="{FF2B5EF4-FFF2-40B4-BE49-F238E27FC236}">
+                  <ns2:creationId id="{78F1F45C-E64A-4A23-A00F-5D4B84A1DBB7}"/>
                 </a:ext>
               </a:extLst>
             </p:cNvPr>
@@ -18394,10 +18394,10 @@
         </p:sp>
         <p:sp>
           <p:nvSpPr>
-            <p:cNvPr id="272" name="74.7" descr="t138">
-              <a:extLst>
-                <a:ext uri="{FF2B5EF4-FFF2-40B4-BE49-F238E27FC236}">
-                  <ns2:creationId id="{3CD11BDE-5EF3-43B9-B4CF-AF063A8C4275}"/>
+            <p:cNvPr id="273" name="74.7" descr="t139">
+              <a:extLst>
+                <a:ext uri="{FF2B5EF4-FFF2-40B4-BE49-F238E27FC236}">
+                  <ns2:creationId id="{83BB5464-4B75-453B-9635-381D662887E8}"/>
                 </a:ext>
               </a:extLst>
             </p:cNvPr>
@@ -18450,10 +18450,10 @@
         </p:sp>
         <p:sp>
           <p:nvSpPr>
-            <p:cNvPr id="273" name="R6" descr="t139">
-              <a:extLst>
-                <a:ext uri="{FF2B5EF4-FFF2-40B4-BE49-F238E27FC236}">
-                  <ns2:creationId id="{8A031AFA-29FB-4575-B644-D1FED3794200}"/>
+            <p:cNvPr id="274" name="R6" descr="t140">
+              <a:extLst>
+                <a:ext uri="{FF2B5EF4-FFF2-40B4-BE49-F238E27FC236}">
+                  <ns2:creationId id="{113F56AE-00EB-4C21-B05D-945A13E41A9D}"/>
                 </a:ext>
               </a:extLst>
             </p:cNvPr>
@@ -18507,15 +18507,15 @@
       </p:grpSp>
       <p:grpSp>
         <p:nvGrpSpPr>
-          <p:cNvPr id="540" name="9. OCR robustness"/>
+          <p:cNvPr id="541" name="9. Results: OCR robustness"/>
           <p:cNvGrpSpPr/>
           <p:nvPr/>
         </p:nvGrpSpPr>
         <p:grpSpPr>
           <a:xfrm>
-            <a:off x="20975241" y="1370112"/>
+            <a:off x="20975241" y="1351657"/>
             <a:ext cx="9012734" cy="3960316"/>
-            <a:chOff x="20975241" y="1370112"/>
+            <a:chOff x="20975241" y="1351657"/>
             <a:chExt cx="9012734" cy="3960316"/>
           </a:xfrm>
         </p:grpSpPr>
@@ -18524,18 +18524,18 @@
             <p:cNvPr id="42" name="Panel H2" descr="s41">
               <a:extLst>
                 <a:ext uri="{FF2B5EF4-FFF2-40B4-BE49-F238E27FC236}">
-                  <ns2:creationId id="{D92E3D5F-B694-481C-AE53-617977188FC6}"/>
-                </a:ext>
-              </a:extLst>
-            </p:cNvPr>
-            <p:cNvSpPr>
-              <a:spLocks noGrp="1"/>
-            </p:cNvSpPr>
-            <p:nvPr/>
-          </p:nvSpPr>
-          <p:spPr>
-            <a:xfrm>
-              <a:off x="20975241" y="1370112"/>
+                  <ns2:creationId id="{16B8440A-A9D5-4E50-9D60-588476A2A5CA}"/>
+                </a:ext>
+              </a:extLst>
+            </p:cNvPr>
+            <p:cNvSpPr>
+              <a:spLocks noGrp="1"/>
+            </p:cNvSpPr>
+            <p:nvPr/>
+          </p:nvSpPr>
+          <p:spPr>
+            <a:xfrm>
+              <a:off x="20975241" y="1351657"/>
               <a:ext cx="9012734" cy="517327"/>
             </a:xfrm>
             <a:custGeom>
@@ -18606,18 +18606,18 @@
             <p:cNvPr id="43" name="Panel content" descr="s42">
               <a:extLst>
                 <a:ext uri="{FF2B5EF4-FFF2-40B4-BE49-F238E27FC236}">
-                  <ns2:creationId id="{1C201C85-932D-4BCB-9A81-0BDF413A5A64}"/>
-                </a:ext>
-              </a:extLst>
-            </p:cNvPr>
-            <p:cNvSpPr>
-              <a:spLocks noGrp="1"/>
-            </p:cNvSpPr>
-            <p:nvPr/>
-          </p:nvSpPr>
-          <p:spPr>
-            <a:xfrm>
-              <a:off x="20975241" y="1887438"/>
+                  <ns2:creationId id="{8DAA5623-17C3-4964-800A-FEBACF3EA989}"/>
+                </a:ext>
+              </a:extLst>
+            </p:cNvPr>
+            <p:cNvSpPr>
+              <a:spLocks noGrp="1"/>
+            </p:cNvSpPr>
+            <p:nvPr/>
+          </p:nvSpPr>
+          <p:spPr>
+            <a:xfrm>
+              <a:off x="20975241" y="1868984"/>
               <a:ext cx="9012734" cy="3442990"/>
             </a:xfrm>
             <a:custGeom>
@@ -18679,15 +18679,15 @@
         </p:sp>
         <p:grpSp>
           <p:nvGrpSpPr>
-            <p:cNvPr id="539" name="ocr-bars"/>
+            <p:cNvPr id="540" name="ocr-bars"/>
             <p:cNvGrpSpPr/>
             <p:nvPr/>
           </p:nvGrpSpPr>
           <p:grpSpPr>
             <a:xfrm>
-              <a:off x="21137166" y="2416522"/>
+              <a:off x="21137166" y="2398068"/>
               <a:ext cx="8688884" cy="2073920"/>
-              <a:chOff x="21137166" y="2416522"/>
+              <a:chOff x="21137166" y="2398068"/>
               <a:chExt cx="8688884" cy="2073920"/>
             </a:xfrm>
           </p:grpSpPr>
@@ -18696,7 +18696,7 @@
               <p:cNvPr id="44" name="Panel track" descr="s43">
                 <a:extLst>
                   <a:ext uri="{FF2B5EF4-FFF2-40B4-BE49-F238E27FC236}">
-                    <ns2:creationId id="{01FE1ED9-55B6-4216-A411-B327059E1C71}"/>
+                    <ns2:creationId id="{2D416C05-FE10-4A42-B64F-1D26E00B250B}"/>
                   </a:ext>
                 </a:extLst>
               </p:cNvPr>
@@ -18707,7 +18707,7 @@
             </p:nvSpPr>
             <p:spPr>
               <a:xfrm>
-                <a:off x="21137166" y="2747814"/>
+                <a:off x="21137166" y="2729359"/>
                 <a:ext cx="7906792" cy="190500"/>
               </a:xfrm>
               <a:prstGeom prst="rect">
@@ -18726,7 +18726,7 @@
               <p:cNvPr id="45" name="Panel bar" descr="s44">
                 <a:extLst>
                   <a:ext uri="{FF2B5EF4-FFF2-40B4-BE49-F238E27FC236}">
-                    <ns2:creationId id="{6AD940E8-1A29-4F2A-9E7B-7350152B5AD5}"/>
+                    <ns2:creationId id="{A41AEB4A-0277-4F22-AE69-E7DB886BFE45}"/>
                   </a:ext>
                 </a:extLst>
               </p:cNvPr>
@@ -18737,7 +18737,7 @@
             </p:nvSpPr>
             <p:spPr>
               <a:xfrm>
-                <a:off x="21137166" y="2747814"/>
+                <a:off x="21137166" y="2729359"/>
                 <a:ext cx="5171033" cy="190500"/>
               </a:xfrm>
               <a:prstGeom prst="rect">
@@ -18756,7 +18756,7 @@
               <p:cNvPr id="46" name="Panel track" descr="s45">
                 <a:extLst>
                   <a:ext uri="{FF2B5EF4-FFF2-40B4-BE49-F238E27FC236}">
-                    <ns2:creationId id="{281E232A-C0B3-4B8B-9158-2AEA91B9D8F6}"/>
+                    <ns2:creationId id="{309B391C-5F7B-49D3-A978-4F77B98214FF}"/>
                   </a:ext>
                 </a:extLst>
               </p:cNvPr>
@@ -18767,7 +18767,7 @@
             </p:nvSpPr>
             <p:spPr>
               <a:xfrm>
-                <a:off x="21137166" y="3345805"/>
+                <a:off x="21137166" y="3327350"/>
                 <a:ext cx="7906792" cy="190500"/>
               </a:xfrm>
               <a:prstGeom prst="rect">
@@ -18786,7 +18786,7 @@
               <p:cNvPr id="47" name="Panel bar" descr="s46">
                 <a:extLst>
                   <a:ext uri="{FF2B5EF4-FFF2-40B4-BE49-F238E27FC236}">
-                    <ns2:creationId id="{8ECD1539-651F-46DF-A911-28EF7E944347}"/>
+                    <ns2:creationId id="{5ECAA590-6082-4FB4-8756-D1BEF8C8BE55}"/>
                   </a:ext>
                 </a:extLst>
               </p:cNvPr>
@@ -18797,7 +18797,7 @@
             </p:nvSpPr>
             <p:spPr>
               <a:xfrm>
-                <a:off x="21137166" y="3345805"/>
+                <a:off x="21137166" y="3327350"/>
                 <a:ext cx="3652838" cy="190500"/>
               </a:xfrm>
               <a:prstGeom prst="rect">
@@ -18816,7 +18816,7 @@
               <p:cNvPr id="48" name="Panel track" descr="s47">
                 <a:extLst>
                   <a:ext uri="{FF2B5EF4-FFF2-40B4-BE49-F238E27FC236}">
-                    <ns2:creationId id="{C7561BDE-7EEE-40AA-9E10-D752104067B2}"/>
+                    <ns2:creationId id="{4673F160-39C5-4AA4-8E9E-6308821DCE88}"/>
                   </a:ext>
                 </a:extLst>
               </p:cNvPr>
@@ -18827,7 +18827,7 @@
             </p:nvSpPr>
             <p:spPr>
               <a:xfrm>
-                <a:off x="21137166" y="3943796"/>
+                <a:off x="21137166" y="3925342"/>
                 <a:ext cx="7906792" cy="190500"/>
               </a:xfrm>
               <a:prstGeom prst="rect">
@@ -18846,7 +18846,7 @@
               <p:cNvPr id="49" name="Panel bar" descr="s48">
                 <a:extLst>
                   <a:ext uri="{FF2B5EF4-FFF2-40B4-BE49-F238E27FC236}">
-                    <ns2:creationId id="{25D72072-C089-4DC9-84D1-BF80AF214212}"/>
+                    <ns2:creationId id="{24BEE708-0152-43B9-95CB-9C9FE03ADDBA}"/>
                   </a:ext>
                 </a:extLst>
               </p:cNvPr>
@@ -18857,7 +18857,7 @@
             </p:nvSpPr>
             <p:spPr>
               <a:xfrm>
-                <a:off x="21137166" y="3943796"/>
+                <a:off x="21137166" y="3925342"/>
                 <a:ext cx="4997053" cy="190500"/>
               </a:xfrm>
               <a:prstGeom prst="rect">
@@ -18873,10 +18873,10 @@
           </p:sp>
           <p:sp>
             <p:nvSpPr>
-              <p:cNvPr id="276" name="Original corpus · R0" descr="t142">
+              <p:cNvPr id="277" name="Original corpus · R0" descr="t143">
                 <a:extLst>
                   <a:ext uri="{FF2B5EF4-FFF2-40B4-BE49-F238E27FC236}">
-                    <ns2:creationId id="{B002D015-7DA7-4974-BDD2-DDA9860C8D5E}"/>
+                    <ns2:creationId id="{BA111EDD-9E8D-41AD-ABD9-2601351FA8CB}"/>
                   </a:ext>
                 </a:extLst>
               </p:cNvPr>
@@ -18887,7 +18887,7 @@
             </p:nvSpPr>
             <p:spPr>
               <a:xfrm>
-                <a:off x="21137166" y="2387632"/>
+                <a:off x="21137166" y="2368582"/>
                 <a:ext cx="1906178" cy="373342"/>
               </a:xfrm>
               <a:prstGeom prst="rect">
@@ -18929,10 +18929,10 @@
           </p:sp>
           <p:sp>
             <p:nvSpPr>
-              <p:cNvPr id="277" name="Mixed corpus (original + synthetic scans) · R0" descr="t143">
+              <p:cNvPr id="278" name="Mixed corpus (original + synthetic scans) · R0" descr="t144">
                 <a:extLst>
                   <a:ext uri="{FF2B5EF4-FFF2-40B4-BE49-F238E27FC236}">
-                    <ns2:creationId id="{86EF12ED-1E1E-4AD4-A3CA-2C292F4E71D8}"/>
+                    <ns2:creationId id="{CE3C7885-CABB-4D17-A704-DB7175B47135}"/>
                   </a:ext>
                 </a:extLst>
               </p:cNvPr>
@@ -18943,7 +18943,7 @@
             </p:nvSpPr>
             <p:spPr>
               <a:xfrm>
-                <a:off x="21137166" y="2978182"/>
+                <a:off x="21137166" y="2968657"/>
                 <a:ext cx="4332622" cy="373342"/>
               </a:xfrm>
               <a:prstGeom prst="rect">
@@ -18985,10 +18985,10 @@
           </p:sp>
           <p:sp>
             <p:nvSpPr>
-              <p:cNvPr id="278" name="Mixed corpus + OCR · R1" descr="t144">
+              <p:cNvPr id="279" name="Mixed corpus + OCR · R1" descr="t145">
                 <a:extLst>
                   <a:ext uri="{FF2B5EF4-FFF2-40B4-BE49-F238E27FC236}">
-                    <ns2:creationId id="{3A7CB6E3-890D-4B0F-9576-DD617C25D30F}"/>
+                    <ns2:creationId id="{15ACFEB9-0AE8-4E0A-BC54-0703DE45DF6A}"/>
                   </a:ext>
                 </a:extLst>
               </p:cNvPr>
@@ -18999,7 +18999,7 @@
             </p:nvSpPr>
             <p:spPr>
               <a:xfrm>
-                <a:off x="21137166" y="3578257"/>
+                <a:off x="21137166" y="3559207"/>
                 <a:ext cx="2276039" cy="373342"/>
               </a:xfrm>
               <a:prstGeom prst="rect">
@@ -19041,10 +19041,10 @@
           </p:sp>
           <p:sp>
             <p:nvSpPr>
-              <p:cNvPr id="279" name="0" descr="t145">
+              <p:cNvPr id="280" name="0" descr="t146">
                 <a:extLst>
                   <a:ext uri="{FF2B5EF4-FFF2-40B4-BE49-F238E27FC236}">
-                    <ns2:creationId id="{31EED955-E226-4283-A61B-039A6EBD5387}"/>
+                    <ns2:creationId id="{29AA0F10-7148-420B-B9E7-C2B2D3802485}"/>
                   </a:ext>
                 </a:extLst>
               </p:cNvPr>
@@ -19055,7 +19055,7 @@
             </p:nvSpPr>
             <p:spPr>
               <a:xfrm>
-                <a:off x="21137166" y="4181475"/>
+                <a:off x="21137166" y="4162425"/>
                 <a:ext cx="175564" cy="358140"/>
               </a:xfrm>
               <a:prstGeom prst="rect">
@@ -19097,10 +19097,10 @@
           </p:sp>
           <p:sp>
             <p:nvSpPr>
-              <p:cNvPr id="280" name="50" descr="t146">
+              <p:cNvPr id="281" name="50" descr="t147">
                 <a:extLst>
                   <a:ext uri="{FF2B5EF4-FFF2-40B4-BE49-F238E27FC236}">
-                    <ns2:creationId id="{713639EC-7A6C-4AF1-857F-514A3CD5C6EA}"/>
+                    <ns2:creationId id="{9920BB56-59CE-4BB6-B83C-5FDD5D7EC86C}"/>
                   </a:ext>
                 </a:extLst>
               </p:cNvPr>
@@ -19111,7 +19111,7 @@
             </p:nvSpPr>
             <p:spPr>
               <a:xfrm>
-                <a:off x="24779288" y="4181475"/>
+                <a:off x="24779288" y="4162425"/>
                 <a:ext cx="284646" cy="358140"/>
               </a:xfrm>
               <a:prstGeom prst="rect">
@@ -19153,10 +19153,10 @@
           </p:sp>
           <p:sp>
             <p:nvSpPr>
-              <p:cNvPr id="281" name="100%" descr="t147">
+              <p:cNvPr id="282" name="100%" descr="t148">
                 <a:extLst>
                   <a:ext uri="{FF2B5EF4-FFF2-40B4-BE49-F238E27FC236}">
-                    <ns2:creationId id="{5F4FD694-2C0C-44D1-8BFA-7600C96A9ED7}"/>
+                    <ns2:creationId id="{1D345E19-6499-4E07-99EE-E10541C0AD79}"/>
                   </a:ext>
                 </a:extLst>
               </p:cNvPr>
@@ -19167,7 +19167,7 @@
             </p:nvSpPr>
             <p:spPr>
               <a:xfrm>
-                <a:off x="28530500" y="4181475"/>
+                <a:off x="28530500" y="4162425"/>
                 <a:ext cx="570551" cy="358140"/>
               </a:xfrm>
               <a:prstGeom prst="rect">
@@ -19209,10 +19209,10 @@
           </p:sp>
           <p:sp>
             <p:nvSpPr>
-              <p:cNvPr id="399" name="65.4" descr="t265">
+              <p:cNvPr id="400" name="65.4" descr="t266">
                 <a:extLst>
                   <a:ext uri="{FF2B5EF4-FFF2-40B4-BE49-F238E27FC236}">
-                    <ns2:creationId id="{E67BD05E-14E0-4DD3-A76F-AB9331CF4D30}"/>
+                    <ns2:creationId id="{9E829721-7239-449F-83D4-65F931A124D9}"/>
                   </a:ext>
                 </a:extLst>
               </p:cNvPr>
@@ -19223,7 +19223,7 @@
             </p:nvSpPr>
             <p:spPr>
               <a:xfrm>
-                <a:off x="26384399" y="2660714"/>
+                <a:off x="26384399" y="2651189"/>
                 <a:ext cx="520281" cy="388544"/>
               </a:xfrm>
               <a:prstGeom prst="rect">
@@ -19265,10 +19265,10 @@
           </p:sp>
           <p:sp>
             <p:nvSpPr>
-              <p:cNvPr id="400" name="46.2" descr="t266">
+              <p:cNvPr id="401" name="46.2" descr="t267">
                 <a:extLst>
                   <a:ext uri="{FF2B5EF4-FFF2-40B4-BE49-F238E27FC236}">
-                    <ns2:creationId id="{C66BFD7B-5F18-4819-A1FD-57D557BF70D0}"/>
+                    <ns2:creationId id="{65929D98-A525-4AD5-BDF7-C39939C6DDC8}"/>
                   </a:ext>
                 </a:extLst>
               </p:cNvPr>
@@ -19279,7 +19279,7 @@
             </p:nvSpPr>
             <p:spPr>
               <a:xfrm>
-                <a:off x="24866203" y="3260789"/>
+                <a:off x="24866203" y="3241739"/>
                 <a:ext cx="519987" cy="388544"/>
               </a:xfrm>
               <a:prstGeom prst="rect">
@@ -19321,10 +19321,10 @@
           </p:sp>
           <p:sp>
             <p:nvSpPr>
-              <p:cNvPr id="401" name="63.2" descr="t267">
+              <p:cNvPr id="402" name="63.2" descr="t268">
                 <a:extLst>
                   <a:ext uri="{FF2B5EF4-FFF2-40B4-BE49-F238E27FC236}">
-                    <ns2:creationId id="{A595E34E-F011-4D37-9986-72F9A71B09C8}"/>
+                    <ns2:creationId id="{B66E8D36-5D2A-4869-98C1-027043ECC01C}"/>
                   </a:ext>
                 </a:extLst>
               </p:cNvPr>
@@ -19335,7 +19335,7 @@
             </p:nvSpPr>
             <p:spPr>
               <a:xfrm>
-                <a:off x="26210419" y="3860864"/>
+                <a:off x="26210419" y="3841814"/>
                 <a:ext cx="505972" cy="388544"/>
               </a:xfrm>
               <a:prstGeom prst="rect">
@@ -19378,22 +19378,22 @@
         </p:grpSp>
         <p:sp>
           <p:nvSpPr>
-            <p:cNvPr id="274" name="9. OCR robustness" descr="t140">
-              <a:extLst>
-                <a:ext uri="{FF2B5EF4-FFF2-40B4-BE49-F238E27FC236}">
-                  <ns2:creationId id="{90127CBC-811F-44B6-8FB1-42B1EB977CBE}"/>
-                </a:ext>
-              </a:extLst>
-            </p:cNvPr>
-            <p:cNvSpPr>
-              <a:spLocks noGrp="1"/>
-            </p:cNvSpPr>
-            <p:nvPr/>
-          </p:nvSpPr>
-          <p:spPr>
-            <a:xfrm>
-              <a:off x="21108591" y="1416082"/>
-              <a:ext cx="2463589" cy="464782"/>
+            <p:cNvPr id="275" name="9. Results: OCR robustness" descr="t141">
+              <a:extLst>
+                <a:ext uri="{FF2B5EF4-FFF2-40B4-BE49-F238E27FC236}">
+                  <ns2:creationId id="{99E273F0-B60F-40FD-935B-5D31C4EB8196}"/>
+                </a:ext>
+              </a:extLst>
+            </p:cNvPr>
+            <p:cNvSpPr>
+              <a:spLocks noGrp="1"/>
+            </p:cNvSpPr>
+            <p:nvPr/>
+          </p:nvSpPr>
+          <p:spPr>
+            <a:xfrm>
+              <a:off x="21108591" y="1397032"/>
+              <a:ext cx="3597148" cy="464782"/>
             </a:xfrm>
             <a:prstGeom prst="rect">
               <a:avLst/>
@@ -19426,7 +19426,7 @@
                   <a:ea typeface="Barlow Condensed"/>
                   <a:cs typeface="Barlow Condensed"/>
                 </a:rPr>
-                <a:t>9. OCR robustness</a:t>
+                <a:t>9. Results: OCR robustness</a:t>
               </a:r>
               <a:endParaRPr lang="en-GB" sz="2800"/>
             </a:p>
@@ -19434,21 +19434,21 @@
         </p:sp>
         <p:sp>
           <p:nvSpPr>
-            <p:cNvPr id="275" name="OCR recovers performance on scanned documents" descr="t141">
-              <a:extLst>
-                <a:ext uri="{FF2B5EF4-FFF2-40B4-BE49-F238E27FC236}">
-                  <ns2:creationId id="{6C55C6A3-0C93-4CCC-8C01-4C936C9E4020}"/>
-                </a:ext>
-              </a:extLst>
-            </p:cNvPr>
-            <p:cNvSpPr>
-              <a:spLocks noGrp="1"/>
-            </p:cNvSpPr>
-            <p:nvPr/>
-          </p:nvSpPr>
-          <p:spPr>
-            <a:xfrm>
-              <a:off x="21137166" y="1962150"/>
+            <p:cNvPr id="276" name="OCR recovers performance on scanned documents" descr="t142">
+              <a:extLst>
+                <a:ext uri="{FF2B5EF4-FFF2-40B4-BE49-F238E27FC236}">
+                  <ns2:creationId id="{54FDD7FB-824D-4010-A108-CC59952B0F4E}"/>
+                </a:ext>
+              </a:extLst>
+            </p:cNvPr>
+            <p:cNvSpPr>
+              <a:spLocks noGrp="1"/>
+            </p:cNvSpPr>
+            <p:nvPr/>
+          </p:nvSpPr>
+          <p:spPr>
+            <a:xfrm>
+              <a:off x="21137166" y="1943100"/>
               <a:ext cx="5637436" cy="403860"/>
             </a:xfrm>
             <a:prstGeom prst="rect">
@@ -19490,21 +19490,21 @@
         </p:sp>
         <p:sp>
           <p:nvSpPr>
-            <p:cNvPr id="282" name="Converting 10 documents into synthetic scans reduces answer quality fr" descr="t148">
-              <a:extLst>
-                <a:ext uri="{FF2B5EF4-FFF2-40B4-BE49-F238E27FC236}">
-                  <ns2:creationId id="{0467B30A-0313-4123-9AFA-3F2971C37336}"/>
-                </a:ext>
-              </a:extLst>
-            </p:cNvPr>
-            <p:cNvSpPr>
-              <a:spLocks noGrp="1"/>
-            </p:cNvSpPr>
-            <p:nvPr/>
-          </p:nvSpPr>
-          <p:spPr>
-            <a:xfrm>
-              <a:off x="21137166" y="4562475"/>
+            <p:cNvPr id="283" name="Converting 10 documents into synthetic scans reduces answer quality fr" descr="t149">
+              <a:extLst>
+                <a:ext uri="{FF2B5EF4-FFF2-40B4-BE49-F238E27FC236}">
+                  <ns2:creationId id="{DAEECB34-EDB2-4B30-AF72-2E3BEF8258F5}"/>
+                </a:ext>
+              </a:extLst>
+            </p:cNvPr>
+            <p:cNvSpPr>
+              <a:spLocks noGrp="1"/>
+            </p:cNvSpPr>
+            <p:nvPr/>
+          </p:nvSpPr>
+          <p:spPr>
+            <a:xfrm>
+              <a:off x="21137166" y="4552950"/>
               <a:ext cx="8548588" cy="403860"/>
             </a:xfrm>
             <a:prstGeom prst="rect">
@@ -19546,21 +19546,21 @@
         </p:sp>
         <p:sp>
           <p:nvSpPr>
-            <p:cNvPr id="283" name="to 46.2%. OCR restores most of this loss, reaching 63.2%." descr="t149">
-              <a:extLst>
-                <a:ext uri="{FF2B5EF4-FFF2-40B4-BE49-F238E27FC236}">
-                  <ns2:creationId id="{1C73501D-3D44-4492-B413-BCA148703307}"/>
-                </a:ext>
-              </a:extLst>
-            </p:cNvPr>
-            <p:cNvSpPr>
-              <a:spLocks noGrp="1"/>
-            </p:cNvSpPr>
-            <p:nvPr/>
-          </p:nvSpPr>
-          <p:spPr>
-            <a:xfrm>
-              <a:off x="21137166" y="4886325"/>
+            <p:cNvPr id="284" name="to 46.2%. OCR restores most of this loss, reaching 63.2%." descr="t150">
+              <a:extLst>
+                <a:ext uri="{FF2B5EF4-FFF2-40B4-BE49-F238E27FC236}">
+                  <ns2:creationId id="{8A488D84-B514-4DD2-A083-F95804D09474}"/>
+                </a:ext>
+              </a:extLst>
+            </p:cNvPr>
+            <p:cNvSpPr>
+              <a:spLocks noGrp="1"/>
+            </p:cNvSpPr>
+            <p:nvPr/>
+          </p:nvSpPr>
+          <p:spPr>
+            <a:xfrm>
+              <a:off x="21137166" y="4867275"/>
               <a:ext cx="6016609" cy="403860"/>
             </a:xfrm>
             <a:prstGeom prst="rect">
@@ -19603,15 +19603,15 @@
       </p:grpSp>
       <p:grpSp>
         <p:nvGrpSpPr>
-          <p:cNvPr id="538" name="10. Hypothesis evaluation"/>
+          <p:cNvPr id="539" name="10. Results: Hypothesis evaluation"/>
           <p:cNvGrpSpPr/>
           <p:nvPr/>
         </p:nvGrpSpPr>
         <p:grpSpPr>
           <a:xfrm>
-            <a:off x="20975241" y="5426422"/>
+            <a:off x="20975241" y="5412581"/>
             <a:ext cx="9012734" cy="3719215"/>
-            <a:chOff x="20975241" y="5426422"/>
+            <a:chOff x="20975241" y="5412581"/>
             <a:chExt cx="9012734" cy="3719215"/>
           </a:xfrm>
         </p:grpSpPr>
@@ -19620,18 +19620,18 @@
             <p:cNvPr id="50" name="Panel H2" descr="s49">
               <a:extLst>
                 <a:ext uri="{FF2B5EF4-FFF2-40B4-BE49-F238E27FC236}">
-                  <ns2:creationId id="{6F17153C-37CB-4410-95D9-484D1295D4B7}"/>
-                </a:ext>
-              </a:extLst>
-            </p:cNvPr>
-            <p:cNvSpPr>
-              <a:spLocks noGrp="1"/>
-            </p:cNvSpPr>
-            <p:nvPr/>
-          </p:nvSpPr>
-          <p:spPr>
-            <a:xfrm>
-              <a:off x="20975241" y="5426422"/>
+                  <ns2:creationId id="{FCE47388-9763-4BC7-88D9-12D3641EFB63}"/>
+                </a:ext>
+              </a:extLst>
+            </p:cNvPr>
+            <p:cNvSpPr>
+              <a:spLocks noGrp="1"/>
+            </p:cNvSpPr>
+            <p:nvPr/>
+          </p:nvSpPr>
+          <p:spPr>
+            <a:xfrm>
+              <a:off x="20975241" y="5412581"/>
               <a:ext cx="9012734" cy="517327"/>
             </a:xfrm>
             <a:custGeom>
@@ -19702,18 +19702,18 @@
             <p:cNvPr id="51" name="Panel content" descr="s50">
               <a:extLst>
                 <a:ext uri="{FF2B5EF4-FFF2-40B4-BE49-F238E27FC236}">
-                  <ns2:creationId id="{84579EEE-CB06-4743-8550-B0DFFD9AA8A0}"/>
-                </a:ext>
-              </a:extLst>
-            </p:cNvPr>
-            <p:cNvSpPr>
-              <a:spLocks noGrp="1"/>
-            </p:cNvSpPr>
-            <p:nvPr/>
-          </p:nvSpPr>
-          <p:spPr>
-            <a:xfrm>
-              <a:off x="20975241" y="5943749"/>
+                  <ns2:creationId id="{6BFC2851-760F-422A-8253-06B126A0A75F}"/>
+                </a:ext>
+              </a:extLst>
+            </p:cNvPr>
+            <p:cNvSpPr>
+              <a:spLocks noGrp="1"/>
+            </p:cNvSpPr>
+            <p:nvPr/>
+          </p:nvSpPr>
+          <p:spPr>
+            <a:xfrm>
+              <a:off x="20975241" y="5929908"/>
               <a:ext cx="9012734" cy="3201888"/>
             </a:xfrm>
             <a:custGeom>
@@ -19778,18 +19778,18 @@
             <p:cNvPr id="52" name="Panel hyp-result h1" descr="s51">
               <a:extLst>
                 <a:ext uri="{FF2B5EF4-FFF2-40B4-BE49-F238E27FC236}">
-                  <ns2:creationId id="{B14694D2-780B-427C-A21E-AF6B2958518D}"/>
-                </a:ext>
-              </a:extLst>
-            </p:cNvPr>
-            <p:cNvSpPr>
-              <a:spLocks noGrp="1"/>
-            </p:cNvSpPr>
-            <p:nvPr/>
-          </p:nvSpPr>
-          <p:spPr>
-            <a:xfrm>
-              <a:off x="21099066" y="6067574"/>
+                  <ns2:creationId id="{D099235C-26A1-463A-BC5C-0894979CC056}"/>
+                </a:ext>
+              </a:extLst>
+            </p:cNvPr>
+            <p:cNvSpPr>
+              <a:spLocks noGrp="1"/>
+            </p:cNvSpPr>
+            <p:nvPr/>
+          </p:nvSpPr>
+          <p:spPr>
+            <a:xfrm>
+              <a:off x="21099066" y="6053733"/>
               <a:ext cx="8765084" cy="1159966"/>
             </a:xfrm>
             <a:custGeom>
@@ -19852,18 +19852,18 @@
             <p:cNvPr id="53" name="Panel hyp-result h2" descr="s52">
               <a:extLst>
                 <a:ext uri="{FF2B5EF4-FFF2-40B4-BE49-F238E27FC236}">
-                  <ns2:creationId id="{D56966A3-1F28-4F1E-A4FB-8450F8801B8B}"/>
-                </a:ext>
-              </a:extLst>
-            </p:cNvPr>
-            <p:cNvSpPr>
-              <a:spLocks noGrp="1"/>
-            </p:cNvSpPr>
-            <p:nvPr/>
-          </p:nvSpPr>
-          <p:spPr>
-            <a:xfrm>
-              <a:off x="21099066" y="7284690"/>
+                  <ns2:creationId id="{9EF43E87-7733-4CB7-B122-D2F2D75D1A55}"/>
+                </a:ext>
+              </a:extLst>
+            </p:cNvPr>
+            <p:cNvSpPr>
+              <a:spLocks noGrp="1"/>
+            </p:cNvSpPr>
+            <p:nvPr/>
+          </p:nvSpPr>
+          <p:spPr>
+            <a:xfrm>
+              <a:off x="21099066" y="7270849"/>
               <a:ext cx="8765084" cy="839986"/>
             </a:xfrm>
             <a:custGeom>
@@ -19926,18 +19926,18 @@
             <p:cNvPr id="54" name="Panel hyp-result h3" descr="s53">
               <a:extLst>
                 <a:ext uri="{FF2B5EF4-FFF2-40B4-BE49-F238E27FC236}">
-                  <ns2:creationId id="{9CE68E51-7877-4F67-A0DE-7D882D4F2716}"/>
-                </a:ext>
-              </a:extLst>
-            </p:cNvPr>
-            <p:cNvSpPr>
-              <a:spLocks noGrp="1"/>
-            </p:cNvSpPr>
-            <p:nvPr/>
-          </p:nvSpPr>
-          <p:spPr>
-            <a:xfrm>
-              <a:off x="21099066" y="8181826"/>
+                  <ns2:creationId id="{6674BC3C-0D19-48B4-AE24-33369D5E082A}"/>
+                </a:ext>
+              </a:extLst>
+            </p:cNvPr>
+            <p:cNvSpPr>
+              <a:spLocks noGrp="1"/>
+            </p:cNvSpPr>
+            <p:nvPr/>
+          </p:nvSpPr>
+          <p:spPr>
+            <a:xfrm>
+              <a:off x="21099066" y="8167985"/>
               <a:ext cx="8765084" cy="839986"/>
             </a:xfrm>
             <a:custGeom>
@@ -19997,22 +19997,22 @@
         </p:sp>
         <p:sp>
           <p:nvSpPr>
-            <p:cNvPr id="284" name="10. Hypothesis evaluation" descr="t150">
-              <a:extLst>
-                <a:ext uri="{FF2B5EF4-FFF2-40B4-BE49-F238E27FC236}">
-                  <ns2:creationId id="{07BE9E80-07F8-4C3D-BDF7-7CF11FB90F88}"/>
-                </a:ext>
-              </a:extLst>
-            </p:cNvPr>
-            <p:cNvSpPr>
-              <a:spLocks noGrp="1"/>
-            </p:cNvSpPr>
-            <p:nvPr/>
-          </p:nvSpPr>
-          <p:spPr>
-            <a:xfrm>
-              <a:off x="21108591" y="5473732"/>
-              <a:ext cx="3415091" cy="464782"/>
+            <p:cNvPr id="285" name="10. Results: Hypothesis evaluation" descr="t151">
+              <a:extLst>
+                <a:ext uri="{FF2B5EF4-FFF2-40B4-BE49-F238E27FC236}">
+                  <ns2:creationId id="{C830288A-3E11-45DB-807D-F58AA382CBCA}"/>
+                </a:ext>
+              </a:extLst>
+            </p:cNvPr>
+            <p:cNvSpPr>
+              <a:spLocks noGrp="1"/>
+            </p:cNvSpPr>
+            <p:nvPr/>
+          </p:nvSpPr>
+          <p:spPr>
+            <a:xfrm>
+              <a:off x="21108591" y="5454682"/>
+              <a:ext cx="4548649" cy="464782"/>
             </a:xfrm>
             <a:prstGeom prst="rect">
               <a:avLst/>
@@ -20045,7 +20045,7 @@
                   <a:ea typeface="Barlow Condensed"/>
                   <a:cs typeface="Barlow Condensed"/>
                 </a:rPr>
-                <a:t>10. Hypothesis evaluation</a:t>
+                <a:t>10. Results: Hypothesis evaluation</a:t>
               </a:r>
               <a:endParaRPr lang="en-GB" sz="2800"/>
             </a:p>
@@ -20053,21 +20053,21 @@
         </p:sp>
         <p:sp>
           <p:nvSpPr>
-            <p:cNvPr id="285" name="H1 — Retrieval &amp; representation" descr="t151">
-              <a:extLst>
-                <a:ext uri="{FF2B5EF4-FFF2-40B4-BE49-F238E27FC236}">
-                  <ns2:creationId id="{6180580F-83CF-4642-B22D-633917A3365B}"/>
-                </a:ext>
-              </a:extLst>
-            </p:cNvPr>
-            <p:cNvSpPr>
-              <a:spLocks noGrp="1"/>
-            </p:cNvSpPr>
-            <p:nvPr/>
-          </p:nvSpPr>
-          <p:spPr>
-            <a:xfrm>
-              <a:off x="21222891" y="6143625"/>
+            <p:cNvPr id="286" name="H1 — Retrieval &amp; representation" descr="t152">
+              <a:extLst>
+                <a:ext uri="{FF2B5EF4-FFF2-40B4-BE49-F238E27FC236}">
+                  <ns2:creationId id="{F750C180-E1F1-4139-9236-871F9B552722}"/>
+                </a:ext>
+              </a:extLst>
+            </p:cNvPr>
+            <p:cNvSpPr>
+              <a:spLocks noGrp="1"/>
+            </p:cNvSpPr>
+            <p:nvPr/>
+          </p:nvSpPr>
+          <p:spPr>
+            <a:xfrm>
+              <a:off x="21222891" y="6134100"/>
               <a:ext cx="3526081" cy="403860"/>
             </a:xfrm>
             <a:prstGeom prst="rect">
@@ -20109,21 +20109,21 @@
         </p:sp>
         <p:sp>
           <p:nvSpPr>
-            <p:cNvPr id="286" name="Partially supported." descr="t152">
-              <a:extLst>
-                <a:ext uri="{FF2B5EF4-FFF2-40B4-BE49-F238E27FC236}">
-                  <ns2:creationId id="{BDCB007C-B850-4965-A1CA-42C9185F336A}"/>
-                </a:ext>
-              </a:extLst>
-            </p:cNvPr>
-            <p:cNvSpPr>
-              <a:spLocks noGrp="1"/>
-            </p:cNvSpPr>
-            <p:nvPr/>
-          </p:nvSpPr>
-          <p:spPr>
-            <a:xfrm>
-              <a:off x="24848195" y="6143625"/>
+            <p:cNvPr id="287" name="Partially supported." descr="t153">
+              <a:extLst>
+                <a:ext uri="{FF2B5EF4-FFF2-40B4-BE49-F238E27FC236}">
+                  <ns2:creationId id="{57999790-3D54-47DD-8F5C-BD0B49A17773}"/>
+                </a:ext>
+              </a:extLst>
+            </p:cNvPr>
+            <p:cNvSpPr>
+              <a:spLocks noGrp="1"/>
+            </p:cNvSpPr>
+            <p:nvPr/>
+          </p:nvSpPr>
+          <p:spPr>
+            <a:xfrm>
+              <a:off x="24848195" y="6134100"/>
               <a:ext cx="2235860" cy="403860"/>
             </a:xfrm>
             <a:prstGeom prst="rect">
@@ -20165,21 +20165,21 @@
         </p:sp>
         <p:sp>
           <p:nvSpPr>
-            <p:cNvPr id="287" name=" Multi-scale" descr="t153">
-              <a:extLst>
-                <a:ext uri="{FF2B5EF4-FFF2-40B4-BE49-F238E27FC236}">
-                  <ns2:creationId id="{45B17A18-2F0F-4378-9A62-BCC50C6D30B5}"/>
-                </a:ext>
-              </a:extLst>
-            </p:cNvPr>
-            <p:cNvSpPr>
-              <a:spLocks noGrp="1"/>
-            </p:cNvSpPr>
-            <p:nvPr/>
-          </p:nvSpPr>
-          <p:spPr>
-            <a:xfrm>
-              <a:off x="27027039" y="6143625"/>
+            <p:cNvPr id="288" name=" Multi-scale" descr="t154">
+              <a:extLst>
+                <a:ext uri="{FF2B5EF4-FFF2-40B4-BE49-F238E27FC236}">
+                  <ns2:creationId id="{200A1A25-4AAD-4D87-9D3D-31E45612A505}"/>
+                </a:ext>
+              </a:extLst>
+            </p:cNvPr>
+            <p:cNvSpPr>
+              <a:spLocks noGrp="1"/>
+            </p:cNvSpPr>
+            <p:nvPr/>
+          </p:nvSpPr>
+          <p:spPr>
+            <a:xfrm>
+              <a:off x="27027039" y="6134100"/>
               <a:ext cx="1243130" cy="403860"/>
             </a:xfrm>
             <a:prstGeom prst="rect">
@@ -20221,21 +20221,21 @@
         </p:sp>
         <p:sp>
           <p:nvSpPr>
-            <p:cNvPr id="288" name="representations alone reduce Q, but adding lexical retrieval and reran" descr="t154">
-              <a:extLst>
-                <a:ext uri="{FF2B5EF4-FFF2-40B4-BE49-F238E27FC236}">
-                  <ns2:creationId id="{6CFCFE69-6C0D-45B8-9B41-FCFDBEB0EC2B}"/>
-                </a:ext>
-              </a:extLst>
-            </p:cNvPr>
-            <p:cNvSpPr>
-              <a:spLocks noGrp="1"/>
-            </p:cNvSpPr>
-            <p:nvPr/>
-          </p:nvSpPr>
-          <p:spPr>
-            <a:xfrm>
-              <a:off x="21222891" y="6467475"/>
+            <p:cNvPr id="289" name="representations alone reduce Q, but adding lexical retrieval and reran" descr="t155">
+              <a:extLst>
+                <a:ext uri="{FF2B5EF4-FFF2-40B4-BE49-F238E27FC236}">
+                  <ns2:creationId id="{1678B759-38FB-4FEF-978E-B5FB8F4F9721}"/>
+                </a:ext>
+              </a:extLst>
+            </p:cNvPr>
+            <p:cNvSpPr>
+              <a:spLocks noGrp="1"/>
+            </p:cNvSpPr>
+            <p:nvPr/>
+          </p:nvSpPr>
+          <p:spPr>
+            <a:xfrm>
+              <a:off x="21222891" y="6448425"/>
               <a:ext cx="7657970" cy="403860"/>
             </a:xfrm>
             <a:prstGeom prst="rect">
@@ -20277,21 +20277,21 @@
         </p:sp>
         <p:sp>
           <p:nvSpPr>
-            <p:cNvPr id="289" name="substantially improves answer quality and source-page recall." descr="t155">
-              <a:extLst>
-                <a:ext uri="{FF2B5EF4-FFF2-40B4-BE49-F238E27FC236}">
-                  <ns2:creationId id="{5030ABF8-8FED-4AE3-8638-8CF833562F25}"/>
-                </a:ext>
-              </a:extLst>
-            </p:cNvPr>
-            <p:cNvSpPr>
-              <a:spLocks noGrp="1"/>
-            </p:cNvSpPr>
-            <p:nvPr/>
-          </p:nvSpPr>
-          <p:spPr>
-            <a:xfrm>
-              <a:off x="21222891" y="6781800"/>
+            <p:cNvPr id="290" name="substantially improves answer quality and source-page recall." descr="t156">
+              <a:extLst>
+                <a:ext uri="{FF2B5EF4-FFF2-40B4-BE49-F238E27FC236}">
+                  <ns2:creationId id="{9BFE9856-F922-44A3-BB23-9AFD9F056578}"/>
+                </a:ext>
+              </a:extLst>
+            </p:cNvPr>
+            <p:cNvSpPr>
+              <a:spLocks noGrp="1"/>
+            </p:cNvSpPr>
+            <p:nvPr/>
+          </p:nvSpPr>
+          <p:spPr>
+            <a:xfrm>
+              <a:off x="21222891" y="6772275"/>
               <a:ext cx="6453094" cy="403860"/>
             </a:xfrm>
             <a:prstGeom prst="rect">
@@ -20333,21 +20333,21 @@
         </p:sp>
         <p:sp>
           <p:nvSpPr>
-            <p:cNvPr id="290" name="H2 — Scan robustness" descr="t156">
-              <a:extLst>
-                <a:ext uri="{FF2B5EF4-FFF2-40B4-BE49-F238E27FC236}">
-                  <ns2:creationId id="{C3628BF6-C159-4DB7-AA89-5203B4CAA03C}"/>
-                </a:ext>
-              </a:extLst>
-            </p:cNvPr>
-            <p:cNvSpPr>
-              <a:spLocks noGrp="1"/>
-            </p:cNvSpPr>
-            <p:nvPr/>
-          </p:nvSpPr>
-          <p:spPr>
-            <a:xfrm>
-              <a:off x="21222891" y="7362825"/>
+            <p:cNvPr id="291" name="H2 — Scan robustness" descr="t157">
+              <a:extLst>
+                <a:ext uri="{FF2B5EF4-FFF2-40B4-BE49-F238E27FC236}">
+                  <ns2:creationId id="{76721F2C-A92C-4121-B831-B0E73101A75C}"/>
+                </a:ext>
+              </a:extLst>
+            </p:cNvPr>
+            <p:cNvSpPr>
+              <a:spLocks noGrp="1"/>
+            </p:cNvSpPr>
+            <p:nvPr/>
+          </p:nvSpPr>
+          <p:spPr>
+            <a:xfrm>
+              <a:off x="21222891" y="7343775"/>
               <a:ext cx="2474823" cy="403860"/>
             </a:xfrm>
             <a:prstGeom prst="rect">
@@ -20389,21 +20389,21 @@
         </p:sp>
         <p:sp>
           <p:nvSpPr>
-            <p:cNvPr id="291" name="Supported." descr="t157">
-              <a:extLst>
-                <a:ext uri="{FF2B5EF4-FFF2-40B4-BE49-F238E27FC236}">
-                  <ns2:creationId id="{B7EBAABF-4B2A-4171-927F-6299C600F120}"/>
-                </a:ext>
-              </a:extLst>
-            </p:cNvPr>
-            <p:cNvSpPr>
-              <a:spLocks noGrp="1"/>
-            </p:cNvSpPr>
-            <p:nvPr/>
-          </p:nvSpPr>
-          <p:spPr>
-            <a:xfrm>
-              <a:off x="23796873" y="7362825"/>
+            <p:cNvPr id="292" name="Supported." descr="t158">
+              <a:extLst>
+                <a:ext uri="{FF2B5EF4-FFF2-40B4-BE49-F238E27FC236}">
+                  <ns2:creationId id="{D86A6FEA-7AF5-41D3-8BF3-7D27A6976E94}"/>
+                </a:ext>
+              </a:extLst>
+            </p:cNvPr>
+            <p:cNvSpPr>
+              <a:spLocks noGrp="1"/>
+            </p:cNvSpPr>
+            <p:nvPr/>
+          </p:nvSpPr>
+          <p:spPr>
+            <a:xfrm>
+              <a:off x="23796873" y="7343775"/>
               <a:ext cx="1260500" cy="403860"/>
             </a:xfrm>
             <a:prstGeom prst="rect">
@@ -20445,21 +20445,21 @@
         </p:sp>
         <p:sp>
           <p:nvSpPr>
-            <p:cNvPr id="292" name=" OCR restores most of the answer-quality loss" descr="t158">
-              <a:extLst>
-                <a:ext uri="{FF2B5EF4-FFF2-40B4-BE49-F238E27FC236}">
-                  <ns2:creationId id="{53DC3758-B980-4C22-8350-85D20FBB3DF0}"/>
-                </a:ext>
-              </a:extLst>
-            </p:cNvPr>
-            <p:cNvSpPr>
-              <a:spLocks noGrp="1"/>
-            </p:cNvSpPr>
-            <p:nvPr/>
-          </p:nvSpPr>
-          <p:spPr>
-            <a:xfrm>
-              <a:off x="25000297" y="7362825"/>
+            <p:cNvPr id="293" name=" OCR restores most of the answer-quality loss" descr="t159">
+              <a:extLst>
+                <a:ext uri="{FF2B5EF4-FFF2-40B4-BE49-F238E27FC236}">
+                  <ns2:creationId id="{71530DDE-BBFD-4E13-AB6C-E68E1FE99E36}"/>
+                </a:ext>
+              </a:extLst>
+            </p:cNvPr>
+            <p:cNvSpPr>
+              <a:spLocks noGrp="1"/>
+            </p:cNvSpPr>
+            <p:nvPr/>
+          </p:nvSpPr>
+          <p:spPr>
+            <a:xfrm>
+              <a:off x="25000297" y="7343775"/>
               <a:ext cx="4757170" cy="403860"/>
             </a:xfrm>
             <a:prstGeom prst="rect">
@@ -20501,21 +20501,21 @@
         </p:sp>
         <p:sp>
           <p:nvSpPr>
-            <p:cNvPr id="293" name="caused by removing the machine-readable text layer." descr="t159">
-              <a:extLst>
-                <a:ext uri="{FF2B5EF4-FFF2-40B4-BE49-F238E27FC236}">
-                  <ns2:creationId id="{1C7806A9-5685-4F8E-931D-F8CC3B38BBFD}"/>
-                </a:ext>
-              </a:extLst>
-            </p:cNvPr>
-            <p:cNvSpPr>
-              <a:spLocks noGrp="1"/>
-            </p:cNvSpPr>
-            <p:nvPr/>
-          </p:nvSpPr>
-          <p:spPr>
-            <a:xfrm>
-              <a:off x="21222891" y="7677150"/>
+            <p:cNvPr id="294" name="caused by removing the machine-readable text layer." descr="t160">
+              <a:extLst>
+                <a:ext uri="{FF2B5EF4-FFF2-40B4-BE49-F238E27FC236}">
+                  <ns2:creationId id="{125179A3-BFE8-4847-822E-317FE890EC4C}"/>
+                </a:ext>
+              </a:extLst>
+            </p:cNvPr>
+            <p:cNvSpPr>
+              <a:spLocks noGrp="1"/>
+            </p:cNvSpPr>
+            <p:nvPr/>
+          </p:nvSpPr>
+          <p:spPr>
+            <a:xfrm>
+              <a:off x="21222891" y="7667625"/>
               <a:ext cx="5556359" cy="403860"/>
             </a:xfrm>
             <a:prstGeom prst="rect">
@@ -20557,21 +20557,21 @@
         </p:sp>
         <p:sp>
           <p:nvSpPr>
-            <p:cNvPr id="294" name="H3 — Citation selection" descr="t160">
-              <a:extLst>
-                <a:ext uri="{FF2B5EF4-FFF2-40B4-BE49-F238E27FC236}">
-                  <ns2:creationId id="{47FACAA7-42FF-4779-A86E-55999C622473}"/>
-                </a:ext>
-              </a:extLst>
-            </p:cNvPr>
-            <p:cNvSpPr>
-              <a:spLocks noGrp="1"/>
-            </p:cNvSpPr>
-            <p:nvPr/>
-          </p:nvSpPr>
-          <p:spPr>
-            <a:xfrm>
-              <a:off x="21222891" y="8258175"/>
+            <p:cNvPr id="295" name="H3 — Citation selection" descr="t161">
+              <a:extLst>
+                <a:ext uri="{FF2B5EF4-FFF2-40B4-BE49-F238E27FC236}">
+                  <ns2:creationId id="{5E170E0F-9D6A-4CFB-BD74-50EC4D6ED34D}"/>
+                </a:ext>
+              </a:extLst>
+            </p:cNvPr>
+            <p:cNvSpPr>
+              <a:spLocks noGrp="1"/>
+            </p:cNvSpPr>
+            <p:nvPr/>
+          </p:nvSpPr>
+          <p:spPr>
+            <a:xfrm>
+              <a:off x="21222891" y="8248650"/>
               <a:ext cx="2571144" cy="403860"/>
             </a:xfrm>
             <a:prstGeom prst="rect">
@@ -20613,21 +20613,21 @@
         </p:sp>
         <p:sp>
           <p:nvSpPr>
-            <p:cNvPr id="295" name="Supported with a trade-off." descr="t161">
-              <a:extLst>
-                <a:ext uri="{FF2B5EF4-FFF2-40B4-BE49-F238E27FC236}">
-                  <ns2:creationId id="{E5016A71-D2A6-4286-967C-20E4F0FA011A}"/>
-                </a:ext>
-              </a:extLst>
-            </p:cNvPr>
-            <p:cNvSpPr>
-              <a:spLocks noGrp="1"/>
-            </p:cNvSpPr>
-            <p:nvPr/>
-          </p:nvSpPr>
-          <p:spPr>
-            <a:xfrm>
-              <a:off x="23893165" y="8258175"/>
+            <p:cNvPr id="296" name="Supported with a trade-off." descr="t162">
+              <a:extLst>
+                <a:ext uri="{FF2B5EF4-FFF2-40B4-BE49-F238E27FC236}">
+                  <ns2:creationId id="{DB84FAEB-4300-4400-8932-15AECA4F5383}"/>
+                </a:ext>
+              </a:extLst>
+            </p:cNvPr>
+            <p:cNvSpPr>
+              <a:spLocks noGrp="1"/>
+            </p:cNvSpPr>
+            <p:nvPr/>
+          </p:nvSpPr>
+          <p:spPr>
+            <a:xfrm>
+              <a:off x="23893165" y="8248650"/>
               <a:ext cx="3065528" cy="403860"/>
             </a:xfrm>
             <a:prstGeom prst="rect">
@@ -20669,21 +20669,21 @@
         </p:sp>
         <p:sp>
           <p:nvSpPr>
-            <p:cNvPr id="296" name=" Precision rises from 27.1%" descr="t162">
-              <a:extLst>
-                <a:ext uri="{FF2B5EF4-FFF2-40B4-BE49-F238E27FC236}">
-                  <ns2:creationId id="{DA487800-9931-4D8E-9FF2-E90AC759CB5F}"/>
-                </a:ext>
-              </a:extLst>
-            </p:cNvPr>
-            <p:cNvSpPr>
-              <a:spLocks noGrp="1"/>
-            </p:cNvSpPr>
-            <p:nvPr/>
-          </p:nvSpPr>
-          <p:spPr>
-            <a:xfrm>
-              <a:off x="26901577" y="8258175"/>
+            <p:cNvPr id="297" name=" Precision rises from 27.1%" descr="t163">
+              <a:extLst>
+                <a:ext uri="{FF2B5EF4-FFF2-40B4-BE49-F238E27FC236}">
+                  <ns2:creationId id="{106E98AC-87A3-424F-8636-F7CA3CCDE543}"/>
+                </a:ext>
+              </a:extLst>
+            </p:cNvPr>
+            <p:cNvSpPr>
+              <a:spLocks noGrp="1"/>
+            </p:cNvSpPr>
+            <p:nvPr/>
+          </p:nvSpPr>
+          <p:spPr>
+            <a:xfrm>
+              <a:off x="26901577" y="8248650"/>
               <a:ext cx="2858266" cy="403860"/>
             </a:xfrm>
             <a:prstGeom prst="rect">
@@ -20725,21 +20725,21 @@
         </p:sp>
         <p:sp>
           <p:nvSpPr>
-            <p:cNvPr id="297" name="to 61.8%, while recall decreases moderately from 78.9% to 74.7%." descr="t163">
-              <a:extLst>
-                <a:ext uri="{FF2B5EF4-FFF2-40B4-BE49-F238E27FC236}">
-                  <ns2:creationId id="{36750378-C1A9-4702-98AC-8106959E40A2}"/>
-                </a:ext>
-              </a:extLst>
-            </p:cNvPr>
-            <p:cNvSpPr>
-              <a:spLocks noGrp="1"/>
-            </p:cNvSpPr>
-            <p:nvPr/>
-          </p:nvSpPr>
-          <p:spPr>
-            <a:xfrm>
-              <a:off x="21222891" y="8582025"/>
+            <p:cNvPr id="298" name="to 61.8%, while recall decreases moderately from 78.9% to 74.7%." descr="t164">
+              <a:extLst>
+                <a:ext uri="{FF2B5EF4-FFF2-40B4-BE49-F238E27FC236}">
+                  <ns2:creationId id="{29728C0E-AE31-43BC-98BF-A77BEC843EA3}"/>
+                </a:ext>
+              </a:extLst>
+            </p:cNvPr>
+            <p:cNvSpPr>
+              <a:spLocks noGrp="1"/>
+            </p:cNvSpPr>
+            <p:nvPr/>
+          </p:nvSpPr>
+          <p:spPr>
+            <a:xfrm>
+              <a:off x="21222891" y="8562975"/>
               <a:ext cx="6884067" cy="403860"/>
             </a:xfrm>
             <a:prstGeom prst="rect">
@@ -20782,15 +20782,15 @@
       </p:grpSp>
       <p:grpSp>
         <p:nvGrpSpPr>
-          <p:cNvPr id="537" name="11. Conclusion and takeaways"/>
+          <p:cNvPr id="538" name="11. Conclusion and takeaways"/>
           <p:cNvGrpSpPr/>
           <p:nvPr/>
         </p:nvGrpSpPr>
         <p:grpSpPr>
           <a:xfrm>
-            <a:off x="20975241" y="9241631"/>
+            <a:off x="20975241" y="9232404"/>
             <a:ext cx="9012734" cy="6221909"/>
-            <a:chOff x="20975241" y="9241631"/>
+            <a:chOff x="20975241" y="9232404"/>
             <a:chExt cx="9012734" cy="6221909"/>
           </a:xfrm>
         </p:grpSpPr>
@@ -20799,18 +20799,18 @@
             <p:cNvPr id="55" name="Panel H2" descr="s54">
               <a:extLst>
                 <a:ext uri="{FF2B5EF4-FFF2-40B4-BE49-F238E27FC236}">
-                  <ns2:creationId id="{D91F9D23-3B31-4882-8AC7-F7B57E8B8B93}"/>
-                </a:ext>
-              </a:extLst>
-            </p:cNvPr>
-            <p:cNvSpPr>
-              <a:spLocks noGrp="1"/>
-            </p:cNvSpPr>
-            <p:nvPr/>
-          </p:nvSpPr>
-          <p:spPr>
-            <a:xfrm>
-              <a:off x="20975241" y="9241631"/>
+                  <ns2:creationId id="{9E5E4B37-E368-4F90-AFA6-D0AB3852BA03}"/>
+                </a:ext>
+              </a:extLst>
+            </p:cNvPr>
+            <p:cNvSpPr>
+              <a:spLocks noGrp="1"/>
+            </p:cNvSpPr>
+            <p:nvPr/>
+          </p:nvSpPr>
+          <p:spPr>
+            <a:xfrm>
+              <a:off x="20975241" y="9232404"/>
               <a:ext cx="9012734" cy="517327"/>
             </a:xfrm>
             <a:custGeom>
@@ -20881,18 +20881,18 @@
             <p:cNvPr id="56" name="Panel content" descr="s55">
               <a:extLst>
                 <a:ext uri="{FF2B5EF4-FFF2-40B4-BE49-F238E27FC236}">
-                  <ns2:creationId id="{C6CBF5E1-1596-4CF4-A634-9E1C0EEF7AF3}"/>
-                </a:ext>
-              </a:extLst>
-            </p:cNvPr>
-            <p:cNvSpPr>
-              <a:spLocks noGrp="1"/>
-            </p:cNvSpPr>
-            <p:nvPr/>
-          </p:nvSpPr>
-          <p:spPr>
-            <a:xfrm>
-              <a:off x="20975241" y="9758958"/>
+                  <ns2:creationId id="{C724D722-91D8-435B-9976-7C53255D73AD}"/>
+                </a:ext>
+              </a:extLst>
+            </p:cNvPr>
+            <p:cNvSpPr>
+              <a:spLocks noGrp="1"/>
+            </p:cNvSpPr>
+            <p:nvPr/>
+          </p:nvSpPr>
+          <p:spPr>
+            <a:xfrm>
+              <a:off x="20975241" y="9749730"/>
               <a:ext cx="9012734" cy="5704582"/>
             </a:xfrm>
             <a:custGeom>
@@ -20957,18 +20957,18 @@
             <p:cNvPr id="57" name="Panel main-takeaway" descr="s56">
               <a:extLst>
                 <a:ext uri="{FF2B5EF4-FFF2-40B4-BE49-F238E27FC236}">
-                  <ns2:creationId id="{DCFFB352-4A25-423C-9C55-ABA686299973}"/>
-                </a:ext>
-              </a:extLst>
-            </p:cNvPr>
-            <p:cNvSpPr>
-              <a:spLocks noGrp="1"/>
-            </p:cNvSpPr>
-            <p:nvPr/>
-          </p:nvSpPr>
-          <p:spPr>
-            <a:xfrm>
-              <a:off x="21137166" y="9854208"/>
+                  <ns2:creationId id="{7F4ADE35-E8CF-4290-A4B5-E7F43564B0E7}"/>
+                </a:ext>
+              </a:extLst>
+            </p:cNvPr>
+            <p:cNvSpPr>
+              <a:spLocks noGrp="1"/>
+            </p:cNvSpPr>
+            <p:nvPr/>
+          </p:nvSpPr>
+          <p:spPr>
+            <a:xfrm>
+              <a:off x="21137166" y="9844980"/>
               <a:ext cx="8688884" cy="1866602"/>
             </a:xfrm>
             <a:custGeom>
@@ -21031,18 +21031,18 @@
             <p:cNvPr id="58" name="Rule" descr="s57">
               <a:extLst>
                 <a:ext uri="{FF2B5EF4-FFF2-40B4-BE49-F238E27FC236}">
-                  <ns2:creationId id="{BBD764D5-D87E-4D3C-9440-6034B65B79BC}"/>
-                </a:ext>
-              </a:extLst>
-            </p:cNvPr>
-            <p:cNvSpPr>
-              <a:spLocks noGrp="1"/>
-            </p:cNvSpPr>
-            <p:nvPr/>
-          </p:nvSpPr>
-          <p:spPr>
-            <a:xfrm>
-              <a:off x="21137166" y="14623554"/>
+                  <ns2:creationId id="{8428B80F-8F7B-46E1-9390-240B21AAA230}"/>
+                </a:ext>
+              </a:extLst>
+            </p:cNvPr>
+            <p:cNvSpPr>
+              <a:spLocks noGrp="1"/>
+            </p:cNvSpPr>
+            <p:nvPr/>
+          </p:nvSpPr>
+          <p:spPr>
+            <a:xfrm>
+              <a:off x="21137166" y="14614327"/>
               <a:ext cx="8688884" cy="9525"/>
             </a:xfrm>
             <a:prstGeom prst="rect">
@@ -21058,21 +21058,21 @@
         </p:sp>
         <p:sp>
           <p:nvSpPr>
-            <p:cNvPr id="298" name="11. Conclusion and takeaways" descr="t164">
-              <a:extLst>
-                <a:ext uri="{FF2B5EF4-FFF2-40B4-BE49-F238E27FC236}">
-                  <ns2:creationId id="{F4818B04-D6F0-4956-8DBC-FC80EE249CA8}"/>
-                </a:ext>
-              </a:extLst>
-            </p:cNvPr>
-            <p:cNvSpPr>
-              <a:spLocks noGrp="1"/>
-            </p:cNvSpPr>
-            <p:nvPr/>
-          </p:nvSpPr>
-          <p:spPr>
-            <a:xfrm>
-              <a:off x="21108591" y="9283732"/>
+            <p:cNvPr id="299" name="11. Conclusion and takeaways" descr="t165">
+              <a:extLst>
+                <a:ext uri="{FF2B5EF4-FFF2-40B4-BE49-F238E27FC236}">
+                  <ns2:creationId id="{213DAE21-DDDF-44B0-85E1-B93F93318547}"/>
+                </a:ext>
+              </a:extLst>
+            </p:cNvPr>
+            <p:cNvSpPr>
+              <a:spLocks noGrp="1"/>
+            </p:cNvSpPr>
+            <p:nvPr/>
+          </p:nvSpPr>
+          <p:spPr>
+            <a:xfrm>
+              <a:off x="21108591" y="9274207"/>
               <a:ext cx="3915346" cy="464782"/>
             </a:xfrm>
             <a:prstGeom prst="rect">
@@ -21114,21 +21114,21 @@
         </p:sp>
         <p:sp>
           <p:nvSpPr>
-            <p:cNvPr id="299" name="Legal RAG should be designed as a multi-stage pipeline: OCR improves" descr="t165">
-              <a:extLst>
-                <a:ext uri="{FF2B5EF4-FFF2-40B4-BE49-F238E27FC236}">
-                  <ns2:creationId id="{FDE83B51-1754-42B7-8D7C-7412C3EDC597}"/>
-                </a:ext>
-              </a:extLst>
-            </p:cNvPr>
-            <p:cNvSpPr>
-              <a:spLocks noGrp="1"/>
-            </p:cNvSpPr>
-            <p:nvPr/>
-          </p:nvSpPr>
-          <p:spPr>
-            <a:xfrm>
-              <a:off x="21270516" y="9963150"/>
+            <p:cNvPr id="300" name="Legal RAG should be designed as a multi-stage pipeline: OCR improves" descr="t166">
+              <a:extLst>
+                <a:ext uri="{FF2B5EF4-FFF2-40B4-BE49-F238E27FC236}">
+                  <ns2:creationId id="{43EF8139-43D4-41A3-A9A2-AF11E5A9DD22}"/>
+                </a:ext>
+              </a:extLst>
+            </p:cNvPr>
+            <p:cNvSpPr>
+              <a:spLocks noGrp="1"/>
+            </p:cNvSpPr>
+            <p:nvPr/>
+          </p:nvSpPr>
+          <p:spPr>
+            <a:xfrm>
+              <a:off x="21270516" y="9953625"/>
               <a:ext cx="7296169" cy="403860"/>
             </a:xfrm>
             <a:prstGeom prst="rect">
@@ -21170,21 +21170,21 @@
         </p:sp>
         <p:sp>
           <p:nvSpPr>
-            <p:cNvPr id="300" name="robustness to unreadable PDFs, hybrid retrieval and reranking improve " descr="t166">
-              <a:extLst>
-                <a:ext uri="{FF2B5EF4-FFF2-40B4-BE49-F238E27FC236}">
-                  <ns2:creationId id="{34500D83-FF37-4A39-9388-7CB6CF6ECFCB}"/>
-                </a:ext>
-              </a:extLst>
-            </p:cNvPr>
-            <p:cNvSpPr>
-              <a:spLocks noGrp="1"/>
-            </p:cNvSpPr>
-            <p:nvPr/>
-          </p:nvSpPr>
-          <p:spPr>
-            <a:xfrm>
-              <a:off x="21270516" y="10277475"/>
+            <p:cNvPr id="301" name="robustness to unreadable PDFs, hybrid retrieval and reranking improve " descr="t167">
+              <a:extLst>
+                <a:ext uri="{FF2B5EF4-FFF2-40B4-BE49-F238E27FC236}">
+                  <ns2:creationId id="{23EAD2E8-1EAD-45AE-8532-3745D54842BE}"/>
+                </a:ext>
+              </a:extLst>
+            </p:cNvPr>
+            <p:cNvSpPr>
+              <a:spLocks noGrp="1"/>
+            </p:cNvSpPr>
+            <p:nvPr/>
+          </p:nvSpPr>
+          <p:spPr>
+            <a:xfrm>
+              <a:off x="21270516" y="10267950"/>
               <a:ext cx="8149310" cy="403860"/>
             </a:xfrm>
             <a:prstGeom prst="rect">
@@ -21226,21 +21226,21 @@
         </p:sp>
         <p:sp>
           <p:nvSpPr>
-            <p:cNvPr id="301" name="quality, and post-answer citation selection improves citation precisio" descr="t167">
-              <a:extLst>
-                <a:ext uri="{FF2B5EF4-FFF2-40B4-BE49-F238E27FC236}">
-                  <ns2:creationId id="{F36933D4-27B4-4DEA-BE76-77151C2D1BA9}"/>
-                </a:ext>
-              </a:extLst>
-            </p:cNvPr>
-            <p:cNvSpPr>
-              <a:spLocks noGrp="1"/>
-            </p:cNvSpPr>
-            <p:nvPr/>
-          </p:nvSpPr>
-          <p:spPr>
-            <a:xfrm>
-              <a:off x="21270516" y="10601325"/>
+            <p:cNvPr id="302" name="quality, and post-answer citation selection improves citation precisio" descr="t168">
+              <a:extLst>
+                <a:ext uri="{FF2B5EF4-FFF2-40B4-BE49-F238E27FC236}">
+                  <ns2:creationId id="{52A11CB8-1769-4A32-85DD-2BA3CC97134B}"/>
+                </a:ext>
+              </a:extLst>
+            </p:cNvPr>
+            <p:cNvSpPr>
+              <a:spLocks noGrp="1"/>
+            </p:cNvSpPr>
+            <p:nvPr/>
+          </p:nvSpPr>
+          <p:spPr>
+            <a:xfrm>
+              <a:off x="21270516" y="10591800"/>
               <a:ext cx="8401062" cy="403860"/>
             </a:xfrm>
             <a:prstGeom prst="rect">
@@ -21282,21 +21282,21 @@
         </p:sp>
         <p:sp>
           <p:nvSpPr>
-            <p:cNvPr id="302" name="citation selection introduces a precision–recall trade-off, so answer " descr="t168">
-              <a:extLst>
-                <a:ext uri="{FF2B5EF4-FFF2-40B4-BE49-F238E27FC236}">
-                  <ns2:creationId id="{83C24129-AD9E-485C-BD41-ED8B2EC14A6B}"/>
-                </a:ext>
-              </a:extLst>
-            </p:cNvPr>
-            <p:cNvSpPr>
-              <a:spLocks noGrp="1"/>
-            </p:cNvSpPr>
-            <p:nvPr/>
-          </p:nvSpPr>
-          <p:spPr>
-            <a:xfrm>
-              <a:off x="21270516" y="10915650"/>
+            <p:cNvPr id="303" name="citation selection introduces a precision–recall trade-off, so answer " descr="t169">
+              <a:extLst>
+                <a:ext uri="{FF2B5EF4-FFF2-40B4-BE49-F238E27FC236}">
+                  <ns2:creationId id="{71FD2C59-FE01-40DF-AD1D-9597B6E7D7DF}"/>
+                </a:ext>
+              </a:extLst>
+            </p:cNvPr>
+            <p:cNvSpPr>
+              <a:spLocks noGrp="1"/>
+            </p:cNvSpPr>
+            <p:nvPr/>
+          </p:nvSpPr>
+          <p:spPr>
+            <a:xfrm>
+              <a:off x="21270516" y="10906125"/>
               <a:ext cx="8278230" cy="403860"/>
             </a:xfrm>
             <a:prstGeom prst="rect">
@@ -21338,21 +21338,21 @@
         </p:sp>
         <p:sp>
           <p:nvSpPr>
-            <p:cNvPr id="303" name="citation quality should be optimized and evaluated separately." descr="t169">
-              <a:extLst>
-                <a:ext uri="{FF2B5EF4-FFF2-40B4-BE49-F238E27FC236}">
-                  <ns2:creationId id="{9FA88BDF-A46E-4632-9FE9-542FC7C49873}"/>
-                </a:ext>
-              </a:extLst>
-            </p:cNvPr>
-            <p:cNvSpPr>
-              <a:spLocks noGrp="1"/>
-            </p:cNvSpPr>
-            <p:nvPr/>
-          </p:nvSpPr>
-          <p:spPr>
-            <a:xfrm>
-              <a:off x="21270516" y="11239500"/>
+            <p:cNvPr id="304" name="citation quality should be optimized and evaluated separately." descr="t170">
+              <a:extLst>
+                <a:ext uri="{FF2B5EF4-FFF2-40B4-BE49-F238E27FC236}">
+                  <ns2:creationId id="{8A564B3F-3E1E-47B3-8C82-E39E5D6972A1}"/>
+                </a:ext>
+              </a:extLst>
+            </p:cNvPr>
+            <p:cNvSpPr>
+              <a:spLocks noGrp="1"/>
+            </p:cNvSpPr>
+            <p:nvPr/>
+          </p:nvSpPr>
+          <p:spPr>
+            <a:xfrm>
+              <a:off x="21270516" y="11229975"/>
               <a:ext cx="6464058" cy="403860"/>
             </a:xfrm>
             <a:prstGeom prst="rect">
@@ -21394,21 +21394,21 @@
         </p:sp>
         <p:sp>
           <p:nvSpPr>
-            <p:cNvPr id="304" name="1 · Ensure document robustness" descr="t170">
-              <a:extLst>
-                <a:ext uri="{FF2B5EF4-FFF2-40B4-BE49-F238E27FC236}">
-                  <ns2:creationId id="{C17BAA0B-607B-41A3-9FE9-9A383D672380}"/>
-                </a:ext>
-              </a:extLst>
-            </p:cNvPr>
-            <p:cNvSpPr>
-              <a:spLocks noGrp="1"/>
-            </p:cNvSpPr>
-            <p:nvPr/>
-          </p:nvSpPr>
-          <p:spPr>
-            <a:xfrm>
-              <a:off x="21137166" y="11791950"/>
+            <p:cNvPr id="305" name="1 · Ensure document robustness" descr="t171">
+              <a:extLst>
+                <a:ext uri="{FF2B5EF4-FFF2-40B4-BE49-F238E27FC236}">
+                  <ns2:creationId id="{BECAB606-F880-4921-AC7E-CCBE6A015F5A}"/>
+                </a:ext>
+              </a:extLst>
+            </p:cNvPr>
+            <p:cNvSpPr>
+              <a:spLocks noGrp="1"/>
+            </p:cNvSpPr>
+            <p:nvPr/>
+          </p:nvSpPr>
+          <p:spPr>
+            <a:xfrm>
+              <a:off x="21137166" y="11782425"/>
               <a:ext cx="3554115" cy="403860"/>
             </a:xfrm>
             <a:prstGeom prst="rect">
@@ -21450,21 +21450,21 @@
         </p:sp>
         <p:sp>
           <p:nvSpPr>
-            <p:cNvPr id="305" name=" OCR provides robustness when machine-" descr="t171">
-              <a:extLst>
-                <a:ext uri="{FF2B5EF4-FFF2-40B4-BE49-F238E27FC236}">
-                  <ns2:creationId id="{B49A8276-20CA-43C0-AC6D-8FA8952493F3}"/>
-                </a:ext>
-              </a:extLst>
-            </p:cNvPr>
-            <p:cNvSpPr>
-              <a:spLocks noGrp="1"/>
-            </p:cNvSpPr>
-            <p:nvPr/>
-          </p:nvSpPr>
-          <p:spPr>
-            <a:xfrm>
-              <a:off x="24710380" y="11791950"/>
+            <p:cNvPr id="306" name=" OCR provides robustness when machine-" descr="t172">
+              <a:extLst>
+                <a:ext uri="{FF2B5EF4-FFF2-40B4-BE49-F238E27FC236}">
+                  <ns2:creationId id="{4064B21F-9CB1-43DC-89C2-412FBE49FF31}"/>
+                </a:ext>
+              </a:extLst>
+            </p:cNvPr>
+            <p:cNvSpPr>
+              <a:spLocks noGrp="1"/>
+            </p:cNvSpPr>
+            <p:nvPr/>
+          </p:nvSpPr>
+          <p:spPr>
+            <a:xfrm>
+              <a:off x="24710380" y="11782425"/>
               <a:ext cx="4337217" cy="403860"/>
             </a:xfrm>
             <a:prstGeom prst="rect">
@@ -21506,21 +21506,21 @@
         </p:sp>
         <p:sp>
           <p:nvSpPr>
-            <p:cNvPr id="306" name="readable text is unavailable. It recovered most of the performance los" descr="t172">
-              <a:extLst>
-                <a:ext uri="{FF2B5EF4-FFF2-40B4-BE49-F238E27FC236}">
-                  <ns2:creationId id="{394CB051-3B46-4B48-A36D-1A4BE9D23E02}"/>
-                </a:ext>
-              </a:extLst>
-            </p:cNvPr>
-            <p:cNvSpPr>
-              <a:spLocks noGrp="1"/>
-            </p:cNvSpPr>
-            <p:nvPr/>
-          </p:nvSpPr>
-          <p:spPr>
-            <a:xfrm>
-              <a:off x="21137166" y="12106275"/>
+            <p:cNvPr id="307" name="readable text is unavailable. It recovered most of the performance los" descr="t173">
+              <a:extLst>
+                <a:ext uri="{FF2B5EF4-FFF2-40B4-BE49-F238E27FC236}">
+                  <ns2:creationId id="{E6278E60-EE3A-4F9F-A359-E84DD34F238E}"/>
+                </a:ext>
+              </a:extLst>
+            </p:cNvPr>
+            <p:cNvSpPr>
+              <a:spLocks noGrp="1"/>
+            </p:cNvSpPr>
+            <p:nvPr/>
+          </p:nvSpPr>
+          <p:spPr>
+            <a:xfrm>
+              <a:off x="21137166" y="12096750"/>
               <a:ext cx="8549801" cy="403860"/>
             </a:xfrm>
             <a:prstGeom prst="rect">
@@ -21562,21 +21562,21 @@
         </p:sp>
         <p:sp>
           <p:nvSpPr>
-            <p:cNvPr id="307" name="by synthetic scans." descr="t173">
-              <a:extLst>
-                <a:ext uri="{FF2B5EF4-FFF2-40B4-BE49-F238E27FC236}">
-                  <ns2:creationId id="{B1E359DF-7F17-426E-9E8E-351F646CC01E}"/>
-                </a:ext>
-              </a:extLst>
-            </p:cNvPr>
-            <p:cNvSpPr>
-              <a:spLocks noGrp="1"/>
-            </p:cNvSpPr>
-            <p:nvPr/>
-          </p:nvSpPr>
-          <p:spPr>
-            <a:xfrm>
-              <a:off x="21137166" y="12430125"/>
+            <p:cNvPr id="308" name="by synthetic scans." descr="t174">
+              <a:extLst>
+                <a:ext uri="{FF2B5EF4-FFF2-40B4-BE49-F238E27FC236}">
+                  <ns2:creationId id="{A57DCACD-6660-472F-BFA5-1F7568E204FE}"/>
+                </a:ext>
+              </a:extLst>
+            </p:cNvPr>
+            <p:cNvSpPr>
+              <a:spLocks noGrp="1"/>
+            </p:cNvSpPr>
+            <p:nvPr/>
+          </p:nvSpPr>
+          <p:spPr>
+            <a:xfrm>
+              <a:off x="21137166" y="12420600"/>
               <a:ext cx="2036220" cy="403860"/>
             </a:xfrm>
             <a:prstGeom prst="rect">
@@ -21618,21 +21618,21 @@
         </p:sp>
         <p:sp>
           <p:nvSpPr>
-            <p:cNvPr id="308" name="2 · Optimize retrieval" descr="t174">
-              <a:extLst>
-                <a:ext uri="{FF2B5EF4-FFF2-40B4-BE49-F238E27FC236}">
-                  <ns2:creationId id="{10CFD1E0-8A4F-4F87-ADCF-C23C6C1EDC8A}"/>
-                </a:ext>
-              </a:extLst>
-            </p:cNvPr>
-            <p:cNvSpPr>
-              <a:spLocks noGrp="1"/>
-            </p:cNvSpPr>
-            <p:nvPr/>
-          </p:nvSpPr>
-          <p:spPr>
-            <a:xfrm>
-              <a:off x="21137166" y="12820650"/>
+            <p:cNvPr id="309" name="2 · Optimize retrieval" descr="t175">
+              <a:extLst>
+                <a:ext uri="{FF2B5EF4-FFF2-40B4-BE49-F238E27FC236}">
+                  <ns2:creationId id="{BAA31426-3D38-4739-875F-A95A756101C9}"/>
+                </a:ext>
+              </a:extLst>
+            </p:cNvPr>
+            <p:cNvSpPr>
+              <a:spLocks noGrp="1"/>
+            </p:cNvSpPr>
+            <p:nvPr/>
+          </p:nvSpPr>
+          <p:spPr>
+            <a:xfrm>
+              <a:off x="21137166" y="12811125"/>
               <a:ext cx="2337053" cy="403861"/>
             </a:xfrm>
             <a:prstGeom prst="rect">
@@ -21674,21 +21674,21 @@
         </p:sp>
         <p:sp>
           <p:nvSpPr>
-            <p:cNvPr id="309" name=" Hybrid retrieval and reranking produced the largest" descr="t175">
-              <a:extLst>
-                <a:ext uri="{FF2B5EF4-FFF2-40B4-BE49-F238E27FC236}">
-                  <ns2:creationId id="{C4373D66-19A2-4488-A56E-15B167AD8EF2}"/>
-                </a:ext>
-              </a:extLst>
-            </p:cNvPr>
-            <p:cNvSpPr>
-              <a:spLocks noGrp="1"/>
-            </p:cNvSpPr>
-            <p:nvPr/>
-          </p:nvSpPr>
-          <p:spPr>
-            <a:xfrm>
-              <a:off x="23493413" y="12820650"/>
+            <p:cNvPr id="310" name=" Hybrid retrieval and reranking produced the largest" descr="t176">
+              <a:extLst>
+                <a:ext uri="{FF2B5EF4-FFF2-40B4-BE49-F238E27FC236}">
+                  <ns2:creationId id="{6F1093D9-A09F-4A25-81C8-481FA67A6E0C}"/>
+                </a:ext>
+              </a:extLst>
+            </p:cNvPr>
+            <p:cNvSpPr>
+              <a:spLocks noGrp="1"/>
+            </p:cNvSpPr>
+            <p:nvPr/>
+          </p:nvSpPr>
+          <p:spPr>
+            <a:xfrm>
+              <a:off x="23493413" y="12811125"/>
               <a:ext cx="5419263" cy="403861"/>
             </a:xfrm>
             <a:prstGeom prst="rect">
@@ -21730,21 +21730,21 @@
         </p:sp>
         <p:sp>
           <p:nvSpPr>
-            <p:cNvPr id="310" name="observed gains in answer quality. Additional representation complexity" descr="t176">
-              <a:extLst>
-                <a:ext uri="{FF2B5EF4-FFF2-40B4-BE49-F238E27FC236}">
-                  <ns2:creationId id="{2647602D-1C13-446F-8F48-BE9226422C92}"/>
-                </a:ext>
-              </a:extLst>
-            </p:cNvPr>
-            <p:cNvSpPr>
-              <a:spLocks noGrp="1"/>
-            </p:cNvSpPr>
-            <p:nvPr/>
-          </p:nvSpPr>
-          <p:spPr>
-            <a:xfrm>
-              <a:off x="21137166" y="13144500"/>
+            <p:cNvPr id="311" name="observed gains in answer quality. Additional representation complexity" descr="t177">
+              <a:extLst>
+                <a:ext uri="{FF2B5EF4-FFF2-40B4-BE49-F238E27FC236}">
+                  <ns2:creationId id="{EB8C7455-9800-4FAC-A32E-FCF7EC0D6A8B}"/>
+                </a:ext>
+              </a:extLst>
+            </p:cNvPr>
+            <p:cNvSpPr>
+              <a:spLocks noGrp="1"/>
+            </p:cNvSpPr>
+            <p:nvPr/>
+          </p:nvSpPr>
+          <p:spPr>
+            <a:xfrm>
+              <a:off x="21137166" y="13134975"/>
               <a:ext cx="8150823" cy="403861"/>
             </a:xfrm>
             <a:prstGeom prst="rect">
@@ -21786,21 +21786,21 @@
         </p:sp>
         <p:sp>
           <p:nvSpPr>
-            <p:cNvPr id="311" name="consistently improve performance." descr="t177">
-              <a:extLst>
-                <a:ext uri="{FF2B5EF4-FFF2-40B4-BE49-F238E27FC236}">
-                  <ns2:creationId id="{2B28DCE7-1441-4F23-A2C4-B06C0F459A51}"/>
-                </a:ext>
-              </a:extLst>
-            </p:cNvPr>
-            <p:cNvSpPr>
-              <a:spLocks noGrp="1"/>
-            </p:cNvSpPr>
-            <p:nvPr/>
-          </p:nvSpPr>
-          <p:spPr>
-            <a:xfrm>
-              <a:off x="21137166" y="13468350"/>
+            <p:cNvPr id="312" name="consistently improve performance." descr="t178">
+              <a:extLst>
+                <a:ext uri="{FF2B5EF4-FFF2-40B4-BE49-F238E27FC236}">
+                  <ns2:creationId id="{1C3B4AF9-D2C5-4692-8F88-3FF3358A0C21}"/>
+                </a:ext>
+              </a:extLst>
+            </p:cNvPr>
+            <p:cNvSpPr>
+              <a:spLocks noGrp="1"/>
+            </p:cNvSpPr>
+            <p:nvPr/>
+          </p:nvSpPr>
+          <p:spPr>
+            <a:xfrm>
+              <a:off x="21137166" y="13458825"/>
               <a:ext cx="3669342" cy="403861"/>
             </a:xfrm>
             <a:prstGeom prst="rect">
@@ -21842,21 +21842,21 @@
         </p:sp>
         <p:sp>
           <p:nvSpPr>
-            <p:cNvPr id="312" name="3 · Optimize citations separately" descr="t178">
-              <a:extLst>
-                <a:ext uri="{FF2B5EF4-FFF2-40B4-BE49-F238E27FC236}">
-                  <ns2:creationId id="{AEE9E768-D2E2-4002-8877-336710543E42}"/>
-                </a:ext>
-              </a:extLst>
-            </p:cNvPr>
-            <p:cNvSpPr>
-              <a:spLocks noGrp="1"/>
-            </p:cNvSpPr>
-            <p:nvPr/>
-          </p:nvSpPr>
-          <p:spPr>
-            <a:xfrm>
-              <a:off x="21137166" y="13858875"/>
+            <p:cNvPr id="313" name="3 · Optimize citations separately" descr="t179">
+              <a:extLst>
+                <a:ext uri="{FF2B5EF4-FFF2-40B4-BE49-F238E27FC236}">
+                  <ns2:creationId id="{1EBC80FB-7FFB-4C42-89CC-2DE7F8176A0F}"/>
+                </a:ext>
+              </a:extLst>
+            </p:cNvPr>
+            <p:cNvSpPr>
+              <a:spLocks noGrp="1"/>
+            </p:cNvSpPr>
+            <p:nvPr/>
+          </p:nvSpPr>
+          <p:spPr>
+            <a:xfrm>
+              <a:off x="21137166" y="13849350"/>
               <a:ext cx="3611731" cy="403861"/>
             </a:xfrm>
             <a:prstGeom prst="rect">
@@ -21898,21 +21898,21 @@
         </p:sp>
         <p:sp>
           <p:nvSpPr>
-            <p:cNvPr id="313" name=" Post-answer citation selection substantially" descr="t179">
-              <a:extLst>
-                <a:ext uri="{FF2B5EF4-FFF2-40B4-BE49-F238E27FC236}">
-                  <ns2:creationId id="{3D947704-6DB4-4594-9F36-A1A9A9A723B7}"/>
-                </a:ext>
-              </a:extLst>
-            </p:cNvPr>
-            <p:cNvSpPr>
-              <a:spLocks noGrp="1"/>
-            </p:cNvSpPr>
-            <p:nvPr/>
-          </p:nvSpPr>
-          <p:spPr>
-            <a:xfrm>
-              <a:off x="24767977" y="13858875"/>
+            <p:cNvPr id="314" name=" Post-answer citation selection substantially" descr="t180">
+              <a:extLst>
+                <a:ext uri="{FF2B5EF4-FFF2-40B4-BE49-F238E27FC236}">
+                  <ns2:creationId id="{CFC54292-AEE4-4E8C-8510-2CAFFF5802E1}"/>
+                </a:ext>
+              </a:extLst>
+            </p:cNvPr>
+            <p:cNvSpPr>
+              <a:spLocks noGrp="1"/>
+            </p:cNvSpPr>
+            <p:nvPr/>
+          </p:nvSpPr>
+          <p:spPr>
+            <a:xfrm>
+              <a:off x="24767977" y="13849350"/>
               <a:ext cx="4648107" cy="403861"/>
             </a:xfrm>
             <a:prstGeom prst="rect">
@@ -21954,21 +21954,21 @@
         </p:sp>
         <p:sp>
           <p:nvSpPr>
-            <p:cNvPr id="314" name="increased precision, with a small reduction in recall." descr="t180">
-              <a:extLst>
-                <a:ext uri="{FF2B5EF4-FFF2-40B4-BE49-F238E27FC236}">
-                  <ns2:creationId id="{6C098B37-71BF-4B4C-8786-4DD9CA4E1E23}"/>
-                </a:ext>
-              </a:extLst>
-            </p:cNvPr>
-            <p:cNvSpPr>
-              <a:spLocks noGrp="1"/>
-            </p:cNvSpPr>
-            <p:nvPr/>
-          </p:nvSpPr>
-          <p:spPr>
-            <a:xfrm>
-              <a:off x="21137166" y="14182725"/>
+            <p:cNvPr id="315" name="increased precision, with a small reduction in recall." descr="t181">
+              <a:extLst>
+                <a:ext uri="{FF2B5EF4-FFF2-40B4-BE49-F238E27FC236}">
+                  <ns2:creationId id="{36306B5B-B5AC-4EC0-A095-2CCB30642A47}"/>
+                </a:ext>
+              </a:extLst>
+            </p:cNvPr>
+            <p:cNvSpPr>
+              <a:spLocks noGrp="1"/>
+            </p:cNvSpPr>
+            <p:nvPr/>
+          </p:nvSpPr>
+          <p:spPr>
+            <a:xfrm>
+              <a:off x="21137166" y="14173200"/>
               <a:ext cx="5443283" cy="403861"/>
             </a:xfrm>
             <a:prstGeom prst="rect">
@@ -22010,21 +22010,21 @@
         </p:sp>
         <p:sp>
           <p:nvSpPr>
-            <p:cNvPr id="315" name="Unexpected outcome:" descr="t181">
-              <a:extLst>
-                <a:ext uri="{FF2B5EF4-FFF2-40B4-BE49-F238E27FC236}">
-                  <ns2:creationId id="{14F4EF93-F52E-43D1-8162-C5AF77614681}"/>
-                </a:ext>
-              </a:extLst>
-            </p:cNvPr>
-            <p:cNvSpPr>
-              <a:spLocks noGrp="1"/>
-            </p:cNvSpPr>
-            <p:nvPr/>
-          </p:nvSpPr>
-          <p:spPr>
-            <a:xfrm>
-              <a:off x="21137166" y="14697075"/>
+            <p:cNvPr id="316" name="Unexpected outcome:" descr="t182">
+              <a:extLst>
+                <a:ext uri="{FF2B5EF4-FFF2-40B4-BE49-F238E27FC236}">
+                  <ns2:creationId id="{BDDCA4F5-015C-4D46-B7C5-B2D30B9BD1C1}"/>
+                </a:ext>
+              </a:extLst>
+            </p:cNvPr>
+            <p:cNvSpPr>
+              <a:spLocks noGrp="1"/>
+            </p:cNvSpPr>
+            <p:nvPr/>
+          </p:nvSpPr>
+          <p:spPr>
+            <a:xfrm>
+              <a:off x="21137166" y="14687550"/>
               <a:ext cx="2473297" cy="403861"/>
             </a:xfrm>
             <a:prstGeom prst="rect">
@@ -22066,21 +22066,21 @@
         </p:sp>
         <p:sp>
           <p:nvSpPr>
-            <p:cNvPr id="316" name=" Multi-scale representations did not improve performance; Q" descr="t182">
-              <a:extLst>
-                <a:ext uri="{FF2B5EF4-FFF2-40B4-BE49-F238E27FC236}">
-                  <ns2:creationId id="{4D0AAF5E-BFF8-4689-8543-7C6166461B6C}"/>
-                </a:ext>
-              </a:extLst>
-            </p:cNvPr>
-            <p:cNvSpPr>
-              <a:spLocks noGrp="1"/>
-            </p:cNvSpPr>
-            <p:nvPr/>
-          </p:nvSpPr>
-          <p:spPr>
-            <a:xfrm>
-              <a:off x="23553390" y="14697075"/>
+            <p:cNvPr id="317" name=" Multi-scale representations did not improve performance; Q" descr="t183">
+              <a:extLst>
+                <a:ext uri="{FF2B5EF4-FFF2-40B4-BE49-F238E27FC236}">
+                  <ns2:creationId id="{EBB8D42B-3271-4B03-A021-840F8A763BBF}"/>
+                </a:ext>
+              </a:extLst>
+            </p:cNvPr>
+            <p:cNvSpPr>
+              <a:spLocks noGrp="1"/>
+            </p:cNvSpPr>
+            <p:nvPr/>
+          </p:nvSpPr>
+          <p:spPr>
+            <a:xfrm>
+              <a:off x="23553390" y="14687550"/>
               <a:ext cx="6285139" cy="403861"/>
             </a:xfrm>
             <a:prstGeom prst="rect">
@@ -22122,21 +22122,21 @@
         </p:sp>
         <p:sp>
           <p:nvSpPr>
-            <p:cNvPr id="317" name="decreased from 63.2% to 49.8% after R2." descr="t183">
-              <a:extLst>
-                <a:ext uri="{FF2B5EF4-FFF2-40B4-BE49-F238E27FC236}">
-                  <ns2:creationId id="{C572DBAB-3687-4B2F-804F-EB6D65B42945}"/>
-                </a:ext>
-              </a:extLst>
-            </p:cNvPr>
-            <p:cNvSpPr>
-              <a:spLocks noGrp="1"/>
-            </p:cNvSpPr>
-            <p:nvPr/>
-          </p:nvSpPr>
-          <p:spPr>
-            <a:xfrm>
-              <a:off x="21137166" y="15020925"/>
+            <p:cNvPr id="318" name="decreased from 63.2% to 49.8% after R2." descr="t184">
+              <a:extLst>
+                <a:ext uri="{FF2B5EF4-FFF2-40B4-BE49-F238E27FC236}">
+                  <ns2:creationId id="{41628D32-7BB6-44D1-B1A8-DF5A321E7582}"/>
+                </a:ext>
+              </a:extLst>
+            </p:cNvPr>
+            <p:cNvSpPr>
+              <a:spLocks noGrp="1"/>
+            </p:cNvSpPr>
+            <p:nvPr/>
+          </p:nvSpPr>
+          <p:spPr>
+            <a:xfrm>
+              <a:off x="21137166" y="15011400"/>
               <a:ext cx="4367944" cy="403861"/>
             </a:xfrm>
             <a:prstGeom prst="rect">
@@ -22179,15 +22179,15 @@
       </p:grpSp>
       <p:grpSp>
         <p:nvGrpSpPr>
-          <p:cNvPr id="536" name="12. Limitations"/>
+          <p:cNvPr id="537" name="12. Limitations"/>
           <p:cNvGrpSpPr/>
           <p:nvPr/>
         </p:nvGrpSpPr>
         <p:grpSpPr>
           <a:xfrm>
-            <a:off x="20975241" y="15559534"/>
+            <a:off x="20975241" y="15554920"/>
             <a:ext cx="9012734" cy="1366838"/>
-            <a:chOff x="20975241" y="15559534"/>
+            <a:chOff x="20975241" y="15554920"/>
             <a:chExt cx="9012734" cy="1366838"/>
           </a:xfrm>
         </p:grpSpPr>
@@ -22196,18 +22196,18 @@
             <p:cNvPr id="59" name="Panel H2" descr="s58">
               <a:extLst>
                 <a:ext uri="{FF2B5EF4-FFF2-40B4-BE49-F238E27FC236}">
-                  <ns2:creationId id="{42023CE8-1038-4AA0-8CE6-A807C4C97215}"/>
-                </a:ext>
-              </a:extLst>
-            </p:cNvPr>
-            <p:cNvSpPr>
-              <a:spLocks noGrp="1"/>
-            </p:cNvSpPr>
-            <p:nvPr/>
-          </p:nvSpPr>
-          <p:spPr>
-            <a:xfrm>
-              <a:off x="20975241" y="15559534"/>
+                  <ns2:creationId id="{2A8B7349-EE5B-4413-9CB7-C006BAE9E6E7}"/>
+                </a:ext>
+              </a:extLst>
+            </p:cNvPr>
+            <p:cNvSpPr>
+              <a:spLocks noGrp="1"/>
+            </p:cNvSpPr>
+            <p:nvPr/>
+          </p:nvSpPr>
+          <p:spPr>
+            <a:xfrm>
+              <a:off x="20975241" y="15554920"/>
               <a:ext cx="9012734" cy="517327"/>
             </a:xfrm>
             <a:custGeom>
@@ -22278,18 +22278,18 @@
             <p:cNvPr id="60" name="Panel content" descr="s59">
               <a:extLst>
                 <a:ext uri="{FF2B5EF4-FFF2-40B4-BE49-F238E27FC236}">
-                  <ns2:creationId id="{1F9D4052-D0E8-4706-BD6E-11393C46D8E0}"/>
-                </a:ext>
-              </a:extLst>
-            </p:cNvPr>
-            <p:cNvSpPr>
-              <a:spLocks noGrp="1"/>
-            </p:cNvSpPr>
-            <p:nvPr/>
-          </p:nvSpPr>
-          <p:spPr>
-            <a:xfrm>
-              <a:off x="20975241" y="16076861"/>
+                  <ns2:creationId id="{EE68587D-32AB-4152-BC82-BF6F510A7CE7}"/>
+                </a:ext>
+              </a:extLst>
+            </p:cNvPr>
+            <p:cNvSpPr>
+              <a:spLocks noGrp="1"/>
+            </p:cNvSpPr>
+            <p:nvPr/>
+          </p:nvSpPr>
+          <p:spPr>
+            <a:xfrm>
+              <a:off x="20975241" y="16072247"/>
               <a:ext cx="9012734" cy="849511"/>
             </a:xfrm>
             <a:custGeom>
@@ -22351,21 +22351,21 @@
         </p:sp>
         <p:sp>
           <p:nvSpPr>
-            <p:cNvPr id="318" name="12. Limitations" descr="t184">
-              <a:extLst>
-                <a:ext uri="{FF2B5EF4-FFF2-40B4-BE49-F238E27FC236}">
-                  <ns2:creationId id="{0D29FB2E-A504-4E99-B11F-9BA5B7F2FC3C}"/>
-                </a:ext>
-              </a:extLst>
-            </p:cNvPr>
-            <p:cNvSpPr>
-              <a:spLocks noGrp="1"/>
-            </p:cNvSpPr>
-            <p:nvPr/>
-          </p:nvSpPr>
-          <p:spPr>
-            <a:xfrm>
-              <a:off x="21108591" y="15608331"/>
+            <p:cNvPr id="319" name="12. Limitations" descr="t185">
+              <a:extLst>
+                <a:ext uri="{FF2B5EF4-FFF2-40B4-BE49-F238E27FC236}">
+                  <ns2:creationId id="{3E4DD7C9-C180-4D19-8834-E51B376F66D0}"/>
+                </a:ext>
+              </a:extLst>
+            </p:cNvPr>
+            <p:cNvSpPr>
+              <a:spLocks noGrp="1"/>
+            </p:cNvSpPr>
+            <p:nvPr/>
+          </p:nvSpPr>
+          <p:spPr>
+            <a:xfrm>
+              <a:off x="21108591" y="15598806"/>
               <a:ext cx="2005505" cy="464782"/>
             </a:xfrm>
             <a:prstGeom prst="rect">
@@ -22407,21 +22407,21 @@
         </p:sp>
         <p:sp>
           <p:nvSpPr>
-            <p:cNvPr id="319" name="one DIFC corpus and 100 questions; one run per condition with no signi" descr="t185">
-              <a:extLst>
-                <a:ext uri="{FF2B5EF4-FFF2-40B4-BE49-F238E27FC236}">
-                  <ns2:creationId id="{00B79AD4-6A67-4A5E-8FE7-804ACA39B168}"/>
-                </a:ext>
-              </a:extLst>
-            </p:cNvPr>
-            <p:cNvSpPr>
-              <a:spLocks noGrp="1"/>
-            </p:cNvSpPr>
-            <p:nvPr/>
-          </p:nvSpPr>
-          <p:spPr>
-            <a:xfrm>
-              <a:off x="21137166" y="16154400"/>
+            <p:cNvPr id="320" name="one DIFC corpus and 100 questions; one run per condition with no signi" descr="t186">
+              <a:extLst>
+                <a:ext uri="{FF2B5EF4-FFF2-40B4-BE49-F238E27FC236}">
+                  <ns2:creationId id="{D32FA478-A1E2-46AB-B99F-B31AFB53E9C4}"/>
+                </a:ext>
+              </a:extLst>
+            </p:cNvPr>
+            <p:cNvSpPr>
+              <a:spLocks noGrp="1"/>
+            </p:cNvSpPr>
+            <p:nvPr/>
+          </p:nvSpPr>
+          <p:spPr>
+            <a:xfrm>
+              <a:off x="21137166" y="16144875"/>
               <a:ext cx="8157831" cy="403861"/>
             </a:xfrm>
             <a:prstGeom prst="rect">
@@ -22463,10 +22463,10 @@
         </p:sp>
         <p:sp>
           <p:nvSpPr>
-            <p:cNvPr id="320" name="testing; LLM-based evaluation of free-text answers." descr="t186">
-              <a:extLst>
-                <a:ext uri="{FF2B5EF4-FFF2-40B4-BE49-F238E27FC236}">
-                  <ns2:creationId id="{976A31AB-C5BE-4C5A-BDD4-30C3A48E01D5}"/>
+            <p:cNvPr id="321" name="testing; LLM-based evaluation of free-text answers." descr="t187">
+              <a:extLst>
+                <a:ext uri="{FF2B5EF4-FFF2-40B4-BE49-F238E27FC236}">
+                  <ns2:creationId id="{4E644E41-D0BE-421E-BCC3-ABBEE59A5425}"/>
                 </a:ext>
               </a:extLst>
             </p:cNvPr>
@@ -22520,7 +22520,7 @@
       </p:grpSp>
       <p:grpSp>
         <p:nvGrpSpPr>
-          <p:cNvPr id="535" name="13. References"/>
+          <p:cNvPr id="536" name="13. References"/>
           <p:cNvGrpSpPr/>
           <p:nvPr/>
         </p:nvGrpSpPr>
@@ -22537,7 +22537,7 @@
             <p:cNvPr id="61" name="Panel H2" descr="s60">
               <a:extLst>
                 <a:ext uri="{FF2B5EF4-FFF2-40B4-BE49-F238E27FC236}">
-                  <ns2:creationId id="{16CE1C3B-7758-4B55-8C5B-1E9AF609D1B0}"/>
+                  <ns2:creationId id="{EC04A66B-788E-40A5-ABBB-ACE8F67C8FBF}"/>
                 </a:ext>
               </a:extLst>
             </p:cNvPr>
@@ -22619,7 +22619,7 @@
             <p:cNvPr id="62" name="Panel content" descr="s61">
               <a:extLst>
                 <a:ext uri="{FF2B5EF4-FFF2-40B4-BE49-F238E27FC236}">
-                  <ns2:creationId id="{980ABD42-76EC-4126-AF72-93162F8AEB53}"/>
+                  <ns2:creationId id="{9D763CA3-3B24-4AA1-99FB-BEA321DC83CA}"/>
                 </a:ext>
               </a:extLst>
             </p:cNvPr>
@@ -22695,7 +22695,7 @@
             <p:cNvPr id="63" name="Rule" descr="s62">
               <a:extLst>
                 <a:ext uri="{FF2B5EF4-FFF2-40B4-BE49-F238E27FC236}">
-                  <ns2:creationId id="{3F0EB1A4-2A8E-4981-84F6-64482F4DAB74}"/>
+                  <ns2:creationId id="{9EFC8CA5-651E-4C42-8D62-395307C32A83}"/>
                 </a:ext>
               </a:extLst>
             </p:cNvPr>
@@ -22722,10 +22722,10 @@
         </p:sp>
         <p:sp>
           <p:nvSpPr>
-            <p:cNvPr id="321" name="13. References" descr="t187">
-              <a:extLst>
-                <a:ext uri="{FF2B5EF4-FFF2-40B4-BE49-F238E27FC236}">
-                  <ns2:creationId id="{5D3EB9D9-0271-47C0-8D07-C89B8AAA284A}"/>
+            <p:cNvPr id="322" name="13. References" descr="t188">
+              <a:extLst>
+                <a:ext uri="{FF2B5EF4-FFF2-40B4-BE49-F238E27FC236}">
+                  <ns2:creationId id="{A87E6995-DF34-4BFA-90C0-757CF90327D6}"/>
                 </a:ext>
               </a:extLst>
             </p:cNvPr>
@@ -22778,10 +22778,10 @@
         </p:sp>
         <p:sp>
           <p:nvSpPr>
-            <p:cNvPr id="322" name="1. Lewis, P., Perez, E., Piktus, A., Petroni, F., Karpukhin, V., Goyal" descr="t188">
-              <a:extLst>
-                <a:ext uri="{FF2B5EF4-FFF2-40B4-BE49-F238E27FC236}">
-                  <ns2:creationId id="{E2B606A6-5485-47BC-8B96-76023758B99A}"/>
+            <p:cNvPr id="323" name="1. Lewis, P., Perez, E., Piktus, A., Petroni, F., Karpukhin, V., Goyal" descr="t189">
+              <a:extLst>
+                <a:ext uri="{FF2B5EF4-FFF2-40B4-BE49-F238E27FC236}">
+                  <ns2:creationId id="{C64D1F0F-F055-4804-AEF8-3EFD0D851D2E}"/>
                 </a:ext>
               </a:extLst>
             </p:cNvPr>
@@ -22834,10 +22834,10 @@
         </p:sp>
         <p:sp>
           <p:nvSpPr>
-            <p:cNvPr id="323" name="knowledge-intensive nlp tasks. Advances in neural information processi" descr="t189">
-              <a:extLst>
-                <a:ext uri="{FF2B5EF4-FFF2-40B4-BE49-F238E27FC236}">
-                  <ns2:creationId id="{BF7FAD7B-D5F4-41AA-9FEC-739897DEDE0D}"/>
+            <p:cNvPr id="324" name="knowledge-intensive nlp tasks. Advances in neural information processi" descr="t190">
+              <a:extLst>
+                <a:ext uri="{FF2B5EF4-FFF2-40B4-BE49-F238E27FC236}">
+                  <ns2:creationId id="{532BB03F-3642-4308-843E-09C27F344EE4}"/>
                 </a:ext>
               </a:extLst>
             </p:cNvPr>
@@ -22890,10 +22890,10 @@
         </p:sp>
         <p:sp>
           <p:nvSpPr>
-            <p:cNvPr id="324" name="2. Pipitone, Nicholas, and Ghita Houir Alami. &quot;Legalbench-rag: A bench" descr="t190">
-              <a:extLst>
-                <a:ext uri="{FF2B5EF4-FFF2-40B4-BE49-F238E27FC236}">
-                  <ns2:creationId id="{CC2A6095-4EDE-4A6C-8CE7-9B22E7D83B26}"/>
+            <p:cNvPr id="325" name="2. Pipitone, Nicholas, and Ghita Houir Alami. &quot;Legalbench-rag: A bench" descr="t191">
+              <a:extLst>
+                <a:ext uri="{FF2B5EF4-FFF2-40B4-BE49-F238E27FC236}">
+                  <ns2:creationId id="{FDEFC8A1-F5B8-4598-8C58-1619EA34E22D}"/>
                 </a:ext>
               </a:extLst>
             </p:cNvPr>
@@ -22946,10 +22946,10 @@
         </p:sp>
         <p:sp>
           <p:nvSpPr>
-            <p:cNvPr id="325" name="domain.&quot; arXiv preprint arXiv:2408.10343 (2024)." descr="t191">
-              <a:extLst>
-                <a:ext uri="{FF2B5EF4-FFF2-40B4-BE49-F238E27FC236}">
-                  <ns2:creationId id="{443F57DB-9F23-40B9-9F0B-47C9A1395ABF}"/>
+            <p:cNvPr id="326" name="domain.&quot; arXiv preprint arXiv:2408.10343 (2024)." descr="t192">
+              <a:extLst>
+                <a:ext uri="{FF2B5EF4-FFF2-40B4-BE49-F238E27FC236}">
+                  <ns2:creationId id="{82E75172-2B8D-460A-8758-BC8E5510C014}"/>
                 </a:ext>
               </a:extLst>
             </p:cNvPr>
@@ -23002,10 +23002,10 @@
         </p:sp>
         <p:sp>
           <p:nvSpPr>
-            <p:cNvPr id="326" name="3. Gokhan, T., &amp; Briscoe, T. (2025, November). Grounded Answers from M" descr="t192">
-              <a:extLst>
-                <a:ext uri="{FF2B5EF4-FFF2-40B4-BE49-F238E27FC236}">
-                  <ns2:creationId id="{C8CC2096-3BB7-4F12-995F-5931787EF367}"/>
+            <p:cNvPr id="327" name="3. Gokhan, T., &amp; Briscoe, T. (2025, November). Grounded Answers from M" descr="t193">
+              <a:extLst>
+                <a:ext uri="{FF2B5EF4-FFF2-40B4-BE49-F238E27FC236}">
+                  <ns2:creationId id="{946C21D4-0697-4805-944A-4C4BF5D79165}"/>
                 </a:ext>
               </a:extLst>
             </p:cNvPr>
@@ -23058,10 +23058,10 @@
         </p:sp>
         <p:sp>
           <p:nvSpPr>
-            <p:cNvPr id="327" name="Regulatory RAG. In Proceedings of the Natural Legal Language Processin" descr="t193">
-              <a:extLst>
-                <a:ext uri="{FF2B5EF4-FFF2-40B4-BE49-F238E27FC236}">
-                  <ns2:creationId id="{F3A090B7-2F49-46ED-B688-522F90ABC94F}"/>
+            <p:cNvPr id="328" name="Regulatory RAG. In Proceedings of the Natural Legal Language Processin" descr="t194">
+              <a:extLst>
+                <a:ext uri="{FF2B5EF4-FFF2-40B4-BE49-F238E27FC236}">
+                  <ns2:creationId id="{BF6C8751-AB4A-4353-9584-4205F9FCA0B4}"/>
                 </a:ext>
               </a:extLst>
             </p:cNvPr>
@@ -23114,10 +23114,10 @@
         </p:sp>
         <p:sp>
           <p:nvSpPr>
-            <p:cNvPr id="328" name="4. Butler, A. R., &amp; Butler, U. (2026). Legal RAG Bench: an end-to-end " descr="t194">
-              <a:extLst>
-                <a:ext uri="{FF2B5EF4-FFF2-40B4-BE49-F238E27FC236}">
-                  <ns2:creationId id="{06C9652E-85CA-45CD-8768-8BE98F29268C}"/>
+            <p:cNvPr id="329" name="4. Butler, A. R., &amp; Butler, U. (2026). Legal RAG Bench: an end-to-end " descr="t195">
+              <a:extLst>
+                <a:ext uri="{FF2B5EF4-FFF2-40B4-BE49-F238E27FC236}">
+                  <ns2:creationId id="{B943CC74-BD9F-4C9A-AC5B-1730D2DE9244}"/>
                 </a:ext>
               </a:extLst>
             </p:cNvPr>
@@ -23170,10 +23170,10 @@
         </p:sp>
         <p:sp>
           <p:nvSpPr>
-            <p:cNvPr id="329" name="5. Trautmann, D., Ostapuk, N., Grail, Q., Pol, A., Bonifazi, G., Gao, " descr="t195">
-              <a:extLst>
-                <a:ext uri="{FF2B5EF4-FFF2-40B4-BE49-F238E27FC236}">
-                  <ns2:creationId id="{58321AA9-8B06-4B2E-92B2-0890294F11B7}"/>
+            <p:cNvPr id="330" name="5. Trautmann, D., Ostapuk, N., Grail, Q., Pol, A., Bonifazi, G., Gao, " descr="t196">
+              <a:extLst>
+                <a:ext uri="{FF2B5EF4-FFF2-40B4-BE49-F238E27FC236}">
+                  <ns2:creationId id="{84422D4D-6FC7-4CB5-9F40-F4E648871FD9}"/>
                 </a:ext>
               </a:extLst>
             </p:cNvPr>
@@ -23226,10 +23226,10 @@
         </p:sp>
         <p:sp>
           <p:nvSpPr>
-            <p:cNvPr id="330" name="of legal question-answering systems. In Proceedings of the Natural Leg" descr="t196">
-              <a:extLst>
-                <a:ext uri="{FF2B5EF4-FFF2-40B4-BE49-F238E27FC236}">
-                  <ns2:creationId id="{845832F2-4FF2-4C63-AB33-716EC8E2EA45}"/>
+            <p:cNvPr id="331" name="of legal question-answering systems. In Proceedings of the Natural Leg" descr="t197">
+              <a:extLst>
+                <a:ext uri="{FF2B5EF4-FFF2-40B4-BE49-F238E27FC236}">
+                  <ns2:creationId id="{83A62097-D476-4793-B6D7-C6648533C142}"/>
                 </a:ext>
               </a:extLst>
             </p:cNvPr>
@@ -23282,10 +23282,10 @@
         </p:sp>
         <p:sp>
           <p:nvSpPr>
-            <p:cNvPr id="331" name="186)." descr="t197">
-              <a:extLst>
-                <a:ext uri="{FF2B5EF4-FFF2-40B4-BE49-F238E27FC236}">
-                  <ns2:creationId id="{27135F4D-545B-437B-A977-C2C4BF507147}"/>
+            <p:cNvPr id="332" name="186)." descr="t198">
+              <a:extLst>
+                <a:ext uri="{FF2B5EF4-FFF2-40B4-BE49-F238E27FC236}">
+                  <ns2:creationId id="{7E813F23-D3E6-4A0F-9449-743B6A5898EF}"/>
                 </a:ext>
               </a:extLst>
             </p:cNvPr>
@@ -23338,10 +23338,10 @@
         </p:sp>
         <p:sp>
           <p:nvSpPr>
-            <p:cNvPr id="332" name="6. Gao, T., Yen, H., Yu, J., &amp; Chen, D. (2023, December). Enabling lar" descr="t198">
-              <a:extLst>
-                <a:ext uri="{FF2B5EF4-FFF2-40B4-BE49-F238E27FC236}">
-                  <ns2:creationId id="{A52F8A0A-8BED-41A0-95BC-78402351ECC2}"/>
+            <p:cNvPr id="333" name="6. Gao, T., Yen, H., Yu, J., &amp; Chen, D. (2023, December). Enabling lar" descr="t199">
+              <a:extLst>
+                <a:ext uri="{FF2B5EF4-FFF2-40B4-BE49-F238E27FC236}">
+                  <ns2:creationId id="{5BC6EFD4-1BA8-41CC-B4DA-E3829949C858}"/>
                 </a:ext>
               </a:extLst>
             </p:cNvPr>
@@ -23394,10 +23394,10 @@
         </p:sp>
         <p:sp>
           <p:nvSpPr>
-            <p:cNvPr id="333" name="Proceedings of the 2023 Conference on Empirical Methods in Natural Lan" descr="t199">
-              <a:extLst>
-                <a:ext uri="{FF2B5EF4-FFF2-40B4-BE49-F238E27FC236}">
-                  <ns2:creationId id="{71F6654C-DA7C-412D-A2ED-DD22D1C7F6B7}"/>
+            <p:cNvPr id="334" name="Proceedings of the 2023 Conference on Empirical Methods in Natural Lan" descr="t200">
+              <a:extLst>
+                <a:ext uri="{FF2B5EF4-FFF2-40B4-BE49-F238E27FC236}">
+                  <ns2:creationId id="{A946928E-DCC6-4806-8763-FB4E47B1D3D2}"/>
                 </a:ext>
               </a:extLst>
             </p:cNvPr>
@@ -23450,10 +23450,10 @@
         </p:sp>
         <p:sp>
           <p:nvSpPr>
-            <p:cNvPr id="334" name="Code, protocol &amp; results" descr="t200">
-              <a:extLst>
-                <a:ext uri="{FF2B5EF4-FFF2-40B4-BE49-F238E27FC236}">
-                  <ns2:creationId id="{DCAB6D59-186A-4078-AA3A-2035709021B2}"/>
+            <p:cNvPr id="335" name="Code, protocol &amp; results" descr="t201">
+              <a:extLst>
+                <a:ext uri="{FF2B5EF4-FFF2-40B4-BE49-F238E27FC236}">
+                  <ns2:creationId id="{3026A7CB-DC7E-4BD7-9F89-C7A4A255EB42}"/>
                 </a:ext>
               </a:extLst>
             </p:cNvPr>
@@ -23506,10 +23506,10 @@
         </p:sp>
         <p:sp>
           <p:nvSpPr>
-            <p:cNvPr id="335" name="github.com/SteinVR/Trends-in-NLP-Poster" descr="t201">
-              <a:extLst>
-                <a:ext uri="{FF2B5EF4-FFF2-40B4-BE49-F238E27FC236}">
-                  <ns2:creationId id="{6377A29B-1AC5-413F-9673-A60D4A6B6032}"/>
+            <p:cNvPr id="336" name="github.com/SteinVR/Trends-in-NLP-Poster" descr="t202">
+              <a:extLst>
+                <a:ext uri="{FF2B5EF4-FFF2-40B4-BE49-F238E27FC236}">
+                  <ns2:creationId id="{69ED79E2-5F7E-430D-AF13-00E0C49173C0}"/>
                 </a:ext>
               </a:extLst>
             </p:cNvPr>
@@ -23563,17 +23563,17 @@
       </p:grpSp>
       <p:pic>
         <p:nvPicPr>
-          <p:cNvPr id="534" name="Universität Trier" descr="s132"/>
+          <p:cNvPr id="535" name="Universität Trier" descr="s132"/>
           <p:cNvPicPr>
             <a:picLocks noChangeAspect="1"/>
           </p:cNvPicPr>
           <p:nvPr/>
         </p:nvPicPr>
         <p:blipFill>
-          <a:blip r:embed="Rea475a0cb4b64a65">
+          <a:blip r:embed="R02314f3531f74082">
             <a:extLst>
               <a:ext uri="{96DAC541-7B7A-43D3-8B79-37D633B846F1}">
-                <ns4:svgBlip r:embed="Rf9eb3c8ec0254adf"/>
+                <ns4:svgBlip r:embed="R311fc11a30024f58"/>
               </a:ext>
             </a:extLst>
           </a:blip>
@@ -23581,7 +23581,7 @@
         </p:blipFill>
         <p:spPr>
           <a:xfrm>
-            <a:off x="27035224" y="287982"/>
+            <a:off x="27035224" y="374005"/>
             <a:ext cx="2857500" cy="720179"/>
           </a:xfrm>
           <a:prstGeom prst="rect">
@@ -23594,7 +23594,7 @@
           <p:cNvPr id="134" name="Building Legal RAG: what each component contributes" descr="t0">
             <a:extLst>
               <a:ext uri="{FF2B5EF4-FFF2-40B4-BE49-F238E27FC236}">
-                <ns2:creationId id="{B0D202B7-B56A-4653-863E-52844A9C3D8C}"/>
+                <ns2:creationId id="{65780CB4-E978-401B-8D37-3CAB48150234}"/>
               </a:ext>
             </a:extLst>
           </p:cNvPr>
@@ -23605,8 +23605,8 @@
         </p:nvSpPr>
         <p:spPr>
           <a:xfrm>
-            <a:off x="383232" y="181280"/>
-            <a:ext cx="18019103" cy="972160"/>
+            <a:off x="383232" y="191795"/>
+            <a:ext cx="13889971" cy="764591"/>
           </a:xfrm>
           <a:prstGeom prst="rect">
             <a:avLst/>
@@ -23631,7 +23631,7 @@
               </a:spcAft>
             </a:pPr>
             <a:r>
-              <a:rPr lang="en-GB" sz="5400" b="1" i="0" spc="-98" kern="0" dirty="0">
+              <a:rPr lang="en-GB" sz="4200" b="1" i="0" spc="-98" kern="0" dirty="0">
                 <a:solidFill>
                   <a:srgbClr val="082b51"/>
                 </a:solidFill>
@@ -23641,14 +23641,70 @@
               </a:rPr>
               <a:t>Building Legal RAG: what each component contributes</a:t>
             </a:r>
-            <a:endParaRPr lang="en-GB" sz="5400"/>
+            <a:endParaRPr lang="en-GB" sz="4200"/>
+          </a:p>
+        </p:txBody>
+      </p:sp>
+      <p:sp>
+        <p:nvSpPr>
+          <p:cNvPr id="135" name="Aleksandr Loginov, Yulia Malakhova" descr="t1">
+            <a:extLst>
+              <a:ext uri="{FF2B5EF4-FFF2-40B4-BE49-F238E27FC236}">
+                <ns2:creationId id="{904D1480-070C-4F23-9114-393C11F98C4F}"/>
+              </a:ext>
+            </a:extLst>
+          </p:cNvPr>
+          <p:cNvSpPr>
+            <a:spLocks noGrp="1"/>
+          </p:cNvSpPr>
+          <p:nvPr/>
+        </p:nvSpPr>
+        <p:spPr>
+          <a:xfrm>
+            <a:off x="383232" y="847725"/>
+            <a:ext cx="3687325" cy="403860"/>
+          </a:xfrm>
+          <a:prstGeom prst="rect">
+            <a:avLst/>
+          </a:prstGeom>
+          <a:noFill/>
+          <a:ln w="0">
+            <a:noFill/>
+          </a:ln>
+        </p:spPr>
+        <p:txBody>
+          <a:bodyPr wrap="none" lIns="0" rIns="0" tIns="0" bIns="0" anchor="t" anchorCtr="0">
+            <a:noAutofit/>
+          </a:bodyPr>
+          <a:lstStyle/>
+          <a:p>
+            <a:pPr algn="l" marL="0" marR="0" indent="0" fontAlgn="base">
+              <a:spcBef>
+                <a:spcPts val="0"/>
+              </a:spcBef>
+              <a:spcAft>
+                <a:spcPts val="0"/>
+              </a:spcAft>
+            </a:pPr>
+            <a:r>
+              <a:rPr lang="en-GB" sz="2400" b="0" i="0" spc="0" kern="0" dirty="0">
+                <a:solidFill>
+                  <a:srgbClr val="34566e"/>
+                </a:solidFill>
+                <a:latin typeface="Barlow Condensed"/>
+                <a:ea typeface="Barlow Condensed"/>
+                <a:cs typeface="Barlow Condensed"/>
+              </a:rPr>
+              <a:t>Aleksandr Loginov, Yulia Malakhova</a:t>
+            </a:r>
+            <a:endParaRPr lang="en-GB" sz="2400"/>
           </a:p>
         </p:txBody>
       </p:sp>
     </p:spTree>
     <p:extLst>
       <p:ext uri="{BB962C8B-B14F-4D97-AF65-F5344CB8AC3E}">
-        <ns5:creationId val="259956015"/>
+        <ns5:creationId val="1065893961"/>
       </p:ext>
     </p:extLst>
   </p:cSld>
